--- a/docs/plots/carbo/jx_carbo_linsubhr_egfrdisc_grade3.pptx
+++ b/docs/plots/carbo/jx_carbo_linsubhr_egfrdisc_grade3.pptx
@@ -3003,473 +3003,467 @@
           <p:spPr>
             <a:xfrm>
               <a:off x="1172049" y="2073503"/>
-              <a:ext cx="7090630" cy="3372669"/>
+              <a:ext cx="7090630" cy="3388787"/>
             </a:xfrm>
             <a:custGeom>
               <a:avLst/>
               <a:pathLst>
-                <a:path w="7090630" h="3372669">
+                <a:path w="7090630" h="3388787">
                   <a:moveTo>
-                    <a:pt x="3336470" y="0"/>
+                    <a:pt x="3449351" y="0"/>
                   </a:moveTo>
                   <a:lnTo>
-                    <a:pt x="3366258" y="95728"/>
-                  </a:lnTo>
-                  <a:lnTo>
-                    <a:pt x="3437881" y="311250"/>
-                  </a:lnTo>
-                  <a:lnTo>
-                    <a:pt x="3509503" y="513062"/>
-                  </a:lnTo>
-                  <a:lnTo>
-                    <a:pt x="3581126" y="702036"/>
-                  </a:lnTo>
-                  <a:lnTo>
-                    <a:pt x="3652748" y="878989"/>
-                  </a:lnTo>
-                  <a:lnTo>
-                    <a:pt x="3724371" y="1044686"/>
-                  </a:lnTo>
-                  <a:lnTo>
-                    <a:pt x="3795993" y="1199842"/>
-                  </a:lnTo>
-                  <a:lnTo>
-                    <a:pt x="3867616" y="1345128"/>
-                  </a:lnTo>
-                  <a:lnTo>
-                    <a:pt x="3939238" y="1481172"/>
-                  </a:lnTo>
-                  <a:lnTo>
-                    <a:pt x="4010861" y="1608562"/>
-                  </a:lnTo>
-                  <a:lnTo>
-                    <a:pt x="4082483" y="1727848"/>
-                  </a:lnTo>
-                  <a:lnTo>
-                    <a:pt x="4154106" y="1839546"/>
-                  </a:lnTo>
-                  <a:lnTo>
-                    <a:pt x="4225729" y="1944139"/>
-                  </a:lnTo>
-                  <a:lnTo>
-                    <a:pt x="4297351" y="2042078"/>
-                  </a:lnTo>
-                  <a:lnTo>
-                    <a:pt x="4368974" y="2133787"/>
-                  </a:lnTo>
-                  <a:lnTo>
-                    <a:pt x="4440596" y="2219662"/>
-                  </a:lnTo>
-                  <a:lnTo>
-                    <a:pt x="4512219" y="2300074"/>
-                  </a:lnTo>
-                  <a:lnTo>
-                    <a:pt x="4583841" y="2375371"/>
-                  </a:lnTo>
-                  <a:lnTo>
-                    <a:pt x="4655464" y="2445878"/>
-                  </a:lnTo>
-                  <a:lnTo>
-                    <a:pt x="4727086" y="2511900"/>
-                  </a:lnTo>
-                  <a:lnTo>
-                    <a:pt x="4798709" y="2573722"/>
-                  </a:lnTo>
-                  <a:lnTo>
-                    <a:pt x="4870331" y="2631612"/>
-                  </a:lnTo>
-                  <a:lnTo>
-                    <a:pt x="4941954" y="2656373"/>
-                  </a:lnTo>
-                  <a:lnTo>
-                    <a:pt x="5013576" y="2659906"/>
-                  </a:lnTo>
-                  <a:lnTo>
-                    <a:pt x="5085199" y="2663423"/>
-                  </a:lnTo>
-                  <a:lnTo>
-                    <a:pt x="5156821" y="2666925"/>
-                  </a:lnTo>
-                  <a:lnTo>
-                    <a:pt x="5228444" y="2670412"/>
-                  </a:lnTo>
-                  <a:lnTo>
-                    <a:pt x="5300066" y="2673885"/>
-                  </a:lnTo>
-                  <a:lnTo>
-                    <a:pt x="5371689" y="2677343"/>
-                  </a:lnTo>
-                  <a:lnTo>
-                    <a:pt x="5443311" y="2680785"/>
-                  </a:lnTo>
-                  <a:lnTo>
-                    <a:pt x="5514934" y="2684214"/>
-                  </a:lnTo>
-                  <a:lnTo>
-                    <a:pt x="5586557" y="2687627"/>
-                  </a:lnTo>
-                  <a:lnTo>
-                    <a:pt x="5658179" y="2691026"/>
-                  </a:lnTo>
-                  <a:lnTo>
-                    <a:pt x="5729802" y="2694410"/>
-                  </a:lnTo>
-                  <a:lnTo>
-                    <a:pt x="5801424" y="2697780"/>
-                  </a:lnTo>
-                  <a:lnTo>
-                    <a:pt x="5873047" y="2701136"/>
-                  </a:lnTo>
-                  <a:lnTo>
-                    <a:pt x="5944669" y="2704477"/>
-                  </a:lnTo>
-                  <a:lnTo>
-                    <a:pt x="6016292" y="2707804"/>
-                  </a:lnTo>
-                  <a:lnTo>
-                    <a:pt x="6087914" y="2711117"/>
-                  </a:lnTo>
-                  <a:lnTo>
-                    <a:pt x="6159537" y="2714416"/>
-                  </a:lnTo>
-                  <a:lnTo>
-                    <a:pt x="6231159" y="2717700"/>
-                  </a:lnTo>
-                  <a:lnTo>
-                    <a:pt x="6302782" y="2720971"/>
-                  </a:lnTo>
-                  <a:lnTo>
-                    <a:pt x="6374404" y="2724228"/>
-                  </a:lnTo>
-                  <a:lnTo>
-                    <a:pt x="6446027" y="2727470"/>
-                  </a:lnTo>
-                  <a:lnTo>
-                    <a:pt x="6517649" y="2730699"/>
-                  </a:lnTo>
-                  <a:lnTo>
-                    <a:pt x="6589272" y="2733914"/>
-                  </a:lnTo>
-                  <a:lnTo>
-                    <a:pt x="6660894" y="2737116"/>
-                  </a:lnTo>
-                  <a:lnTo>
-                    <a:pt x="6732517" y="2740303"/>
-                  </a:lnTo>
-                  <a:lnTo>
-                    <a:pt x="6804139" y="2743477"/>
-                  </a:lnTo>
-                  <a:lnTo>
-                    <a:pt x="6875762" y="2746638"/>
-                  </a:lnTo>
-                  <a:lnTo>
-                    <a:pt x="6947385" y="2749785"/>
-                  </a:lnTo>
-                  <a:lnTo>
-                    <a:pt x="7019007" y="2752918"/>
-                  </a:lnTo>
-                  <a:lnTo>
-                    <a:pt x="7090630" y="2756039"/>
-                  </a:lnTo>
-                  <a:lnTo>
-                    <a:pt x="7090630" y="3372669"/>
-                  </a:lnTo>
-                  <a:lnTo>
-                    <a:pt x="7019007" y="3365123"/>
-                  </a:lnTo>
-                  <a:lnTo>
-                    <a:pt x="6947385" y="3357065"/>
-                  </a:lnTo>
-                  <a:lnTo>
-                    <a:pt x="6875762" y="3348459"/>
-                  </a:lnTo>
-                  <a:lnTo>
-                    <a:pt x="6804139" y="3339268"/>
-                  </a:lnTo>
-                  <a:lnTo>
-                    <a:pt x="6732517" y="3329453"/>
-                  </a:lnTo>
-                  <a:lnTo>
-                    <a:pt x="6660894" y="3318971"/>
-                  </a:lnTo>
-                  <a:lnTo>
-                    <a:pt x="6589272" y="3307777"/>
-                  </a:lnTo>
-                  <a:lnTo>
-                    <a:pt x="6517649" y="3295823"/>
-                  </a:lnTo>
-                  <a:lnTo>
-                    <a:pt x="6446027" y="3283056"/>
-                  </a:lnTo>
-                  <a:lnTo>
-                    <a:pt x="6374404" y="3269423"/>
-                  </a:lnTo>
-                  <a:lnTo>
-                    <a:pt x="6302782" y="3254863"/>
-                  </a:lnTo>
-                  <a:lnTo>
-                    <a:pt x="6231159" y="3239313"/>
-                  </a:lnTo>
-                  <a:lnTo>
-                    <a:pt x="6159537" y="3222708"/>
-                  </a:lnTo>
-                  <a:lnTo>
-                    <a:pt x="6087914" y="3204974"/>
-                  </a:lnTo>
-                  <a:lnTo>
-                    <a:pt x="6016292" y="3186036"/>
-                  </a:lnTo>
-                  <a:lnTo>
-                    <a:pt x="5944669" y="3165811"/>
-                  </a:lnTo>
-                  <a:lnTo>
-                    <a:pt x="5873047" y="3144213"/>
-                  </a:lnTo>
-                  <a:lnTo>
-                    <a:pt x="5801424" y="3121146"/>
-                  </a:lnTo>
-                  <a:lnTo>
-                    <a:pt x="5729802" y="3096513"/>
-                  </a:lnTo>
-                  <a:lnTo>
-                    <a:pt x="5658179" y="3070207"/>
-                  </a:lnTo>
-                  <a:lnTo>
-                    <a:pt x="5586557" y="3042113"/>
-                  </a:lnTo>
-                  <a:lnTo>
-                    <a:pt x="5514934" y="3012111"/>
-                  </a:lnTo>
-                  <a:lnTo>
-                    <a:pt x="5443311" y="2980071"/>
-                  </a:lnTo>
-                  <a:lnTo>
-                    <a:pt x="5371689" y="2945854"/>
-                  </a:lnTo>
-                  <a:lnTo>
-                    <a:pt x="5300066" y="2909312"/>
-                  </a:lnTo>
-                  <a:lnTo>
-                    <a:pt x="5228444" y="2870288"/>
-                  </a:lnTo>
-                  <a:lnTo>
-                    <a:pt x="5156821" y="2828613"/>
-                  </a:lnTo>
-                  <a:lnTo>
-                    <a:pt x="5085199" y="2784107"/>
-                  </a:lnTo>
-                  <a:lnTo>
-                    <a:pt x="5013576" y="2736577"/>
-                  </a:lnTo>
-                  <a:lnTo>
-                    <a:pt x="4941954" y="2685819"/>
-                  </a:lnTo>
-                  <a:lnTo>
-                    <a:pt x="4870331" y="2652826"/>
-                  </a:lnTo>
-                  <a:lnTo>
-                    <a:pt x="4798709" y="2649263"/>
-                  </a:lnTo>
-                  <a:lnTo>
-                    <a:pt x="4727086" y="2645685"/>
-                  </a:lnTo>
-                  <a:lnTo>
-                    <a:pt x="4655464" y="2642091"/>
-                  </a:lnTo>
-                  <a:lnTo>
-                    <a:pt x="4583841" y="2638483"/>
-                  </a:lnTo>
-                  <a:lnTo>
-                    <a:pt x="4512219" y="2634858"/>
-                  </a:lnTo>
-                  <a:lnTo>
-                    <a:pt x="4440596" y="2631219"/>
-                  </a:lnTo>
-                  <a:lnTo>
-                    <a:pt x="4368974" y="2627563"/>
-                  </a:lnTo>
-                  <a:lnTo>
-                    <a:pt x="4297351" y="2623892"/>
-                  </a:lnTo>
-                  <a:lnTo>
-                    <a:pt x="4225729" y="2620205"/>
-                  </a:lnTo>
-                  <a:lnTo>
-                    <a:pt x="4154106" y="2616503"/>
-                  </a:lnTo>
-                  <a:lnTo>
-                    <a:pt x="4082483" y="2612784"/>
-                  </a:lnTo>
-                  <a:lnTo>
-                    <a:pt x="4010861" y="2609050"/>
-                  </a:lnTo>
-                  <a:lnTo>
-                    <a:pt x="3939238" y="2605299"/>
-                  </a:lnTo>
-                  <a:lnTo>
-                    <a:pt x="3867616" y="2601533"/>
-                  </a:lnTo>
-                  <a:lnTo>
-                    <a:pt x="3795993" y="2597750"/>
-                  </a:lnTo>
-                  <a:lnTo>
-                    <a:pt x="3724371" y="2593951"/>
-                  </a:lnTo>
-                  <a:lnTo>
-                    <a:pt x="3652748" y="2590136"/>
-                  </a:lnTo>
-                  <a:lnTo>
-                    <a:pt x="3581126" y="2586305"/>
-                  </a:lnTo>
-                  <a:lnTo>
-                    <a:pt x="3509503" y="2582457"/>
-                  </a:lnTo>
-                  <a:lnTo>
-                    <a:pt x="3437881" y="2578592"/>
-                  </a:lnTo>
-                  <a:lnTo>
-                    <a:pt x="3366258" y="2574711"/>
-                  </a:lnTo>
-                  <a:lnTo>
-                    <a:pt x="3294636" y="2570813"/>
-                  </a:lnTo>
-                  <a:lnTo>
-                    <a:pt x="3223013" y="2566899"/>
-                  </a:lnTo>
-                  <a:lnTo>
-                    <a:pt x="3151391" y="2562968"/>
-                  </a:lnTo>
-                  <a:lnTo>
-                    <a:pt x="3079768" y="2559020"/>
-                  </a:lnTo>
-                  <a:lnTo>
-                    <a:pt x="3008146" y="2555055"/>
-                  </a:lnTo>
-                  <a:lnTo>
-                    <a:pt x="2936523" y="2551073"/>
-                  </a:lnTo>
-                  <a:lnTo>
-                    <a:pt x="2864901" y="2547074"/>
-                  </a:lnTo>
-                  <a:lnTo>
-                    <a:pt x="2793278" y="2543058"/>
-                  </a:lnTo>
-                  <a:lnTo>
-                    <a:pt x="2721655" y="2539024"/>
-                  </a:lnTo>
-                  <a:lnTo>
-                    <a:pt x="2650033" y="2534974"/>
-                  </a:lnTo>
-                  <a:lnTo>
-                    <a:pt x="2578410" y="2530906"/>
-                  </a:lnTo>
-                  <a:lnTo>
-                    <a:pt x="2506788" y="2526820"/>
-                  </a:lnTo>
-                  <a:lnTo>
-                    <a:pt x="2435165" y="2522717"/>
-                  </a:lnTo>
-                  <a:lnTo>
-                    <a:pt x="2363543" y="2518596"/>
-                  </a:lnTo>
-                  <a:lnTo>
-                    <a:pt x="2291920" y="2514458"/>
-                  </a:lnTo>
-                  <a:lnTo>
-                    <a:pt x="2220298" y="2510302"/>
-                  </a:lnTo>
-                  <a:lnTo>
-                    <a:pt x="2148675" y="2506128"/>
-                  </a:lnTo>
-                  <a:lnTo>
-                    <a:pt x="2077053" y="2501936"/>
-                  </a:lnTo>
-                  <a:lnTo>
-                    <a:pt x="2005430" y="2497727"/>
-                  </a:lnTo>
-                  <a:lnTo>
-                    <a:pt x="1933808" y="2493499"/>
-                  </a:lnTo>
-                  <a:lnTo>
-                    <a:pt x="1862185" y="2489253"/>
-                  </a:lnTo>
-                  <a:lnTo>
-                    <a:pt x="1790563" y="2484989"/>
-                  </a:lnTo>
-                  <a:lnTo>
-                    <a:pt x="1718940" y="2480707"/>
-                  </a:lnTo>
-                  <a:lnTo>
-                    <a:pt x="1647318" y="2476406"/>
-                  </a:lnTo>
-                  <a:lnTo>
-                    <a:pt x="1575695" y="2472087"/>
-                  </a:lnTo>
-                  <a:lnTo>
-                    <a:pt x="1504073" y="2467749"/>
-                  </a:lnTo>
-                  <a:lnTo>
-                    <a:pt x="1432450" y="2463393"/>
-                  </a:lnTo>
-                  <a:lnTo>
-                    <a:pt x="1360827" y="2459018"/>
-                  </a:lnTo>
-                  <a:lnTo>
-                    <a:pt x="1289205" y="2454624"/>
-                  </a:lnTo>
-                  <a:lnTo>
-                    <a:pt x="1217582" y="2450211"/>
-                  </a:lnTo>
-                  <a:lnTo>
-                    <a:pt x="1145960" y="2445780"/>
-                  </a:lnTo>
-                  <a:lnTo>
-                    <a:pt x="1074337" y="2441329"/>
-                  </a:lnTo>
-                  <a:lnTo>
-                    <a:pt x="1002715" y="2436860"/>
-                  </a:lnTo>
-                  <a:lnTo>
-                    <a:pt x="931092" y="2432371"/>
-                  </a:lnTo>
-                  <a:lnTo>
-                    <a:pt x="859470" y="2427863"/>
-                  </a:lnTo>
-                  <a:lnTo>
-                    <a:pt x="787847" y="2423336"/>
-                  </a:lnTo>
-                  <a:lnTo>
-                    <a:pt x="716225" y="2418789"/>
-                  </a:lnTo>
-                  <a:lnTo>
-                    <a:pt x="644602" y="2414223"/>
-                  </a:lnTo>
-                  <a:lnTo>
-                    <a:pt x="572980" y="2409637"/>
-                  </a:lnTo>
-                  <a:lnTo>
-                    <a:pt x="501357" y="2405031"/>
-                  </a:lnTo>
-                  <a:lnTo>
-                    <a:pt x="429735" y="2400406"/>
-                  </a:lnTo>
-                  <a:lnTo>
-                    <a:pt x="358112" y="2395761"/>
-                  </a:lnTo>
-                  <a:lnTo>
-                    <a:pt x="286490" y="2391096"/>
-                  </a:lnTo>
-                  <a:lnTo>
-                    <a:pt x="214867" y="2386411"/>
-                  </a:lnTo>
-                  <a:lnTo>
-                    <a:pt x="143245" y="2381706"/>
-                  </a:lnTo>
-                  <a:lnTo>
-                    <a:pt x="71622" y="2376981"/>
-                  </a:lnTo>
-                  <a:lnTo>
-                    <a:pt x="0" y="2372236"/>
+                    <a:pt x="3509503" y="202343"/>
+                  </a:lnTo>
+                  <a:lnTo>
+                    <a:pt x="3581126" y="426790"/>
+                  </a:lnTo>
+                  <a:lnTo>
+                    <a:pt x="3652748" y="635885"/>
+                  </a:lnTo>
+                  <a:lnTo>
+                    <a:pt x="3724371" y="830678"/>
+                  </a:lnTo>
+                  <a:lnTo>
+                    <a:pt x="3795993" y="1012148"/>
+                  </a:lnTo>
+                  <a:lnTo>
+                    <a:pt x="3867616" y="1181205"/>
+                  </a:lnTo>
+                  <a:lnTo>
+                    <a:pt x="3939238" y="1338698"/>
+                  </a:lnTo>
+                  <a:lnTo>
+                    <a:pt x="4010861" y="1485419"/>
+                  </a:lnTo>
+                  <a:lnTo>
+                    <a:pt x="4082483" y="1622104"/>
+                  </a:lnTo>
+                  <a:lnTo>
+                    <a:pt x="4154106" y="1749440"/>
+                  </a:lnTo>
+                  <a:lnTo>
+                    <a:pt x="4225729" y="1868067"/>
+                  </a:lnTo>
+                  <a:lnTo>
+                    <a:pt x="4297351" y="1978579"/>
+                  </a:lnTo>
+                  <a:lnTo>
+                    <a:pt x="4368974" y="2081532"/>
+                  </a:lnTo>
+                  <a:lnTo>
+                    <a:pt x="4440596" y="2177443"/>
+                  </a:lnTo>
+                  <a:lnTo>
+                    <a:pt x="4512219" y="2266794"/>
+                  </a:lnTo>
+                  <a:lnTo>
+                    <a:pt x="4583841" y="2350033"/>
+                  </a:lnTo>
+                  <a:lnTo>
+                    <a:pt x="4655464" y="2427579"/>
+                  </a:lnTo>
+                  <a:lnTo>
+                    <a:pt x="4727086" y="2499821"/>
+                  </a:lnTo>
+                  <a:lnTo>
+                    <a:pt x="4798709" y="2567121"/>
+                  </a:lnTo>
+                  <a:lnTo>
+                    <a:pt x="4870331" y="2629818"/>
+                  </a:lnTo>
+                  <a:lnTo>
+                    <a:pt x="4941954" y="2656862"/>
+                  </a:lnTo>
+                  <a:lnTo>
+                    <a:pt x="5013576" y="2661217"/>
+                  </a:lnTo>
+                  <a:lnTo>
+                    <a:pt x="5085199" y="2665549"/>
+                  </a:lnTo>
+                  <a:lnTo>
+                    <a:pt x="5156821" y="2669858"/>
+                  </a:lnTo>
+                  <a:lnTo>
+                    <a:pt x="5228444" y="2674145"/>
+                  </a:lnTo>
+                  <a:lnTo>
+                    <a:pt x="5300066" y="2678409"/>
+                  </a:lnTo>
+                  <a:lnTo>
+                    <a:pt x="5371689" y="2682650"/>
+                  </a:lnTo>
+                  <a:lnTo>
+                    <a:pt x="5443311" y="2686869"/>
+                  </a:lnTo>
+                  <a:lnTo>
+                    <a:pt x="5514934" y="2691066"/>
+                  </a:lnTo>
+                  <a:lnTo>
+                    <a:pt x="5586557" y="2695241"/>
+                  </a:lnTo>
+                  <a:lnTo>
+                    <a:pt x="5658179" y="2699394"/>
+                  </a:lnTo>
+                  <a:lnTo>
+                    <a:pt x="5729802" y="2703525"/>
+                  </a:lnTo>
+                  <a:lnTo>
+                    <a:pt x="5801424" y="2707634"/>
+                  </a:lnTo>
+                  <a:lnTo>
+                    <a:pt x="5873047" y="2711722"/>
+                  </a:lnTo>
+                  <a:lnTo>
+                    <a:pt x="5944669" y="2715788"/>
+                  </a:lnTo>
+                  <a:lnTo>
+                    <a:pt x="6016292" y="2719833"/>
+                  </a:lnTo>
+                  <a:lnTo>
+                    <a:pt x="6087914" y="2723856"/>
+                  </a:lnTo>
+                  <a:lnTo>
+                    <a:pt x="6159537" y="2727858"/>
+                  </a:lnTo>
+                  <a:lnTo>
+                    <a:pt x="6231159" y="2731839"/>
+                  </a:lnTo>
+                  <a:lnTo>
+                    <a:pt x="6302782" y="2735799"/>
+                  </a:lnTo>
+                  <a:lnTo>
+                    <a:pt x="6374404" y="2739739"/>
+                  </a:lnTo>
+                  <a:lnTo>
+                    <a:pt x="6446027" y="2743657"/>
+                  </a:lnTo>
+                  <a:lnTo>
+                    <a:pt x="6517649" y="2747555"/>
+                  </a:lnTo>
+                  <a:lnTo>
+                    <a:pt x="6589272" y="2751432"/>
+                  </a:lnTo>
+                  <a:lnTo>
+                    <a:pt x="6660894" y="2755289"/>
+                  </a:lnTo>
+                  <a:lnTo>
+                    <a:pt x="6732517" y="2759126"/>
+                  </a:lnTo>
+                  <a:lnTo>
+                    <a:pt x="6804139" y="2762942"/>
+                  </a:lnTo>
+                  <a:lnTo>
+                    <a:pt x="6875762" y="2766739"/>
+                  </a:lnTo>
+                  <a:lnTo>
+                    <a:pt x="6947385" y="2770515"/>
+                  </a:lnTo>
+                  <a:lnTo>
+                    <a:pt x="7019007" y="2774271"/>
+                  </a:lnTo>
+                  <a:lnTo>
+                    <a:pt x="7090630" y="2778008"/>
+                  </a:lnTo>
+                  <a:lnTo>
+                    <a:pt x="7090630" y="3388787"/>
+                  </a:lnTo>
+                  <a:lnTo>
+                    <a:pt x="7019007" y="3381815"/>
+                  </a:lnTo>
+                  <a:lnTo>
+                    <a:pt x="6947385" y="3374331"/>
+                  </a:lnTo>
+                  <a:lnTo>
+                    <a:pt x="6875762" y="3366297"/>
+                  </a:lnTo>
+                  <a:lnTo>
+                    <a:pt x="6804139" y="3357674"/>
+                  </a:lnTo>
+                  <a:lnTo>
+                    <a:pt x="6732517" y="3348418"/>
+                  </a:lnTo>
+                  <a:lnTo>
+                    <a:pt x="6660894" y="3338482"/>
+                  </a:lnTo>
+                  <a:lnTo>
+                    <a:pt x="6589272" y="3327816"/>
+                  </a:lnTo>
+                  <a:lnTo>
+                    <a:pt x="6517649" y="3316367"/>
+                  </a:lnTo>
+                  <a:lnTo>
+                    <a:pt x="6446027" y="3304078"/>
+                  </a:lnTo>
+                  <a:lnTo>
+                    <a:pt x="6374404" y="3290886"/>
+                  </a:lnTo>
+                  <a:lnTo>
+                    <a:pt x="6302782" y="3276726"/>
+                  </a:lnTo>
+                  <a:lnTo>
+                    <a:pt x="6231159" y="3261526"/>
+                  </a:lnTo>
+                  <a:lnTo>
+                    <a:pt x="6159537" y="3245211"/>
+                  </a:lnTo>
+                  <a:lnTo>
+                    <a:pt x="6087914" y="3227697"/>
+                  </a:lnTo>
+                  <a:lnTo>
+                    <a:pt x="6016292" y="3208897"/>
+                  </a:lnTo>
+                  <a:lnTo>
+                    <a:pt x="5944669" y="3188717"/>
+                  </a:lnTo>
+                  <a:lnTo>
+                    <a:pt x="5873047" y="3167056"/>
+                  </a:lnTo>
+                  <a:lnTo>
+                    <a:pt x="5801424" y="3143804"/>
+                  </a:lnTo>
+                  <a:lnTo>
+                    <a:pt x="5729802" y="3118844"/>
+                  </a:lnTo>
+                  <a:lnTo>
+                    <a:pt x="5658179" y="3092053"/>
+                  </a:lnTo>
+                  <a:lnTo>
+                    <a:pt x="5586557" y="3063294"/>
+                  </a:lnTo>
+                  <a:lnTo>
+                    <a:pt x="5514934" y="3032423"/>
+                  </a:lnTo>
+                  <a:lnTo>
+                    <a:pt x="5443311" y="2999286"/>
+                  </a:lnTo>
+                  <a:lnTo>
+                    <a:pt x="5371689" y="2963716"/>
+                  </a:lnTo>
+                  <a:lnTo>
+                    <a:pt x="5300066" y="2925535"/>
+                  </a:lnTo>
+                  <a:lnTo>
+                    <a:pt x="5228444" y="2884550"/>
+                  </a:lnTo>
+                  <a:lnTo>
+                    <a:pt x="5156821" y="2840556"/>
+                  </a:lnTo>
+                  <a:lnTo>
+                    <a:pt x="5085199" y="2793332"/>
+                  </a:lnTo>
+                  <a:lnTo>
+                    <a:pt x="5013576" y="2742640"/>
+                  </a:lnTo>
+                  <a:lnTo>
+                    <a:pt x="4941954" y="2688227"/>
+                  </a:lnTo>
+                  <a:lnTo>
+                    <a:pt x="4870331" y="2652484"/>
+                  </a:lnTo>
+                  <a:lnTo>
+                    <a:pt x="4798709" y="2648083"/>
+                  </a:lnTo>
+                  <a:lnTo>
+                    <a:pt x="4727086" y="2643658"/>
+                  </a:lnTo>
+                  <a:lnTo>
+                    <a:pt x="4655464" y="2639210"/>
+                  </a:lnTo>
+                  <a:lnTo>
+                    <a:pt x="4583841" y="2634739"/>
+                  </a:lnTo>
+                  <a:lnTo>
+                    <a:pt x="4512219" y="2630243"/>
+                  </a:lnTo>
+                  <a:lnTo>
+                    <a:pt x="4440596" y="2625724"/>
+                  </a:lnTo>
+                  <a:lnTo>
+                    <a:pt x="4368974" y="2621182"/>
+                  </a:lnTo>
+                  <a:lnTo>
+                    <a:pt x="4297351" y="2616615"/>
+                  </a:lnTo>
+                  <a:lnTo>
+                    <a:pt x="4225729" y="2612023"/>
+                  </a:lnTo>
+                  <a:lnTo>
+                    <a:pt x="4154106" y="2607408"/>
+                  </a:lnTo>
+                  <a:lnTo>
+                    <a:pt x="4082483" y="2602768"/>
+                  </a:lnTo>
+                  <a:lnTo>
+                    <a:pt x="4010861" y="2598104"/>
+                  </a:lnTo>
+                  <a:lnTo>
+                    <a:pt x="3939238" y="2593414"/>
+                  </a:lnTo>
+                  <a:lnTo>
+                    <a:pt x="3867616" y="2588700"/>
+                  </a:lnTo>
+                  <a:lnTo>
+                    <a:pt x="3795993" y="2583962"/>
+                  </a:lnTo>
+                  <a:lnTo>
+                    <a:pt x="3724371" y="2579197"/>
+                  </a:lnTo>
+                  <a:lnTo>
+                    <a:pt x="3652748" y="2574408"/>
+                  </a:lnTo>
+                  <a:lnTo>
+                    <a:pt x="3581126" y="2569594"/>
+                  </a:lnTo>
+                  <a:lnTo>
+                    <a:pt x="3509503" y="2564754"/>
+                  </a:lnTo>
+                  <a:lnTo>
+                    <a:pt x="3437881" y="2559888"/>
+                  </a:lnTo>
+                  <a:lnTo>
+                    <a:pt x="3366258" y="2554996"/>
+                  </a:lnTo>
+                  <a:lnTo>
+                    <a:pt x="3294636" y="2550079"/>
+                  </a:lnTo>
+                  <a:lnTo>
+                    <a:pt x="3223013" y="2545135"/>
+                  </a:lnTo>
+                  <a:lnTo>
+                    <a:pt x="3151391" y="2540166"/>
+                  </a:lnTo>
+                  <a:lnTo>
+                    <a:pt x="3079768" y="2535170"/>
+                  </a:lnTo>
+                  <a:lnTo>
+                    <a:pt x="3008146" y="2530148"/>
+                  </a:lnTo>
+                  <a:lnTo>
+                    <a:pt x="2936523" y="2525099"/>
+                  </a:lnTo>
+                  <a:lnTo>
+                    <a:pt x="2864901" y="2520023"/>
+                  </a:lnTo>
+                  <a:lnTo>
+                    <a:pt x="2793278" y="2514920"/>
+                  </a:lnTo>
+                  <a:lnTo>
+                    <a:pt x="2721655" y="2509791"/>
+                  </a:lnTo>
+                  <a:lnTo>
+                    <a:pt x="2650033" y="2504634"/>
+                  </a:lnTo>
+                  <a:lnTo>
+                    <a:pt x="2578410" y="2499450"/>
+                  </a:lnTo>
+                  <a:lnTo>
+                    <a:pt x="2506788" y="2494238"/>
+                  </a:lnTo>
+                  <a:lnTo>
+                    <a:pt x="2435165" y="2488999"/>
+                  </a:lnTo>
+                  <a:lnTo>
+                    <a:pt x="2363543" y="2483733"/>
+                  </a:lnTo>
+                  <a:lnTo>
+                    <a:pt x="2291920" y="2478438"/>
+                  </a:lnTo>
+                  <a:lnTo>
+                    <a:pt x="2220298" y="2473115"/>
+                  </a:lnTo>
+                  <a:lnTo>
+                    <a:pt x="2148675" y="2467764"/>
+                  </a:lnTo>
+                  <a:lnTo>
+                    <a:pt x="2077053" y="2462385"/>
+                  </a:lnTo>
+                  <a:lnTo>
+                    <a:pt x="2005430" y="2456977"/>
+                  </a:lnTo>
+                  <a:lnTo>
+                    <a:pt x="1933808" y="2451541"/>
+                  </a:lnTo>
+                  <a:lnTo>
+                    <a:pt x="1862185" y="2446076"/>
+                  </a:lnTo>
+                  <a:lnTo>
+                    <a:pt x="1790563" y="2440582"/>
+                  </a:lnTo>
+                  <a:lnTo>
+                    <a:pt x="1718940" y="2435058"/>
+                  </a:lnTo>
+                  <a:lnTo>
+                    <a:pt x="1647318" y="2429506"/>
+                  </a:lnTo>
+                  <a:lnTo>
+                    <a:pt x="1575695" y="2423924"/>
+                  </a:lnTo>
+                  <a:lnTo>
+                    <a:pt x="1504073" y="2418313"/>
+                  </a:lnTo>
+                  <a:lnTo>
+                    <a:pt x="1432450" y="2412672"/>
+                  </a:lnTo>
+                  <a:lnTo>
+                    <a:pt x="1360827" y="2407001"/>
+                  </a:lnTo>
+                  <a:lnTo>
+                    <a:pt x="1289205" y="2401300"/>
+                  </a:lnTo>
+                  <a:lnTo>
+                    <a:pt x="1217582" y="2395569"/>
+                  </a:lnTo>
+                  <a:lnTo>
+                    <a:pt x="1145960" y="2389807"/>
+                  </a:lnTo>
+                  <a:lnTo>
+                    <a:pt x="1074337" y="2384015"/>
+                  </a:lnTo>
+                  <a:lnTo>
+                    <a:pt x="1002715" y="2378192"/>
+                  </a:lnTo>
+                  <a:lnTo>
+                    <a:pt x="931092" y="2372339"/>
+                  </a:lnTo>
+                  <a:lnTo>
+                    <a:pt x="859470" y="2366454"/>
+                  </a:lnTo>
+                  <a:lnTo>
+                    <a:pt x="787847" y="2360539"/>
+                  </a:lnTo>
+                  <a:lnTo>
+                    <a:pt x="716225" y="2354592"/>
+                  </a:lnTo>
+                  <a:lnTo>
+                    <a:pt x="644602" y="2348613"/>
+                  </a:lnTo>
+                  <a:lnTo>
+                    <a:pt x="572980" y="2342603"/>
+                  </a:lnTo>
+                  <a:lnTo>
+                    <a:pt x="501357" y="2336561"/>
+                  </a:lnTo>
+                  <a:lnTo>
+                    <a:pt x="429735" y="2330487"/>
+                  </a:lnTo>
+                  <a:lnTo>
+                    <a:pt x="358112" y="2324381"/>
+                  </a:lnTo>
+                  <a:lnTo>
+                    <a:pt x="286490" y="2318243"/>
+                  </a:lnTo>
+                  <a:lnTo>
+                    <a:pt x="214867" y="2312072"/>
+                  </a:lnTo>
+                  <a:lnTo>
+                    <a:pt x="143245" y="2305868"/>
+                  </a:lnTo>
+                  <a:lnTo>
+                    <a:pt x="71622" y="2299632"/>
+                  </a:lnTo>
+                  <a:lnTo>
+                    <a:pt x="0" y="2293362"/>
                   </a:lnTo>
                   <a:lnTo>
                     <a:pt x="0" y="0"/>
@@ -3498,174 +3492,168 @@
           </p:nvSpPr>
           <p:spPr>
             <a:xfrm>
-              <a:off x="4508519" y="2073503"/>
-              <a:ext cx="3754160" cy="2756039"/>
+              <a:off x="4621400" y="2073503"/>
+              <a:ext cx="3641278" cy="2778008"/>
             </a:xfrm>
             <a:custGeom>
               <a:avLst/>
               <a:pathLst>
-                <a:path w="3754160" h="2756039">
+                <a:path w="3641278" h="2778008">
                   <a:moveTo>
                     <a:pt x="0" y="0"/>
                   </a:moveTo>
                   <a:lnTo>
-                    <a:pt x="29788" y="95728"/>
-                  </a:lnTo>
-                  <a:lnTo>
-                    <a:pt x="101411" y="311250"/>
-                  </a:lnTo>
-                  <a:lnTo>
-                    <a:pt x="173033" y="513062"/>
-                  </a:lnTo>
-                  <a:lnTo>
-                    <a:pt x="244656" y="702036"/>
-                  </a:lnTo>
-                  <a:lnTo>
-                    <a:pt x="316278" y="878989"/>
-                  </a:lnTo>
-                  <a:lnTo>
-                    <a:pt x="387901" y="1044686"/>
-                  </a:lnTo>
-                  <a:lnTo>
-                    <a:pt x="459523" y="1199842"/>
-                  </a:lnTo>
-                  <a:lnTo>
-                    <a:pt x="531146" y="1345128"/>
-                  </a:lnTo>
-                  <a:lnTo>
-                    <a:pt x="602768" y="1481172"/>
-                  </a:lnTo>
-                  <a:lnTo>
-                    <a:pt x="674391" y="1608562"/>
-                  </a:lnTo>
-                  <a:lnTo>
-                    <a:pt x="746013" y="1727848"/>
-                  </a:lnTo>
-                  <a:lnTo>
-                    <a:pt x="817636" y="1839546"/>
-                  </a:lnTo>
-                  <a:lnTo>
-                    <a:pt x="889259" y="1944139"/>
-                  </a:lnTo>
-                  <a:lnTo>
-                    <a:pt x="960881" y="2042078"/>
-                  </a:lnTo>
-                  <a:lnTo>
-                    <a:pt x="1032504" y="2133787"/>
-                  </a:lnTo>
-                  <a:lnTo>
-                    <a:pt x="1104126" y="2219662"/>
-                  </a:lnTo>
-                  <a:lnTo>
-                    <a:pt x="1175749" y="2300074"/>
-                  </a:lnTo>
-                  <a:lnTo>
-                    <a:pt x="1247371" y="2375371"/>
-                  </a:lnTo>
-                  <a:lnTo>
-                    <a:pt x="1318994" y="2445878"/>
-                  </a:lnTo>
-                  <a:lnTo>
-                    <a:pt x="1390616" y="2511900"/>
-                  </a:lnTo>
-                  <a:lnTo>
-                    <a:pt x="1462239" y="2573722"/>
-                  </a:lnTo>
-                  <a:lnTo>
-                    <a:pt x="1533861" y="2631612"/>
-                  </a:lnTo>
-                  <a:lnTo>
-                    <a:pt x="1605484" y="2656373"/>
-                  </a:lnTo>
-                  <a:lnTo>
-                    <a:pt x="1677106" y="2659906"/>
-                  </a:lnTo>
-                  <a:lnTo>
-                    <a:pt x="1748729" y="2663423"/>
-                  </a:lnTo>
-                  <a:lnTo>
-                    <a:pt x="1820351" y="2666925"/>
-                  </a:lnTo>
-                  <a:lnTo>
-                    <a:pt x="1891974" y="2670412"/>
-                  </a:lnTo>
-                  <a:lnTo>
-                    <a:pt x="1963596" y="2673885"/>
-                  </a:lnTo>
-                  <a:lnTo>
-                    <a:pt x="2035219" y="2677343"/>
-                  </a:lnTo>
-                  <a:lnTo>
-                    <a:pt x="2106841" y="2680785"/>
-                  </a:lnTo>
-                  <a:lnTo>
-                    <a:pt x="2178464" y="2684214"/>
-                  </a:lnTo>
-                  <a:lnTo>
-                    <a:pt x="2250087" y="2687627"/>
-                  </a:lnTo>
-                  <a:lnTo>
-                    <a:pt x="2321709" y="2691026"/>
-                  </a:lnTo>
-                  <a:lnTo>
-                    <a:pt x="2393332" y="2694410"/>
-                  </a:lnTo>
-                  <a:lnTo>
-                    <a:pt x="2464954" y="2697780"/>
-                  </a:lnTo>
-                  <a:lnTo>
-                    <a:pt x="2536577" y="2701136"/>
-                  </a:lnTo>
-                  <a:lnTo>
-                    <a:pt x="2608199" y="2704477"/>
-                  </a:lnTo>
-                  <a:lnTo>
-                    <a:pt x="2679822" y="2707804"/>
-                  </a:lnTo>
-                  <a:lnTo>
-                    <a:pt x="2751444" y="2711117"/>
-                  </a:lnTo>
-                  <a:lnTo>
-                    <a:pt x="2823067" y="2714416"/>
-                  </a:lnTo>
-                  <a:lnTo>
-                    <a:pt x="2894689" y="2717700"/>
-                  </a:lnTo>
-                  <a:lnTo>
-                    <a:pt x="2966312" y="2720971"/>
-                  </a:lnTo>
-                  <a:lnTo>
-                    <a:pt x="3037934" y="2724228"/>
-                  </a:lnTo>
-                  <a:lnTo>
-                    <a:pt x="3109557" y="2727470"/>
-                  </a:lnTo>
-                  <a:lnTo>
-                    <a:pt x="3181179" y="2730699"/>
-                  </a:lnTo>
-                  <a:lnTo>
-                    <a:pt x="3252802" y="2733914"/>
-                  </a:lnTo>
-                  <a:lnTo>
-                    <a:pt x="3324424" y="2737116"/>
-                  </a:lnTo>
-                  <a:lnTo>
-                    <a:pt x="3396047" y="2740303"/>
-                  </a:lnTo>
-                  <a:lnTo>
-                    <a:pt x="3467669" y="2743477"/>
-                  </a:lnTo>
-                  <a:lnTo>
-                    <a:pt x="3539292" y="2746638"/>
-                  </a:lnTo>
-                  <a:lnTo>
-                    <a:pt x="3610915" y="2749785"/>
-                  </a:lnTo>
-                  <a:lnTo>
-                    <a:pt x="3682537" y="2752918"/>
-                  </a:lnTo>
-                  <a:lnTo>
-                    <a:pt x="3754160" y="2756039"/>
+                    <a:pt x="60152" y="202343"/>
+                  </a:lnTo>
+                  <a:lnTo>
+                    <a:pt x="131774" y="426790"/>
+                  </a:lnTo>
+                  <a:lnTo>
+                    <a:pt x="203397" y="635885"/>
+                  </a:lnTo>
+                  <a:lnTo>
+                    <a:pt x="275019" y="830678"/>
+                  </a:lnTo>
+                  <a:lnTo>
+                    <a:pt x="346642" y="1012148"/>
+                  </a:lnTo>
+                  <a:lnTo>
+                    <a:pt x="418265" y="1181205"/>
+                  </a:lnTo>
+                  <a:lnTo>
+                    <a:pt x="489887" y="1338698"/>
+                  </a:lnTo>
+                  <a:lnTo>
+                    <a:pt x="561510" y="1485419"/>
+                  </a:lnTo>
+                  <a:lnTo>
+                    <a:pt x="633132" y="1622104"/>
+                  </a:lnTo>
+                  <a:lnTo>
+                    <a:pt x="704755" y="1749440"/>
+                  </a:lnTo>
+                  <a:lnTo>
+                    <a:pt x="776377" y="1868067"/>
+                  </a:lnTo>
+                  <a:lnTo>
+                    <a:pt x="848000" y="1978579"/>
+                  </a:lnTo>
+                  <a:lnTo>
+                    <a:pt x="919622" y="2081532"/>
+                  </a:lnTo>
+                  <a:lnTo>
+                    <a:pt x="991245" y="2177443"/>
+                  </a:lnTo>
+                  <a:lnTo>
+                    <a:pt x="1062867" y="2266794"/>
+                  </a:lnTo>
+                  <a:lnTo>
+                    <a:pt x="1134490" y="2350033"/>
+                  </a:lnTo>
+                  <a:lnTo>
+                    <a:pt x="1206112" y="2427579"/>
+                  </a:lnTo>
+                  <a:lnTo>
+                    <a:pt x="1277735" y="2499821"/>
+                  </a:lnTo>
+                  <a:lnTo>
+                    <a:pt x="1349357" y="2567121"/>
+                  </a:lnTo>
+                  <a:lnTo>
+                    <a:pt x="1420980" y="2629818"/>
+                  </a:lnTo>
+                  <a:lnTo>
+                    <a:pt x="1492602" y="2656862"/>
+                  </a:lnTo>
+                  <a:lnTo>
+                    <a:pt x="1564225" y="2661217"/>
+                  </a:lnTo>
+                  <a:lnTo>
+                    <a:pt x="1635847" y="2665549"/>
+                  </a:lnTo>
+                  <a:lnTo>
+                    <a:pt x="1707470" y="2669858"/>
+                  </a:lnTo>
+                  <a:lnTo>
+                    <a:pt x="1779093" y="2674145"/>
+                  </a:lnTo>
+                  <a:lnTo>
+                    <a:pt x="1850715" y="2678409"/>
+                  </a:lnTo>
+                  <a:lnTo>
+                    <a:pt x="1922338" y="2682650"/>
+                  </a:lnTo>
+                  <a:lnTo>
+                    <a:pt x="1993960" y="2686869"/>
+                  </a:lnTo>
+                  <a:lnTo>
+                    <a:pt x="2065583" y="2691066"/>
+                  </a:lnTo>
+                  <a:lnTo>
+                    <a:pt x="2137205" y="2695241"/>
+                  </a:lnTo>
+                  <a:lnTo>
+                    <a:pt x="2208828" y="2699394"/>
+                  </a:lnTo>
+                  <a:lnTo>
+                    <a:pt x="2280450" y="2703525"/>
+                  </a:lnTo>
+                  <a:lnTo>
+                    <a:pt x="2352073" y="2707634"/>
+                  </a:lnTo>
+                  <a:lnTo>
+                    <a:pt x="2423695" y="2711722"/>
+                  </a:lnTo>
+                  <a:lnTo>
+                    <a:pt x="2495318" y="2715788"/>
+                  </a:lnTo>
+                  <a:lnTo>
+                    <a:pt x="2566940" y="2719833"/>
+                  </a:lnTo>
+                  <a:lnTo>
+                    <a:pt x="2638563" y="2723856"/>
+                  </a:lnTo>
+                  <a:lnTo>
+                    <a:pt x="2710185" y="2727858"/>
+                  </a:lnTo>
+                  <a:lnTo>
+                    <a:pt x="2781808" y="2731839"/>
+                  </a:lnTo>
+                  <a:lnTo>
+                    <a:pt x="2853430" y="2735799"/>
+                  </a:lnTo>
+                  <a:lnTo>
+                    <a:pt x="2925053" y="2739739"/>
+                  </a:lnTo>
+                  <a:lnTo>
+                    <a:pt x="2996675" y="2743657"/>
+                  </a:lnTo>
+                  <a:lnTo>
+                    <a:pt x="3068298" y="2747555"/>
+                  </a:lnTo>
+                  <a:lnTo>
+                    <a:pt x="3139921" y="2751432"/>
+                  </a:lnTo>
+                  <a:lnTo>
+                    <a:pt x="3211543" y="2755289"/>
+                  </a:lnTo>
+                  <a:lnTo>
+                    <a:pt x="3283166" y="2759126"/>
+                  </a:lnTo>
+                  <a:lnTo>
+                    <a:pt x="3354788" y="2762942"/>
+                  </a:lnTo>
+                  <a:lnTo>
+                    <a:pt x="3426411" y="2766739"/>
+                  </a:lnTo>
+                  <a:lnTo>
+                    <a:pt x="3498033" y="2770515"/>
+                  </a:lnTo>
+                  <a:lnTo>
+                    <a:pt x="3569656" y="2774271"/>
+                  </a:lnTo>
+                  <a:lnTo>
+                    <a:pt x="3641278" y="2778008"/>
                   </a:lnTo>
                 </a:path>
               </a:pathLst>
@@ -3685,309 +3673,309 @@
           </p:nvSpPr>
           <p:spPr>
             <a:xfrm>
-              <a:off x="1172049" y="4445739"/>
-              <a:ext cx="7090630" cy="1000433"/>
+              <a:off x="1172049" y="4366865"/>
+              <a:ext cx="7090630" cy="1095424"/>
             </a:xfrm>
             <a:custGeom>
               <a:avLst/>
               <a:pathLst>
-                <a:path w="7090630" h="1000433">
+                <a:path w="7090630" h="1095424">
                   <a:moveTo>
-                    <a:pt x="7090630" y="1000433"/>
+                    <a:pt x="7090630" y="1095424"/>
                   </a:moveTo>
                   <a:lnTo>
-                    <a:pt x="7019007" y="992887"/>
-                  </a:lnTo>
-                  <a:lnTo>
-                    <a:pt x="6947385" y="984829"/>
-                  </a:lnTo>
-                  <a:lnTo>
-                    <a:pt x="6875762" y="976223"/>
-                  </a:lnTo>
-                  <a:lnTo>
-                    <a:pt x="6804139" y="967032"/>
-                  </a:lnTo>
-                  <a:lnTo>
-                    <a:pt x="6732517" y="957217"/>
-                  </a:lnTo>
-                  <a:lnTo>
-                    <a:pt x="6660894" y="946735"/>
-                  </a:lnTo>
-                  <a:lnTo>
-                    <a:pt x="6589272" y="935541"/>
-                  </a:lnTo>
-                  <a:lnTo>
-                    <a:pt x="6517649" y="923587"/>
-                  </a:lnTo>
-                  <a:lnTo>
-                    <a:pt x="6446027" y="910820"/>
-                  </a:lnTo>
-                  <a:lnTo>
-                    <a:pt x="6374404" y="897186"/>
-                  </a:lnTo>
-                  <a:lnTo>
-                    <a:pt x="6302782" y="882626"/>
-                  </a:lnTo>
-                  <a:lnTo>
-                    <a:pt x="6231159" y="867077"/>
-                  </a:lnTo>
-                  <a:lnTo>
-                    <a:pt x="6159537" y="850472"/>
-                  </a:lnTo>
-                  <a:lnTo>
-                    <a:pt x="6087914" y="832738"/>
-                  </a:lnTo>
-                  <a:lnTo>
-                    <a:pt x="6016292" y="813800"/>
-                  </a:lnTo>
-                  <a:lnTo>
-                    <a:pt x="5944669" y="793575"/>
-                  </a:lnTo>
-                  <a:lnTo>
-                    <a:pt x="5873047" y="771976"/>
-                  </a:lnTo>
-                  <a:lnTo>
-                    <a:pt x="5801424" y="748910"/>
-                  </a:lnTo>
-                  <a:lnTo>
-                    <a:pt x="5729802" y="724277"/>
-                  </a:lnTo>
-                  <a:lnTo>
-                    <a:pt x="5658179" y="697971"/>
-                  </a:lnTo>
-                  <a:lnTo>
-                    <a:pt x="5586557" y="669877"/>
-                  </a:lnTo>
-                  <a:lnTo>
-                    <a:pt x="5514934" y="639875"/>
-                  </a:lnTo>
-                  <a:lnTo>
-                    <a:pt x="5443311" y="607835"/>
-                  </a:lnTo>
-                  <a:lnTo>
-                    <a:pt x="5371689" y="573618"/>
-                  </a:lnTo>
-                  <a:lnTo>
-                    <a:pt x="5300066" y="537076"/>
-                  </a:lnTo>
-                  <a:lnTo>
-                    <a:pt x="5228444" y="498052"/>
-                  </a:lnTo>
-                  <a:lnTo>
-                    <a:pt x="5156821" y="456377"/>
-                  </a:lnTo>
-                  <a:lnTo>
-                    <a:pt x="5085199" y="411871"/>
-                  </a:lnTo>
-                  <a:lnTo>
-                    <a:pt x="5013576" y="364341"/>
-                  </a:lnTo>
-                  <a:lnTo>
-                    <a:pt x="4941954" y="313583"/>
-                  </a:lnTo>
-                  <a:lnTo>
-                    <a:pt x="4870331" y="280590"/>
-                  </a:lnTo>
-                  <a:lnTo>
-                    <a:pt x="4798709" y="277027"/>
-                  </a:lnTo>
-                  <a:lnTo>
-                    <a:pt x="4727086" y="273449"/>
-                  </a:lnTo>
-                  <a:lnTo>
-                    <a:pt x="4655464" y="269855"/>
-                  </a:lnTo>
-                  <a:lnTo>
-                    <a:pt x="4583841" y="266247"/>
-                  </a:lnTo>
-                  <a:lnTo>
-                    <a:pt x="4512219" y="262622"/>
-                  </a:lnTo>
-                  <a:lnTo>
-                    <a:pt x="4440596" y="258983"/>
-                  </a:lnTo>
-                  <a:lnTo>
-                    <a:pt x="4368974" y="255327"/>
-                  </a:lnTo>
-                  <a:lnTo>
-                    <a:pt x="4297351" y="251656"/>
-                  </a:lnTo>
-                  <a:lnTo>
-                    <a:pt x="4225729" y="247969"/>
-                  </a:lnTo>
-                  <a:lnTo>
-                    <a:pt x="4154106" y="244267"/>
-                  </a:lnTo>
-                  <a:lnTo>
-                    <a:pt x="4082483" y="240548"/>
-                  </a:lnTo>
-                  <a:lnTo>
-                    <a:pt x="4010861" y="236814"/>
-                  </a:lnTo>
-                  <a:lnTo>
-                    <a:pt x="3939238" y="233063"/>
-                  </a:lnTo>
-                  <a:lnTo>
-                    <a:pt x="3867616" y="229297"/>
-                  </a:lnTo>
-                  <a:lnTo>
-                    <a:pt x="3795993" y="225514"/>
-                  </a:lnTo>
-                  <a:lnTo>
-                    <a:pt x="3724371" y="221715"/>
-                  </a:lnTo>
-                  <a:lnTo>
-                    <a:pt x="3652748" y="217900"/>
-                  </a:lnTo>
-                  <a:lnTo>
-                    <a:pt x="3581126" y="214069"/>
-                  </a:lnTo>
-                  <a:lnTo>
-                    <a:pt x="3509503" y="210221"/>
-                  </a:lnTo>
-                  <a:lnTo>
-                    <a:pt x="3437881" y="206356"/>
-                  </a:lnTo>
-                  <a:lnTo>
-                    <a:pt x="3366258" y="202475"/>
-                  </a:lnTo>
-                  <a:lnTo>
-                    <a:pt x="3294636" y="198577"/>
-                  </a:lnTo>
-                  <a:lnTo>
-                    <a:pt x="3223013" y="194663"/>
-                  </a:lnTo>
-                  <a:lnTo>
-                    <a:pt x="3151391" y="190732"/>
-                  </a:lnTo>
-                  <a:lnTo>
-                    <a:pt x="3079768" y="186784"/>
-                  </a:lnTo>
-                  <a:lnTo>
-                    <a:pt x="3008146" y="182819"/>
-                  </a:lnTo>
-                  <a:lnTo>
-                    <a:pt x="2936523" y="178837"/>
-                  </a:lnTo>
-                  <a:lnTo>
-                    <a:pt x="2864901" y="174838"/>
-                  </a:lnTo>
-                  <a:lnTo>
-                    <a:pt x="2793278" y="170822"/>
-                  </a:lnTo>
-                  <a:lnTo>
-                    <a:pt x="2721655" y="166788"/>
-                  </a:lnTo>
-                  <a:lnTo>
-                    <a:pt x="2650033" y="162738"/>
-                  </a:lnTo>
-                  <a:lnTo>
-                    <a:pt x="2578410" y="158670"/>
-                  </a:lnTo>
-                  <a:lnTo>
-                    <a:pt x="2506788" y="154584"/>
-                  </a:lnTo>
-                  <a:lnTo>
-                    <a:pt x="2435165" y="150481"/>
-                  </a:lnTo>
-                  <a:lnTo>
-                    <a:pt x="2363543" y="146360"/>
-                  </a:lnTo>
-                  <a:lnTo>
-                    <a:pt x="2291920" y="142222"/>
-                  </a:lnTo>
-                  <a:lnTo>
-                    <a:pt x="2220298" y="138066"/>
-                  </a:lnTo>
-                  <a:lnTo>
-                    <a:pt x="2148675" y="133892"/>
-                  </a:lnTo>
-                  <a:lnTo>
-                    <a:pt x="2077053" y="129700"/>
-                  </a:lnTo>
-                  <a:lnTo>
-                    <a:pt x="2005430" y="125491"/>
-                  </a:lnTo>
-                  <a:lnTo>
-                    <a:pt x="1933808" y="121263"/>
-                  </a:lnTo>
-                  <a:lnTo>
-                    <a:pt x="1862185" y="117017"/>
-                  </a:lnTo>
-                  <a:lnTo>
-                    <a:pt x="1790563" y="112753"/>
-                  </a:lnTo>
-                  <a:lnTo>
-                    <a:pt x="1718940" y="108471"/>
-                  </a:lnTo>
-                  <a:lnTo>
-                    <a:pt x="1647318" y="104170"/>
-                  </a:lnTo>
-                  <a:lnTo>
-                    <a:pt x="1575695" y="99851"/>
-                  </a:lnTo>
-                  <a:lnTo>
-                    <a:pt x="1504073" y="95513"/>
-                  </a:lnTo>
-                  <a:lnTo>
-                    <a:pt x="1432450" y="91157"/>
-                  </a:lnTo>
-                  <a:lnTo>
-                    <a:pt x="1360827" y="86782"/>
-                  </a:lnTo>
-                  <a:lnTo>
-                    <a:pt x="1289205" y="82388"/>
-                  </a:lnTo>
-                  <a:lnTo>
-                    <a:pt x="1217582" y="77975"/>
-                  </a:lnTo>
-                  <a:lnTo>
-                    <a:pt x="1145960" y="73544"/>
-                  </a:lnTo>
-                  <a:lnTo>
-                    <a:pt x="1074337" y="69093"/>
-                  </a:lnTo>
-                  <a:lnTo>
-                    <a:pt x="1002715" y="64624"/>
-                  </a:lnTo>
-                  <a:lnTo>
-                    <a:pt x="931092" y="60135"/>
-                  </a:lnTo>
-                  <a:lnTo>
-                    <a:pt x="859470" y="55627"/>
-                  </a:lnTo>
-                  <a:lnTo>
-                    <a:pt x="787847" y="51100"/>
-                  </a:lnTo>
-                  <a:lnTo>
-                    <a:pt x="716225" y="46553"/>
-                  </a:lnTo>
-                  <a:lnTo>
-                    <a:pt x="644602" y="41987"/>
-                  </a:lnTo>
-                  <a:lnTo>
-                    <a:pt x="572980" y="37401"/>
-                  </a:lnTo>
-                  <a:lnTo>
-                    <a:pt x="501357" y="32795"/>
-                  </a:lnTo>
-                  <a:lnTo>
-                    <a:pt x="429735" y="28170"/>
-                  </a:lnTo>
-                  <a:lnTo>
-                    <a:pt x="358112" y="23525"/>
-                  </a:lnTo>
-                  <a:lnTo>
-                    <a:pt x="286490" y="18860"/>
-                  </a:lnTo>
-                  <a:lnTo>
-                    <a:pt x="214867" y="14175"/>
-                  </a:lnTo>
-                  <a:lnTo>
-                    <a:pt x="143245" y="9470"/>
-                  </a:lnTo>
-                  <a:lnTo>
-                    <a:pt x="71622" y="4745"/>
+                    <a:pt x="7019007" y="1088452"/>
+                  </a:lnTo>
+                  <a:lnTo>
+                    <a:pt x="6947385" y="1080968"/>
+                  </a:lnTo>
+                  <a:lnTo>
+                    <a:pt x="6875762" y="1072935"/>
+                  </a:lnTo>
+                  <a:lnTo>
+                    <a:pt x="6804139" y="1064311"/>
+                  </a:lnTo>
+                  <a:lnTo>
+                    <a:pt x="6732517" y="1055055"/>
+                  </a:lnTo>
+                  <a:lnTo>
+                    <a:pt x="6660894" y="1045119"/>
+                  </a:lnTo>
+                  <a:lnTo>
+                    <a:pt x="6589272" y="1034453"/>
+                  </a:lnTo>
+                  <a:lnTo>
+                    <a:pt x="6517649" y="1023004"/>
+                  </a:lnTo>
+                  <a:lnTo>
+                    <a:pt x="6446027" y="1010715"/>
+                  </a:lnTo>
+                  <a:lnTo>
+                    <a:pt x="6374404" y="997524"/>
+                  </a:lnTo>
+                  <a:lnTo>
+                    <a:pt x="6302782" y="983363"/>
+                  </a:lnTo>
+                  <a:lnTo>
+                    <a:pt x="6231159" y="968164"/>
+                  </a:lnTo>
+                  <a:lnTo>
+                    <a:pt x="6159537" y="951848"/>
+                  </a:lnTo>
+                  <a:lnTo>
+                    <a:pt x="6087914" y="934334"/>
+                  </a:lnTo>
+                  <a:lnTo>
+                    <a:pt x="6016292" y="915534"/>
+                  </a:lnTo>
+                  <a:lnTo>
+                    <a:pt x="5944669" y="895354"/>
+                  </a:lnTo>
+                  <a:lnTo>
+                    <a:pt x="5873047" y="873693"/>
+                  </a:lnTo>
+                  <a:lnTo>
+                    <a:pt x="5801424" y="850441"/>
+                  </a:lnTo>
+                  <a:lnTo>
+                    <a:pt x="5729802" y="825482"/>
+                  </a:lnTo>
+                  <a:lnTo>
+                    <a:pt x="5658179" y="798690"/>
+                  </a:lnTo>
+                  <a:lnTo>
+                    <a:pt x="5586557" y="769931"/>
+                  </a:lnTo>
+                  <a:lnTo>
+                    <a:pt x="5514934" y="739061"/>
+                  </a:lnTo>
+                  <a:lnTo>
+                    <a:pt x="5443311" y="705924"/>
+                  </a:lnTo>
+                  <a:lnTo>
+                    <a:pt x="5371689" y="670354"/>
+                  </a:lnTo>
+                  <a:lnTo>
+                    <a:pt x="5300066" y="632172"/>
+                  </a:lnTo>
+                  <a:lnTo>
+                    <a:pt x="5228444" y="591187"/>
+                  </a:lnTo>
+                  <a:lnTo>
+                    <a:pt x="5156821" y="547193"/>
+                  </a:lnTo>
+                  <a:lnTo>
+                    <a:pt x="5085199" y="499969"/>
+                  </a:lnTo>
+                  <a:lnTo>
+                    <a:pt x="5013576" y="449277"/>
+                  </a:lnTo>
+                  <a:lnTo>
+                    <a:pt x="4941954" y="394864"/>
+                  </a:lnTo>
+                  <a:lnTo>
+                    <a:pt x="4870331" y="359121"/>
+                  </a:lnTo>
+                  <a:lnTo>
+                    <a:pt x="4798709" y="354720"/>
+                  </a:lnTo>
+                  <a:lnTo>
+                    <a:pt x="4727086" y="350295"/>
+                  </a:lnTo>
+                  <a:lnTo>
+                    <a:pt x="4655464" y="345847"/>
+                  </a:lnTo>
+                  <a:lnTo>
+                    <a:pt x="4583841" y="341376"/>
+                  </a:lnTo>
+                  <a:lnTo>
+                    <a:pt x="4512219" y="336881"/>
+                  </a:lnTo>
+                  <a:lnTo>
+                    <a:pt x="4440596" y="332362"/>
+                  </a:lnTo>
+                  <a:lnTo>
+                    <a:pt x="4368974" y="327819"/>
+                  </a:lnTo>
+                  <a:lnTo>
+                    <a:pt x="4297351" y="323252"/>
+                  </a:lnTo>
+                  <a:lnTo>
+                    <a:pt x="4225729" y="318661"/>
+                  </a:lnTo>
+                  <a:lnTo>
+                    <a:pt x="4154106" y="314045"/>
+                  </a:lnTo>
+                  <a:lnTo>
+                    <a:pt x="4082483" y="309405"/>
+                  </a:lnTo>
+                  <a:lnTo>
+                    <a:pt x="4010861" y="304741"/>
+                  </a:lnTo>
+                  <a:lnTo>
+                    <a:pt x="3939238" y="300052"/>
+                  </a:lnTo>
+                  <a:lnTo>
+                    <a:pt x="3867616" y="295338"/>
+                  </a:lnTo>
+                  <a:lnTo>
+                    <a:pt x="3795993" y="290599"/>
+                  </a:lnTo>
+                  <a:lnTo>
+                    <a:pt x="3724371" y="285835"/>
+                  </a:lnTo>
+                  <a:lnTo>
+                    <a:pt x="3652748" y="281045"/>
+                  </a:lnTo>
+                  <a:lnTo>
+                    <a:pt x="3581126" y="276231"/>
+                  </a:lnTo>
+                  <a:lnTo>
+                    <a:pt x="3509503" y="271391"/>
+                  </a:lnTo>
+                  <a:lnTo>
+                    <a:pt x="3437881" y="266525"/>
+                  </a:lnTo>
+                  <a:lnTo>
+                    <a:pt x="3366258" y="261633"/>
+                  </a:lnTo>
+                  <a:lnTo>
+                    <a:pt x="3294636" y="256716"/>
+                  </a:lnTo>
+                  <a:lnTo>
+                    <a:pt x="3223013" y="251773"/>
+                  </a:lnTo>
+                  <a:lnTo>
+                    <a:pt x="3151391" y="246803"/>
+                  </a:lnTo>
+                  <a:lnTo>
+                    <a:pt x="3079768" y="241807"/>
+                  </a:lnTo>
+                  <a:lnTo>
+                    <a:pt x="3008146" y="236785"/>
+                  </a:lnTo>
+                  <a:lnTo>
+                    <a:pt x="2936523" y="231736"/>
+                  </a:lnTo>
+                  <a:lnTo>
+                    <a:pt x="2864901" y="226660"/>
+                  </a:lnTo>
+                  <a:lnTo>
+                    <a:pt x="2793278" y="221557"/>
+                  </a:lnTo>
+                  <a:lnTo>
+                    <a:pt x="2721655" y="216428"/>
+                  </a:lnTo>
+                  <a:lnTo>
+                    <a:pt x="2650033" y="211271"/>
+                  </a:lnTo>
+                  <a:lnTo>
+                    <a:pt x="2578410" y="206087"/>
+                  </a:lnTo>
+                  <a:lnTo>
+                    <a:pt x="2506788" y="200876"/>
+                  </a:lnTo>
+                  <a:lnTo>
+                    <a:pt x="2435165" y="195637"/>
+                  </a:lnTo>
+                  <a:lnTo>
+                    <a:pt x="2363543" y="190370"/>
+                  </a:lnTo>
+                  <a:lnTo>
+                    <a:pt x="2291920" y="185075"/>
+                  </a:lnTo>
+                  <a:lnTo>
+                    <a:pt x="2220298" y="179752"/>
+                  </a:lnTo>
+                  <a:lnTo>
+                    <a:pt x="2148675" y="174401"/>
+                  </a:lnTo>
+                  <a:lnTo>
+                    <a:pt x="2077053" y="169022"/>
+                  </a:lnTo>
+                  <a:lnTo>
+                    <a:pt x="2005430" y="163614"/>
+                  </a:lnTo>
+                  <a:lnTo>
+                    <a:pt x="1933808" y="158178"/>
+                  </a:lnTo>
+                  <a:lnTo>
+                    <a:pt x="1862185" y="152713"/>
+                  </a:lnTo>
+                  <a:lnTo>
+                    <a:pt x="1790563" y="147219"/>
+                  </a:lnTo>
+                  <a:lnTo>
+                    <a:pt x="1718940" y="141696"/>
+                  </a:lnTo>
+                  <a:lnTo>
+                    <a:pt x="1647318" y="136143"/>
+                  </a:lnTo>
+                  <a:lnTo>
+                    <a:pt x="1575695" y="130561"/>
+                  </a:lnTo>
+                  <a:lnTo>
+                    <a:pt x="1504073" y="124950"/>
+                  </a:lnTo>
+                  <a:lnTo>
+                    <a:pt x="1432450" y="119309"/>
+                  </a:lnTo>
+                  <a:lnTo>
+                    <a:pt x="1360827" y="113638"/>
+                  </a:lnTo>
+                  <a:lnTo>
+                    <a:pt x="1289205" y="107937"/>
+                  </a:lnTo>
+                  <a:lnTo>
+                    <a:pt x="1217582" y="102206"/>
+                  </a:lnTo>
+                  <a:lnTo>
+                    <a:pt x="1145960" y="96444"/>
+                  </a:lnTo>
+                  <a:lnTo>
+                    <a:pt x="1074337" y="90652"/>
+                  </a:lnTo>
+                  <a:lnTo>
+                    <a:pt x="1002715" y="84830"/>
+                  </a:lnTo>
+                  <a:lnTo>
+                    <a:pt x="931092" y="78976"/>
+                  </a:lnTo>
+                  <a:lnTo>
+                    <a:pt x="859470" y="73092"/>
+                  </a:lnTo>
+                  <a:lnTo>
+                    <a:pt x="787847" y="67176"/>
+                  </a:lnTo>
+                  <a:lnTo>
+                    <a:pt x="716225" y="61229"/>
+                  </a:lnTo>
+                  <a:lnTo>
+                    <a:pt x="644602" y="55250"/>
+                  </a:lnTo>
+                  <a:lnTo>
+                    <a:pt x="572980" y="49240"/>
+                  </a:lnTo>
+                  <a:lnTo>
+                    <a:pt x="501357" y="43198"/>
+                  </a:lnTo>
+                  <a:lnTo>
+                    <a:pt x="429735" y="37124"/>
+                  </a:lnTo>
+                  <a:lnTo>
+                    <a:pt x="358112" y="31018"/>
+                  </a:lnTo>
+                  <a:lnTo>
+                    <a:pt x="286490" y="24880"/>
+                  </a:lnTo>
+                  <a:lnTo>
+                    <a:pt x="214867" y="18709"/>
+                  </a:lnTo>
+                  <a:lnTo>
+                    <a:pt x="143245" y="12505"/>
+                  </a:lnTo>
+                  <a:lnTo>
+                    <a:pt x="71622" y="6269"/>
                   </a:lnTo>
                   <a:lnTo>
                     <a:pt x="0" y="0"/>
@@ -4010,231 +3998,222 @@
           </p:nvSpPr>
           <p:spPr>
             <a:xfrm>
-              <a:off x="3135583" y="2073503"/>
-              <a:ext cx="5127096" cy="3199437"/>
+              <a:off x="3371890" y="2073503"/>
+              <a:ext cx="4890788" cy="3224871"/>
             </a:xfrm>
             <a:custGeom>
               <a:avLst/>
               <a:pathLst>
-                <a:path w="5127096" h="3199437">
+                <a:path w="4890788" h="3224871">
                   <a:moveTo>
                     <a:pt x="0" y="0"/>
                   </a:moveTo>
                   <a:lnTo>
-                    <a:pt x="41896" y="71111"/>
-                  </a:lnTo>
-                  <a:lnTo>
-                    <a:pt x="113519" y="188496"/>
-                  </a:lnTo>
-                  <a:lnTo>
-                    <a:pt x="185141" y="301843"/>
-                  </a:lnTo>
-                  <a:lnTo>
-                    <a:pt x="256764" y="411290"/>
-                  </a:lnTo>
-                  <a:lnTo>
-                    <a:pt x="328386" y="516974"/>
-                  </a:lnTo>
-                  <a:lnTo>
-                    <a:pt x="400009" y="619022"/>
-                  </a:lnTo>
-                  <a:lnTo>
-                    <a:pt x="471631" y="717560"/>
-                  </a:lnTo>
-                  <a:lnTo>
-                    <a:pt x="543254" y="812708"/>
-                  </a:lnTo>
-                  <a:lnTo>
-                    <a:pt x="614876" y="904584"/>
-                  </a:lnTo>
-                  <a:lnTo>
-                    <a:pt x="686499" y="993300"/>
-                  </a:lnTo>
-                  <a:lnTo>
-                    <a:pt x="758121" y="1078964"/>
-                  </a:lnTo>
-                  <a:lnTo>
-                    <a:pt x="829744" y="1161681"/>
-                  </a:lnTo>
-                  <a:lnTo>
-                    <a:pt x="901366" y="1241553"/>
-                  </a:lnTo>
-                  <a:lnTo>
-                    <a:pt x="972989" y="1318678"/>
-                  </a:lnTo>
-                  <a:lnTo>
-                    <a:pt x="1044612" y="1393150"/>
-                  </a:lnTo>
-                  <a:lnTo>
-                    <a:pt x="1116234" y="1465060"/>
-                  </a:lnTo>
-                  <a:lnTo>
-                    <a:pt x="1187857" y="1534497"/>
-                  </a:lnTo>
-                  <a:lnTo>
-                    <a:pt x="1259479" y="1601545"/>
-                  </a:lnTo>
-                  <a:lnTo>
-                    <a:pt x="1331102" y="1666287"/>
-                  </a:lnTo>
-                  <a:lnTo>
-                    <a:pt x="1402724" y="1728802"/>
-                  </a:lnTo>
-                  <a:lnTo>
-                    <a:pt x="1474347" y="1789167"/>
-                  </a:lnTo>
-                  <a:lnTo>
-                    <a:pt x="1545969" y="1847456"/>
-                  </a:lnTo>
-                  <a:lnTo>
-                    <a:pt x="1617592" y="1903739"/>
-                  </a:lnTo>
-                  <a:lnTo>
-                    <a:pt x="1689214" y="1958087"/>
-                  </a:lnTo>
-                  <a:lnTo>
-                    <a:pt x="1760837" y="2010565"/>
-                  </a:lnTo>
-                  <a:lnTo>
-                    <a:pt x="1832459" y="2061238"/>
-                  </a:lnTo>
-                  <a:lnTo>
-                    <a:pt x="1904082" y="2110168"/>
-                  </a:lnTo>
-                  <a:lnTo>
-                    <a:pt x="1975704" y="2157415"/>
-                  </a:lnTo>
-                  <a:lnTo>
-                    <a:pt x="2047327" y="2203037"/>
-                  </a:lnTo>
-                  <a:lnTo>
-                    <a:pt x="2118949" y="2247089"/>
-                  </a:lnTo>
-                  <a:lnTo>
-                    <a:pt x="2190572" y="2289627"/>
-                  </a:lnTo>
-                  <a:lnTo>
-                    <a:pt x="2262194" y="2330701"/>
-                  </a:lnTo>
-                  <a:lnTo>
-                    <a:pt x="2333817" y="2370362"/>
-                  </a:lnTo>
-                  <a:lnTo>
-                    <a:pt x="2405440" y="2408659"/>
-                  </a:lnTo>
-                  <a:lnTo>
-                    <a:pt x="2477062" y="2445639"/>
-                  </a:lnTo>
-                  <a:lnTo>
-                    <a:pt x="2548685" y="2481347"/>
-                  </a:lnTo>
-                  <a:lnTo>
-                    <a:pt x="2620307" y="2515826"/>
-                  </a:lnTo>
-                  <a:lnTo>
-                    <a:pt x="2691930" y="2549120"/>
-                  </a:lnTo>
-                  <a:lnTo>
-                    <a:pt x="2763552" y="2581268"/>
-                  </a:lnTo>
-                  <a:lnTo>
-                    <a:pt x="2835175" y="2612311"/>
-                  </a:lnTo>
-                  <a:lnTo>
-                    <a:pt x="2906797" y="2642286"/>
-                  </a:lnTo>
-                  <a:lnTo>
-                    <a:pt x="2978420" y="2671229"/>
-                  </a:lnTo>
-                  <a:lnTo>
-                    <a:pt x="3050042" y="2699177"/>
-                  </a:lnTo>
-                  <a:lnTo>
-                    <a:pt x="3121665" y="2726164"/>
-                  </a:lnTo>
-                  <a:lnTo>
-                    <a:pt x="3193287" y="2752223"/>
-                  </a:lnTo>
-                  <a:lnTo>
-                    <a:pt x="3264910" y="2777385"/>
-                  </a:lnTo>
-                  <a:lnTo>
-                    <a:pt x="3336532" y="2801682"/>
-                  </a:lnTo>
-                  <a:lnTo>
-                    <a:pt x="3408155" y="2825143"/>
-                  </a:lnTo>
-                  <a:lnTo>
-                    <a:pt x="3479777" y="2847797"/>
-                  </a:lnTo>
-                  <a:lnTo>
-                    <a:pt x="3551400" y="2869672"/>
-                  </a:lnTo>
-                  <a:lnTo>
-                    <a:pt x="3623022" y="2890794"/>
-                  </a:lnTo>
-                  <a:lnTo>
-                    <a:pt x="3694645" y="2911190"/>
-                  </a:lnTo>
-                  <a:lnTo>
-                    <a:pt x="3766268" y="2930884"/>
-                  </a:lnTo>
-                  <a:lnTo>
-                    <a:pt x="3837890" y="2949901"/>
-                  </a:lnTo>
-                  <a:lnTo>
-                    <a:pt x="3909513" y="2968263"/>
-                  </a:lnTo>
-                  <a:lnTo>
-                    <a:pt x="3981135" y="2985994"/>
-                  </a:lnTo>
-                  <a:lnTo>
-                    <a:pt x="4052758" y="3003116"/>
-                  </a:lnTo>
-                  <a:lnTo>
-                    <a:pt x="4124380" y="3019648"/>
-                  </a:lnTo>
-                  <a:lnTo>
-                    <a:pt x="4196003" y="3035612"/>
-                  </a:lnTo>
-                  <a:lnTo>
-                    <a:pt x="4267625" y="3051026"/>
-                  </a:lnTo>
-                  <a:lnTo>
-                    <a:pt x="4339248" y="3065910"/>
-                  </a:lnTo>
-                  <a:lnTo>
-                    <a:pt x="4410870" y="3080283"/>
-                  </a:lnTo>
-                  <a:lnTo>
-                    <a:pt x="4482493" y="3094161"/>
-                  </a:lnTo>
-                  <a:lnTo>
-                    <a:pt x="4554115" y="3107561"/>
-                  </a:lnTo>
-                  <a:lnTo>
-                    <a:pt x="4625738" y="3120501"/>
-                  </a:lnTo>
-                  <a:lnTo>
-                    <a:pt x="4697360" y="3132995"/>
-                  </a:lnTo>
-                  <a:lnTo>
-                    <a:pt x="4768983" y="3145060"/>
-                  </a:lnTo>
-                  <a:lnTo>
-                    <a:pt x="4840605" y="3156710"/>
-                  </a:lnTo>
-                  <a:lnTo>
-                    <a:pt x="4912228" y="3167959"/>
-                  </a:lnTo>
-                  <a:lnTo>
-                    <a:pt x="4983850" y="3178821"/>
-                  </a:lnTo>
-                  <a:lnTo>
-                    <a:pt x="5055473" y="3189310"/>
-                  </a:lnTo>
-                  <a:lnTo>
-                    <a:pt x="5127096" y="3199437"/>
+                    <a:pt x="20457" y="38184"/>
+                  </a:lnTo>
+                  <a:lnTo>
+                    <a:pt x="92079" y="166878"/>
+                  </a:lnTo>
+                  <a:lnTo>
+                    <a:pt x="163702" y="290765"/>
+                  </a:lnTo>
+                  <a:lnTo>
+                    <a:pt x="235324" y="410025"/>
+                  </a:lnTo>
+                  <a:lnTo>
+                    <a:pt x="306947" y="524831"/>
+                  </a:lnTo>
+                  <a:lnTo>
+                    <a:pt x="378569" y="635349"/>
+                  </a:lnTo>
+                  <a:lnTo>
+                    <a:pt x="450192" y="741738"/>
+                  </a:lnTo>
+                  <a:lnTo>
+                    <a:pt x="521814" y="844154"/>
+                  </a:lnTo>
+                  <a:lnTo>
+                    <a:pt x="593437" y="942745"/>
+                  </a:lnTo>
+                  <a:lnTo>
+                    <a:pt x="665059" y="1037653"/>
+                  </a:lnTo>
+                  <a:lnTo>
+                    <a:pt x="736682" y="1129016"/>
+                  </a:lnTo>
+                  <a:lnTo>
+                    <a:pt x="808304" y="1216967"/>
+                  </a:lnTo>
+                  <a:lnTo>
+                    <a:pt x="879927" y="1301633"/>
+                  </a:lnTo>
+                  <a:lnTo>
+                    <a:pt x="951549" y="1383136"/>
+                  </a:lnTo>
+                  <a:lnTo>
+                    <a:pt x="1023172" y="1461596"/>
+                  </a:lnTo>
+                  <a:lnTo>
+                    <a:pt x="1094794" y="1537124"/>
+                  </a:lnTo>
+                  <a:lnTo>
+                    <a:pt x="1166417" y="1609832"/>
+                  </a:lnTo>
+                  <a:lnTo>
+                    <a:pt x="1238039" y="1679824"/>
+                  </a:lnTo>
+                  <a:lnTo>
+                    <a:pt x="1309662" y="1747202"/>
+                  </a:lnTo>
+                  <a:lnTo>
+                    <a:pt x="1381285" y="1812063"/>
+                  </a:lnTo>
+                  <a:lnTo>
+                    <a:pt x="1452907" y="1874502"/>
+                  </a:lnTo>
+                  <a:lnTo>
+                    <a:pt x="1524530" y="1934608"/>
+                  </a:lnTo>
+                  <a:lnTo>
+                    <a:pt x="1596152" y="1992469"/>
+                  </a:lnTo>
+                  <a:lnTo>
+                    <a:pt x="1667775" y="2048170"/>
+                  </a:lnTo>
+                  <a:lnTo>
+                    <a:pt x="1739397" y="2101789"/>
+                  </a:lnTo>
+                  <a:lnTo>
+                    <a:pt x="1811020" y="2153407"/>
+                  </a:lnTo>
+                  <a:lnTo>
+                    <a:pt x="1882642" y="2203096"/>
+                  </a:lnTo>
+                  <a:lnTo>
+                    <a:pt x="1954265" y="2250929"/>
+                  </a:lnTo>
+                  <a:lnTo>
+                    <a:pt x="2025887" y="2296975"/>
+                  </a:lnTo>
+                  <a:lnTo>
+                    <a:pt x="2097510" y="2341302"/>
+                  </a:lnTo>
+                  <a:lnTo>
+                    <a:pt x="2169132" y="2383973"/>
+                  </a:lnTo>
+                  <a:lnTo>
+                    <a:pt x="2240755" y="2425051"/>
+                  </a:lnTo>
+                  <a:lnTo>
+                    <a:pt x="2312377" y="2464594"/>
+                  </a:lnTo>
+                  <a:lnTo>
+                    <a:pt x="2384000" y="2502660"/>
+                  </a:lnTo>
+                  <a:lnTo>
+                    <a:pt x="2455622" y="2539304"/>
+                  </a:lnTo>
+                  <a:lnTo>
+                    <a:pt x="2527245" y="2574580"/>
+                  </a:lnTo>
+                  <a:lnTo>
+                    <a:pt x="2598867" y="2608538"/>
+                  </a:lnTo>
+                  <a:lnTo>
+                    <a:pt x="2670490" y="2641227"/>
+                  </a:lnTo>
+                  <a:lnTo>
+                    <a:pt x="2742113" y="2672696"/>
+                  </a:lnTo>
+                  <a:lnTo>
+                    <a:pt x="2813735" y="2702989"/>
+                  </a:lnTo>
+                  <a:lnTo>
+                    <a:pt x="2885358" y="2732151"/>
+                  </a:lnTo>
+                  <a:lnTo>
+                    <a:pt x="2956980" y="2760224"/>
+                  </a:lnTo>
+                  <a:lnTo>
+                    <a:pt x="3028603" y="2787248"/>
+                  </a:lnTo>
+                  <a:lnTo>
+                    <a:pt x="3100225" y="2813262"/>
+                  </a:lnTo>
+                  <a:lnTo>
+                    <a:pt x="3171848" y="2838306"/>
+                  </a:lnTo>
+                  <a:lnTo>
+                    <a:pt x="3243470" y="2862413"/>
+                  </a:lnTo>
+                  <a:lnTo>
+                    <a:pt x="3315093" y="2885620"/>
+                  </a:lnTo>
+                  <a:lnTo>
+                    <a:pt x="3386715" y="2907961"/>
+                  </a:lnTo>
+                  <a:lnTo>
+                    <a:pt x="3458338" y="2929467"/>
+                  </a:lnTo>
+                  <a:lnTo>
+                    <a:pt x="3529960" y="2950170"/>
+                  </a:lnTo>
+                  <a:lnTo>
+                    <a:pt x="3601583" y="2970099"/>
+                  </a:lnTo>
+                  <a:lnTo>
+                    <a:pt x="3673205" y="2989284"/>
+                  </a:lnTo>
+                  <a:lnTo>
+                    <a:pt x="3744828" y="3007753"/>
+                  </a:lnTo>
+                  <a:lnTo>
+                    <a:pt x="3816450" y="3025531"/>
+                  </a:lnTo>
+                  <a:lnTo>
+                    <a:pt x="3888073" y="3042646"/>
+                  </a:lnTo>
+                  <a:lnTo>
+                    <a:pt x="3959695" y="3059121"/>
+                  </a:lnTo>
+                  <a:lnTo>
+                    <a:pt x="4031318" y="3074981"/>
+                  </a:lnTo>
+                  <a:lnTo>
+                    <a:pt x="4102941" y="3090249"/>
+                  </a:lnTo>
+                  <a:lnTo>
+                    <a:pt x="4174563" y="3104947"/>
+                  </a:lnTo>
+                  <a:lnTo>
+                    <a:pt x="4246186" y="3119095"/>
+                  </a:lnTo>
+                  <a:lnTo>
+                    <a:pt x="4317808" y="3132715"/>
+                  </a:lnTo>
+                  <a:lnTo>
+                    <a:pt x="4389431" y="3145826"/>
+                  </a:lnTo>
+                  <a:lnTo>
+                    <a:pt x="4461053" y="3158448"/>
+                  </a:lnTo>
+                  <a:lnTo>
+                    <a:pt x="4532676" y="3170598"/>
+                  </a:lnTo>
+                  <a:lnTo>
+                    <a:pt x="4604298" y="3182294"/>
+                  </a:lnTo>
+                  <a:lnTo>
+                    <a:pt x="4675921" y="3193554"/>
+                  </a:lnTo>
+                  <a:lnTo>
+                    <a:pt x="4747543" y="3204393"/>
+                  </a:lnTo>
+                  <a:lnTo>
+                    <a:pt x="4819166" y="3214827"/>
+                  </a:lnTo>
+                  <a:lnTo>
+                    <a:pt x="4890788" y="3224871"/>
                   </a:lnTo>
                 </a:path>
               </a:pathLst>
@@ -4974,7 +4953,7 @@
                   <a:latin typeface="Helvetica"/>
                   <a:cs typeface="Helvetica"/>
                 </a:rPr>
-                <a:t>subHR per 1 mL/min: 0.96 (0.92-0.99)  |  per IQR (Δ = 18.2): 0.44 (0.21-0.90)  |  IQR: [-11.5, 6.7]</a:t>
+                <a:t>subHR per 1 mL/min: 0.95 (0.91-0.99)  |  per IQR (Δ = 18.2): 0.41 (0.19-0.88)  |  IQR: [-11.5, 6.7]</a:t>
               </a:r>
             </a:p>
           </p:txBody>

--- a/docs/plots/carbo/jx_carbo_linsubhr_egfrdisc_grade3.pptx
+++ b/docs/plots/carbo/jx_carbo_linsubhr_egfrdisc_grade3.pptx
@@ -3003,467 +3003,476 @@
           <p:spPr>
             <a:xfrm>
               <a:off x="1172049" y="2073503"/>
-              <a:ext cx="7090630" cy="3388787"/>
+              <a:ext cx="7090630" cy="3364413"/>
             </a:xfrm>
             <a:custGeom>
               <a:avLst/>
               <a:pathLst>
-                <a:path w="7090630" h="3388787">
+                <a:path w="7090630" h="3364413">
                   <a:moveTo>
-                    <a:pt x="3449351" y="0"/>
+                    <a:pt x="3278466" y="0"/>
                   </a:moveTo>
                   <a:lnTo>
-                    <a:pt x="3509503" y="202343"/>
-                  </a:lnTo>
-                  <a:lnTo>
-                    <a:pt x="3581126" y="426790"/>
-                  </a:lnTo>
-                  <a:lnTo>
-                    <a:pt x="3652748" y="635885"/>
-                  </a:lnTo>
-                  <a:lnTo>
-                    <a:pt x="3724371" y="830678"/>
-                  </a:lnTo>
-                  <a:lnTo>
-                    <a:pt x="3795993" y="1012148"/>
-                  </a:lnTo>
-                  <a:lnTo>
-                    <a:pt x="3867616" y="1181205"/>
-                  </a:lnTo>
-                  <a:lnTo>
-                    <a:pt x="3939238" y="1338698"/>
-                  </a:lnTo>
-                  <a:lnTo>
-                    <a:pt x="4010861" y="1485419"/>
-                  </a:lnTo>
-                  <a:lnTo>
-                    <a:pt x="4082483" y="1622104"/>
-                  </a:lnTo>
-                  <a:lnTo>
-                    <a:pt x="4154106" y="1749440"/>
-                  </a:lnTo>
-                  <a:lnTo>
-                    <a:pt x="4225729" y="1868067"/>
-                  </a:lnTo>
-                  <a:lnTo>
-                    <a:pt x="4297351" y="1978579"/>
-                  </a:lnTo>
-                  <a:lnTo>
-                    <a:pt x="4368974" y="2081532"/>
-                  </a:lnTo>
-                  <a:lnTo>
-                    <a:pt x="4440596" y="2177443"/>
-                  </a:lnTo>
-                  <a:lnTo>
-                    <a:pt x="4512219" y="2266794"/>
-                  </a:lnTo>
-                  <a:lnTo>
-                    <a:pt x="4583841" y="2350033"/>
-                  </a:lnTo>
-                  <a:lnTo>
-                    <a:pt x="4655464" y="2427579"/>
-                  </a:lnTo>
-                  <a:lnTo>
-                    <a:pt x="4727086" y="2499821"/>
-                  </a:lnTo>
-                  <a:lnTo>
-                    <a:pt x="4798709" y="2567121"/>
-                  </a:lnTo>
-                  <a:lnTo>
-                    <a:pt x="4870331" y="2629818"/>
-                  </a:lnTo>
-                  <a:lnTo>
-                    <a:pt x="4941954" y="2656862"/>
-                  </a:lnTo>
-                  <a:lnTo>
-                    <a:pt x="5013576" y="2661217"/>
-                  </a:lnTo>
-                  <a:lnTo>
-                    <a:pt x="5085199" y="2665549"/>
-                  </a:lnTo>
-                  <a:lnTo>
-                    <a:pt x="5156821" y="2669858"/>
-                  </a:lnTo>
-                  <a:lnTo>
-                    <a:pt x="5228444" y="2674145"/>
-                  </a:lnTo>
-                  <a:lnTo>
-                    <a:pt x="5300066" y="2678409"/>
-                  </a:lnTo>
-                  <a:lnTo>
-                    <a:pt x="5371689" y="2682650"/>
-                  </a:lnTo>
-                  <a:lnTo>
-                    <a:pt x="5443311" y="2686869"/>
-                  </a:lnTo>
-                  <a:lnTo>
-                    <a:pt x="5514934" y="2691066"/>
-                  </a:lnTo>
-                  <a:lnTo>
-                    <a:pt x="5586557" y="2695241"/>
-                  </a:lnTo>
-                  <a:lnTo>
-                    <a:pt x="5658179" y="2699394"/>
-                  </a:lnTo>
-                  <a:lnTo>
-                    <a:pt x="5729802" y="2703525"/>
-                  </a:lnTo>
-                  <a:lnTo>
-                    <a:pt x="5801424" y="2707634"/>
-                  </a:lnTo>
-                  <a:lnTo>
-                    <a:pt x="5873047" y="2711722"/>
-                  </a:lnTo>
-                  <a:lnTo>
-                    <a:pt x="5944669" y="2715788"/>
-                  </a:lnTo>
-                  <a:lnTo>
-                    <a:pt x="6016292" y="2719833"/>
-                  </a:lnTo>
-                  <a:lnTo>
-                    <a:pt x="6087914" y="2723856"/>
-                  </a:lnTo>
-                  <a:lnTo>
-                    <a:pt x="6159537" y="2727858"/>
-                  </a:lnTo>
-                  <a:lnTo>
-                    <a:pt x="6231159" y="2731839"/>
-                  </a:lnTo>
-                  <a:lnTo>
-                    <a:pt x="6302782" y="2735799"/>
-                  </a:lnTo>
-                  <a:lnTo>
-                    <a:pt x="6374404" y="2739739"/>
-                  </a:lnTo>
-                  <a:lnTo>
-                    <a:pt x="6446027" y="2743657"/>
-                  </a:lnTo>
-                  <a:lnTo>
-                    <a:pt x="6517649" y="2747555"/>
-                  </a:lnTo>
-                  <a:lnTo>
-                    <a:pt x="6589272" y="2751432"/>
-                  </a:lnTo>
-                  <a:lnTo>
-                    <a:pt x="6660894" y="2755289"/>
-                  </a:lnTo>
-                  <a:lnTo>
-                    <a:pt x="6732517" y="2759126"/>
-                  </a:lnTo>
-                  <a:lnTo>
-                    <a:pt x="6804139" y="2762942"/>
-                  </a:lnTo>
-                  <a:lnTo>
-                    <a:pt x="6875762" y="2766739"/>
-                  </a:lnTo>
-                  <a:lnTo>
-                    <a:pt x="6947385" y="2770515"/>
-                  </a:lnTo>
-                  <a:lnTo>
-                    <a:pt x="7019007" y="2774271"/>
-                  </a:lnTo>
-                  <a:lnTo>
-                    <a:pt x="7090630" y="2778008"/>
-                  </a:lnTo>
-                  <a:lnTo>
-                    <a:pt x="7090630" y="3388787"/>
-                  </a:lnTo>
-                  <a:lnTo>
-                    <a:pt x="7019007" y="3381815"/>
-                  </a:lnTo>
-                  <a:lnTo>
-                    <a:pt x="6947385" y="3374331"/>
-                  </a:lnTo>
-                  <a:lnTo>
-                    <a:pt x="6875762" y="3366297"/>
-                  </a:lnTo>
-                  <a:lnTo>
-                    <a:pt x="6804139" y="3357674"/>
-                  </a:lnTo>
-                  <a:lnTo>
-                    <a:pt x="6732517" y="3348418"/>
-                  </a:lnTo>
-                  <a:lnTo>
-                    <a:pt x="6660894" y="3338482"/>
-                  </a:lnTo>
-                  <a:lnTo>
-                    <a:pt x="6589272" y="3327816"/>
-                  </a:lnTo>
-                  <a:lnTo>
-                    <a:pt x="6517649" y="3316367"/>
-                  </a:lnTo>
-                  <a:lnTo>
-                    <a:pt x="6446027" y="3304078"/>
-                  </a:lnTo>
-                  <a:lnTo>
-                    <a:pt x="6374404" y="3290886"/>
-                  </a:lnTo>
-                  <a:lnTo>
-                    <a:pt x="6302782" y="3276726"/>
-                  </a:lnTo>
-                  <a:lnTo>
-                    <a:pt x="6231159" y="3261526"/>
-                  </a:lnTo>
-                  <a:lnTo>
-                    <a:pt x="6159537" y="3245211"/>
-                  </a:lnTo>
-                  <a:lnTo>
-                    <a:pt x="6087914" y="3227697"/>
-                  </a:lnTo>
-                  <a:lnTo>
-                    <a:pt x="6016292" y="3208897"/>
-                  </a:lnTo>
-                  <a:lnTo>
-                    <a:pt x="5944669" y="3188717"/>
-                  </a:lnTo>
-                  <a:lnTo>
-                    <a:pt x="5873047" y="3167056"/>
-                  </a:lnTo>
-                  <a:lnTo>
-                    <a:pt x="5801424" y="3143804"/>
-                  </a:lnTo>
-                  <a:lnTo>
-                    <a:pt x="5729802" y="3118844"/>
-                  </a:lnTo>
-                  <a:lnTo>
-                    <a:pt x="5658179" y="3092053"/>
-                  </a:lnTo>
-                  <a:lnTo>
-                    <a:pt x="5586557" y="3063294"/>
-                  </a:lnTo>
-                  <a:lnTo>
-                    <a:pt x="5514934" y="3032423"/>
-                  </a:lnTo>
-                  <a:lnTo>
-                    <a:pt x="5443311" y="2999286"/>
-                  </a:lnTo>
-                  <a:lnTo>
-                    <a:pt x="5371689" y="2963716"/>
-                  </a:lnTo>
-                  <a:lnTo>
-                    <a:pt x="5300066" y="2925535"/>
-                  </a:lnTo>
-                  <a:lnTo>
-                    <a:pt x="5228444" y="2884550"/>
-                  </a:lnTo>
-                  <a:lnTo>
-                    <a:pt x="5156821" y="2840556"/>
-                  </a:lnTo>
-                  <a:lnTo>
-                    <a:pt x="5085199" y="2793332"/>
-                  </a:lnTo>
-                  <a:lnTo>
-                    <a:pt x="5013576" y="2742640"/>
-                  </a:lnTo>
-                  <a:lnTo>
-                    <a:pt x="4941954" y="2688227"/>
-                  </a:lnTo>
-                  <a:lnTo>
-                    <a:pt x="4870331" y="2652484"/>
-                  </a:lnTo>
-                  <a:lnTo>
-                    <a:pt x="4798709" y="2648083"/>
-                  </a:lnTo>
-                  <a:lnTo>
-                    <a:pt x="4727086" y="2643658"/>
-                  </a:lnTo>
-                  <a:lnTo>
-                    <a:pt x="4655464" y="2639210"/>
-                  </a:lnTo>
-                  <a:lnTo>
-                    <a:pt x="4583841" y="2634739"/>
-                  </a:lnTo>
-                  <a:lnTo>
-                    <a:pt x="4512219" y="2630243"/>
-                  </a:lnTo>
-                  <a:lnTo>
-                    <a:pt x="4440596" y="2625724"/>
-                  </a:lnTo>
-                  <a:lnTo>
-                    <a:pt x="4368974" y="2621182"/>
-                  </a:lnTo>
-                  <a:lnTo>
-                    <a:pt x="4297351" y="2616615"/>
-                  </a:lnTo>
-                  <a:lnTo>
-                    <a:pt x="4225729" y="2612023"/>
-                  </a:lnTo>
-                  <a:lnTo>
-                    <a:pt x="4154106" y="2607408"/>
-                  </a:lnTo>
-                  <a:lnTo>
-                    <a:pt x="4082483" y="2602768"/>
-                  </a:lnTo>
-                  <a:lnTo>
-                    <a:pt x="4010861" y="2598104"/>
-                  </a:lnTo>
-                  <a:lnTo>
-                    <a:pt x="3939238" y="2593414"/>
-                  </a:lnTo>
-                  <a:lnTo>
-                    <a:pt x="3867616" y="2588700"/>
-                  </a:lnTo>
-                  <a:lnTo>
-                    <a:pt x="3795993" y="2583962"/>
-                  </a:lnTo>
-                  <a:lnTo>
-                    <a:pt x="3724371" y="2579197"/>
-                  </a:lnTo>
-                  <a:lnTo>
-                    <a:pt x="3652748" y="2574408"/>
-                  </a:lnTo>
-                  <a:lnTo>
-                    <a:pt x="3581126" y="2569594"/>
-                  </a:lnTo>
-                  <a:lnTo>
-                    <a:pt x="3509503" y="2564754"/>
-                  </a:lnTo>
-                  <a:lnTo>
-                    <a:pt x="3437881" y="2559888"/>
-                  </a:lnTo>
-                  <a:lnTo>
-                    <a:pt x="3366258" y="2554996"/>
-                  </a:lnTo>
-                  <a:lnTo>
-                    <a:pt x="3294636" y="2550079"/>
-                  </a:lnTo>
-                  <a:lnTo>
-                    <a:pt x="3223013" y="2545135"/>
-                  </a:lnTo>
-                  <a:lnTo>
-                    <a:pt x="3151391" y="2540166"/>
-                  </a:lnTo>
-                  <a:lnTo>
-                    <a:pt x="3079768" y="2535170"/>
-                  </a:lnTo>
-                  <a:lnTo>
-                    <a:pt x="3008146" y="2530148"/>
-                  </a:lnTo>
-                  <a:lnTo>
-                    <a:pt x="2936523" y="2525099"/>
-                  </a:lnTo>
-                  <a:lnTo>
-                    <a:pt x="2864901" y="2520023"/>
-                  </a:lnTo>
-                  <a:lnTo>
-                    <a:pt x="2793278" y="2514920"/>
-                  </a:lnTo>
-                  <a:lnTo>
-                    <a:pt x="2721655" y="2509791"/>
-                  </a:lnTo>
-                  <a:lnTo>
-                    <a:pt x="2650033" y="2504634"/>
-                  </a:lnTo>
-                  <a:lnTo>
-                    <a:pt x="2578410" y="2499450"/>
-                  </a:lnTo>
-                  <a:lnTo>
-                    <a:pt x="2506788" y="2494238"/>
-                  </a:lnTo>
-                  <a:lnTo>
-                    <a:pt x="2435165" y="2488999"/>
-                  </a:lnTo>
-                  <a:lnTo>
-                    <a:pt x="2363543" y="2483733"/>
-                  </a:lnTo>
-                  <a:lnTo>
-                    <a:pt x="2291920" y="2478438"/>
-                  </a:lnTo>
-                  <a:lnTo>
-                    <a:pt x="2220298" y="2473115"/>
-                  </a:lnTo>
-                  <a:lnTo>
-                    <a:pt x="2148675" y="2467764"/>
-                  </a:lnTo>
-                  <a:lnTo>
-                    <a:pt x="2077053" y="2462385"/>
-                  </a:lnTo>
-                  <a:lnTo>
-                    <a:pt x="2005430" y="2456977"/>
-                  </a:lnTo>
-                  <a:lnTo>
-                    <a:pt x="1933808" y="2451541"/>
-                  </a:lnTo>
-                  <a:lnTo>
-                    <a:pt x="1862185" y="2446076"/>
-                  </a:lnTo>
-                  <a:lnTo>
-                    <a:pt x="1790563" y="2440582"/>
-                  </a:lnTo>
-                  <a:lnTo>
-                    <a:pt x="1718940" y="2435058"/>
-                  </a:lnTo>
-                  <a:lnTo>
-                    <a:pt x="1647318" y="2429506"/>
-                  </a:lnTo>
-                  <a:lnTo>
-                    <a:pt x="1575695" y="2423924"/>
-                  </a:lnTo>
-                  <a:lnTo>
-                    <a:pt x="1504073" y="2418313"/>
-                  </a:lnTo>
-                  <a:lnTo>
-                    <a:pt x="1432450" y="2412672"/>
-                  </a:lnTo>
-                  <a:lnTo>
-                    <a:pt x="1360827" y="2407001"/>
-                  </a:lnTo>
-                  <a:lnTo>
-                    <a:pt x="1289205" y="2401300"/>
-                  </a:lnTo>
-                  <a:lnTo>
-                    <a:pt x="1217582" y="2395569"/>
-                  </a:lnTo>
-                  <a:lnTo>
-                    <a:pt x="1145960" y="2389807"/>
-                  </a:lnTo>
-                  <a:lnTo>
-                    <a:pt x="1074337" y="2384015"/>
-                  </a:lnTo>
-                  <a:lnTo>
-                    <a:pt x="1002715" y="2378192"/>
-                  </a:lnTo>
-                  <a:lnTo>
-                    <a:pt x="931092" y="2372339"/>
-                  </a:lnTo>
-                  <a:lnTo>
-                    <a:pt x="859470" y="2366454"/>
-                  </a:lnTo>
-                  <a:lnTo>
-                    <a:pt x="787847" y="2360539"/>
-                  </a:lnTo>
-                  <a:lnTo>
-                    <a:pt x="716225" y="2354592"/>
-                  </a:lnTo>
-                  <a:lnTo>
-                    <a:pt x="644602" y="2348613"/>
-                  </a:lnTo>
-                  <a:lnTo>
-                    <a:pt x="572980" y="2342603"/>
-                  </a:lnTo>
-                  <a:lnTo>
-                    <a:pt x="501357" y="2336561"/>
-                  </a:lnTo>
-                  <a:lnTo>
-                    <a:pt x="429735" y="2330487"/>
-                  </a:lnTo>
-                  <a:lnTo>
-                    <a:pt x="358112" y="2324381"/>
-                  </a:lnTo>
-                  <a:lnTo>
-                    <a:pt x="286490" y="2318243"/>
-                  </a:lnTo>
-                  <a:lnTo>
-                    <a:pt x="214867" y="2312072"/>
-                  </a:lnTo>
-                  <a:lnTo>
-                    <a:pt x="143245" y="2305868"/>
-                  </a:lnTo>
-                  <a:lnTo>
-                    <a:pt x="71622" y="2299632"/>
-                  </a:lnTo>
-                  <a:lnTo>
-                    <a:pt x="0" y="2293362"/>
+                    <a:pt x="3294636" y="50716"/>
+                  </a:lnTo>
+                  <a:lnTo>
+                    <a:pt x="3366258" y="261558"/>
+                  </a:lnTo>
+                  <a:lnTo>
+                    <a:pt x="3437881" y="459450"/>
+                  </a:lnTo>
+                  <a:lnTo>
+                    <a:pt x="3509503" y="645189"/>
+                  </a:lnTo>
+                  <a:lnTo>
+                    <a:pt x="3581126" y="819521"/>
+                  </a:lnTo>
+                  <a:lnTo>
+                    <a:pt x="3652748" y="983146"/>
+                  </a:lnTo>
+                  <a:lnTo>
+                    <a:pt x="3724371" y="1136722"/>
+                  </a:lnTo>
+                  <a:lnTo>
+                    <a:pt x="3795993" y="1280866"/>
+                  </a:lnTo>
+                  <a:lnTo>
+                    <a:pt x="3867616" y="1416158"/>
+                  </a:lnTo>
+                  <a:lnTo>
+                    <a:pt x="3939238" y="1543140"/>
+                  </a:lnTo>
+                  <a:lnTo>
+                    <a:pt x="4010861" y="1662323"/>
+                  </a:lnTo>
+                  <a:lnTo>
+                    <a:pt x="4082483" y="1774187"/>
+                  </a:lnTo>
+                  <a:lnTo>
+                    <a:pt x="4154106" y="1879181"/>
+                  </a:lnTo>
+                  <a:lnTo>
+                    <a:pt x="4225729" y="1977726"/>
+                  </a:lnTo>
+                  <a:lnTo>
+                    <a:pt x="4297351" y="2070220"/>
+                  </a:lnTo>
+                  <a:lnTo>
+                    <a:pt x="4368974" y="2157032"/>
+                  </a:lnTo>
+                  <a:lnTo>
+                    <a:pt x="4440596" y="2238513"/>
+                  </a:lnTo>
+                  <a:lnTo>
+                    <a:pt x="4512219" y="2314990"/>
+                  </a:lnTo>
+                  <a:lnTo>
+                    <a:pt x="4583841" y="2386770"/>
+                  </a:lnTo>
+                  <a:lnTo>
+                    <a:pt x="4655464" y="2454141"/>
+                  </a:lnTo>
+                  <a:lnTo>
+                    <a:pt x="4727086" y="2517375"/>
+                  </a:lnTo>
+                  <a:lnTo>
+                    <a:pt x="4798709" y="2576726"/>
+                  </a:lnTo>
+                  <a:lnTo>
+                    <a:pt x="4870331" y="2632431"/>
+                  </a:lnTo>
+                  <a:lnTo>
+                    <a:pt x="4941954" y="2656656"/>
+                  </a:lnTo>
+                  <a:lnTo>
+                    <a:pt x="5013576" y="2660665"/>
+                  </a:lnTo>
+                  <a:lnTo>
+                    <a:pt x="5085199" y="2664654"/>
+                  </a:lnTo>
+                  <a:lnTo>
+                    <a:pt x="5156821" y="2668624"/>
+                  </a:lnTo>
+                  <a:lnTo>
+                    <a:pt x="5228444" y="2672575"/>
+                  </a:lnTo>
+                  <a:lnTo>
+                    <a:pt x="5300066" y="2676506"/>
+                  </a:lnTo>
+                  <a:lnTo>
+                    <a:pt x="5371689" y="2680419"/>
+                  </a:lnTo>
+                  <a:lnTo>
+                    <a:pt x="5443311" y="2684312"/>
+                  </a:lnTo>
+                  <a:lnTo>
+                    <a:pt x="5514934" y="2688187"/>
+                  </a:lnTo>
+                  <a:lnTo>
+                    <a:pt x="5586557" y="2692043"/>
+                  </a:lnTo>
+                  <a:lnTo>
+                    <a:pt x="5658179" y="2695880"/>
+                  </a:lnTo>
+                  <a:lnTo>
+                    <a:pt x="5729802" y="2699699"/>
+                  </a:lnTo>
+                  <a:lnTo>
+                    <a:pt x="5801424" y="2703499"/>
+                  </a:lnTo>
+                  <a:lnTo>
+                    <a:pt x="5873047" y="2707280"/>
+                  </a:lnTo>
+                  <a:lnTo>
+                    <a:pt x="5944669" y="2711044"/>
+                  </a:lnTo>
+                  <a:lnTo>
+                    <a:pt x="6016292" y="2714789"/>
+                  </a:lnTo>
+                  <a:lnTo>
+                    <a:pt x="6087914" y="2718516"/>
+                  </a:lnTo>
+                  <a:lnTo>
+                    <a:pt x="6159537" y="2722225"/>
+                  </a:lnTo>
+                  <a:lnTo>
+                    <a:pt x="6231159" y="2725916"/>
+                  </a:lnTo>
+                  <a:lnTo>
+                    <a:pt x="6302782" y="2729589"/>
+                  </a:lnTo>
+                  <a:lnTo>
+                    <a:pt x="6374404" y="2733244"/>
+                  </a:lnTo>
+                  <a:lnTo>
+                    <a:pt x="6446027" y="2736881"/>
+                  </a:lnTo>
+                  <a:lnTo>
+                    <a:pt x="6517649" y="2740501"/>
+                  </a:lnTo>
+                  <a:lnTo>
+                    <a:pt x="6589272" y="2744103"/>
+                  </a:lnTo>
+                  <a:lnTo>
+                    <a:pt x="6660894" y="2747688"/>
+                  </a:lnTo>
+                  <a:lnTo>
+                    <a:pt x="6732517" y="2751256"/>
+                  </a:lnTo>
+                  <a:lnTo>
+                    <a:pt x="6804139" y="2754806"/>
+                  </a:lnTo>
+                  <a:lnTo>
+                    <a:pt x="6875762" y="2758339"/>
+                  </a:lnTo>
+                  <a:lnTo>
+                    <a:pt x="6947385" y="2761855"/>
+                  </a:lnTo>
+                  <a:lnTo>
+                    <a:pt x="7019007" y="2765354"/>
+                  </a:lnTo>
+                  <a:lnTo>
+                    <a:pt x="7090630" y="2768836"/>
+                  </a:lnTo>
+                  <a:lnTo>
+                    <a:pt x="7090630" y="3364413"/>
+                  </a:lnTo>
+                  <a:lnTo>
+                    <a:pt x="7019007" y="3356604"/>
+                  </a:lnTo>
+                  <a:lnTo>
+                    <a:pt x="6947385" y="3348285"/>
+                  </a:lnTo>
+                  <a:lnTo>
+                    <a:pt x="6875762" y="3339421"/>
+                  </a:lnTo>
+                  <a:lnTo>
+                    <a:pt x="6804139" y="3329977"/>
+                  </a:lnTo>
+                  <a:lnTo>
+                    <a:pt x="6732517" y="3319915"/>
+                  </a:lnTo>
+                  <a:lnTo>
+                    <a:pt x="6660894" y="3309195"/>
+                  </a:lnTo>
+                  <a:lnTo>
+                    <a:pt x="6589272" y="3297773"/>
+                  </a:lnTo>
+                  <a:lnTo>
+                    <a:pt x="6517649" y="3285604"/>
+                  </a:lnTo>
+                  <a:lnTo>
+                    <a:pt x="6446027" y="3272639"/>
+                  </a:lnTo>
+                  <a:lnTo>
+                    <a:pt x="6374404" y="3258825"/>
+                  </a:lnTo>
+                  <a:lnTo>
+                    <a:pt x="6302782" y="3244108"/>
+                  </a:lnTo>
+                  <a:lnTo>
+                    <a:pt x="6231159" y="3228427"/>
+                  </a:lnTo>
+                  <a:lnTo>
+                    <a:pt x="6159537" y="3211721"/>
+                  </a:lnTo>
+                  <a:lnTo>
+                    <a:pt x="6087914" y="3193921"/>
+                  </a:lnTo>
+                  <a:lnTo>
+                    <a:pt x="6016292" y="3174956"/>
+                  </a:lnTo>
+                  <a:lnTo>
+                    <a:pt x="5944669" y="3154751"/>
+                  </a:lnTo>
+                  <a:lnTo>
+                    <a:pt x="5873047" y="3133223"/>
+                  </a:lnTo>
+                  <a:lnTo>
+                    <a:pt x="5801424" y="3110287"/>
+                  </a:lnTo>
+                  <a:lnTo>
+                    <a:pt x="5729802" y="3085850"/>
+                  </a:lnTo>
+                  <a:lnTo>
+                    <a:pt x="5658179" y="3059814"/>
+                  </a:lnTo>
+                  <a:lnTo>
+                    <a:pt x="5586557" y="3032074"/>
+                  </a:lnTo>
+                  <a:lnTo>
+                    <a:pt x="5514934" y="3002519"/>
+                  </a:lnTo>
+                  <a:lnTo>
+                    <a:pt x="5443311" y="2971030"/>
+                  </a:lnTo>
+                  <a:lnTo>
+                    <a:pt x="5371689" y="2937481"/>
+                  </a:lnTo>
+                  <a:lnTo>
+                    <a:pt x="5300066" y="2901736"/>
+                  </a:lnTo>
+                  <a:lnTo>
+                    <a:pt x="5228444" y="2863653"/>
+                  </a:lnTo>
+                  <a:lnTo>
+                    <a:pt x="5156821" y="2823078"/>
+                  </a:lnTo>
+                  <a:lnTo>
+                    <a:pt x="5085199" y="2779847"/>
+                  </a:lnTo>
+                  <a:lnTo>
+                    <a:pt x="5013576" y="2733788"/>
+                  </a:lnTo>
+                  <a:lnTo>
+                    <a:pt x="4941954" y="2684715"/>
+                  </a:lnTo>
+                  <a:lnTo>
+                    <a:pt x="4870331" y="2652628"/>
+                  </a:lnTo>
+                  <a:lnTo>
+                    <a:pt x="4798709" y="2648580"/>
+                  </a:lnTo>
+                  <a:lnTo>
+                    <a:pt x="4727086" y="2644512"/>
+                  </a:lnTo>
+                  <a:lnTo>
+                    <a:pt x="4655464" y="2640425"/>
+                  </a:lnTo>
+                  <a:lnTo>
+                    <a:pt x="4583841" y="2636318"/>
+                  </a:lnTo>
+                  <a:lnTo>
+                    <a:pt x="4512219" y="2632191"/>
+                  </a:lnTo>
+                  <a:lnTo>
+                    <a:pt x="4440596" y="2628043"/>
+                  </a:lnTo>
+                  <a:lnTo>
+                    <a:pt x="4368974" y="2623876"/>
+                  </a:lnTo>
+                  <a:lnTo>
+                    <a:pt x="4297351" y="2619688"/>
+                  </a:lnTo>
+                  <a:lnTo>
+                    <a:pt x="4225729" y="2615479"/>
+                  </a:lnTo>
+                  <a:lnTo>
+                    <a:pt x="4154106" y="2611251"/>
+                  </a:lnTo>
+                  <a:lnTo>
+                    <a:pt x="4082483" y="2607001"/>
+                  </a:lnTo>
+                  <a:lnTo>
+                    <a:pt x="4010861" y="2602731"/>
+                  </a:lnTo>
+                  <a:lnTo>
+                    <a:pt x="3939238" y="2598440"/>
+                  </a:lnTo>
+                  <a:lnTo>
+                    <a:pt x="3867616" y="2594129"/>
+                  </a:lnTo>
+                  <a:lnTo>
+                    <a:pt x="3795993" y="2589796"/>
+                  </a:lnTo>
+                  <a:lnTo>
+                    <a:pt x="3724371" y="2585442"/>
+                  </a:lnTo>
+                  <a:lnTo>
+                    <a:pt x="3652748" y="2581067"/>
+                  </a:lnTo>
+                  <a:lnTo>
+                    <a:pt x="3581126" y="2576670"/>
+                  </a:lnTo>
+                  <a:lnTo>
+                    <a:pt x="3509503" y="2572253"/>
+                  </a:lnTo>
+                  <a:lnTo>
+                    <a:pt x="3437881" y="2567813"/>
+                  </a:lnTo>
+                  <a:lnTo>
+                    <a:pt x="3366258" y="2563352"/>
+                  </a:lnTo>
+                  <a:lnTo>
+                    <a:pt x="3294636" y="2558870"/>
+                  </a:lnTo>
+                  <a:lnTo>
+                    <a:pt x="3223013" y="2554365"/>
+                  </a:lnTo>
+                  <a:lnTo>
+                    <a:pt x="3151391" y="2549839"/>
+                  </a:lnTo>
+                  <a:lnTo>
+                    <a:pt x="3079768" y="2545290"/>
+                  </a:lnTo>
+                  <a:lnTo>
+                    <a:pt x="3008146" y="2540720"/>
+                  </a:lnTo>
+                  <a:lnTo>
+                    <a:pt x="2936523" y="2536127"/>
+                  </a:lnTo>
+                  <a:lnTo>
+                    <a:pt x="2864901" y="2531512"/>
+                  </a:lnTo>
+                  <a:lnTo>
+                    <a:pt x="2793278" y="2526874"/>
+                  </a:lnTo>
+                  <a:lnTo>
+                    <a:pt x="2721655" y="2522214"/>
+                  </a:lnTo>
+                  <a:lnTo>
+                    <a:pt x="2650033" y="2517531"/>
+                  </a:lnTo>
+                  <a:lnTo>
+                    <a:pt x="2578410" y="2512825"/>
+                  </a:lnTo>
+                  <a:lnTo>
+                    <a:pt x="2506788" y="2508096"/>
+                  </a:lnTo>
+                  <a:lnTo>
+                    <a:pt x="2435165" y="2503344"/>
+                  </a:lnTo>
+                  <a:lnTo>
+                    <a:pt x="2363543" y="2498569"/>
+                  </a:lnTo>
+                  <a:lnTo>
+                    <a:pt x="2291920" y="2493771"/>
+                  </a:lnTo>
+                  <a:lnTo>
+                    <a:pt x="2220298" y="2488950"/>
+                  </a:lnTo>
+                  <a:lnTo>
+                    <a:pt x="2148675" y="2484105"/>
+                  </a:lnTo>
+                  <a:lnTo>
+                    <a:pt x="2077053" y="2479236"/>
+                  </a:lnTo>
+                  <a:lnTo>
+                    <a:pt x="2005430" y="2474344"/>
+                  </a:lnTo>
+                  <a:lnTo>
+                    <a:pt x="1933808" y="2469428"/>
+                  </a:lnTo>
+                  <a:lnTo>
+                    <a:pt x="1862185" y="2464487"/>
+                  </a:lnTo>
+                  <a:lnTo>
+                    <a:pt x="1790563" y="2459523"/>
+                  </a:lnTo>
+                  <a:lnTo>
+                    <a:pt x="1718940" y="2454535"/>
+                  </a:lnTo>
+                  <a:lnTo>
+                    <a:pt x="1647318" y="2449522"/>
+                  </a:lnTo>
+                  <a:lnTo>
+                    <a:pt x="1575695" y="2444485"/>
+                  </a:lnTo>
+                  <a:lnTo>
+                    <a:pt x="1504073" y="2439424"/>
+                  </a:lnTo>
+                  <a:lnTo>
+                    <a:pt x="1432450" y="2434338"/>
+                  </a:lnTo>
+                  <a:lnTo>
+                    <a:pt x="1360827" y="2429227"/>
+                  </a:lnTo>
+                  <a:lnTo>
+                    <a:pt x="1289205" y="2424091"/>
+                  </a:lnTo>
+                  <a:lnTo>
+                    <a:pt x="1217582" y="2418930"/>
+                  </a:lnTo>
+                  <a:lnTo>
+                    <a:pt x="1145960" y="2413744"/>
+                  </a:lnTo>
+                  <a:lnTo>
+                    <a:pt x="1074337" y="2408532"/>
+                  </a:lnTo>
+                  <a:lnTo>
+                    <a:pt x="1002715" y="2403296"/>
+                  </a:lnTo>
+                  <a:lnTo>
+                    <a:pt x="931092" y="2398034"/>
+                  </a:lnTo>
+                  <a:lnTo>
+                    <a:pt x="859470" y="2392746"/>
+                  </a:lnTo>
+                  <a:lnTo>
+                    <a:pt x="787847" y="2387432"/>
+                  </a:lnTo>
+                  <a:lnTo>
+                    <a:pt x="716225" y="2382093"/>
+                  </a:lnTo>
+                  <a:lnTo>
+                    <a:pt x="644602" y="2376727"/>
+                  </a:lnTo>
+                  <a:lnTo>
+                    <a:pt x="572980" y="2371336"/>
+                  </a:lnTo>
+                  <a:lnTo>
+                    <a:pt x="501357" y="2365918"/>
+                  </a:lnTo>
+                  <a:lnTo>
+                    <a:pt x="429735" y="2360474"/>
+                  </a:lnTo>
+                  <a:lnTo>
+                    <a:pt x="358112" y="2355003"/>
+                  </a:lnTo>
+                  <a:lnTo>
+                    <a:pt x="286490" y="2349505"/>
+                  </a:lnTo>
+                  <a:lnTo>
+                    <a:pt x="214867" y="2343981"/>
+                  </a:lnTo>
+                  <a:lnTo>
+                    <a:pt x="143245" y="2338430"/>
+                  </a:lnTo>
+                  <a:lnTo>
+                    <a:pt x="71622" y="2332852"/>
+                  </a:lnTo>
+                  <a:lnTo>
+                    <a:pt x="0" y="2327247"/>
                   </a:lnTo>
                   <a:lnTo>
                     <a:pt x="0" y="0"/>
@@ -3492,168 +3501,177 @@
           </p:nvSpPr>
           <p:spPr>
             <a:xfrm>
-              <a:off x="4621400" y="2073503"/>
-              <a:ext cx="3641278" cy="2778008"/>
+              <a:off x="4450515" y="2073503"/>
+              <a:ext cx="3812164" cy="2768836"/>
             </a:xfrm>
             <a:custGeom>
               <a:avLst/>
               <a:pathLst>
-                <a:path w="3641278" h="2778008">
+                <a:path w="3812164" h="2768836">
                   <a:moveTo>
                     <a:pt x="0" y="0"/>
                   </a:moveTo>
                   <a:lnTo>
-                    <a:pt x="60152" y="202343"/>
-                  </a:lnTo>
-                  <a:lnTo>
-                    <a:pt x="131774" y="426790"/>
-                  </a:lnTo>
-                  <a:lnTo>
-                    <a:pt x="203397" y="635885"/>
-                  </a:lnTo>
-                  <a:lnTo>
-                    <a:pt x="275019" y="830678"/>
-                  </a:lnTo>
-                  <a:lnTo>
-                    <a:pt x="346642" y="1012148"/>
-                  </a:lnTo>
-                  <a:lnTo>
-                    <a:pt x="418265" y="1181205"/>
-                  </a:lnTo>
-                  <a:lnTo>
-                    <a:pt x="489887" y="1338698"/>
-                  </a:lnTo>
-                  <a:lnTo>
-                    <a:pt x="561510" y="1485419"/>
-                  </a:lnTo>
-                  <a:lnTo>
-                    <a:pt x="633132" y="1622104"/>
-                  </a:lnTo>
-                  <a:lnTo>
-                    <a:pt x="704755" y="1749440"/>
-                  </a:lnTo>
-                  <a:lnTo>
-                    <a:pt x="776377" y="1868067"/>
-                  </a:lnTo>
-                  <a:lnTo>
-                    <a:pt x="848000" y="1978579"/>
-                  </a:lnTo>
-                  <a:lnTo>
-                    <a:pt x="919622" y="2081532"/>
-                  </a:lnTo>
-                  <a:lnTo>
-                    <a:pt x="991245" y="2177443"/>
-                  </a:lnTo>
-                  <a:lnTo>
-                    <a:pt x="1062867" y="2266794"/>
-                  </a:lnTo>
-                  <a:lnTo>
-                    <a:pt x="1134490" y="2350033"/>
-                  </a:lnTo>
-                  <a:lnTo>
-                    <a:pt x="1206112" y="2427579"/>
-                  </a:lnTo>
-                  <a:lnTo>
-                    <a:pt x="1277735" y="2499821"/>
-                  </a:lnTo>
-                  <a:lnTo>
-                    <a:pt x="1349357" y="2567121"/>
-                  </a:lnTo>
-                  <a:lnTo>
-                    <a:pt x="1420980" y="2629818"/>
-                  </a:lnTo>
-                  <a:lnTo>
-                    <a:pt x="1492602" y="2656862"/>
-                  </a:lnTo>
-                  <a:lnTo>
-                    <a:pt x="1564225" y="2661217"/>
-                  </a:lnTo>
-                  <a:lnTo>
-                    <a:pt x="1635847" y="2665549"/>
-                  </a:lnTo>
-                  <a:lnTo>
-                    <a:pt x="1707470" y="2669858"/>
-                  </a:lnTo>
-                  <a:lnTo>
-                    <a:pt x="1779093" y="2674145"/>
-                  </a:lnTo>
-                  <a:lnTo>
-                    <a:pt x="1850715" y="2678409"/>
-                  </a:lnTo>
-                  <a:lnTo>
-                    <a:pt x="1922338" y="2682650"/>
-                  </a:lnTo>
-                  <a:lnTo>
-                    <a:pt x="1993960" y="2686869"/>
-                  </a:lnTo>
-                  <a:lnTo>
-                    <a:pt x="2065583" y="2691066"/>
-                  </a:lnTo>
-                  <a:lnTo>
-                    <a:pt x="2137205" y="2695241"/>
-                  </a:lnTo>
-                  <a:lnTo>
-                    <a:pt x="2208828" y="2699394"/>
-                  </a:lnTo>
-                  <a:lnTo>
-                    <a:pt x="2280450" y="2703525"/>
-                  </a:lnTo>
-                  <a:lnTo>
-                    <a:pt x="2352073" y="2707634"/>
-                  </a:lnTo>
-                  <a:lnTo>
-                    <a:pt x="2423695" y="2711722"/>
-                  </a:lnTo>
-                  <a:lnTo>
-                    <a:pt x="2495318" y="2715788"/>
-                  </a:lnTo>
-                  <a:lnTo>
-                    <a:pt x="2566940" y="2719833"/>
-                  </a:lnTo>
-                  <a:lnTo>
-                    <a:pt x="2638563" y="2723856"/>
-                  </a:lnTo>
-                  <a:lnTo>
-                    <a:pt x="2710185" y="2727858"/>
-                  </a:lnTo>
-                  <a:lnTo>
-                    <a:pt x="2781808" y="2731839"/>
-                  </a:lnTo>
-                  <a:lnTo>
-                    <a:pt x="2853430" y="2735799"/>
-                  </a:lnTo>
-                  <a:lnTo>
-                    <a:pt x="2925053" y="2739739"/>
-                  </a:lnTo>
-                  <a:lnTo>
-                    <a:pt x="2996675" y="2743657"/>
-                  </a:lnTo>
-                  <a:lnTo>
-                    <a:pt x="3068298" y="2747555"/>
-                  </a:lnTo>
-                  <a:lnTo>
-                    <a:pt x="3139921" y="2751432"/>
-                  </a:lnTo>
-                  <a:lnTo>
-                    <a:pt x="3211543" y="2755289"/>
-                  </a:lnTo>
-                  <a:lnTo>
-                    <a:pt x="3283166" y="2759126"/>
-                  </a:lnTo>
-                  <a:lnTo>
-                    <a:pt x="3354788" y="2762942"/>
-                  </a:lnTo>
-                  <a:lnTo>
-                    <a:pt x="3426411" y="2766739"/>
-                  </a:lnTo>
-                  <a:lnTo>
-                    <a:pt x="3498033" y="2770515"/>
-                  </a:lnTo>
-                  <a:lnTo>
-                    <a:pt x="3569656" y="2774271"/>
-                  </a:lnTo>
-                  <a:lnTo>
-                    <a:pt x="3641278" y="2778008"/>
+                    <a:pt x="16170" y="50716"/>
+                  </a:lnTo>
+                  <a:lnTo>
+                    <a:pt x="87792" y="261558"/>
+                  </a:lnTo>
+                  <a:lnTo>
+                    <a:pt x="159415" y="459450"/>
+                  </a:lnTo>
+                  <a:lnTo>
+                    <a:pt x="231037" y="645189"/>
+                  </a:lnTo>
+                  <a:lnTo>
+                    <a:pt x="302660" y="819521"/>
+                  </a:lnTo>
+                  <a:lnTo>
+                    <a:pt x="374282" y="983146"/>
+                  </a:lnTo>
+                  <a:lnTo>
+                    <a:pt x="445905" y="1136722"/>
+                  </a:lnTo>
+                  <a:lnTo>
+                    <a:pt x="517527" y="1280866"/>
+                  </a:lnTo>
+                  <a:lnTo>
+                    <a:pt x="589150" y="1416158"/>
+                  </a:lnTo>
+                  <a:lnTo>
+                    <a:pt x="660772" y="1543140"/>
+                  </a:lnTo>
+                  <a:lnTo>
+                    <a:pt x="732395" y="1662323"/>
+                  </a:lnTo>
+                  <a:lnTo>
+                    <a:pt x="804017" y="1774187"/>
+                  </a:lnTo>
+                  <a:lnTo>
+                    <a:pt x="875640" y="1879181"/>
+                  </a:lnTo>
+                  <a:lnTo>
+                    <a:pt x="947262" y="1977726"/>
+                  </a:lnTo>
+                  <a:lnTo>
+                    <a:pt x="1018885" y="2070220"/>
+                  </a:lnTo>
+                  <a:lnTo>
+                    <a:pt x="1090508" y="2157032"/>
+                  </a:lnTo>
+                  <a:lnTo>
+                    <a:pt x="1162130" y="2238513"/>
+                  </a:lnTo>
+                  <a:lnTo>
+                    <a:pt x="1233753" y="2314990"/>
+                  </a:lnTo>
+                  <a:lnTo>
+                    <a:pt x="1305375" y="2386770"/>
+                  </a:lnTo>
+                  <a:lnTo>
+                    <a:pt x="1376998" y="2454141"/>
+                  </a:lnTo>
+                  <a:lnTo>
+                    <a:pt x="1448620" y="2517375"/>
+                  </a:lnTo>
+                  <a:lnTo>
+                    <a:pt x="1520243" y="2576726"/>
+                  </a:lnTo>
+                  <a:lnTo>
+                    <a:pt x="1591865" y="2632431"/>
+                  </a:lnTo>
+                  <a:lnTo>
+                    <a:pt x="1663488" y="2656656"/>
+                  </a:lnTo>
+                  <a:lnTo>
+                    <a:pt x="1735110" y="2660665"/>
+                  </a:lnTo>
+                  <a:lnTo>
+                    <a:pt x="1806733" y="2664654"/>
+                  </a:lnTo>
+                  <a:lnTo>
+                    <a:pt x="1878355" y="2668624"/>
+                  </a:lnTo>
+                  <a:lnTo>
+                    <a:pt x="1949978" y="2672575"/>
+                  </a:lnTo>
+                  <a:lnTo>
+                    <a:pt x="2021600" y="2676506"/>
+                  </a:lnTo>
+                  <a:lnTo>
+                    <a:pt x="2093223" y="2680419"/>
+                  </a:lnTo>
+                  <a:lnTo>
+                    <a:pt x="2164845" y="2684312"/>
+                  </a:lnTo>
+                  <a:lnTo>
+                    <a:pt x="2236468" y="2688187"/>
+                  </a:lnTo>
+                  <a:lnTo>
+                    <a:pt x="2308090" y="2692043"/>
+                  </a:lnTo>
+                  <a:lnTo>
+                    <a:pt x="2379713" y="2695880"/>
+                  </a:lnTo>
+                  <a:lnTo>
+                    <a:pt x="2451336" y="2699699"/>
+                  </a:lnTo>
+                  <a:lnTo>
+                    <a:pt x="2522958" y="2703499"/>
+                  </a:lnTo>
+                  <a:lnTo>
+                    <a:pt x="2594581" y="2707280"/>
+                  </a:lnTo>
+                  <a:lnTo>
+                    <a:pt x="2666203" y="2711044"/>
+                  </a:lnTo>
+                  <a:lnTo>
+                    <a:pt x="2737826" y="2714789"/>
+                  </a:lnTo>
+                  <a:lnTo>
+                    <a:pt x="2809448" y="2718516"/>
+                  </a:lnTo>
+                  <a:lnTo>
+                    <a:pt x="2881071" y="2722225"/>
+                  </a:lnTo>
+                  <a:lnTo>
+                    <a:pt x="2952693" y="2725916"/>
+                  </a:lnTo>
+                  <a:lnTo>
+                    <a:pt x="3024316" y="2729589"/>
+                  </a:lnTo>
+                  <a:lnTo>
+                    <a:pt x="3095938" y="2733244"/>
+                  </a:lnTo>
+                  <a:lnTo>
+                    <a:pt x="3167561" y="2736881"/>
+                  </a:lnTo>
+                  <a:lnTo>
+                    <a:pt x="3239183" y="2740501"/>
+                  </a:lnTo>
+                  <a:lnTo>
+                    <a:pt x="3310806" y="2744103"/>
+                  </a:lnTo>
+                  <a:lnTo>
+                    <a:pt x="3382428" y="2747688"/>
+                  </a:lnTo>
+                  <a:lnTo>
+                    <a:pt x="3454051" y="2751256"/>
+                  </a:lnTo>
+                  <a:lnTo>
+                    <a:pt x="3525673" y="2754806"/>
+                  </a:lnTo>
+                  <a:lnTo>
+                    <a:pt x="3597296" y="2758339"/>
+                  </a:lnTo>
+                  <a:lnTo>
+                    <a:pt x="3668918" y="2761855"/>
+                  </a:lnTo>
+                  <a:lnTo>
+                    <a:pt x="3740541" y="2765354"/>
+                  </a:lnTo>
+                  <a:lnTo>
+                    <a:pt x="3812164" y="2768836"/>
                   </a:lnTo>
                 </a:path>
               </a:pathLst>
@@ -3673,309 +3691,309 @@
           </p:nvSpPr>
           <p:spPr>
             <a:xfrm>
-              <a:off x="1172049" y="4366865"/>
-              <a:ext cx="7090630" cy="1095424"/>
+              <a:off x="1172049" y="4400750"/>
+              <a:ext cx="7090630" cy="1037165"/>
             </a:xfrm>
             <a:custGeom>
               <a:avLst/>
               <a:pathLst>
-                <a:path w="7090630" h="1095424">
+                <a:path w="7090630" h="1037165">
                   <a:moveTo>
-                    <a:pt x="7090630" y="1095424"/>
+                    <a:pt x="7090630" y="1037165"/>
                   </a:moveTo>
                   <a:lnTo>
-                    <a:pt x="7019007" y="1088452"/>
-                  </a:lnTo>
-                  <a:lnTo>
-                    <a:pt x="6947385" y="1080968"/>
-                  </a:lnTo>
-                  <a:lnTo>
-                    <a:pt x="6875762" y="1072935"/>
-                  </a:lnTo>
-                  <a:lnTo>
-                    <a:pt x="6804139" y="1064311"/>
-                  </a:lnTo>
-                  <a:lnTo>
-                    <a:pt x="6732517" y="1055055"/>
-                  </a:lnTo>
-                  <a:lnTo>
-                    <a:pt x="6660894" y="1045119"/>
-                  </a:lnTo>
-                  <a:lnTo>
-                    <a:pt x="6589272" y="1034453"/>
-                  </a:lnTo>
-                  <a:lnTo>
-                    <a:pt x="6517649" y="1023004"/>
-                  </a:lnTo>
-                  <a:lnTo>
-                    <a:pt x="6446027" y="1010715"/>
-                  </a:lnTo>
-                  <a:lnTo>
-                    <a:pt x="6374404" y="997524"/>
-                  </a:lnTo>
-                  <a:lnTo>
-                    <a:pt x="6302782" y="983363"/>
-                  </a:lnTo>
-                  <a:lnTo>
-                    <a:pt x="6231159" y="968164"/>
-                  </a:lnTo>
-                  <a:lnTo>
-                    <a:pt x="6159537" y="951848"/>
-                  </a:lnTo>
-                  <a:lnTo>
-                    <a:pt x="6087914" y="934334"/>
-                  </a:lnTo>
-                  <a:lnTo>
-                    <a:pt x="6016292" y="915534"/>
-                  </a:lnTo>
-                  <a:lnTo>
-                    <a:pt x="5944669" y="895354"/>
-                  </a:lnTo>
-                  <a:lnTo>
-                    <a:pt x="5873047" y="873693"/>
-                  </a:lnTo>
-                  <a:lnTo>
-                    <a:pt x="5801424" y="850441"/>
-                  </a:lnTo>
-                  <a:lnTo>
-                    <a:pt x="5729802" y="825482"/>
-                  </a:lnTo>
-                  <a:lnTo>
-                    <a:pt x="5658179" y="798690"/>
-                  </a:lnTo>
-                  <a:lnTo>
-                    <a:pt x="5586557" y="769931"/>
-                  </a:lnTo>
-                  <a:lnTo>
-                    <a:pt x="5514934" y="739061"/>
-                  </a:lnTo>
-                  <a:lnTo>
-                    <a:pt x="5443311" y="705924"/>
-                  </a:lnTo>
-                  <a:lnTo>
-                    <a:pt x="5371689" y="670354"/>
-                  </a:lnTo>
-                  <a:lnTo>
-                    <a:pt x="5300066" y="632172"/>
-                  </a:lnTo>
-                  <a:lnTo>
-                    <a:pt x="5228444" y="591187"/>
-                  </a:lnTo>
-                  <a:lnTo>
-                    <a:pt x="5156821" y="547193"/>
-                  </a:lnTo>
-                  <a:lnTo>
-                    <a:pt x="5085199" y="499969"/>
-                  </a:lnTo>
-                  <a:lnTo>
-                    <a:pt x="5013576" y="449277"/>
-                  </a:lnTo>
-                  <a:lnTo>
-                    <a:pt x="4941954" y="394864"/>
-                  </a:lnTo>
-                  <a:lnTo>
-                    <a:pt x="4870331" y="359121"/>
-                  </a:lnTo>
-                  <a:lnTo>
-                    <a:pt x="4798709" y="354720"/>
-                  </a:lnTo>
-                  <a:lnTo>
-                    <a:pt x="4727086" y="350295"/>
-                  </a:lnTo>
-                  <a:lnTo>
-                    <a:pt x="4655464" y="345847"/>
-                  </a:lnTo>
-                  <a:lnTo>
-                    <a:pt x="4583841" y="341376"/>
-                  </a:lnTo>
-                  <a:lnTo>
-                    <a:pt x="4512219" y="336881"/>
-                  </a:lnTo>
-                  <a:lnTo>
-                    <a:pt x="4440596" y="332362"/>
-                  </a:lnTo>
-                  <a:lnTo>
-                    <a:pt x="4368974" y="327819"/>
-                  </a:lnTo>
-                  <a:lnTo>
-                    <a:pt x="4297351" y="323252"/>
-                  </a:lnTo>
-                  <a:lnTo>
-                    <a:pt x="4225729" y="318661"/>
-                  </a:lnTo>
-                  <a:lnTo>
-                    <a:pt x="4154106" y="314045"/>
-                  </a:lnTo>
-                  <a:lnTo>
-                    <a:pt x="4082483" y="309405"/>
-                  </a:lnTo>
-                  <a:lnTo>
-                    <a:pt x="4010861" y="304741"/>
-                  </a:lnTo>
-                  <a:lnTo>
-                    <a:pt x="3939238" y="300052"/>
-                  </a:lnTo>
-                  <a:lnTo>
-                    <a:pt x="3867616" y="295338"/>
-                  </a:lnTo>
-                  <a:lnTo>
-                    <a:pt x="3795993" y="290599"/>
-                  </a:lnTo>
-                  <a:lnTo>
-                    <a:pt x="3724371" y="285835"/>
-                  </a:lnTo>
-                  <a:lnTo>
-                    <a:pt x="3652748" y="281045"/>
-                  </a:lnTo>
-                  <a:lnTo>
-                    <a:pt x="3581126" y="276231"/>
-                  </a:lnTo>
-                  <a:lnTo>
-                    <a:pt x="3509503" y="271391"/>
-                  </a:lnTo>
-                  <a:lnTo>
-                    <a:pt x="3437881" y="266525"/>
-                  </a:lnTo>
-                  <a:lnTo>
-                    <a:pt x="3366258" y="261633"/>
-                  </a:lnTo>
-                  <a:lnTo>
-                    <a:pt x="3294636" y="256716"/>
-                  </a:lnTo>
-                  <a:lnTo>
-                    <a:pt x="3223013" y="251773"/>
-                  </a:lnTo>
-                  <a:lnTo>
-                    <a:pt x="3151391" y="246803"/>
-                  </a:lnTo>
-                  <a:lnTo>
-                    <a:pt x="3079768" y="241807"/>
-                  </a:lnTo>
-                  <a:lnTo>
-                    <a:pt x="3008146" y="236785"/>
-                  </a:lnTo>
-                  <a:lnTo>
-                    <a:pt x="2936523" y="231736"/>
-                  </a:lnTo>
-                  <a:lnTo>
-                    <a:pt x="2864901" y="226660"/>
-                  </a:lnTo>
-                  <a:lnTo>
-                    <a:pt x="2793278" y="221557"/>
-                  </a:lnTo>
-                  <a:lnTo>
-                    <a:pt x="2721655" y="216428"/>
-                  </a:lnTo>
-                  <a:lnTo>
-                    <a:pt x="2650033" y="211271"/>
-                  </a:lnTo>
-                  <a:lnTo>
-                    <a:pt x="2578410" y="206087"/>
-                  </a:lnTo>
-                  <a:lnTo>
-                    <a:pt x="2506788" y="200876"/>
-                  </a:lnTo>
-                  <a:lnTo>
-                    <a:pt x="2435165" y="195637"/>
-                  </a:lnTo>
-                  <a:lnTo>
-                    <a:pt x="2363543" y="190370"/>
-                  </a:lnTo>
-                  <a:lnTo>
-                    <a:pt x="2291920" y="185075"/>
-                  </a:lnTo>
-                  <a:lnTo>
-                    <a:pt x="2220298" y="179752"/>
-                  </a:lnTo>
-                  <a:lnTo>
-                    <a:pt x="2148675" y="174401"/>
-                  </a:lnTo>
-                  <a:lnTo>
-                    <a:pt x="2077053" y="169022"/>
-                  </a:lnTo>
-                  <a:lnTo>
-                    <a:pt x="2005430" y="163614"/>
-                  </a:lnTo>
-                  <a:lnTo>
-                    <a:pt x="1933808" y="158178"/>
-                  </a:lnTo>
-                  <a:lnTo>
-                    <a:pt x="1862185" y="152713"/>
-                  </a:lnTo>
-                  <a:lnTo>
-                    <a:pt x="1790563" y="147219"/>
-                  </a:lnTo>
-                  <a:lnTo>
-                    <a:pt x="1718940" y="141696"/>
-                  </a:lnTo>
-                  <a:lnTo>
-                    <a:pt x="1647318" y="136143"/>
-                  </a:lnTo>
-                  <a:lnTo>
-                    <a:pt x="1575695" y="130561"/>
-                  </a:lnTo>
-                  <a:lnTo>
-                    <a:pt x="1504073" y="124950"/>
-                  </a:lnTo>
-                  <a:lnTo>
-                    <a:pt x="1432450" y="119309"/>
-                  </a:lnTo>
-                  <a:lnTo>
-                    <a:pt x="1360827" y="113638"/>
-                  </a:lnTo>
-                  <a:lnTo>
-                    <a:pt x="1289205" y="107937"/>
-                  </a:lnTo>
-                  <a:lnTo>
-                    <a:pt x="1217582" y="102206"/>
-                  </a:lnTo>
-                  <a:lnTo>
-                    <a:pt x="1145960" y="96444"/>
-                  </a:lnTo>
-                  <a:lnTo>
-                    <a:pt x="1074337" y="90652"/>
-                  </a:lnTo>
-                  <a:lnTo>
-                    <a:pt x="1002715" y="84830"/>
-                  </a:lnTo>
-                  <a:lnTo>
-                    <a:pt x="931092" y="78976"/>
-                  </a:lnTo>
-                  <a:lnTo>
-                    <a:pt x="859470" y="73092"/>
-                  </a:lnTo>
-                  <a:lnTo>
-                    <a:pt x="787847" y="67176"/>
-                  </a:lnTo>
-                  <a:lnTo>
-                    <a:pt x="716225" y="61229"/>
-                  </a:lnTo>
-                  <a:lnTo>
-                    <a:pt x="644602" y="55250"/>
-                  </a:lnTo>
-                  <a:lnTo>
-                    <a:pt x="572980" y="49240"/>
-                  </a:lnTo>
-                  <a:lnTo>
-                    <a:pt x="501357" y="43198"/>
-                  </a:lnTo>
-                  <a:lnTo>
-                    <a:pt x="429735" y="37124"/>
-                  </a:lnTo>
-                  <a:lnTo>
-                    <a:pt x="358112" y="31018"/>
-                  </a:lnTo>
-                  <a:lnTo>
-                    <a:pt x="286490" y="24880"/>
-                  </a:lnTo>
-                  <a:lnTo>
-                    <a:pt x="214867" y="18709"/>
-                  </a:lnTo>
-                  <a:lnTo>
-                    <a:pt x="143245" y="12505"/>
-                  </a:lnTo>
-                  <a:lnTo>
-                    <a:pt x="71622" y="6269"/>
+                    <a:pt x="7019007" y="1029357"/>
+                  </a:lnTo>
+                  <a:lnTo>
+                    <a:pt x="6947385" y="1021037"/>
+                  </a:lnTo>
+                  <a:lnTo>
+                    <a:pt x="6875762" y="1012173"/>
+                  </a:lnTo>
+                  <a:lnTo>
+                    <a:pt x="6804139" y="1002730"/>
+                  </a:lnTo>
+                  <a:lnTo>
+                    <a:pt x="6732517" y="992668"/>
+                  </a:lnTo>
+                  <a:lnTo>
+                    <a:pt x="6660894" y="981948"/>
+                  </a:lnTo>
+                  <a:lnTo>
+                    <a:pt x="6589272" y="970526"/>
+                  </a:lnTo>
+                  <a:lnTo>
+                    <a:pt x="6517649" y="958357"/>
+                  </a:lnTo>
+                  <a:lnTo>
+                    <a:pt x="6446027" y="945392"/>
+                  </a:lnTo>
+                  <a:lnTo>
+                    <a:pt x="6374404" y="931578"/>
+                  </a:lnTo>
+                  <a:lnTo>
+                    <a:pt x="6302782" y="916860"/>
+                  </a:lnTo>
+                  <a:lnTo>
+                    <a:pt x="6231159" y="901180"/>
+                  </a:lnTo>
+                  <a:lnTo>
+                    <a:pt x="6159537" y="884473"/>
+                  </a:lnTo>
+                  <a:lnTo>
+                    <a:pt x="6087914" y="866673"/>
+                  </a:lnTo>
+                  <a:lnTo>
+                    <a:pt x="6016292" y="847709"/>
+                  </a:lnTo>
+                  <a:lnTo>
+                    <a:pt x="5944669" y="827503"/>
+                  </a:lnTo>
+                  <a:lnTo>
+                    <a:pt x="5873047" y="805976"/>
+                  </a:lnTo>
+                  <a:lnTo>
+                    <a:pt x="5801424" y="783039"/>
+                  </a:lnTo>
+                  <a:lnTo>
+                    <a:pt x="5729802" y="758602"/>
+                  </a:lnTo>
+                  <a:lnTo>
+                    <a:pt x="5658179" y="732566"/>
+                  </a:lnTo>
+                  <a:lnTo>
+                    <a:pt x="5586557" y="704826"/>
+                  </a:lnTo>
+                  <a:lnTo>
+                    <a:pt x="5514934" y="675272"/>
+                  </a:lnTo>
+                  <a:lnTo>
+                    <a:pt x="5443311" y="643783"/>
+                  </a:lnTo>
+                  <a:lnTo>
+                    <a:pt x="5371689" y="610234"/>
+                  </a:lnTo>
+                  <a:lnTo>
+                    <a:pt x="5300066" y="574489"/>
+                  </a:lnTo>
+                  <a:lnTo>
+                    <a:pt x="5228444" y="536406"/>
+                  </a:lnTo>
+                  <a:lnTo>
+                    <a:pt x="5156821" y="495830"/>
+                  </a:lnTo>
+                  <a:lnTo>
+                    <a:pt x="5085199" y="452600"/>
+                  </a:lnTo>
+                  <a:lnTo>
+                    <a:pt x="5013576" y="406541"/>
+                  </a:lnTo>
+                  <a:lnTo>
+                    <a:pt x="4941954" y="357468"/>
+                  </a:lnTo>
+                  <a:lnTo>
+                    <a:pt x="4870331" y="325380"/>
+                  </a:lnTo>
+                  <a:lnTo>
+                    <a:pt x="4798709" y="321333"/>
+                  </a:lnTo>
+                  <a:lnTo>
+                    <a:pt x="4727086" y="317265"/>
+                  </a:lnTo>
+                  <a:lnTo>
+                    <a:pt x="4655464" y="313178"/>
+                  </a:lnTo>
+                  <a:lnTo>
+                    <a:pt x="4583841" y="309070"/>
+                  </a:lnTo>
+                  <a:lnTo>
+                    <a:pt x="4512219" y="304943"/>
+                  </a:lnTo>
+                  <a:lnTo>
+                    <a:pt x="4440596" y="300796"/>
+                  </a:lnTo>
+                  <a:lnTo>
+                    <a:pt x="4368974" y="296628"/>
+                  </a:lnTo>
+                  <a:lnTo>
+                    <a:pt x="4297351" y="292440"/>
+                  </a:lnTo>
+                  <a:lnTo>
+                    <a:pt x="4225729" y="288232"/>
+                  </a:lnTo>
+                  <a:lnTo>
+                    <a:pt x="4154106" y="284003"/>
+                  </a:lnTo>
+                  <a:lnTo>
+                    <a:pt x="4082483" y="279754"/>
+                  </a:lnTo>
+                  <a:lnTo>
+                    <a:pt x="4010861" y="275484"/>
+                  </a:lnTo>
+                  <a:lnTo>
+                    <a:pt x="3939238" y="271193"/>
+                  </a:lnTo>
+                  <a:lnTo>
+                    <a:pt x="3867616" y="266881"/>
+                  </a:lnTo>
+                  <a:lnTo>
+                    <a:pt x="3795993" y="262548"/>
+                  </a:lnTo>
+                  <a:lnTo>
+                    <a:pt x="3724371" y="258195"/>
+                  </a:lnTo>
+                  <a:lnTo>
+                    <a:pt x="3652748" y="253819"/>
+                  </a:lnTo>
+                  <a:lnTo>
+                    <a:pt x="3581126" y="249423"/>
+                  </a:lnTo>
+                  <a:lnTo>
+                    <a:pt x="3509503" y="245005"/>
+                  </a:lnTo>
+                  <a:lnTo>
+                    <a:pt x="3437881" y="240566"/>
+                  </a:lnTo>
+                  <a:lnTo>
+                    <a:pt x="3366258" y="236105"/>
+                  </a:lnTo>
+                  <a:lnTo>
+                    <a:pt x="3294636" y="231622"/>
+                  </a:lnTo>
+                  <a:lnTo>
+                    <a:pt x="3223013" y="227118"/>
+                  </a:lnTo>
+                  <a:lnTo>
+                    <a:pt x="3151391" y="222592"/>
+                  </a:lnTo>
+                  <a:lnTo>
+                    <a:pt x="3079768" y="218043"/>
+                  </a:lnTo>
+                  <a:lnTo>
+                    <a:pt x="3008146" y="213472"/>
+                  </a:lnTo>
+                  <a:lnTo>
+                    <a:pt x="2936523" y="208880"/>
+                  </a:lnTo>
+                  <a:lnTo>
+                    <a:pt x="2864901" y="204264"/>
+                  </a:lnTo>
+                  <a:lnTo>
+                    <a:pt x="2793278" y="199627"/>
+                  </a:lnTo>
+                  <a:lnTo>
+                    <a:pt x="2721655" y="194966"/>
+                  </a:lnTo>
+                  <a:lnTo>
+                    <a:pt x="2650033" y="190283"/>
+                  </a:lnTo>
+                  <a:lnTo>
+                    <a:pt x="2578410" y="185577"/>
+                  </a:lnTo>
+                  <a:lnTo>
+                    <a:pt x="2506788" y="180849"/>
+                  </a:lnTo>
+                  <a:lnTo>
+                    <a:pt x="2435165" y="176097"/>
+                  </a:lnTo>
+                  <a:lnTo>
+                    <a:pt x="2363543" y="171322"/>
+                  </a:lnTo>
+                  <a:lnTo>
+                    <a:pt x="2291920" y="166524"/>
+                  </a:lnTo>
+                  <a:lnTo>
+                    <a:pt x="2220298" y="161702"/>
+                  </a:lnTo>
+                  <a:lnTo>
+                    <a:pt x="2148675" y="156857"/>
+                  </a:lnTo>
+                  <a:lnTo>
+                    <a:pt x="2077053" y="151989"/>
+                  </a:lnTo>
+                  <a:lnTo>
+                    <a:pt x="2005430" y="147096"/>
+                  </a:lnTo>
+                  <a:lnTo>
+                    <a:pt x="1933808" y="142180"/>
+                  </a:lnTo>
+                  <a:lnTo>
+                    <a:pt x="1862185" y="137240"/>
+                  </a:lnTo>
+                  <a:lnTo>
+                    <a:pt x="1790563" y="132276"/>
+                  </a:lnTo>
+                  <a:lnTo>
+                    <a:pt x="1718940" y="127288"/>
+                  </a:lnTo>
+                  <a:lnTo>
+                    <a:pt x="1647318" y="122275"/>
+                  </a:lnTo>
+                  <a:lnTo>
+                    <a:pt x="1575695" y="117238"/>
+                  </a:lnTo>
+                  <a:lnTo>
+                    <a:pt x="1504073" y="112176"/>
+                  </a:lnTo>
+                  <a:lnTo>
+                    <a:pt x="1432450" y="107090"/>
+                  </a:lnTo>
+                  <a:lnTo>
+                    <a:pt x="1360827" y="101979"/>
+                  </a:lnTo>
+                  <a:lnTo>
+                    <a:pt x="1289205" y="96843"/>
+                  </a:lnTo>
+                  <a:lnTo>
+                    <a:pt x="1217582" y="91682"/>
+                  </a:lnTo>
+                  <a:lnTo>
+                    <a:pt x="1145960" y="86496"/>
+                  </a:lnTo>
+                  <a:lnTo>
+                    <a:pt x="1074337" y="81285"/>
+                  </a:lnTo>
+                  <a:lnTo>
+                    <a:pt x="1002715" y="76048"/>
+                  </a:lnTo>
+                  <a:lnTo>
+                    <a:pt x="931092" y="70786"/>
+                  </a:lnTo>
+                  <a:lnTo>
+                    <a:pt x="859470" y="65498"/>
+                  </a:lnTo>
+                  <a:lnTo>
+                    <a:pt x="787847" y="60185"/>
+                  </a:lnTo>
+                  <a:lnTo>
+                    <a:pt x="716225" y="54845"/>
+                  </a:lnTo>
+                  <a:lnTo>
+                    <a:pt x="644602" y="49480"/>
+                  </a:lnTo>
+                  <a:lnTo>
+                    <a:pt x="572980" y="44088"/>
+                  </a:lnTo>
+                  <a:lnTo>
+                    <a:pt x="501357" y="38670"/>
+                  </a:lnTo>
+                  <a:lnTo>
+                    <a:pt x="429735" y="33226"/>
+                  </a:lnTo>
+                  <a:lnTo>
+                    <a:pt x="358112" y="27755"/>
+                  </a:lnTo>
+                  <a:lnTo>
+                    <a:pt x="286490" y="22258"/>
+                  </a:lnTo>
+                  <a:lnTo>
+                    <a:pt x="214867" y="16734"/>
+                  </a:lnTo>
+                  <a:lnTo>
+                    <a:pt x="143245" y="11183"/>
+                  </a:lnTo>
+                  <a:lnTo>
+                    <a:pt x="71622" y="5605"/>
                   </a:lnTo>
                   <a:lnTo>
                     <a:pt x="0" y="0"/>
@@ -3998,222 +4016,234 @@
           </p:nvSpPr>
           <p:spPr>
             <a:xfrm>
-              <a:off x="3371890" y="2073503"/>
-              <a:ext cx="4890788" cy="3224871"/>
+              <a:off x="3059653" y="2073503"/>
+              <a:ext cx="5203025" cy="3191663"/>
             </a:xfrm>
             <a:custGeom>
               <a:avLst/>
               <a:pathLst>
-                <a:path w="4890788" h="3224871">
+                <a:path w="5203025" h="3191663">
                   <a:moveTo>
                     <a:pt x="0" y="0"/>
                   </a:moveTo>
                   <a:lnTo>
-                    <a:pt x="20457" y="38184"/>
-                  </a:lnTo>
-                  <a:lnTo>
-                    <a:pt x="92079" y="166878"/>
-                  </a:lnTo>
-                  <a:lnTo>
-                    <a:pt x="163702" y="290765"/>
-                  </a:lnTo>
-                  <a:lnTo>
-                    <a:pt x="235324" y="410025"/>
-                  </a:lnTo>
-                  <a:lnTo>
-                    <a:pt x="306947" y="524831"/>
-                  </a:lnTo>
-                  <a:lnTo>
-                    <a:pt x="378569" y="635349"/>
-                  </a:lnTo>
-                  <a:lnTo>
-                    <a:pt x="450192" y="741738"/>
-                  </a:lnTo>
-                  <a:lnTo>
-                    <a:pt x="521814" y="844154"/>
-                  </a:lnTo>
-                  <a:lnTo>
-                    <a:pt x="593437" y="942745"/>
-                  </a:lnTo>
-                  <a:lnTo>
-                    <a:pt x="665059" y="1037653"/>
-                  </a:lnTo>
-                  <a:lnTo>
-                    <a:pt x="736682" y="1129016"/>
-                  </a:lnTo>
-                  <a:lnTo>
-                    <a:pt x="808304" y="1216967"/>
-                  </a:lnTo>
-                  <a:lnTo>
-                    <a:pt x="879927" y="1301633"/>
-                  </a:lnTo>
-                  <a:lnTo>
-                    <a:pt x="951549" y="1383136"/>
-                  </a:lnTo>
-                  <a:lnTo>
-                    <a:pt x="1023172" y="1461596"/>
-                  </a:lnTo>
-                  <a:lnTo>
-                    <a:pt x="1094794" y="1537124"/>
-                  </a:lnTo>
-                  <a:lnTo>
-                    <a:pt x="1166417" y="1609832"/>
-                  </a:lnTo>
-                  <a:lnTo>
-                    <a:pt x="1238039" y="1679824"/>
-                  </a:lnTo>
-                  <a:lnTo>
-                    <a:pt x="1309662" y="1747202"/>
-                  </a:lnTo>
-                  <a:lnTo>
-                    <a:pt x="1381285" y="1812063"/>
-                  </a:lnTo>
-                  <a:lnTo>
-                    <a:pt x="1452907" y="1874502"/>
-                  </a:lnTo>
-                  <a:lnTo>
-                    <a:pt x="1524530" y="1934608"/>
-                  </a:lnTo>
-                  <a:lnTo>
-                    <a:pt x="1596152" y="1992469"/>
-                  </a:lnTo>
-                  <a:lnTo>
-                    <a:pt x="1667775" y="2048170"/>
-                  </a:lnTo>
-                  <a:lnTo>
-                    <a:pt x="1739397" y="2101789"/>
-                  </a:lnTo>
-                  <a:lnTo>
-                    <a:pt x="1811020" y="2153407"/>
-                  </a:lnTo>
-                  <a:lnTo>
-                    <a:pt x="1882642" y="2203096"/>
-                  </a:lnTo>
-                  <a:lnTo>
-                    <a:pt x="1954265" y="2250929"/>
-                  </a:lnTo>
-                  <a:lnTo>
-                    <a:pt x="2025887" y="2296975"/>
-                  </a:lnTo>
-                  <a:lnTo>
-                    <a:pt x="2097510" y="2341302"/>
-                  </a:lnTo>
-                  <a:lnTo>
-                    <a:pt x="2169132" y="2383973"/>
-                  </a:lnTo>
-                  <a:lnTo>
-                    <a:pt x="2240755" y="2425051"/>
-                  </a:lnTo>
-                  <a:lnTo>
-                    <a:pt x="2312377" y="2464594"/>
-                  </a:lnTo>
-                  <a:lnTo>
-                    <a:pt x="2384000" y="2502660"/>
-                  </a:lnTo>
-                  <a:lnTo>
-                    <a:pt x="2455622" y="2539304"/>
-                  </a:lnTo>
-                  <a:lnTo>
-                    <a:pt x="2527245" y="2574580"/>
-                  </a:lnTo>
-                  <a:lnTo>
-                    <a:pt x="2598867" y="2608538"/>
-                  </a:lnTo>
-                  <a:lnTo>
-                    <a:pt x="2670490" y="2641227"/>
-                  </a:lnTo>
-                  <a:lnTo>
-                    <a:pt x="2742113" y="2672696"/>
-                  </a:lnTo>
-                  <a:lnTo>
-                    <a:pt x="2813735" y="2702989"/>
-                  </a:lnTo>
-                  <a:lnTo>
-                    <a:pt x="2885358" y="2732151"/>
-                  </a:lnTo>
-                  <a:lnTo>
-                    <a:pt x="2956980" y="2760224"/>
-                  </a:lnTo>
-                  <a:lnTo>
-                    <a:pt x="3028603" y="2787248"/>
-                  </a:lnTo>
-                  <a:lnTo>
-                    <a:pt x="3100225" y="2813262"/>
-                  </a:lnTo>
-                  <a:lnTo>
-                    <a:pt x="3171848" y="2838306"/>
-                  </a:lnTo>
-                  <a:lnTo>
-                    <a:pt x="3243470" y="2862413"/>
-                  </a:lnTo>
-                  <a:lnTo>
-                    <a:pt x="3315093" y="2885620"/>
-                  </a:lnTo>
-                  <a:lnTo>
-                    <a:pt x="3386715" y="2907961"/>
-                  </a:lnTo>
-                  <a:lnTo>
-                    <a:pt x="3458338" y="2929467"/>
-                  </a:lnTo>
-                  <a:lnTo>
-                    <a:pt x="3529960" y="2950170"/>
-                  </a:lnTo>
-                  <a:lnTo>
-                    <a:pt x="3601583" y="2970099"/>
-                  </a:lnTo>
-                  <a:lnTo>
-                    <a:pt x="3673205" y="2989284"/>
-                  </a:lnTo>
-                  <a:lnTo>
-                    <a:pt x="3744828" y="3007753"/>
-                  </a:lnTo>
-                  <a:lnTo>
-                    <a:pt x="3816450" y="3025531"/>
-                  </a:lnTo>
-                  <a:lnTo>
-                    <a:pt x="3888073" y="3042646"/>
-                  </a:lnTo>
-                  <a:lnTo>
-                    <a:pt x="3959695" y="3059121"/>
-                  </a:lnTo>
-                  <a:lnTo>
-                    <a:pt x="4031318" y="3074981"/>
-                  </a:lnTo>
-                  <a:lnTo>
-                    <a:pt x="4102941" y="3090249"/>
-                  </a:lnTo>
-                  <a:lnTo>
-                    <a:pt x="4174563" y="3104947"/>
-                  </a:lnTo>
-                  <a:lnTo>
-                    <a:pt x="4246186" y="3119095"/>
-                  </a:lnTo>
-                  <a:lnTo>
-                    <a:pt x="4317808" y="3132715"/>
-                  </a:lnTo>
-                  <a:lnTo>
-                    <a:pt x="4389431" y="3145826"/>
-                  </a:lnTo>
-                  <a:lnTo>
-                    <a:pt x="4461053" y="3158448"/>
-                  </a:lnTo>
-                  <a:lnTo>
-                    <a:pt x="4532676" y="3170598"/>
-                  </a:lnTo>
-                  <a:lnTo>
-                    <a:pt x="4604298" y="3182294"/>
-                  </a:lnTo>
-                  <a:lnTo>
-                    <a:pt x="4675921" y="3193554"/>
-                  </a:lnTo>
-                  <a:lnTo>
-                    <a:pt x="4747543" y="3204393"/>
-                  </a:lnTo>
-                  <a:lnTo>
-                    <a:pt x="4819166" y="3214827"/>
-                  </a:lnTo>
-                  <a:lnTo>
-                    <a:pt x="4890788" y="3224871"/>
+                    <a:pt x="46203" y="76296"/>
+                  </a:lnTo>
+                  <a:lnTo>
+                    <a:pt x="117826" y="190599"/>
+                  </a:lnTo>
+                  <a:lnTo>
+                    <a:pt x="189448" y="301067"/>
+                  </a:lnTo>
+                  <a:lnTo>
+                    <a:pt x="261071" y="407830"/>
+                  </a:lnTo>
+                  <a:lnTo>
+                    <a:pt x="332693" y="511012"/>
+                  </a:lnTo>
+                  <a:lnTo>
+                    <a:pt x="404316" y="610732"/>
+                  </a:lnTo>
+                  <a:lnTo>
+                    <a:pt x="475938" y="707107"/>
+                  </a:lnTo>
+                  <a:lnTo>
+                    <a:pt x="547561" y="800250"/>
+                  </a:lnTo>
+                  <a:lnTo>
+                    <a:pt x="619183" y="890268"/>
+                  </a:lnTo>
+                  <a:lnTo>
+                    <a:pt x="690806" y="977266"/>
+                  </a:lnTo>
+                  <a:lnTo>
+                    <a:pt x="762428" y="1061346"/>
+                  </a:lnTo>
+                  <a:lnTo>
+                    <a:pt x="834051" y="1142605"/>
+                  </a:lnTo>
+                  <a:lnTo>
+                    <a:pt x="905673" y="1221139"/>
+                  </a:lnTo>
+                  <a:lnTo>
+                    <a:pt x="977296" y="1297038"/>
+                  </a:lnTo>
+                  <a:lnTo>
+                    <a:pt x="1048918" y="1370391"/>
+                  </a:lnTo>
+                  <a:lnTo>
+                    <a:pt x="1120541" y="1441284"/>
+                  </a:lnTo>
+                  <a:lnTo>
+                    <a:pt x="1192164" y="1509798"/>
+                  </a:lnTo>
+                  <a:lnTo>
+                    <a:pt x="1263786" y="1576014"/>
+                  </a:lnTo>
+                  <a:lnTo>
+                    <a:pt x="1335409" y="1640009"/>
+                  </a:lnTo>
+                  <a:lnTo>
+                    <a:pt x="1407031" y="1701857"/>
+                  </a:lnTo>
+                  <a:lnTo>
+                    <a:pt x="1478654" y="1761631"/>
+                  </a:lnTo>
+                  <a:lnTo>
+                    <a:pt x="1550276" y="1819399"/>
+                  </a:lnTo>
+                  <a:lnTo>
+                    <a:pt x="1621899" y="1875229"/>
+                  </a:lnTo>
+                  <a:lnTo>
+                    <a:pt x="1693521" y="1929187"/>
+                  </a:lnTo>
+                  <a:lnTo>
+                    <a:pt x="1765144" y="1981335"/>
+                  </a:lnTo>
+                  <a:lnTo>
+                    <a:pt x="1836766" y="2031733"/>
+                  </a:lnTo>
+                  <a:lnTo>
+                    <a:pt x="1908389" y="2080441"/>
+                  </a:lnTo>
+                  <a:lnTo>
+                    <a:pt x="1980011" y="2127515"/>
+                  </a:lnTo>
+                  <a:lnTo>
+                    <a:pt x="2051634" y="2173010"/>
+                  </a:lnTo>
+                  <a:lnTo>
+                    <a:pt x="2123256" y="2216978"/>
+                  </a:lnTo>
+                  <a:lnTo>
+                    <a:pt x="2194879" y="2259472"/>
+                  </a:lnTo>
+                  <a:lnTo>
+                    <a:pt x="2266501" y="2300540"/>
+                  </a:lnTo>
+                  <a:lnTo>
+                    <a:pt x="2338124" y="2340231"/>
+                  </a:lnTo>
+                  <a:lnTo>
+                    <a:pt x="2409746" y="2378590"/>
+                  </a:lnTo>
+                  <a:lnTo>
+                    <a:pt x="2481369" y="2415663"/>
+                  </a:lnTo>
+                  <a:lnTo>
+                    <a:pt x="2552992" y="2451492"/>
+                  </a:lnTo>
+                  <a:lnTo>
+                    <a:pt x="2624614" y="2486119"/>
+                  </a:lnTo>
+                  <a:lnTo>
+                    <a:pt x="2696237" y="2519584"/>
+                  </a:lnTo>
+                  <a:lnTo>
+                    <a:pt x="2767859" y="2551927"/>
+                  </a:lnTo>
+                  <a:lnTo>
+                    <a:pt x="2839482" y="2583185"/>
+                  </a:lnTo>
+                  <a:lnTo>
+                    <a:pt x="2911104" y="2613394"/>
+                  </a:lnTo>
+                  <a:lnTo>
+                    <a:pt x="2982727" y="2642590"/>
+                  </a:lnTo>
+                  <a:lnTo>
+                    <a:pt x="3054349" y="2670807"/>
+                  </a:lnTo>
+                  <a:lnTo>
+                    <a:pt x="3125972" y="2698077"/>
+                  </a:lnTo>
+                  <a:lnTo>
+                    <a:pt x="3197594" y="2724432"/>
+                  </a:lnTo>
+                  <a:lnTo>
+                    <a:pt x="3269217" y="2749903"/>
+                  </a:lnTo>
+                  <a:lnTo>
+                    <a:pt x="3340839" y="2774520"/>
+                  </a:lnTo>
+                  <a:lnTo>
+                    <a:pt x="3412462" y="2798311"/>
+                  </a:lnTo>
+                  <a:lnTo>
+                    <a:pt x="3484084" y="2821304"/>
+                  </a:lnTo>
+                  <a:lnTo>
+                    <a:pt x="3555707" y="2843525"/>
+                  </a:lnTo>
+                  <a:lnTo>
+                    <a:pt x="3627329" y="2865002"/>
+                  </a:lnTo>
+                  <a:lnTo>
+                    <a:pt x="3698952" y="2885757"/>
+                  </a:lnTo>
+                  <a:lnTo>
+                    <a:pt x="3770574" y="2905817"/>
+                  </a:lnTo>
+                  <a:lnTo>
+                    <a:pt x="3842197" y="2925204"/>
+                  </a:lnTo>
+                  <a:lnTo>
+                    <a:pt x="3913820" y="2943940"/>
+                  </a:lnTo>
+                  <a:lnTo>
+                    <a:pt x="3985442" y="2962048"/>
+                  </a:lnTo>
+                  <a:lnTo>
+                    <a:pt x="4057065" y="2979548"/>
+                  </a:lnTo>
+                  <a:lnTo>
+                    <a:pt x="4128687" y="2996461"/>
+                  </a:lnTo>
+                  <a:lnTo>
+                    <a:pt x="4200310" y="3012807"/>
+                  </a:lnTo>
+                  <a:lnTo>
+                    <a:pt x="4271932" y="3028605"/>
+                  </a:lnTo>
+                  <a:lnTo>
+                    <a:pt x="4343555" y="3043873"/>
+                  </a:lnTo>
+                  <a:lnTo>
+                    <a:pt x="4415177" y="3058628"/>
+                  </a:lnTo>
+                  <a:lnTo>
+                    <a:pt x="4486800" y="3072889"/>
+                  </a:lnTo>
+                  <a:lnTo>
+                    <a:pt x="4558422" y="3086671"/>
+                  </a:lnTo>
+                  <a:lnTo>
+                    <a:pt x="4630045" y="3099991"/>
+                  </a:lnTo>
+                  <a:lnTo>
+                    <a:pt x="4701667" y="3112864"/>
+                  </a:lnTo>
+                  <a:lnTo>
+                    <a:pt x="4773290" y="3125305"/>
+                  </a:lnTo>
+                  <a:lnTo>
+                    <a:pt x="4844912" y="3137329"/>
+                  </a:lnTo>
+                  <a:lnTo>
+                    <a:pt x="4916535" y="3148950"/>
+                  </a:lnTo>
+                  <a:lnTo>
+                    <a:pt x="4988157" y="3160181"/>
+                  </a:lnTo>
+                  <a:lnTo>
+                    <a:pt x="5059780" y="3171035"/>
+                  </a:lnTo>
+                  <a:lnTo>
+                    <a:pt x="5131402" y="3181525"/>
+                  </a:lnTo>
+                  <a:lnTo>
+                    <a:pt x="5203025" y="3191663"/>
                   </a:lnTo>
                 </a:path>
               </a:pathLst>
@@ -4953,7 +4983,7 @@
                   <a:latin typeface="Helvetica"/>
                   <a:cs typeface="Helvetica"/>
                 </a:rPr>
-                <a:t>subHR per 1 mL/min: 0.95 (0.91-0.99)  |  per IQR (Δ = 18.2): 0.41 (0.19-0.88)  |  IQR: [-11.5, 6.7]</a:t>
+                <a:t>subHR per 1 mL/min: 0.96 (0.92-0.99)  |  per IQR (Δ = 18.2): 0.45 (0.23-0.89)  |  IQR: [-11.5, 6.7]</a:t>
               </a:r>
             </a:p>
           </p:txBody>

--- a/docs/plots/carbo/jx_carbo_linsubhr_egfrdisc_grade3.pptx
+++ b/docs/plots/carbo/jx_carbo_linsubhr_egfrdisc_grade3.pptx
@@ -3003,476 +3003,467 @@
           <p:spPr>
             <a:xfrm>
               <a:off x="1172049" y="2073503"/>
-              <a:ext cx="7090630" cy="3364413"/>
+              <a:ext cx="7090630" cy="3388787"/>
             </a:xfrm>
             <a:custGeom>
               <a:avLst/>
               <a:pathLst>
-                <a:path w="7090630" h="3364413">
+                <a:path w="7090630" h="3388787">
                   <a:moveTo>
-                    <a:pt x="3278466" y="0"/>
+                    <a:pt x="3449351" y="0"/>
                   </a:moveTo>
                   <a:lnTo>
-                    <a:pt x="3294636" y="50716"/>
-                  </a:lnTo>
-                  <a:lnTo>
-                    <a:pt x="3366258" y="261558"/>
-                  </a:lnTo>
-                  <a:lnTo>
-                    <a:pt x="3437881" y="459450"/>
-                  </a:lnTo>
-                  <a:lnTo>
-                    <a:pt x="3509503" y="645189"/>
-                  </a:lnTo>
-                  <a:lnTo>
-                    <a:pt x="3581126" y="819521"/>
-                  </a:lnTo>
-                  <a:lnTo>
-                    <a:pt x="3652748" y="983146"/>
-                  </a:lnTo>
-                  <a:lnTo>
-                    <a:pt x="3724371" y="1136722"/>
-                  </a:lnTo>
-                  <a:lnTo>
-                    <a:pt x="3795993" y="1280866"/>
-                  </a:lnTo>
-                  <a:lnTo>
-                    <a:pt x="3867616" y="1416158"/>
-                  </a:lnTo>
-                  <a:lnTo>
-                    <a:pt x="3939238" y="1543140"/>
-                  </a:lnTo>
-                  <a:lnTo>
-                    <a:pt x="4010861" y="1662323"/>
-                  </a:lnTo>
-                  <a:lnTo>
-                    <a:pt x="4082483" y="1774187"/>
-                  </a:lnTo>
-                  <a:lnTo>
-                    <a:pt x="4154106" y="1879181"/>
-                  </a:lnTo>
-                  <a:lnTo>
-                    <a:pt x="4225729" y="1977726"/>
-                  </a:lnTo>
-                  <a:lnTo>
-                    <a:pt x="4297351" y="2070220"/>
-                  </a:lnTo>
-                  <a:lnTo>
-                    <a:pt x="4368974" y="2157032"/>
-                  </a:lnTo>
-                  <a:lnTo>
-                    <a:pt x="4440596" y="2238513"/>
-                  </a:lnTo>
-                  <a:lnTo>
-                    <a:pt x="4512219" y="2314990"/>
-                  </a:lnTo>
-                  <a:lnTo>
-                    <a:pt x="4583841" y="2386770"/>
-                  </a:lnTo>
-                  <a:lnTo>
-                    <a:pt x="4655464" y="2454141"/>
-                  </a:lnTo>
-                  <a:lnTo>
-                    <a:pt x="4727086" y="2517375"/>
-                  </a:lnTo>
-                  <a:lnTo>
-                    <a:pt x="4798709" y="2576726"/>
-                  </a:lnTo>
-                  <a:lnTo>
-                    <a:pt x="4870331" y="2632431"/>
-                  </a:lnTo>
-                  <a:lnTo>
-                    <a:pt x="4941954" y="2656656"/>
-                  </a:lnTo>
-                  <a:lnTo>
-                    <a:pt x="5013576" y="2660665"/>
-                  </a:lnTo>
-                  <a:lnTo>
-                    <a:pt x="5085199" y="2664654"/>
-                  </a:lnTo>
-                  <a:lnTo>
-                    <a:pt x="5156821" y="2668624"/>
-                  </a:lnTo>
-                  <a:lnTo>
-                    <a:pt x="5228444" y="2672575"/>
-                  </a:lnTo>
-                  <a:lnTo>
-                    <a:pt x="5300066" y="2676506"/>
-                  </a:lnTo>
-                  <a:lnTo>
-                    <a:pt x="5371689" y="2680419"/>
-                  </a:lnTo>
-                  <a:lnTo>
-                    <a:pt x="5443311" y="2684312"/>
-                  </a:lnTo>
-                  <a:lnTo>
-                    <a:pt x="5514934" y="2688187"/>
-                  </a:lnTo>
-                  <a:lnTo>
-                    <a:pt x="5586557" y="2692043"/>
-                  </a:lnTo>
-                  <a:lnTo>
-                    <a:pt x="5658179" y="2695880"/>
-                  </a:lnTo>
-                  <a:lnTo>
-                    <a:pt x="5729802" y="2699699"/>
-                  </a:lnTo>
-                  <a:lnTo>
-                    <a:pt x="5801424" y="2703499"/>
-                  </a:lnTo>
-                  <a:lnTo>
-                    <a:pt x="5873047" y="2707280"/>
-                  </a:lnTo>
-                  <a:lnTo>
-                    <a:pt x="5944669" y="2711044"/>
-                  </a:lnTo>
-                  <a:lnTo>
-                    <a:pt x="6016292" y="2714789"/>
-                  </a:lnTo>
-                  <a:lnTo>
-                    <a:pt x="6087914" y="2718516"/>
-                  </a:lnTo>
-                  <a:lnTo>
-                    <a:pt x="6159537" y="2722225"/>
-                  </a:lnTo>
-                  <a:lnTo>
-                    <a:pt x="6231159" y="2725916"/>
-                  </a:lnTo>
-                  <a:lnTo>
-                    <a:pt x="6302782" y="2729589"/>
-                  </a:lnTo>
-                  <a:lnTo>
-                    <a:pt x="6374404" y="2733244"/>
-                  </a:lnTo>
-                  <a:lnTo>
-                    <a:pt x="6446027" y="2736881"/>
-                  </a:lnTo>
-                  <a:lnTo>
-                    <a:pt x="6517649" y="2740501"/>
-                  </a:lnTo>
-                  <a:lnTo>
-                    <a:pt x="6589272" y="2744103"/>
-                  </a:lnTo>
-                  <a:lnTo>
-                    <a:pt x="6660894" y="2747688"/>
-                  </a:lnTo>
-                  <a:lnTo>
-                    <a:pt x="6732517" y="2751256"/>
-                  </a:lnTo>
-                  <a:lnTo>
-                    <a:pt x="6804139" y="2754806"/>
-                  </a:lnTo>
-                  <a:lnTo>
-                    <a:pt x="6875762" y="2758339"/>
-                  </a:lnTo>
-                  <a:lnTo>
-                    <a:pt x="6947385" y="2761855"/>
-                  </a:lnTo>
-                  <a:lnTo>
-                    <a:pt x="7019007" y="2765354"/>
-                  </a:lnTo>
-                  <a:lnTo>
-                    <a:pt x="7090630" y="2768836"/>
-                  </a:lnTo>
-                  <a:lnTo>
-                    <a:pt x="7090630" y="3364413"/>
-                  </a:lnTo>
-                  <a:lnTo>
-                    <a:pt x="7019007" y="3356604"/>
-                  </a:lnTo>
-                  <a:lnTo>
-                    <a:pt x="6947385" y="3348285"/>
-                  </a:lnTo>
-                  <a:lnTo>
-                    <a:pt x="6875762" y="3339421"/>
-                  </a:lnTo>
-                  <a:lnTo>
-                    <a:pt x="6804139" y="3329977"/>
-                  </a:lnTo>
-                  <a:lnTo>
-                    <a:pt x="6732517" y="3319915"/>
-                  </a:lnTo>
-                  <a:lnTo>
-                    <a:pt x="6660894" y="3309195"/>
-                  </a:lnTo>
-                  <a:lnTo>
-                    <a:pt x="6589272" y="3297773"/>
-                  </a:lnTo>
-                  <a:lnTo>
-                    <a:pt x="6517649" y="3285604"/>
-                  </a:lnTo>
-                  <a:lnTo>
-                    <a:pt x="6446027" y="3272639"/>
-                  </a:lnTo>
-                  <a:lnTo>
-                    <a:pt x="6374404" y="3258825"/>
-                  </a:lnTo>
-                  <a:lnTo>
-                    <a:pt x="6302782" y="3244108"/>
-                  </a:lnTo>
-                  <a:lnTo>
-                    <a:pt x="6231159" y="3228427"/>
-                  </a:lnTo>
-                  <a:lnTo>
-                    <a:pt x="6159537" y="3211721"/>
-                  </a:lnTo>
-                  <a:lnTo>
-                    <a:pt x="6087914" y="3193921"/>
-                  </a:lnTo>
-                  <a:lnTo>
-                    <a:pt x="6016292" y="3174956"/>
-                  </a:lnTo>
-                  <a:lnTo>
-                    <a:pt x="5944669" y="3154751"/>
-                  </a:lnTo>
-                  <a:lnTo>
-                    <a:pt x="5873047" y="3133223"/>
-                  </a:lnTo>
-                  <a:lnTo>
-                    <a:pt x="5801424" y="3110287"/>
-                  </a:lnTo>
-                  <a:lnTo>
-                    <a:pt x="5729802" y="3085850"/>
-                  </a:lnTo>
-                  <a:lnTo>
-                    <a:pt x="5658179" y="3059814"/>
-                  </a:lnTo>
-                  <a:lnTo>
-                    <a:pt x="5586557" y="3032074"/>
-                  </a:lnTo>
-                  <a:lnTo>
-                    <a:pt x="5514934" y="3002519"/>
-                  </a:lnTo>
-                  <a:lnTo>
-                    <a:pt x="5443311" y="2971030"/>
-                  </a:lnTo>
-                  <a:lnTo>
-                    <a:pt x="5371689" y="2937481"/>
-                  </a:lnTo>
-                  <a:lnTo>
-                    <a:pt x="5300066" y="2901736"/>
-                  </a:lnTo>
-                  <a:lnTo>
-                    <a:pt x="5228444" y="2863653"/>
-                  </a:lnTo>
-                  <a:lnTo>
-                    <a:pt x="5156821" y="2823078"/>
-                  </a:lnTo>
-                  <a:lnTo>
-                    <a:pt x="5085199" y="2779847"/>
-                  </a:lnTo>
-                  <a:lnTo>
-                    <a:pt x="5013576" y="2733788"/>
-                  </a:lnTo>
-                  <a:lnTo>
-                    <a:pt x="4941954" y="2684715"/>
-                  </a:lnTo>
-                  <a:lnTo>
-                    <a:pt x="4870331" y="2652628"/>
-                  </a:lnTo>
-                  <a:lnTo>
-                    <a:pt x="4798709" y="2648580"/>
-                  </a:lnTo>
-                  <a:lnTo>
-                    <a:pt x="4727086" y="2644512"/>
-                  </a:lnTo>
-                  <a:lnTo>
-                    <a:pt x="4655464" y="2640425"/>
-                  </a:lnTo>
-                  <a:lnTo>
-                    <a:pt x="4583841" y="2636318"/>
-                  </a:lnTo>
-                  <a:lnTo>
-                    <a:pt x="4512219" y="2632191"/>
-                  </a:lnTo>
-                  <a:lnTo>
-                    <a:pt x="4440596" y="2628043"/>
-                  </a:lnTo>
-                  <a:lnTo>
-                    <a:pt x="4368974" y="2623876"/>
-                  </a:lnTo>
-                  <a:lnTo>
-                    <a:pt x="4297351" y="2619688"/>
-                  </a:lnTo>
-                  <a:lnTo>
-                    <a:pt x="4225729" y="2615479"/>
-                  </a:lnTo>
-                  <a:lnTo>
-                    <a:pt x="4154106" y="2611251"/>
-                  </a:lnTo>
-                  <a:lnTo>
-                    <a:pt x="4082483" y="2607001"/>
-                  </a:lnTo>
-                  <a:lnTo>
-                    <a:pt x="4010861" y="2602731"/>
-                  </a:lnTo>
-                  <a:lnTo>
-                    <a:pt x="3939238" y="2598440"/>
-                  </a:lnTo>
-                  <a:lnTo>
-                    <a:pt x="3867616" y="2594129"/>
-                  </a:lnTo>
-                  <a:lnTo>
-                    <a:pt x="3795993" y="2589796"/>
-                  </a:lnTo>
-                  <a:lnTo>
-                    <a:pt x="3724371" y="2585442"/>
-                  </a:lnTo>
-                  <a:lnTo>
-                    <a:pt x="3652748" y="2581067"/>
-                  </a:lnTo>
-                  <a:lnTo>
-                    <a:pt x="3581126" y="2576670"/>
-                  </a:lnTo>
-                  <a:lnTo>
-                    <a:pt x="3509503" y="2572253"/>
-                  </a:lnTo>
-                  <a:lnTo>
-                    <a:pt x="3437881" y="2567813"/>
-                  </a:lnTo>
-                  <a:lnTo>
-                    <a:pt x="3366258" y="2563352"/>
-                  </a:lnTo>
-                  <a:lnTo>
-                    <a:pt x="3294636" y="2558870"/>
-                  </a:lnTo>
-                  <a:lnTo>
-                    <a:pt x="3223013" y="2554365"/>
-                  </a:lnTo>
-                  <a:lnTo>
-                    <a:pt x="3151391" y="2549839"/>
-                  </a:lnTo>
-                  <a:lnTo>
-                    <a:pt x="3079768" y="2545290"/>
-                  </a:lnTo>
-                  <a:lnTo>
-                    <a:pt x="3008146" y="2540720"/>
-                  </a:lnTo>
-                  <a:lnTo>
-                    <a:pt x="2936523" y="2536127"/>
-                  </a:lnTo>
-                  <a:lnTo>
-                    <a:pt x="2864901" y="2531512"/>
-                  </a:lnTo>
-                  <a:lnTo>
-                    <a:pt x="2793278" y="2526874"/>
-                  </a:lnTo>
-                  <a:lnTo>
-                    <a:pt x="2721655" y="2522214"/>
-                  </a:lnTo>
-                  <a:lnTo>
-                    <a:pt x="2650033" y="2517531"/>
-                  </a:lnTo>
-                  <a:lnTo>
-                    <a:pt x="2578410" y="2512825"/>
-                  </a:lnTo>
-                  <a:lnTo>
-                    <a:pt x="2506788" y="2508096"/>
-                  </a:lnTo>
-                  <a:lnTo>
-                    <a:pt x="2435165" y="2503344"/>
-                  </a:lnTo>
-                  <a:lnTo>
-                    <a:pt x="2363543" y="2498569"/>
-                  </a:lnTo>
-                  <a:lnTo>
-                    <a:pt x="2291920" y="2493771"/>
-                  </a:lnTo>
-                  <a:lnTo>
-                    <a:pt x="2220298" y="2488950"/>
-                  </a:lnTo>
-                  <a:lnTo>
-                    <a:pt x="2148675" y="2484105"/>
-                  </a:lnTo>
-                  <a:lnTo>
-                    <a:pt x="2077053" y="2479236"/>
-                  </a:lnTo>
-                  <a:lnTo>
-                    <a:pt x="2005430" y="2474344"/>
-                  </a:lnTo>
-                  <a:lnTo>
-                    <a:pt x="1933808" y="2469428"/>
-                  </a:lnTo>
-                  <a:lnTo>
-                    <a:pt x="1862185" y="2464487"/>
-                  </a:lnTo>
-                  <a:lnTo>
-                    <a:pt x="1790563" y="2459523"/>
-                  </a:lnTo>
-                  <a:lnTo>
-                    <a:pt x="1718940" y="2454535"/>
-                  </a:lnTo>
-                  <a:lnTo>
-                    <a:pt x="1647318" y="2449522"/>
-                  </a:lnTo>
-                  <a:lnTo>
-                    <a:pt x="1575695" y="2444485"/>
-                  </a:lnTo>
-                  <a:lnTo>
-                    <a:pt x="1504073" y="2439424"/>
-                  </a:lnTo>
-                  <a:lnTo>
-                    <a:pt x="1432450" y="2434338"/>
-                  </a:lnTo>
-                  <a:lnTo>
-                    <a:pt x="1360827" y="2429227"/>
-                  </a:lnTo>
-                  <a:lnTo>
-                    <a:pt x="1289205" y="2424091"/>
-                  </a:lnTo>
-                  <a:lnTo>
-                    <a:pt x="1217582" y="2418930"/>
-                  </a:lnTo>
-                  <a:lnTo>
-                    <a:pt x="1145960" y="2413744"/>
-                  </a:lnTo>
-                  <a:lnTo>
-                    <a:pt x="1074337" y="2408532"/>
-                  </a:lnTo>
-                  <a:lnTo>
-                    <a:pt x="1002715" y="2403296"/>
-                  </a:lnTo>
-                  <a:lnTo>
-                    <a:pt x="931092" y="2398034"/>
-                  </a:lnTo>
-                  <a:lnTo>
-                    <a:pt x="859470" y="2392746"/>
-                  </a:lnTo>
-                  <a:lnTo>
-                    <a:pt x="787847" y="2387432"/>
-                  </a:lnTo>
-                  <a:lnTo>
-                    <a:pt x="716225" y="2382093"/>
-                  </a:lnTo>
-                  <a:lnTo>
-                    <a:pt x="644602" y="2376727"/>
-                  </a:lnTo>
-                  <a:lnTo>
-                    <a:pt x="572980" y="2371336"/>
-                  </a:lnTo>
-                  <a:lnTo>
-                    <a:pt x="501357" y="2365918"/>
-                  </a:lnTo>
-                  <a:lnTo>
-                    <a:pt x="429735" y="2360474"/>
-                  </a:lnTo>
-                  <a:lnTo>
-                    <a:pt x="358112" y="2355003"/>
-                  </a:lnTo>
-                  <a:lnTo>
-                    <a:pt x="286490" y="2349505"/>
-                  </a:lnTo>
-                  <a:lnTo>
-                    <a:pt x="214867" y="2343981"/>
-                  </a:lnTo>
-                  <a:lnTo>
-                    <a:pt x="143245" y="2338430"/>
-                  </a:lnTo>
-                  <a:lnTo>
-                    <a:pt x="71622" y="2332852"/>
-                  </a:lnTo>
-                  <a:lnTo>
-                    <a:pt x="0" y="2327247"/>
+                    <a:pt x="3509503" y="202343"/>
+                  </a:lnTo>
+                  <a:lnTo>
+                    <a:pt x="3581126" y="426790"/>
+                  </a:lnTo>
+                  <a:lnTo>
+                    <a:pt x="3652748" y="635885"/>
+                  </a:lnTo>
+                  <a:lnTo>
+                    <a:pt x="3724371" y="830678"/>
+                  </a:lnTo>
+                  <a:lnTo>
+                    <a:pt x="3795993" y="1012148"/>
+                  </a:lnTo>
+                  <a:lnTo>
+                    <a:pt x="3867616" y="1181205"/>
+                  </a:lnTo>
+                  <a:lnTo>
+                    <a:pt x="3939238" y="1338698"/>
+                  </a:lnTo>
+                  <a:lnTo>
+                    <a:pt x="4010861" y="1485419"/>
+                  </a:lnTo>
+                  <a:lnTo>
+                    <a:pt x="4082483" y="1622104"/>
+                  </a:lnTo>
+                  <a:lnTo>
+                    <a:pt x="4154106" y="1749440"/>
+                  </a:lnTo>
+                  <a:lnTo>
+                    <a:pt x="4225729" y="1868067"/>
+                  </a:lnTo>
+                  <a:lnTo>
+                    <a:pt x="4297351" y="1978579"/>
+                  </a:lnTo>
+                  <a:lnTo>
+                    <a:pt x="4368974" y="2081532"/>
+                  </a:lnTo>
+                  <a:lnTo>
+                    <a:pt x="4440596" y="2177443"/>
+                  </a:lnTo>
+                  <a:lnTo>
+                    <a:pt x="4512219" y="2266794"/>
+                  </a:lnTo>
+                  <a:lnTo>
+                    <a:pt x="4583841" y="2350033"/>
+                  </a:lnTo>
+                  <a:lnTo>
+                    <a:pt x="4655464" y="2427579"/>
+                  </a:lnTo>
+                  <a:lnTo>
+                    <a:pt x="4727086" y="2499821"/>
+                  </a:lnTo>
+                  <a:lnTo>
+                    <a:pt x="4798709" y="2567121"/>
+                  </a:lnTo>
+                  <a:lnTo>
+                    <a:pt x="4870331" y="2629818"/>
+                  </a:lnTo>
+                  <a:lnTo>
+                    <a:pt x="4941954" y="2656862"/>
+                  </a:lnTo>
+                  <a:lnTo>
+                    <a:pt x="5013576" y="2661217"/>
+                  </a:lnTo>
+                  <a:lnTo>
+                    <a:pt x="5085199" y="2665549"/>
+                  </a:lnTo>
+                  <a:lnTo>
+                    <a:pt x="5156821" y="2669858"/>
+                  </a:lnTo>
+                  <a:lnTo>
+                    <a:pt x="5228444" y="2674145"/>
+                  </a:lnTo>
+                  <a:lnTo>
+                    <a:pt x="5300066" y="2678409"/>
+                  </a:lnTo>
+                  <a:lnTo>
+                    <a:pt x="5371689" y="2682650"/>
+                  </a:lnTo>
+                  <a:lnTo>
+                    <a:pt x="5443311" y="2686869"/>
+                  </a:lnTo>
+                  <a:lnTo>
+                    <a:pt x="5514934" y="2691066"/>
+                  </a:lnTo>
+                  <a:lnTo>
+                    <a:pt x="5586557" y="2695241"/>
+                  </a:lnTo>
+                  <a:lnTo>
+                    <a:pt x="5658179" y="2699394"/>
+                  </a:lnTo>
+                  <a:lnTo>
+                    <a:pt x="5729802" y="2703525"/>
+                  </a:lnTo>
+                  <a:lnTo>
+                    <a:pt x="5801424" y="2707634"/>
+                  </a:lnTo>
+                  <a:lnTo>
+                    <a:pt x="5873047" y="2711722"/>
+                  </a:lnTo>
+                  <a:lnTo>
+                    <a:pt x="5944669" y="2715788"/>
+                  </a:lnTo>
+                  <a:lnTo>
+                    <a:pt x="6016292" y="2719833"/>
+                  </a:lnTo>
+                  <a:lnTo>
+                    <a:pt x="6087914" y="2723856"/>
+                  </a:lnTo>
+                  <a:lnTo>
+                    <a:pt x="6159537" y="2727858"/>
+                  </a:lnTo>
+                  <a:lnTo>
+                    <a:pt x="6231159" y="2731839"/>
+                  </a:lnTo>
+                  <a:lnTo>
+                    <a:pt x="6302782" y="2735799"/>
+                  </a:lnTo>
+                  <a:lnTo>
+                    <a:pt x="6374404" y="2739739"/>
+                  </a:lnTo>
+                  <a:lnTo>
+                    <a:pt x="6446027" y="2743657"/>
+                  </a:lnTo>
+                  <a:lnTo>
+                    <a:pt x="6517649" y="2747555"/>
+                  </a:lnTo>
+                  <a:lnTo>
+                    <a:pt x="6589272" y="2751432"/>
+                  </a:lnTo>
+                  <a:lnTo>
+                    <a:pt x="6660894" y="2755289"/>
+                  </a:lnTo>
+                  <a:lnTo>
+                    <a:pt x="6732517" y="2759126"/>
+                  </a:lnTo>
+                  <a:lnTo>
+                    <a:pt x="6804139" y="2762942"/>
+                  </a:lnTo>
+                  <a:lnTo>
+                    <a:pt x="6875762" y="2766739"/>
+                  </a:lnTo>
+                  <a:lnTo>
+                    <a:pt x="6947385" y="2770515"/>
+                  </a:lnTo>
+                  <a:lnTo>
+                    <a:pt x="7019007" y="2774271"/>
+                  </a:lnTo>
+                  <a:lnTo>
+                    <a:pt x="7090630" y="2778008"/>
+                  </a:lnTo>
+                  <a:lnTo>
+                    <a:pt x="7090630" y="3388787"/>
+                  </a:lnTo>
+                  <a:lnTo>
+                    <a:pt x="7019007" y="3381815"/>
+                  </a:lnTo>
+                  <a:lnTo>
+                    <a:pt x="6947385" y="3374331"/>
+                  </a:lnTo>
+                  <a:lnTo>
+                    <a:pt x="6875762" y="3366297"/>
+                  </a:lnTo>
+                  <a:lnTo>
+                    <a:pt x="6804139" y="3357674"/>
+                  </a:lnTo>
+                  <a:lnTo>
+                    <a:pt x="6732517" y="3348418"/>
+                  </a:lnTo>
+                  <a:lnTo>
+                    <a:pt x="6660894" y="3338482"/>
+                  </a:lnTo>
+                  <a:lnTo>
+                    <a:pt x="6589272" y="3327816"/>
+                  </a:lnTo>
+                  <a:lnTo>
+                    <a:pt x="6517649" y="3316367"/>
+                  </a:lnTo>
+                  <a:lnTo>
+                    <a:pt x="6446027" y="3304078"/>
+                  </a:lnTo>
+                  <a:lnTo>
+                    <a:pt x="6374404" y="3290886"/>
+                  </a:lnTo>
+                  <a:lnTo>
+                    <a:pt x="6302782" y="3276726"/>
+                  </a:lnTo>
+                  <a:lnTo>
+                    <a:pt x="6231159" y="3261526"/>
+                  </a:lnTo>
+                  <a:lnTo>
+                    <a:pt x="6159537" y="3245211"/>
+                  </a:lnTo>
+                  <a:lnTo>
+                    <a:pt x="6087914" y="3227697"/>
+                  </a:lnTo>
+                  <a:lnTo>
+                    <a:pt x="6016292" y="3208897"/>
+                  </a:lnTo>
+                  <a:lnTo>
+                    <a:pt x="5944669" y="3188717"/>
+                  </a:lnTo>
+                  <a:lnTo>
+                    <a:pt x="5873047" y="3167056"/>
+                  </a:lnTo>
+                  <a:lnTo>
+                    <a:pt x="5801424" y="3143804"/>
+                  </a:lnTo>
+                  <a:lnTo>
+                    <a:pt x="5729802" y="3118844"/>
+                  </a:lnTo>
+                  <a:lnTo>
+                    <a:pt x="5658179" y="3092053"/>
+                  </a:lnTo>
+                  <a:lnTo>
+                    <a:pt x="5586557" y="3063294"/>
+                  </a:lnTo>
+                  <a:lnTo>
+                    <a:pt x="5514934" y="3032423"/>
+                  </a:lnTo>
+                  <a:lnTo>
+                    <a:pt x="5443311" y="2999286"/>
+                  </a:lnTo>
+                  <a:lnTo>
+                    <a:pt x="5371689" y="2963716"/>
+                  </a:lnTo>
+                  <a:lnTo>
+                    <a:pt x="5300066" y="2925535"/>
+                  </a:lnTo>
+                  <a:lnTo>
+                    <a:pt x="5228444" y="2884550"/>
+                  </a:lnTo>
+                  <a:lnTo>
+                    <a:pt x="5156821" y="2840556"/>
+                  </a:lnTo>
+                  <a:lnTo>
+                    <a:pt x="5085199" y="2793332"/>
+                  </a:lnTo>
+                  <a:lnTo>
+                    <a:pt x="5013576" y="2742640"/>
+                  </a:lnTo>
+                  <a:lnTo>
+                    <a:pt x="4941954" y="2688227"/>
+                  </a:lnTo>
+                  <a:lnTo>
+                    <a:pt x="4870331" y="2652484"/>
+                  </a:lnTo>
+                  <a:lnTo>
+                    <a:pt x="4798709" y="2648083"/>
+                  </a:lnTo>
+                  <a:lnTo>
+                    <a:pt x="4727086" y="2643658"/>
+                  </a:lnTo>
+                  <a:lnTo>
+                    <a:pt x="4655464" y="2639210"/>
+                  </a:lnTo>
+                  <a:lnTo>
+                    <a:pt x="4583841" y="2634739"/>
+                  </a:lnTo>
+                  <a:lnTo>
+                    <a:pt x="4512219" y="2630243"/>
+                  </a:lnTo>
+                  <a:lnTo>
+                    <a:pt x="4440596" y="2625724"/>
+                  </a:lnTo>
+                  <a:lnTo>
+                    <a:pt x="4368974" y="2621182"/>
+                  </a:lnTo>
+                  <a:lnTo>
+                    <a:pt x="4297351" y="2616615"/>
+                  </a:lnTo>
+                  <a:lnTo>
+                    <a:pt x="4225729" y="2612023"/>
+                  </a:lnTo>
+                  <a:lnTo>
+                    <a:pt x="4154106" y="2607408"/>
+                  </a:lnTo>
+                  <a:lnTo>
+                    <a:pt x="4082483" y="2602768"/>
+                  </a:lnTo>
+                  <a:lnTo>
+                    <a:pt x="4010861" y="2598104"/>
+                  </a:lnTo>
+                  <a:lnTo>
+                    <a:pt x="3939238" y="2593414"/>
+                  </a:lnTo>
+                  <a:lnTo>
+                    <a:pt x="3867616" y="2588700"/>
+                  </a:lnTo>
+                  <a:lnTo>
+                    <a:pt x="3795993" y="2583962"/>
+                  </a:lnTo>
+                  <a:lnTo>
+                    <a:pt x="3724371" y="2579197"/>
+                  </a:lnTo>
+                  <a:lnTo>
+                    <a:pt x="3652748" y="2574408"/>
+                  </a:lnTo>
+                  <a:lnTo>
+                    <a:pt x="3581126" y="2569594"/>
+                  </a:lnTo>
+                  <a:lnTo>
+                    <a:pt x="3509503" y="2564754"/>
+                  </a:lnTo>
+                  <a:lnTo>
+                    <a:pt x="3437881" y="2559888"/>
+                  </a:lnTo>
+                  <a:lnTo>
+                    <a:pt x="3366258" y="2554996"/>
+                  </a:lnTo>
+                  <a:lnTo>
+                    <a:pt x="3294636" y="2550079"/>
+                  </a:lnTo>
+                  <a:lnTo>
+                    <a:pt x="3223013" y="2545135"/>
+                  </a:lnTo>
+                  <a:lnTo>
+                    <a:pt x="3151391" y="2540166"/>
+                  </a:lnTo>
+                  <a:lnTo>
+                    <a:pt x="3079768" y="2535170"/>
+                  </a:lnTo>
+                  <a:lnTo>
+                    <a:pt x="3008146" y="2530148"/>
+                  </a:lnTo>
+                  <a:lnTo>
+                    <a:pt x="2936523" y="2525099"/>
+                  </a:lnTo>
+                  <a:lnTo>
+                    <a:pt x="2864901" y="2520023"/>
+                  </a:lnTo>
+                  <a:lnTo>
+                    <a:pt x="2793278" y="2514920"/>
+                  </a:lnTo>
+                  <a:lnTo>
+                    <a:pt x="2721655" y="2509791"/>
+                  </a:lnTo>
+                  <a:lnTo>
+                    <a:pt x="2650033" y="2504634"/>
+                  </a:lnTo>
+                  <a:lnTo>
+                    <a:pt x="2578410" y="2499450"/>
+                  </a:lnTo>
+                  <a:lnTo>
+                    <a:pt x="2506788" y="2494238"/>
+                  </a:lnTo>
+                  <a:lnTo>
+                    <a:pt x="2435165" y="2488999"/>
+                  </a:lnTo>
+                  <a:lnTo>
+                    <a:pt x="2363543" y="2483733"/>
+                  </a:lnTo>
+                  <a:lnTo>
+                    <a:pt x="2291920" y="2478438"/>
+                  </a:lnTo>
+                  <a:lnTo>
+                    <a:pt x="2220298" y="2473115"/>
+                  </a:lnTo>
+                  <a:lnTo>
+                    <a:pt x="2148675" y="2467764"/>
+                  </a:lnTo>
+                  <a:lnTo>
+                    <a:pt x="2077053" y="2462385"/>
+                  </a:lnTo>
+                  <a:lnTo>
+                    <a:pt x="2005430" y="2456977"/>
+                  </a:lnTo>
+                  <a:lnTo>
+                    <a:pt x="1933808" y="2451541"/>
+                  </a:lnTo>
+                  <a:lnTo>
+                    <a:pt x="1862185" y="2446076"/>
+                  </a:lnTo>
+                  <a:lnTo>
+                    <a:pt x="1790563" y="2440582"/>
+                  </a:lnTo>
+                  <a:lnTo>
+                    <a:pt x="1718940" y="2435058"/>
+                  </a:lnTo>
+                  <a:lnTo>
+                    <a:pt x="1647318" y="2429506"/>
+                  </a:lnTo>
+                  <a:lnTo>
+                    <a:pt x="1575695" y="2423924"/>
+                  </a:lnTo>
+                  <a:lnTo>
+                    <a:pt x="1504073" y="2418313"/>
+                  </a:lnTo>
+                  <a:lnTo>
+                    <a:pt x="1432450" y="2412672"/>
+                  </a:lnTo>
+                  <a:lnTo>
+                    <a:pt x="1360827" y="2407001"/>
+                  </a:lnTo>
+                  <a:lnTo>
+                    <a:pt x="1289205" y="2401300"/>
+                  </a:lnTo>
+                  <a:lnTo>
+                    <a:pt x="1217582" y="2395569"/>
+                  </a:lnTo>
+                  <a:lnTo>
+                    <a:pt x="1145960" y="2389807"/>
+                  </a:lnTo>
+                  <a:lnTo>
+                    <a:pt x="1074337" y="2384015"/>
+                  </a:lnTo>
+                  <a:lnTo>
+                    <a:pt x="1002715" y="2378192"/>
+                  </a:lnTo>
+                  <a:lnTo>
+                    <a:pt x="931092" y="2372339"/>
+                  </a:lnTo>
+                  <a:lnTo>
+                    <a:pt x="859470" y="2366454"/>
+                  </a:lnTo>
+                  <a:lnTo>
+                    <a:pt x="787847" y="2360539"/>
+                  </a:lnTo>
+                  <a:lnTo>
+                    <a:pt x="716225" y="2354592"/>
+                  </a:lnTo>
+                  <a:lnTo>
+                    <a:pt x="644602" y="2348613"/>
+                  </a:lnTo>
+                  <a:lnTo>
+                    <a:pt x="572980" y="2342603"/>
+                  </a:lnTo>
+                  <a:lnTo>
+                    <a:pt x="501357" y="2336561"/>
+                  </a:lnTo>
+                  <a:lnTo>
+                    <a:pt x="429735" y="2330487"/>
+                  </a:lnTo>
+                  <a:lnTo>
+                    <a:pt x="358112" y="2324381"/>
+                  </a:lnTo>
+                  <a:lnTo>
+                    <a:pt x="286490" y="2318243"/>
+                  </a:lnTo>
+                  <a:lnTo>
+                    <a:pt x="214867" y="2312072"/>
+                  </a:lnTo>
+                  <a:lnTo>
+                    <a:pt x="143245" y="2305868"/>
+                  </a:lnTo>
+                  <a:lnTo>
+                    <a:pt x="71622" y="2299632"/>
+                  </a:lnTo>
+                  <a:lnTo>
+                    <a:pt x="0" y="2293362"/>
                   </a:lnTo>
                   <a:lnTo>
                     <a:pt x="0" y="0"/>
@@ -3501,177 +3492,168 @@
           </p:nvSpPr>
           <p:spPr>
             <a:xfrm>
-              <a:off x="4450515" y="2073503"/>
-              <a:ext cx="3812164" cy="2768836"/>
+              <a:off x="4621400" y="2073503"/>
+              <a:ext cx="3641278" cy="2778008"/>
             </a:xfrm>
             <a:custGeom>
               <a:avLst/>
               <a:pathLst>
-                <a:path w="3812164" h="2768836">
+                <a:path w="3641278" h="2778008">
                   <a:moveTo>
                     <a:pt x="0" y="0"/>
                   </a:moveTo>
                   <a:lnTo>
-                    <a:pt x="16170" y="50716"/>
-                  </a:lnTo>
-                  <a:lnTo>
-                    <a:pt x="87792" y="261558"/>
-                  </a:lnTo>
-                  <a:lnTo>
-                    <a:pt x="159415" y="459450"/>
-                  </a:lnTo>
-                  <a:lnTo>
-                    <a:pt x="231037" y="645189"/>
-                  </a:lnTo>
-                  <a:lnTo>
-                    <a:pt x="302660" y="819521"/>
-                  </a:lnTo>
-                  <a:lnTo>
-                    <a:pt x="374282" y="983146"/>
-                  </a:lnTo>
-                  <a:lnTo>
-                    <a:pt x="445905" y="1136722"/>
-                  </a:lnTo>
-                  <a:lnTo>
-                    <a:pt x="517527" y="1280866"/>
-                  </a:lnTo>
-                  <a:lnTo>
-                    <a:pt x="589150" y="1416158"/>
-                  </a:lnTo>
-                  <a:lnTo>
-                    <a:pt x="660772" y="1543140"/>
-                  </a:lnTo>
-                  <a:lnTo>
-                    <a:pt x="732395" y="1662323"/>
-                  </a:lnTo>
-                  <a:lnTo>
-                    <a:pt x="804017" y="1774187"/>
-                  </a:lnTo>
-                  <a:lnTo>
-                    <a:pt x="875640" y="1879181"/>
-                  </a:lnTo>
-                  <a:lnTo>
-                    <a:pt x="947262" y="1977726"/>
-                  </a:lnTo>
-                  <a:lnTo>
-                    <a:pt x="1018885" y="2070220"/>
-                  </a:lnTo>
-                  <a:lnTo>
-                    <a:pt x="1090508" y="2157032"/>
-                  </a:lnTo>
-                  <a:lnTo>
-                    <a:pt x="1162130" y="2238513"/>
-                  </a:lnTo>
-                  <a:lnTo>
-                    <a:pt x="1233753" y="2314990"/>
-                  </a:lnTo>
-                  <a:lnTo>
-                    <a:pt x="1305375" y="2386770"/>
-                  </a:lnTo>
-                  <a:lnTo>
-                    <a:pt x="1376998" y="2454141"/>
-                  </a:lnTo>
-                  <a:lnTo>
-                    <a:pt x="1448620" y="2517375"/>
-                  </a:lnTo>
-                  <a:lnTo>
-                    <a:pt x="1520243" y="2576726"/>
-                  </a:lnTo>
-                  <a:lnTo>
-                    <a:pt x="1591865" y="2632431"/>
-                  </a:lnTo>
-                  <a:lnTo>
-                    <a:pt x="1663488" y="2656656"/>
-                  </a:lnTo>
-                  <a:lnTo>
-                    <a:pt x="1735110" y="2660665"/>
-                  </a:lnTo>
-                  <a:lnTo>
-                    <a:pt x="1806733" y="2664654"/>
-                  </a:lnTo>
-                  <a:lnTo>
-                    <a:pt x="1878355" y="2668624"/>
-                  </a:lnTo>
-                  <a:lnTo>
-                    <a:pt x="1949978" y="2672575"/>
-                  </a:lnTo>
-                  <a:lnTo>
-                    <a:pt x="2021600" y="2676506"/>
-                  </a:lnTo>
-                  <a:lnTo>
-                    <a:pt x="2093223" y="2680419"/>
-                  </a:lnTo>
-                  <a:lnTo>
-                    <a:pt x="2164845" y="2684312"/>
-                  </a:lnTo>
-                  <a:lnTo>
-                    <a:pt x="2236468" y="2688187"/>
-                  </a:lnTo>
-                  <a:lnTo>
-                    <a:pt x="2308090" y="2692043"/>
-                  </a:lnTo>
-                  <a:lnTo>
-                    <a:pt x="2379713" y="2695880"/>
-                  </a:lnTo>
-                  <a:lnTo>
-                    <a:pt x="2451336" y="2699699"/>
-                  </a:lnTo>
-                  <a:lnTo>
-                    <a:pt x="2522958" y="2703499"/>
-                  </a:lnTo>
-                  <a:lnTo>
-                    <a:pt x="2594581" y="2707280"/>
-                  </a:lnTo>
-                  <a:lnTo>
-                    <a:pt x="2666203" y="2711044"/>
-                  </a:lnTo>
-                  <a:lnTo>
-                    <a:pt x="2737826" y="2714789"/>
-                  </a:lnTo>
-                  <a:lnTo>
-                    <a:pt x="2809448" y="2718516"/>
-                  </a:lnTo>
-                  <a:lnTo>
-                    <a:pt x="2881071" y="2722225"/>
-                  </a:lnTo>
-                  <a:lnTo>
-                    <a:pt x="2952693" y="2725916"/>
-                  </a:lnTo>
-                  <a:lnTo>
-                    <a:pt x="3024316" y="2729589"/>
-                  </a:lnTo>
-                  <a:lnTo>
-                    <a:pt x="3095938" y="2733244"/>
-                  </a:lnTo>
-                  <a:lnTo>
-                    <a:pt x="3167561" y="2736881"/>
-                  </a:lnTo>
-                  <a:lnTo>
-                    <a:pt x="3239183" y="2740501"/>
-                  </a:lnTo>
-                  <a:lnTo>
-                    <a:pt x="3310806" y="2744103"/>
-                  </a:lnTo>
-                  <a:lnTo>
-                    <a:pt x="3382428" y="2747688"/>
-                  </a:lnTo>
-                  <a:lnTo>
-                    <a:pt x="3454051" y="2751256"/>
-                  </a:lnTo>
-                  <a:lnTo>
-                    <a:pt x="3525673" y="2754806"/>
-                  </a:lnTo>
-                  <a:lnTo>
-                    <a:pt x="3597296" y="2758339"/>
-                  </a:lnTo>
-                  <a:lnTo>
-                    <a:pt x="3668918" y="2761855"/>
-                  </a:lnTo>
-                  <a:lnTo>
-                    <a:pt x="3740541" y="2765354"/>
-                  </a:lnTo>
-                  <a:lnTo>
-                    <a:pt x="3812164" y="2768836"/>
+                    <a:pt x="60152" y="202343"/>
+                  </a:lnTo>
+                  <a:lnTo>
+                    <a:pt x="131774" y="426790"/>
+                  </a:lnTo>
+                  <a:lnTo>
+                    <a:pt x="203397" y="635885"/>
+                  </a:lnTo>
+                  <a:lnTo>
+                    <a:pt x="275019" y="830678"/>
+                  </a:lnTo>
+                  <a:lnTo>
+                    <a:pt x="346642" y="1012148"/>
+                  </a:lnTo>
+                  <a:lnTo>
+                    <a:pt x="418265" y="1181205"/>
+                  </a:lnTo>
+                  <a:lnTo>
+                    <a:pt x="489887" y="1338698"/>
+                  </a:lnTo>
+                  <a:lnTo>
+                    <a:pt x="561510" y="1485419"/>
+                  </a:lnTo>
+                  <a:lnTo>
+                    <a:pt x="633132" y="1622104"/>
+                  </a:lnTo>
+                  <a:lnTo>
+                    <a:pt x="704755" y="1749440"/>
+                  </a:lnTo>
+                  <a:lnTo>
+                    <a:pt x="776377" y="1868067"/>
+                  </a:lnTo>
+                  <a:lnTo>
+                    <a:pt x="848000" y="1978579"/>
+                  </a:lnTo>
+                  <a:lnTo>
+                    <a:pt x="919622" y="2081532"/>
+                  </a:lnTo>
+                  <a:lnTo>
+                    <a:pt x="991245" y="2177443"/>
+                  </a:lnTo>
+                  <a:lnTo>
+                    <a:pt x="1062867" y="2266794"/>
+                  </a:lnTo>
+                  <a:lnTo>
+                    <a:pt x="1134490" y="2350033"/>
+                  </a:lnTo>
+                  <a:lnTo>
+                    <a:pt x="1206112" y="2427579"/>
+                  </a:lnTo>
+                  <a:lnTo>
+                    <a:pt x="1277735" y="2499821"/>
+                  </a:lnTo>
+                  <a:lnTo>
+                    <a:pt x="1349357" y="2567121"/>
+                  </a:lnTo>
+                  <a:lnTo>
+                    <a:pt x="1420980" y="2629818"/>
+                  </a:lnTo>
+                  <a:lnTo>
+                    <a:pt x="1492602" y="2656862"/>
+                  </a:lnTo>
+                  <a:lnTo>
+                    <a:pt x="1564225" y="2661217"/>
+                  </a:lnTo>
+                  <a:lnTo>
+                    <a:pt x="1635847" y="2665549"/>
+                  </a:lnTo>
+                  <a:lnTo>
+                    <a:pt x="1707470" y="2669858"/>
+                  </a:lnTo>
+                  <a:lnTo>
+                    <a:pt x="1779093" y="2674145"/>
+                  </a:lnTo>
+                  <a:lnTo>
+                    <a:pt x="1850715" y="2678409"/>
+                  </a:lnTo>
+                  <a:lnTo>
+                    <a:pt x="1922338" y="2682650"/>
+                  </a:lnTo>
+                  <a:lnTo>
+                    <a:pt x="1993960" y="2686869"/>
+                  </a:lnTo>
+                  <a:lnTo>
+                    <a:pt x="2065583" y="2691066"/>
+                  </a:lnTo>
+                  <a:lnTo>
+                    <a:pt x="2137205" y="2695241"/>
+                  </a:lnTo>
+                  <a:lnTo>
+                    <a:pt x="2208828" y="2699394"/>
+                  </a:lnTo>
+                  <a:lnTo>
+                    <a:pt x="2280450" y="2703525"/>
+                  </a:lnTo>
+                  <a:lnTo>
+                    <a:pt x="2352073" y="2707634"/>
+                  </a:lnTo>
+                  <a:lnTo>
+                    <a:pt x="2423695" y="2711722"/>
+                  </a:lnTo>
+                  <a:lnTo>
+                    <a:pt x="2495318" y="2715788"/>
+                  </a:lnTo>
+                  <a:lnTo>
+                    <a:pt x="2566940" y="2719833"/>
+                  </a:lnTo>
+                  <a:lnTo>
+                    <a:pt x="2638563" y="2723856"/>
+                  </a:lnTo>
+                  <a:lnTo>
+                    <a:pt x="2710185" y="2727858"/>
+                  </a:lnTo>
+                  <a:lnTo>
+                    <a:pt x="2781808" y="2731839"/>
+                  </a:lnTo>
+                  <a:lnTo>
+                    <a:pt x="2853430" y="2735799"/>
+                  </a:lnTo>
+                  <a:lnTo>
+                    <a:pt x="2925053" y="2739739"/>
+                  </a:lnTo>
+                  <a:lnTo>
+                    <a:pt x="2996675" y="2743657"/>
+                  </a:lnTo>
+                  <a:lnTo>
+                    <a:pt x="3068298" y="2747555"/>
+                  </a:lnTo>
+                  <a:lnTo>
+                    <a:pt x="3139921" y="2751432"/>
+                  </a:lnTo>
+                  <a:lnTo>
+                    <a:pt x="3211543" y="2755289"/>
+                  </a:lnTo>
+                  <a:lnTo>
+                    <a:pt x="3283166" y="2759126"/>
+                  </a:lnTo>
+                  <a:lnTo>
+                    <a:pt x="3354788" y="2762942"/>
+                  </a:lnTo>
+                  <a:lnTo>
+                    <a:pt x="3426411" y="2766739"/>
+                  </a:lnTo>
+                  <a:lnTo>
+                    <a:pt x="3498033" y="2770515"/>
+                  </a:lnTo>
+                  <a:lnTo>
+                    <a:pt x="3569656" y="2774271"/>
+                  </a:lnTo>
+                  <a:lnTo>
+                    <a:pt x="3641278" y="2778008"/>
                   </a:lnTo>
                 </a:path>
               </a:pathLst>
@@ -3691,309 +3673,309 @@
           </p:nvSpPr>
           <p:spPr>
             <a:xfrm>
-              <a:off x="1172049" y="4400750"/>
-              <a:ext cx="7090630" cy="1037165"/>
+              <a:off x="1172049" y="4366865"/>
+              <a:ext cx="7090630" cy="1095424"/>
             </a:xfrm>
             <a:custGeom>
               <a:avLst/>
               <a:pathLst>
-                <a:path w="7090630" h="1037165">
+                <a:path w="7090630" h="1095424">
                   <a:moveTo>
-                    <a:pt x="7090630" y="1037165"/>
+                    <a:pt x="7090630" y="1095424"/>
                   </a:moveTo>
                   <a:lnTo>
-                    <a:pt x="7019007" y="1029357"/>
-                  </a:lnTo>
-                  <a:lnTo>
-                    <a:pt x="6947385" y="1021037"/>
-                  </a:lnTo>
-                  <a:lnTo>
-                    <a:pt x="6875762" y="1012173"/>
-                  </a:lnTo>
-                  <a:lnTo>
-                    <a:pt x="6804139" y="1002730"/>
-                  </a:lnTo>
-                  <a:lnTo>
-                    <a:pt x="6732517" y="992668"/>
-                  </a:lnTo>
-                  <a:lnTo>
-                    <a:pt x="6660894" y="981948"/>
-                  </a:lnTo>
-                  <a:lnTo>
-                    <a:pt x="6589272" y="970526"/>
-                  </a:lnTo>
-                  <a:lnTo>
-                    <a:pt x="6517649" y="958357"/>
-                  </a:lnTo>
-                  <a:lnTo>
-                    <a:pt x="6446027" y="945392"/>
-                  </a:lnTo>
-                  <a:lnTo>
-                    <a:pt x="6374404" y="931578"/>
-                  </a:lnTo>
-                  <a:lnTo>
-                    <a:pt x="6302782" y="916860"/>
-                  </a:lnTo>
-                  <a:lnTo>
-                    <a:pt x="6231159" y="901180"/>
-                  </a:lnTo>
-                  <a:lnTo>
-                    <a:pt x="6159537" y="884473"/>
-                  </a:lnTo>
-                  <a:lnTo>
-                    <a:pt x="6087914" y="866673"/>
-                  </a:lnTo>
-                  <a:lnTo>
-                    <a:pt x="6016292" y="847709"/>
-                  </a:lnTo>
-                  <a:lnTo>
-                    <a:pt x="5944669" y="827503"/>
-                  </a:lnTo>
-                  <a:lnTo>
-                    <a:pt x="5873047" y="805976"/>
-                  </a:lnTo>
-                  <a:lnTo>
-                    <a:pt x="5801424" y="783039"/>
-                  </a:lnTo>
-                  <a:lnTo>
-                    <a:pt x="5729802" y="758602"/>
-                  </a:lnTo>
-                  <a:lnTo>
-                    <a:pt x="5658179" y="732566"/>
-                  </a:lnTo>
-                  <a:lnTo>
-                    <a:pt x="5586557" y="704826"/>
-                  </a:lnTo>
-                  <a:lnTo>
-                    <a:pt x="5514934" y="675272"/>
-                  </a:lnTo>
-                  <a:lnTo>
-                    <a:pt x="5443311" y="643783"/>
-                  </a:lnTo>
-                  <a:lnTo>
-                    <a:pt x="5371689" y="610234"/>
-                  </a:lnTo>
-                  <a:lnTo>
-                    <a:pt x="5300066" y="574489"/>
-                  </a:lnTo>
-                  <a:lnTo>
-                    <a:pt x="5228444" y="536406"/>
-                  </a:lnTo>
-                  <a:lnTo>
-                    <a:pt x="5156821" y="495830"/>
-                  </a:lnTo>
-                  <a:lnTo>
-                    <a:pt x="5085199" y="452600"/>
-                  </a:lnTo>
-                  <a:lnTo>
-                    <a:pt x="5013576" y="406541"/>
-                  </a:lnTo>
-                  <a:lnTo>
-                    <a:pt x="4941954" y="357468"/>
-                  </a:lnTo>
-                  <a:lnTo>
-                    <a:pt x="4870331" y="325380"/>
-                  </a:lnTo>
-                  <a:lnTo>
-                    <a:pt x="4798709" y="321333"/>
-                  </a:lnTo>
-                  <a:lnTo>
-                    <a:pt x="4727086" y="317265"/>
-                  </a:lnTo>
-                  <a:lnTo>
-                    <a:pt x="4655464" y="313178"/>
-                  </a:lnTo>
-                  <a:lnTo>
-                    <a:pt x="4583841" y="309070"/>
-                  </a:lnTo>
-                  <a:lnTo>
-                    <a:pt x="4512219" y="304943"/>
-                  </a:lnTo>
-                  <a:lnTo>
-                    <a:pt x="4440596" y="300796"/>
-                  </a:lnTo>
-                  <a:lnTo>
-                    <a:pt x="4368974" y="296628"/>
-                  </a:lnTo>
-                  <a:lnTo>
-                    <a:pt x="4297351" y="292440"/>
-                  </a:lnTo>
-                  <a:lnTo>
-                    <a:pt x="4225729" y="288232"/>
-                  </a:lnTo>
-                  <a:lnTo>
-                    <a:pt x="4154106" y="284003"/>
-                  </a:lnTo>
-                  <a:lnTo>
-                    <a:pt x="4082483" y="279754"/>
-                  </a:lnTo>
-                  <a:lnTo>
-                    <a:pt x="4010861" y="275484"/>
-                  </a:lnTo>
-                  <a:lnTo>
-                    <a:pt x="3939238" y="271193"/>
-                  </a:lnTo>
-                  <a:lnTo>
-                    <a:pt x="3867616" y="266881"/>
-                  </a:lnTo>
-                  <a:lnTo>
-                    <a:pt x="3795993" y="262548"/>
-                  </a:lnTo>
-                  <a:lnTo>
-                    <a:pt x="3724371" y="258195"/>
-                  </a:lnTo>
-                  <a:lnTo>
-                    <a:pt x="3652748" y="253819"/>
-                  </a:lnTo>
-                  <a:lnTo>
-                    <a:pt x="3581126" y="249423"/>
-                  </a:lnTo>
-                  <a:lnTo>
-                    <a:pt x="3509503" y="245005"/>
-                  </a:lnTo>
-                  <a:lnTo>
-                    <a:pt x="3437881" y="240566"/>
-                  </a:lnTo>
-                  <a:lnTo>
-                    <a:pt x="3366258" y="236105"/>
-                  </a:lnTo>
-                  <a:lnTo>
-                    <a:pt x="3294636" y="231622"/>
-                  </a:lnTo>
-                  <a:lnTo>
-                    <a:pt x="3223013" y="227118"/>
-                  </a:lnTo>
-                  <a:lnTo>
-                    <a:pt x="3151391" y="222592"/>
-                  </a:lnTo>
-                  <a:lnTo>
-                    <a:pt x="3079768" y="218043"/>
-                  </a:lnTo>
-                  <a:lnTo>
-                    <a:pt x="3008146" y="213472"/>
-                  </a:lnTo>
-                  <a:lnTo>
-                    <a:pt x="2936523" y="208880"/>
-                  </a:lnTo>
-                  <a:lnTo>
-                    <a:pt x="2864901" y="204264"/>
-                  </a:lnTo>
-                  <a:lnTo>
-                    <a:pt x="2793278" y="199627"/>
-                  </a:lnTo>
-                  <a:lnTo>
-                    <a:pt x="2721655" y="194966"/>
-                  </a:lnTo>
-                  <a:lnTo>
-                    <a:pt x="2650033" y="190283"/>
-                  </a:lnTo>
-                  <a:lnTo>
-                    <a:pt x="2578410" y="185577"/>
-                  </a:lnTo>
-                  <a:lnTo>
-                    <a:pt x="2506788" y="180849"/>
-                  </a:lnTo>
-                  <a:lnTo>
-                    <a:pt x="2435165" y="176097"/>
-                  </a:lnTo>
-                  <a:lnTo>
-                    <a:pt x="2363543" y="171322"/>
-                  </a:lnTo>
-                  <a:lnTo>
-                    <a:pt x="2291920" y="166524"/>
-                  </a:lnTo>
-                  <a:lnTo>
-                    <a:pt x="2220298" y="161702"/>
-                  </a:lnTo>
-                  <a:lnTo>
-                    <a:pt x="2148675" y="156857"/>
-                  </a:lnTo>
-                  <a:lnTo>
-                    <a:pt x="2077053" y="151989"/>
-                  </a:lnTo>
-                  <a:lnTo>
-                    <a:pt x="2005430" y="147096"/>
-                  </a:lnTo>
-                  <a:lnTo>
-                    <a:pt x="1933808" y="142180"/>
-                  </a:lnTo>
-                  <a:lnTo>
-                    <a:pt x="1862185" y="137240"/>
-                  </a:lnTo>
-                  <a:lnTo>
-                    <a:pt x="1790563" y="132276"/>
-                  </a:lnTo>
-                  <a:lnTo>
-                    <a:pt x="1718940" y="127288"/>
-                  </a:lnTo>
-                  <a:lnTo>
-                    <a:pt x="1647318" y="122275"/>
-                  </a:lnTo>
-                  <a:lnTo>
-                    <a:pt x="1575695" y="117238"/>
-                  </a:lnTo>
-                  <a:lnTo>
-                    <a:pt x="1504073" y="112176"/>
-                  </a:lnTo>
-                  <a:lnTo>
-                    <a:pt x="1432450" y="107090"/>
-                  </a:lnTo>
-                  <a:lnTo>
-                    <a:pt x="1360827" y="101979"/>
-                  </a:lnTo>
-                  <a:lnTo>
-                    <a:pt x="1289205" y="96843"/>
-                  </a:lnTo>
-                  <a:lnTo>
-                    <a:pt x="1217582" y="91682"/>
-                  </a:lnTo>
-                  <a:lnTo>
-                    <a:pt x="1145960" y="86496"/>
-                  </a:lnTo>
-                  <a:lnTo>
-                    <a:pt x="1074337" y="81285"/>
-                  </a:lnTo>
-                  <a:lnTo>
-                    <a:pt x="1002715" y="76048"/>
-                  </a:lnTo>
-                  <a:lnTo>
-                    <a:pt x="931092" y="70786"/>
-                  </a:lnTo>
-                  <a:lnTo>
-                    <a:pt x="859470" y="65498"/>
-                  </a:lnTo>
-                  <a:lnTo>
-                    <a:pt x="787847" y="60185"/>
-                  </a:lnTo>
-                  <a:lnTo>
-                    <a:pt x="716225" y="54845"/>
-                  </a:lnTo>
-                  <a:lnTo>
-                    <a:pt x="644602" y="49480"/>
-                  </a:lnTo>
-                  <a:lnTo>
-                    <a:pt x="572980" y="44088"/>
-                  </a:lnTo>
-                  <a:lnTo>
-                    <a:pt x="501357" y="38670"/>
-                  </a:lnTo>
-                  <a:lnTo>
-                    <a:pt x="429735" y="33226"/>
-                  </a:lnTo>
-                  <a:lnTo>
-                    <a:pt x="358112" y="27755"/>
-                  </a:lnTo>
-                  <a:lnTo>
-                    <a:pt x="286490" y="22258"/>
-                  </a:lnTo>
-                  <a:lnTo>
-                    <a:pt x="214867" y="16734"/>
-                  </a:lnTo>
-                  <a:lnTo>
-                    <a:pt x="143245" y="11183"/>
-                  </a:lnTo>
-                  <a:lnTo>
-                    <a:pt x="71622" y="5605"/>
+                    <a:pt x="7019007" y="1088452"/>
+                  </a:lnTo>
+                  <a:lnTo>
+                    <a:pt x="6947385" y="1080968"/>
+                  </a:lnTo>
+                  <a:lnTo>
+                    <a:pt x="6875762" y="1072935"/>
+                  </a:lnTo>
+                  <a:lnTo>
+                    <a:pt x="6804139" y="1064311"/>
+                  </a:lnTo>
+                  <a:lnTo>
+                    <a:pt x="6732517" y="1055055"/>
+                  </a:lnTo>
+                  <a:lnTo>
+                    <a:pt x="6660894" y="1045119"/>
+                  </a:lnTo>
+                  <a:lnTo>
+                    <a:pt x="6589272" y="1034453"/>
+                  </a:lnTo>
+                  <a:lnTo>
+                    <a:pt x="6517649" y="1023004"/>
+                  </a:lnTo>
+                  <a:lnTo>
+                    <a:pt x="6446027" y="1010715"/>
+                  </a:lnTo>
+                  <a:lnTo>
+                    <a:pt x="6374404" y="997524"/>
+                  </a:lnTo>
+                  <a:lnTo>
+                    <a:pt x="6302782" y="983363"/>
+                  </a:lnTo>
+                  <a:lnTo>
+                    <a:pt x="6231159" y="968164"/>
+                  </a:lnTo>
+                  <a:lnTo>
+                    <a:pt x="6159537" y="951848"/>
+                  </a:lnTo>
+                  <a:lnTo>
+                    <a:pt x="6087914" y="934334"/>
+                  </a:lnTo>
+                  <a:lnTo>
+                    <a:pt x="6016292" y="915534"/>
+                  </a:lnTo>
+                  <a:lnTo>
+                    <a:pt x="5944669" y="895354"/>
+                  </a:lnTo>
+                  <a:lnTo>
+                    <a:pt x="5873047" y="873693"/>
+                  </a:lnTo>
+                  <a:lnTo>
+                    <a:pt x="5801424" y="850441"/>
+                  </a:lnTo>
+                  <a:lnTo>
+                    <a:pt x="5729802" y="825482"/>
+                  </a:lnTo>
+                  <a:lnTo>
+                    <a:pt x="5658179" y="798690"/>
+                  </a:lnTo>
+                  <a:lnTo>
+                    <a:pt x="5586557" y="769931"/>
+                  </a:lnTo>
+                  <a:lnTo>
+                    <a:pt x="5514934" y="739061"/>
+                  </a:lnTo>
+                  <a:lnTo>
+                    <a:pt x="5443311" y="705924"/>
+                  </a:lnTo>
+                  <a:lnTo>
+                    <a:pt x="5371689" y="670354"/>
+                  </a:lnTo>
+                  <a:lnTo>
+                    <a:pt x="5300066" y="632172"/>
+                  </a:lnTo>
+                  <a:lnTo>
+                    <a:pt x="5228444" y="591187"/>
+                  </a:lnTo>
+                  <a:lnTo>
+                    <a:pt x="5156821" y="547193"/>
+                  </a:lnTo>
+                  <a:lnTo>
+                    <a:pt x="5085199" y="499969"/>
+                  </a:lnTo>
+                  <a:lnTo>
+                    <a:pt x="5013576" y="449277"/>
+                  </a:lnTo>
+                  <a:lnTo>
+                    <a:pt x="4941954" y="394864"/>
+                  </a:lnTo>
+                  <a:lnTo>
+                    <a:pt x="4870331" y="359121"/>
+                  </a:lnTo>
+                  <a:lnTo>
+                    <a:pt x="4798709" y="354720"/>
+                  </a:lnTo>
+                  <a:lnTo>
+                    <a:pt x="4727086" y="350295"/>
+                  </a:lnTo>
+                  <a:lnTo>
+                    <a:pt x="4655464" y="345847"/>
+                  </a:lnTo>
+                  <a:lnTo>
+                    <a:pt x="4583841" y="341376"/>
+                  </a:lnTo>
+                  <a:lnTo>
+                    <a:pt x="4512219" y="336881"/>
+                  </a:lnTo>
+                  <a:lnTo>
+                    <a:pt x="4440596" y="332362"/>
+                  </a:lnTo>
+                  <a:lnTo>
+                    <a:pt x="4368974" y="327819"/>
+                  </a:lnTo>
+                  <a:lnTo>
+                    <a:pt x="4297351" y="323252"/>
+                  </a:lnTo>
+                  <a:lnTo>
+                    <a:pt x="4225729" y="318661"/>
+                  </a:lnTo>
+                  <a:lnTo>
+                    <a:pt x="4154106" y="314045"/>
+                  </a:lnTo>
+                  <a:lnTo>
+                    <a:pt x="4082483" y="309405"/>
+                  </a:lnTo>
+                  <a:lnTo>
+                    <a:pt x="4010861" y="304741"/>
+                  </a:lnTo>
+                  <a:lnTo>
+                    <a:pt x="3939238" y="300052"/>
+                  </a:lnTo>
+                  <a:lnTo>
+                    <a:pt x="3867616" y="295338"/>
+                  </a:lnTo>
+                  <a:lnTo>
+                    <a:pt x="3795993" y="290599"/>
+                  </a:lnTo>
+                  <a:lnTo>
+                    <a:pt x="3724371" y="285835"/>
+                  </a:lnTo>
+                  <a:lnTo>
+                    <a:pt x="3652748" y="281045"/>
+                  </a:lnTo>
+                  <a:lnTo>
+                    <a:pt x="3581126" y="276231"/>
+                  </a:lnTo>
+                  <a:lnTo>
+                    <a:pt x="3509503" y="271391"/>
+                  </a:lnTo>
+                  <a:lnTo>
+                    <a:pt x="3437881" y="266525"/>
+                  </a:lnTo>
+                  <a:lnTo>
+                    <a:pt x="3366258" y="261633"/>
+                  </a:lnTo>
+                  <a:lnTo>
+                    <a:pt x="3294636" y="256716"/>
+                  </a:lnTo>
+                  <a:lnTo>
+                    <a:pt x="3223013" y="251773"/>
+                  </a:lnTo>
+                  <a:lnTo>
+                    <a:pt x="3151391" y="246803"/>
+                  </a:lnTo>
+                  <a:lnTo>
+                    <a:pt x="3079768" y="241807"/>
+                  </a:lnTo>
+                  <a:lnTo>
+                    <a:pt x="3008146" y="236785"/>
+                  </a:lnTo>
+                  <a:lnTo>
+                    <a:pt x="2936523" y="231736"/>
+                  </a:lnTo>
+                  <a:lnTo>
+                    <a:pt x="2864901" y="226660"/>
+                  </a:lnTo>
+                  <a:lnTo>
+                    <a:pt x="2793278" y="221557"/>
+                  </a:lnTo>
+                  <a:lnTo>
+                    <a:pt x="2721655" y="216428"/>
+                  </a:lnTo>
+                  <a:lnTo>
+                    <a:pt x="2650033" y="211271"/>
+                  </a:lnTo>
+                  <a:lnTo>
+                    <a:pt x="2578410" y="206087"/>
+                  </a:lnTo>
+                  <a:lnTo>
+                    <a:pt x="2506788" y="200876"/>
+                  </a:lnTo>
+                  <a:lnTo>
+                    <a:pt x="2435165" y="195637"/>
+                  </a:lnTo>
+                  <a:lnTo>
+                    <a:pt x="2363543" y="190370"/>
+                  </a:lnTo>
+                  <a:lnTo>
+                    <a:pt x="2291920" y="185075"/>
+                  </a:lnTo>
+                  <a:lnTo>
+                    <a:pt x="2220298" y="179752"/>
+                  </a:lnTo>
+                  <a:lnTo>
+                    <a:pt x="2148675" y="174401"/>
+                  </a:lnTo>
+                  <a:lnTo>
+                    <a:pt x="2077053" y="169022"/>
+                  </a:lnTo>
+                  <a:lnTo>
+                    <a:pt x="2005430" y="163614"/>
+                  </a:lnTo>
+                  <a:lnTo>
+                    <a:pt x="1933808" y="158178"/>
+                  </a:lnTo>
+                  <a:lnTo>
+                    <a:pt x="1862185" y="152713"/>
+                  </a:lnTo>
+                  <a:lnTo>
+                    <a:pt x="1790563" y="147219"/>
+                  </a:lnTo>
+                  <a:lnTo>
+                    <a:pt x="1718940" y="141696"/>
+                  </a:lnTo>
+                  <a:lnTo>
+                    <a:pt x="1647318" y="136143"/>
+                  </a:lnTo>
+                  <a:lnTo>
+                    <a:pt x="1575695" y="130561"/>
+                  </a:lnTo>
+                  <a:lnTo>
+                    <a:pt x="1504073" y="124950"/>
+                  </a:lnTo>
+                  <a:lnTo>
+                    <a:pt x="1432450" y="119309"/>
+                  </a:lnTo>
+                  <a:lnTo>
+                    <a:pt x="1360827" y="113638"/>
+                  </a:lnTo>
+                  <a:lnTo>
+                    <a:pt x="1289205" y="107937"/>
+                  </a:lnTo>
+                  <a:lnTo>
+                    <a:pt x="1217582" y="102206"/>
+                  </a:lnTo>
+                  <a:lnTo>
+                    <a:pt x="1145960" y="96444"/>
+                  </a:lnTo>
+                  <a:lnTo>
+                    <a:pt x="1074337" y="90652"/>
+                  </a:lnTo>
+                  <a:lnTo>
+                    <a:pt x="1002715" y="84830"/>
+                  </a:lnTo>
+                  <a:lnTo>
+                    <a:pt x="931092" y="78976"/>
+                  </a:lnTo>
+                  <a:lnTo>
+                    <a:pt x="859470" y="73092"/>
+                  </a:lnTo>
+                  <a:lnTo>
+                    <a:pt x="787847" y="67176"/>
+                  </a:lnTo>
+                  <a:lnTo>
+                    <a:pt x="716225" y="61229"/>
+                  </a:lnTo>
+                  <a:lnTo>
+                    <a:pt x="644602" y="55250"/>
+                  </a:lnTo>
+                  <a:lnTo>
+                    <a:pt x="572980" y="49240"/>
+                  </a:lnTo>
+                  <a:lnTo>
+                    <a:pt x="501357" y="43198"/>
+                  </a:lnTo>
+                  <a:lnTo>
+                    <a:pt x="429735" y="37124"/>
+                  </a:lnTo>
+                  <a:lnTo>
+                    <a:pt x="358112" y="31018"/>
+                  </a:lnTo>
+                  <a:lnTo>
+                    <a:pt x="286490" y="24880"/>
+                  </a:lnTo>
+                  <a:lnTo>
+                    <a:pt x="214867" y="18709"/>
+                  </a:lnTo>
+                  <a:lnTo>
+                    <a:pt x="143245" y="12505"/>
+                  </a:lnTo>
+                  <a:lnTo>
+                    <a:pt x="71622" y="6269"/>
                   </a:lnTo>
                   <a:lnTo>
                     <a:pt x="0" y="0"/>
@@ -4016,234 +3998,222 @@
           </p:nvSpPr>
           <p:spPr>
             <a:xfrm>
-              <a:off x="3059653" y="2073503"/>
-              <a:ext cx="5203025" cy="3191663"/>
+              <a:off x="3371890" y="2073503"/>
+              <a:ext cx="4890788" cy="3224871"/>
             </a:xfrm>
             <a:custGeom>
               <a:avLst/>
               <a:pathLst>
-                <a:path w="5203025" h="3191663">
+                <a:path w="4890788" h="3224871">
                   <a:moveTo>
                     <a:pt x="0" y="0"/>
                   </a:moveTo>
                   <a:lnTo>
-                    <a:pt x="46203" y="76296"/>
-                  </a:lnTo>
-                  <a:lnTo>
-                    <a:pt x="117826" y="190599"/>
-                  </a:lnTo>
-                  <a:lnTo>
-                    <a:pt x="189448" y="301067"/>
-                  </a:lnTo>
-                  <a:lnTo>
-                    <a:pt x="261071" y="407830"/>
-                  </a:lnTo>
-                  <a:lnTo>
-                    <a:pt x="332693" y="511012"/>
-                  </a:lnTo>
-                  <a:lnTo>
-                    <a:pt x="404316" y="610732"/>
-                  </a:lnTo>
-                  <a:lnTo>
-                    <a:pt x="475938" y="707107"/>
-                  </a:lnTo>
-                  <a:lnTo>
-                    <a:pt x="547561" y="800250"/>
-                  </a:lnTo>
-                  <a:lnTo>
-                    <a:pt x="619183" y="890268"/>
-                  </a:lnTo>
-                  <a:lnTo>
-                    <a:pt x="690806" y="977266"/>
-                  </a:lnTo>
-                  <a:lnTo>
-                    <a:pt x="762428" y="1061346"/>
-                  </a:lnTo>
-                  <a:lnTo>
-                    <a:pt x="834051" y="1142605"/>
-                  </a:lnTo>
-                  <a:lnTo>
-                    <a:pt x="905673" y="1221139"/>
-                  </a:lnTo>
-                  <a:lnTo>
-                    <a:pt x="977296" y="1297038"/>
-                  </a:lnTo>
-                  <a:lnTo>
-                    <a:pt x="1048918" y="1370391"/>
-                  </a:lnTo>
-                  <a:lnTo>
-                    <a:pt x="1120541" y="1441284"/>
-                  </a:lnTo>
-                  <a:lnTo>
-                    <a:pt x="1192164" y="1509798"/>
-                  </a:lnTo>
-                  <a:lnTo>
-                    <a:pt x="1263786" y="1576014"/>
-                  </a:lnTo>
-                  <a:lnTo>
-                    <a:pt x="1335409" y="1640009"/>
-                  </a:lnTo>
-                  <a:lnTo>
-                    <a:pt x="1407031" y="1701857"/>
-                  </a:lnTo>
-                  <a:lnTo>
-                    <a:pt x="1478654" y="1761631"/>
-                  </a:lnTo>
-                  <a:lnTo>
-                    <a:pt x="1550276" y="1819399"/>
-                  </a:lnTo>
-                  <a:lnTo>
-                    <a:pt x="1621899" y="1875229"/>
-                  </a:lnTo>
-                  <a:lnTo>
-                    <a:pt x="1693521" y="1929187"/>
-                  </a:lnTo>
-                  <a:lnTo>
-                    <a:pt x="1765144" y="1981335"/>
-                  </a:lnTo>
-                  <a:lnTo>
-                    <a:pt x="1836766" y="2031733"/>
-                  </a:lnTo>
-                  <a:lnTo>
-                    <a:pt x="1908389" y="2080441"/>
-                  </a:lnTo>
-                  <a:lnTo>
-                    <a:pt x="1980011" y="2127515"/>
-                  </a:lnTo>
-                  <a:lnTo>
-                    <a:pt x="2051634" y="2173010"/>
-                  </a:lnTo>
-                  <a:lnTo>
-                    <a:pt x="2123256" y="2216978"/>
-                  </a:lnTo>
-                  <a:lnTo>
-                    <a:pt x="2194879" y="2259472"/>
-                  </a:lnTo>
-                  <a:lnTo>
-                    <a:pt x="2266501" y="2300540"/>
-                  </a:lnTo>
-                  <a:lnTo>
-                    <a:pt x="2338124" y="2340231"/>
-                  </a:lnTo>
-                  <a:lnTo>
-                    <a:pt x="2409746" y="2378590"/>
-                  </a:lnTo>
-                  <a:lnTo>
-                    <a:pt x="2481369" y="2415663"/>
-                  </a:lnTo>
-                  <a:lnTo>
-                    <a:pt x="2552992" y="2451492"/>
-                  </a:lnTo>
-                  <a:lnTo>
-                    <a:pt x="2624614" y="2486119"/>
-                  </a:lnTo>
-                  <a:lnTo>
-                    <a:pt x="2696237" y="2519584"/>
-                  </a:lnTo>
-                  <a:lnTo>
-                    <a:pt x="2767859" y="2551927"/>
-                  </a:lnTo>
-                  <a:lnTo>
-                    <a:pt x="2839482" y="2583185"/>
-                  </a:lnTo>
-                  <a:lnTo>
-                    <a:pt x="2911104" y="2613394"/>
-                  </a:lnTo>
-                  <a:lnTo>
-                    <a:pt x="2982727" y="2642590"/>
-                  </a:lnTo>
-                  <a:lnTo>
-                    <a:pt x="3054349" y="2670807"/>
-                  </a:lnTo>
-                  <a:lnTo>
-                    <a:pt x="3125972" y="2698077"/>
-                  </a:lnTo>
-                  <a:lnTo>
-                    <a:pt x="3197594" y="2724432"/>
-                  </a:lnTo>
-                  <a:lnTo>
-                    <a:pt x="3269217" y="2749903"/>
-                  </a:lnTo>
-                  <a:lnTo>
-                    <a:pt x="3340839" y="2774520"/>
-                  </a:lnTo>
-                  <a:lnTo>
-                    <a:pt x="3412462" y="2798311"/>
-                  </a:lnTo>
-                  <a:lnTo>
-                    <a:pt x="3484084" y="2821304"/>
-                  </a:lnTo>
-                  <a:lnTo>
-                    <a:pt x="3555707" y="2843525"/>
-                  </a:lnTo>
-                  <a:lnTo>
-                    <a:pt x="3627329" y="2865002"/>
-                  </a:lnTo>
-                  <a:lnTo>
-                    <a:pt x="3698952" y="2885757"/>
-                  </a:lnTo>
-                  <a:lnTo>
-                    <a:pt x="3770574" y="2905817"/>
-                  </a:lnTo>
-                  <a:lnTo>
-                    <a:pt x="3842197" y="2925204"/>
-                  </a:lnTo>
-                  <a:lnTo>
-                    <a:pt x="3913820" y="2943940"/>
-                  </a:lnTo>
-                  <a:lnTo>
-                    <a:pt x="3985442" y="2962048"/>
-                  </a:lnTo>
-                  <a:lnTo>
-                    <a:pt x="4057065" y="2979548"/>
-                  </a:lnTo>
-                  <a:lnTo>
-                    <a:pt x="4128687" y="2996461"/>
-                  </a:lnTo>
-                  <a:lnTo>
-                    <a:pt x="4200310" y="3012807"/>
-                  </a:lnTo>
-                  <a:lnTo>
-                    <a:pt x="4271932" y="3028605"/>
-                  </a:lnTo>
-                  <a:lnTo>
-                    <a:pt x="4343555" y="3043873"/>
-                  </a:lnTo>
-                  <a:lnTo>
-                    <a:pt x="4415177" y="3058628"/>
-                  </a:lnTo>
-                  <a:lnTo>
-                    <a:pt x="4486800" y="3072889"/>
-                  </a:lnTo>
-                  <a:lnTo>
-                    <a:pt x="4558422" y="3086671"/>
-                  </a:lnTo>
-                  <a:lnTo>
-                    <a:pt x="4630045" y="3099991"/>
-                  </a:lnTo>
-                  <a:lnTo>
-                    <a:pt x="4701667" y="3112864"/>
-                  </a:lnTo>
-                  <a:lnTo>
-                    <a:pt x="4773290" y="3125305"/>
-                  </a:lnTo>
-                  <a:lnTo>
-                    <a:pt x="4844912" y="3137329"/>
-                  </a:lnTo>
-                  <a:lnTo>
-                    <a:pt x="4916535" y="3148950"/>
-                  </a:lnTo>
-                  <a:lnTo>
-                    <a:pt x="4988157" y="3160181"/>
-                  </a:lnTo>
-                  <a:lnTo>
-                    <a:pt x="5059780" y="3171035"/>
-                  </a:lnTo>
-                  <a:lnTo>
-                    <a:pt x="5131402" y="3181525"/>
-                  </a:lnTo>
-                  <a:lnTo>
-                    <a:pt x="5203025" y="3191663"/>
+                    <a:pt x="20457" y="38184"/>
+                  </a:lnTo>
+                  <a:lnTo>
+                    <a:pt x="92079" y="166878"/>
+                  </a:lnTo>
+                  <a:lnTo>
+                    <a:pt x="163702" y="290765"/>
+                  </a:lnTo>
+                  <a:lnTo>
+                    <a:pt x="235324" y="410025"/>
+                  </a:lnTo>
+                  <a:lnTo>
+                    <a:pt x="306947" y="524831"/>
+                  </a:lnTo>
+                  <a:lnTo>
+                    <a:pt x="378569" y="635349"/>
+                  </a:lnTo>
+                  <a:lnTo>
+                    <a:pt x="450192" y="741738"/>
+                  </a:lnTo>
+                  <a:lnTo>
+                    <a:pt x="521814" y="844154"/>
+                  </a:lnTo>
+                  <a:lnTo>
+                    <a:pt x="593437" y="942745"/>
+                  </a:lnTo>
+                  <a:lnTo>
+                    <a:pt x="665059" y="1037653"/>
+                  </a:lnTo>
+                  <a:lnTo>
+                    <a:pt x="736682" y="1129016"/>
+                  </a:lnTo>
+                  <a:lnTo>
+                    <a:pt x="808304" y="1216967"/>
+                  </a:lnTo>
+                  <a:lnTo>
+                    <a:pt x="879927" y="1301633"/>
+                  </a:lnTo>
+                  <a:lnTo>
+                    <a:pt x="951549" y="1383136"/>
+                  </a:lnTo>
+                  <a:lnTo>
+                    <a:pt x="1023172" y="1461596"/>
+                  </a:lnTo>
+                  <a:lnTo>
+                    <a:pt x="1094794" y="1537124"/>
+                  </a:lnTo>
+                  <a:lnTo>
+                    <a:pt x="1166417" y="1609832"/>
+                  </a:lnTo>
+                  <a:lnTo>
+                    <a:pt x="1238039" y="1679824"/>
+                  </a:lnTo>
+                  <a:lnTo>
+                    <a:pt x="1309662" y="1747202"/>
+                  </a:lnTo>
+                  <a:lnTo>
+                    <a:pt x="1381285" y="1812063"/>
+                  </a:lnTo>
+                  <a:lnTo>
+                    <a:pt x="1452907" y="1874502"/>
+                  </a:lnTo>
+                  <a:lnTo>
+                    <a:pt x="1524530" y="1934608"/>
+                  </a:lnTo>
+                  <a:lnTo>
+                    <a:pt x="1596152" y="1992469"/>
+                  </a:lnTo>
+                  <a:lnTo>
+                    <a:pt x="1667775" y="2048170"/>
+                  </a:lnTo>
+                  <a:lnTo>
+                    <a:pt x="1739397" y="2101789"/>
+                  </a:lnTo>
+                  <a:lnTo>
+                    <a:pt x="1811020" y="2153407"/>
+                  </a:lnTo>
+                  <a:lnTo>
+                    <a:pt x="1882642" y="2203096"/>
+                  </a:lnTo>
+                  <a:lnTo>
+                    <a:pt x="1954265" y="2250929"/>
+                  </a:lnTo>
+                  <a:lnTo>
+                    <a:pt x="2025887" y="2296975"/>
+                  </a:lnTo>
+                  <a:lnTo>
+                    <a:pt x="2097510" y="2341302"/>
+                  </a:lnTo>
+                  <a:lnTo>
+                    <a:pt x="2169132" y="2383973"/>
+                  </a:lnTo>
+                  <a:lnTo>
+                    <a:pt x="2240755" y="2425051"/>
+                  </a:lnTo>
+                  <a:lnTo>
+                    <a:pt x="2312377" y="2464594"/>
+                  </a:lnTo>
+                  <a:lnTo>
+                    <a:pt x="2384000" y="2502660"/>
+                  </a:lnTo>
+                  <a:lnTo>
+                    <a:pt x="2455622" y="2539304"/>
+                  </a:lnTo>
+                  <a:lnTo>
+                    <a:pt x="2527245" y="2574580"/>
+                  </a:lnTo>
+                  <a:lnTo>
+                    <a:pt x="2598867" y="2608538"/>
+                  </a:lnTo>
+                  <a:lnTo>
+                    <a:pt x="2670490" y="2641227"/>
+                  </a:lnTo>
+                  <a:lnTo>
+                    <a:pt x="2742113" y="2672696"/>
+                  </a:lnTo>
+                  <a:lnTo>
+                    <a:pt x="2813735" y="2702989"/>
+                  </a:lnTo>
+                  <a:lnTo>
+                    <a:pt x="2885358" y="2732151"/>
+                  </a:lnTo>
+                  <a:lnTo>
+                    <a:pt x="2956980" y="2760224"/>
+                  </a:lnTo>
+                  <a:lnTo>
+                    <a:pt x="3028603" y="2787248"/>
+                  </a:lnTo>
+                  <a:lnTo>
+                    <a:pt x="3100225" y="2813262"/>
+                  </a:lnTo>
+                  <a:lnTo>
+                    <a:pt x="3171848" y="2838306"/>
+                  </a:lnTo>
+                  <a:lnTo>
+                    <a:pt x="3243470" y="2862413"/>
+                  </a:lnTo>
+                  <a:lnTo>
+                    <a:pt x="3315093" y="2885620"/>
+                  </a:lnTo>
+                  <a:lnTo>
+                    <a:pt x="3386715" y="2907961"/>
+                  </a:lnTo>
+                  <a:lnTo>
+                    <a:pt x="3458338" y="2929467"/>
+                  </a:lnTo>
+                  <a:lnTo>
+                    <a:pt x="3529960" y="2950170"/>
+                  </a:lnTo>
+                  <a:lnTo>
+                    <a:pt x="3601583" y="2970099"/>
+                  </a:lnTo>
+                  <a:lnTo>
+                    <a:pt x="3673205" y="2989284"/>
+                  </a:lnTo>
+                  <a:lnTo>
+                    <a:pt x="3744828" y="3007753"/>
+                  </a:lnTo>
+                  <a:lnTo>
+                    <a:pt x="3816450" y="3025531"/>
+                  </a:lnTo>
+                  <a:lnTo>
+                    <a:pt x="3888073" y="3042646"/>
+                  </a:lnTo>
+                  <a:lnTo>
+                    <a:pt x="3959695" y="3059121"/>
+                  </a:lnTo>
+                  <a:lnTo>
+                    <a:pt x="4031318" y="3074981"/>
+                  </a:lnTo>
+                  <a:lnTo>
+                    <a:pt x="4102941" y="3090249"/>
+                  </a:lnTo>
+                  <a:lnTo>
+                    <a:pt x="4174563" y="3104947"/>
+                  </a:lnTo>
+                  <a:lnTo>
+                    <a:pt x="4246186" y="3119095"/>
+                  </a:lnTo>
+                  <a:lnTo>
+                    <a:pt x="4317808" y="3132715"/>
+                  </a:lnTo>
+                  <a:lnTo>
+                    <a:pt x="4389431" y="3145826"/>
+                  </a:lnTo>
+                  <a:lnTo>
+                    <a:pt x="4461053" y="3158448"/>
+                  </a:lnTo>
+                  <a:lnTo>
+                    <a:pt x="4532676" y="3170598"/>
+                  </a:lnTo>
+                  <a:lnTo>
+                    <a:pt x="4604298" y="3182294"/>
+                  </a:lnTo>
+                  <a:lnTo>
+                    <a:pt x="4675921" y="3193554"/>
+                  </a:lnTo>
+                  <a:lnTo>
+                    <a:pt x="4747543" y="3204393"/>
+                  </a:lnTo>
+                  <a:lnTo>
+                    <a:pt x="4819166" y="3214827"/>
+                  </a:lnTo>
+                  <a:lnTo>
+                    <a:pt x="4890788" y="3224871"/>
                   </a:lnTo>
                 </a:path>
               </a:pathLst>
@@ -4983,7 +4953,7 @@
                   <a:latin typeface="Helvetica"/>
                   <a:cs typeface="Helvetica"/>
                 </a:rPr>
-                <a:t>subHR per 1 mL/min: 0.96 (0.92-0.99)  |  per IQR (Δ = 18.2): 0.45 (0.23-0.89)  |  IQR: [-11.5, 6.7]</a:t>
+                <a:t>subHR per 1 mL/min: 0.95 (0.91-0.99)  |  per IQR (Δ = 18.2): 0.41 (0.19-0.88)  |  IQR: [-11.5, 6.7]</a:t>
               </a:r>
             </a:p>
           </p:txBody>

--- a/docs/plots/carbo/jx_carbo_linsubhr_egfrdisc_grade3.pptx
+++ b/docs/plots/carbo/jx_carbo_linsubhr_egfrdisc_grade3.pptx
@@ -3019,10 +3019,10 @@
                     <a:pt x="3581126" y="426790"/>
                   </a:lnTo>
                   <a:lnTo>
-                    <a:pt x="3652748" y="635885"/>
-                  </a:lnTo>
-                  <a:lnTo>
-                    <a:pt x="3724371" y="830678"/>
+                    <a:pt x="3652748" y="635886"/>
+                  </a:lnTo>
+                  <a:lnTo>
+                    <a:pt x="3724371" y="830679"/>
                   </a:lnTo>
                   <a:lnTo>
                     <a:pt x="3795993" y="1012148"/>
@@ -3118,7 +3118,7 @@
                     <a:pt x="5944669" y="2715788"/>
                   </a:lnTo>
                   <a:lnTo>
-                    <a:pt x="6016292" y="2719833"/>
+                    <a:pt x="6016292" y="2719832"/>
                   </a:lnTo>
                   <a:lnTo>
                     <a:pt x="6087914" y="2723856"/>
@@ -3133,7 +3133,7 @@
                     <a:pt x="6302782" y="2735799"/>
                   </a:lnTo>
                   <a:lnTo>
-                    <a:pt x="6374404" y="2739739"/>
+                    <a:pt x="6374404" y="2739738"/>
                   </a:lnTo>
                   <a:lnTo>
                     <a:pt x="6446027" y="2743657"/>
@@ -3148,22 +3148,22 @@
                     <a:pt x="6660894" y="2755289"/>
                   </a:lnTo>
                   <a:lnTo>
-                    <a:pt x="6732517" y="2759126"/>
+                    <a:pt x="6732517" y="2759125"/>
                   </a:lnTo>
                   <a:lnTo>
                     <a:pt x="6804139" y="2762942"/>
                   </a:lnTo>
                   <a:lnTo>
-                    <a:pt x="6875762" y="2766739"/>
-                  </a:lnTo>
-                  <a:lnTo>
-                    <a:pt x="6947385" y="2770515"/>
+                    <a:pt x="6875762" y="2766738"/>
+                  </a:lnTo>
+                  <a:lnTo>
+                    <a:pt x="6947385" y="2770514"/>
                   </a:lnTo>
                   <a:lnTo>
                     <a:pt x="7019007" y="2774271"/>
                   </a:lnTo>
                   <a:lnTo>
-                    <a:pt x="7090630" y="2778008"/>
+                    <a:pt x="7090630" y="2778007"/>
                   </a:lnTo>
                   <a:lnTo>
                     <a:pt x="7090630" y="3388787"/>
@@ -3274,10 +3274,10 @@
                     <a:pt x="4583841" y="2634739"/>
                   </a:lnTo>
                   <a:lnTo>
-                    <a:pt x="4512219" y="2630243"/>
-                  </a:lnTo>
-                  <a:lnTo>
-                    <a:pt x="4440596" y="2625724"/>
+                    <a:pt x="4512219" y="2630244"/>
+                  </a:lnTo>
+                  <a:lnTo>
+                    <a:pt x="4440596" y="2625725"/>
                   </a:lnTo>
                   <a:lnTo>
                     <a:pt x="4368974" y="2621182"/>
@@ -3286,7 +3286,7 @@
                     <a:pt x="4297351" y="2616615"/>
                   </a:lnTo>
                   <a:lnTo>
-                    <a:pt x="4225729" y="2612023"/>
+                    <a:pt x="4225729" y="2612024"/>
                   </a:lnTo>
                   <a:lnTo>
                     <a:pt x="4154106" y="2607408"/>
@@ -3298,19 +3298,19 @@
                     <a:pt x="4010861" y="2598104"/>
                   </a:lnTo>
                   <a:lnTo>
-                    <a:pt x="3939238" y="2593414"/>
-                  </a:lnTo>
-                  <a:lnTo>
-                    <a:pt x="3867616" y="2588700"/>
+                    <a:pt x="3939238" y="2593415"/>
+                  </a:lnTo>
+                  <a:lnTo>
+                    <a:pt x="3867616" y="2588701"/>
                   </a:lnTo>
                   <a:lnTo>
                     <a:pt x="3795993" y="2583962"/>
                   </a:lnTo>
                   <a:lnTo>
-                    <a:pt x="3724371" y="2579197"/>
-                  </a:lnTo>
-                  <a:lnTo>
-                    <a:pt x="3652748" y="2574408"/>
+                    <a:pt x="3724371" y="2579198"/>
+                  </a:lnTo>
+                  <a:lnTo>
+                    <a:pt x="3652748" y="2574409"/>
                   </a:lnTo>
                   <a:lnTo>
                     <a:pt x="3581126" y="2569594"/>
@@ -3322,13 +3322,13 @@
                     <a:pt x="3437881" y="2559888"/>
                   </a:lnTo>
                   <a:lnTo>
-                    <a:pt x="3366258" y="2554996"/>
+                    <a:pt x="3366258" y="2554997"/>
                   </a:lnTo>
                   <a:lnTo>
                     <a:pt x="3294636" y="2550079"/>
                   </a:lnTo>
                   <a:lnTo>
-                    <a:pt x="3223013" y="2545135"/>
+                    <a:pt x="3223013" y="2545136"/>
                   </a:lnTo>
                   <a:lnTo>
                     <a:pt x="3151391" y="2540166"/>
@@ -3346,124 +3346,124 @@
                     <a:pt x="2864901" y="2520023"/>
                   </a:lnTo>
                   <a:lnTo>
-                    <a:pt x="2793278" y="2514920"/>
+                    <a:pt x="2793278" y="2514921"/>
                   </a:lnTo>
                   <a:lnTo>
                     <a:pt x="2721655" y="2509791"/>
                   </a:lnTo>
                   <a:lnTo>
-                    <a:pt x="2650033" y="2504634"/>
-                  </a:lnTo>
-                  <a:lnTo>
-                    <a:pt x="2578410" y="2499450"/>
-                  </a:lnTo>
-                  <a:lnTo>
-                    <a:pt x="2506788" y="2494238"/>
-                  </a:lnTo>
-                  <a:lnTo>
-                    <a:pt x="2435165" y="2488999"/>
+                    <a:pt x="2650033" y="2504635"/>
+                  </a:lnTo>
+                  <a:lnTo>
+                    <a:pt x="2578410" y="2499451"/>
+                  </a:lnTo>
+                  <a:lnTo>
+                    <a:pt x="2506788" y="2494239"/>
+                  </a:lnTo>
+                  <a:lnTo>
+                    <a:pt x="2435165" y="2489000"/>
                   </a:lnTo>
                   <a:lnTo>
                     <a:pt x="2363543" y="2483733"/>
                   </a:lnTo>
                   <a:lnTo>
-                    <a:pt x="2291920" y="2478438"/>
-                  </a:lnTo>
-                  <a:lnTo>
-                    <a:pt x="2220298" y="2473115"/>
-                  </a:lnTo>
-                  <a:lnTo>
-                    <a:pt x="2148675" y="2467764"/>
-                  </a:lnTo>
-                  <a:lnTo>
-                    <a:pt x="2077053" y="2462385"/>
-                  </a:lnTo>
-                  <a:lnTo>
-                    <a:pt x="2005430" y="2456977"/>
-                  </a:lnTo>
-                  <a:lnTo>
-                    <a:pt x="1933808" y="2451541"/>
-                  </a:lnTo>
-                  <a:lnTo>
-                    <a:pt x="1862185" y="2446076"/>
-                  </a:lnTo>
-                  <a:lnTo>
-                    <a:pt x="1790563" y="2440582"/>
-                  </a:lnTo>
-                  <a:lnTo>
-                    <a:pt x="1718940" y="2435058"/>
-                  </a:lnTo>
-                  <a:lnTo>
-                    <a:pt x="1647318" y="2429506"/>
-                  </a:lnTo>
-                  <a:lnTo>
-                    <a:pt x="1575695" y="2423924"/>
-                  </a:lnTo>
-                  <a:lnTo>
-                    <a:pt x="1504073" y="2418313"/>
-                  </a:lnTo>
-                  <a:lnTo>
-                    <a:pt x="1432450" y="2412672"/>
-                  </a:lnTo>
-                  <a:lnTo>
-                    <a:pt x="1360827" y="2407001"/>
-                  </a:lnTo>
-                  <a:lnTo>
-                    <a:pt x="1289205" y="2401300"/>
-                  </a:lnTo>
-                  <a:lnTo>
-                    <a:pt x="1217582" y="2395569"/>
-                  </a:lnTo>
-                  <a:lnTo>
-                    <a:pt x="1145960" y="2389807"/>
-                  </a:lnTo>
-                  <a:lnTo>
-                    <a:pt x="1074337" y="2384015"/>
-                  </a:lnTo>
-                  <a:lnTo>
-                    <a:pt x="1002715" y="2378192"/>
-                  </a:lnTo>
-                  <a:lnTo>
-                    <a:pt x="931092" y="2372339"/>
-                  </a:lnTo>
-                  <a:lnTo>
-                    <a:pt x="859470" y="2366454"/>
-                  </a:lnTo>
-                  <a:lnTo>
-                    <a:pt x="787847" y="2360539"/>
-                  </a:lnTo>
-                  <a:lnTo>
-                    <a:pt x="716225" y="2354592"/>
-                  </a:lnTo>
-                  <a:lnTo>
-                    <a:pt x="644602" y="2348613"/>
-                  </a:lnTo>
-                  <a:lnTo>
-                    <a:pt x="572980" y="2342603"/>
-                  </a:lnTo>
-                  <a:lnTo>
-                    <a:pt x="501357" y="2336561"/>
-                  </a:lnTo>
-                  <a:lnTo>
-                    <a:pt x="429735" y="2330487"/>
-                  </a:lnTo>
-                  <a:lnTo>
-                    <a:pt x="358112" y="2324381"/>
-                  </a:lnTo>
-                  <a:lnTo>
-                    <a:pt x="286490" y="2318243"/>
-                  </a:lnTo>
-                  <a:lnTo>
-                    <a:pt x="214867" y="2312072"/>
-                  </a:lnTo>
-                  <a:lnTo>
-                    <a:pt x="143245" y="2305868"/>
-                  </a:lnTo>
-                  <a:lnTo>
-                    <a:pt x="71622" y="2299632"/>
-                  </a:lnTo>
-                  <a:lnTo>
-                    <a:pt x="0" y="2293362"/>
+                    <a:pt x="2291920" y="2478439"/>
+                  </a:lnTo>
+                  <a:lnTo>
+                    <a:pt x="2220298" y="2473116"/>
+                  </a:lnTo>
+                  <a:lnTo>
+                    <a:pt x="2148675" y="2467765"/>
+                  </a:lnTo>
+                  <a:lnTo>
+                    <a:pt x="2077053" y="2462386"/>
+                  </a:lnTo>
+                  <a:lnTo>
+                    <a:pt x="2005430" y="2456978"/>
+                  </a:lnTo>
+                  <a:lnTo>
+                    <a:pt x="1933808" y="2451542"/>
+                  </a:lnTo>
+                  <a:lnTo>
+                    <a:pt x="1862185" y="2446077"/>
+                  </a:lnTo>
+                  <a:lnTo>
+                    <a:pt x="1790563" y="2440583"/>
+                  </a:lnTo>
+                  <a:lnTo>
+                    <a:pt x="1718940" y="2435059"/>
+                  </a:lnTo>
+                  <a:lnTo>
+                    <a:pt x="1647318" y="2429507"/>
+                  </a:lnTo>
+                  <a:lnTo>
+                    <a:pt x="1575695" y="2423925"/>
+                  </a:lnTo>
+                  <a:lnTo>
+                    <a:pt x="1504073" y="2418314"/>
+                  </a:lnTo>
+                  <a:lnTo>
+                    <a:pt x="1432450" y="2412673"/>
+                  </a:lnTo>
+                  <a:lnTo>
+                    <a:pt x="1360827" y="2407002"/>
+                  </a:lnTo>
+                  <a:lnTo>
+                    <a:pt x="1289205" y="2401301"/>
+                  </a:lnTo>
+                  <a:lnTo>
+                    <a:pt x="1217582" y="2395570"/>
+                  </a:lnTo>
+                  <a:lnTo>
+                    <a:pt x="1145960" y="2389808"/>
+                  </a:lnTo>
+                  <a:lnTo>
+                    <a:pt x="1074337" y="2384016"/>
+                  </a:lnTo>
+                  <a:lnTo>
+                    <a:pt x="1002715" y="2378194"/>
+                  </a:lnTo>
+                  <a:lnTo>
+                    <a:pt x="931092" y="2372340"/>
+                  </a:lnTo>
+                  <a:lnTo>
+                    <a:pt x="859470" y="2366456"/>
+                  </a:lnTo>
+                  <a:lnTo>
+                    <a:pt x="787847" y="2360540"/>
+                  </a:lnTo>
+                  <a:lnTo>
+                    <a:pt x="716225" y="2354593"/>
+                  </a:lnTo>
+                  <a:lnTo>
+                    <a:pt x="644602" y="2348615"/>
+                  </a:lnTo>
+                  <a:lnTo>
+                    <a:pt x="572980" y="2342605"/>
+                  </a:lnTo>
+                  <a:lnTo>
+                    <a:pt x="501357" y="2336563"/>
+                  </a:lnTo>
+                  <a:lnTo>
+                    <a:pt x="429735" y="2330489"/>
+                  </a:lnTo>
+                  <a:lnTo>
+                    <a:pt x="358112" y="2324383"/>
+                  </a:lnTo>
+                  <a:lnTo>
+                    <a:pt x="286490" y="2318244"/>
+                  </a:lnTo>
+                  <a:lnTo>
+                    <a:pt x="214867" y="2312073"/>
+                  </a:lnTo>
+                  <a:lnTo>
+                    <a:pt x="143245" y="2305870"/>
+                  </a:lnTo>
+                  <a:lnTo>
+                    <a:pt x="71622" y="2299633"/>
+                  </a:lnTo>
+                  <a:lnTo>
+                    <a:pt x="0" y="2293364"/>
                   </a:lnTo>
                   <a:lnTo>
                     <a:pt x="0" y="0"/>
@@ -3493,12 +3493,12 @@
           <p:spPr>
             <a:xfrm>
               <a:off x="4621400" y="2073503"/>
-              <a:ext cx="3641278" cy="2778008"/>
+              <a:ext cx="3641278" cy="2778007"/>
             </a:xfrm>
             <a:custGeom>
               <a:avLst/>
               <a:pathLst>
-                <a:path w="3641278" h="2778008">
+                <a:path w="3641278" h="2778007">
                   <a:moveTo>
                     <a:pt x="0" y="0"/>
                   </a:moveTo>
@@ -3506,13 +3506,13 @@
                     <a:pt x="60152" y="202343"/>
                   </a:lnTo>
                   <a:lnTo>
-                    <a:pt x="131774" y="426790"/>
-                  </a:lnTo>
-                  <a:lnTo>
-                    <a:pt x="203397" y="635885"/>
-                  </a:lnTo>
-                  <a:lnTo>
-                    <a:pt x="275019" y="830678"/>
+                    <a:pt x="131775" y="426790"/>
+                  </a:lnTo>
+                  <a:lnTo>
+                    <a:pt x="203397" y="635886"/>
+                  </a:lnTo>
+                  <a:lnTo>
+                    <a:pt x="275020" y="830679"/>
                   </a:lnTo>
                   <a:lnTo>
                     <a:pt x="346642" y="1012148"/>
@@ -3563,13 +3563,13 @@
                     <a:pt x="1420980" y="2629818"/>
                   </a:lnTo>
                   <a:lnTo>
-                    <a:pt x="1492602" y="2656862"/>
+                    <a:pt x="1492603" y="2656862"/>
                   </a:lnTo>
                   <a:lnTo>
                     <a:pt x="1564225" y="2661217"/>
                   </a:lnTo>
                   <a:lnTo>
-                    <a:pt x="1635847" y="2665549"/>
+                    <a:pt x="1635848" y="2665549"/>
                   </a:lnTo>
                   <a:lnTo>
                     <a:pt x="1707470" y="2669858"/>
@@ -3608,7 +3608,7 @@
                     <a:pt x="2495318" y="2715788"/>
                   </a:lnTo>
                   <a:lnTo>
-                    <a:pt x="2566940" y="2719833"/>
+                    <a:pt x="2566940" y="2719832"/>
                   </a:lnTo>
                   <a:lnTo>
                     <a:pt x="2638563" y="2723856"/>
@@ -3620,13 +3620,13 @@
                     <a:pt x="2781808" y="2731839"/>
                   </a:lnTo>
                   <a:lnTo>
-                    <a:pt x="2853430" y="2735799"/>
-                  </a:lnTo>
-                  <a:lnTo>
-                    <a:pt x="2925053" y="2739739"/>
-                  </a:lnTo>
-                  <a:lnTo>
-                    <a:pt x="2996675" y="2743657"/>
+                    <a:pt x="2853431" y="2735799"/>
+                  </a:lnTo>
+                  <a:lnTo>
+                    <a:pt x="2925053" y="2739738"/>
+                  </a:lnTo>
+                  <a:lnTo>
+                    <a:pt x="2996676" y="2743657"/>
                   </a:lnTo>
                   <a:lnTo>
                     <a:pt x="3068298" y="2747555"/>
@@ -3638,22 +3638,22 @@
                     <a:pt x="3211543" y="2755289"/>
                   </a:lnTo>
                   <a:lnTo>
-                    <a:pt x="3283166" y="2759126"/>
+                    <a:pt x="3283166" y="2759125"/>
                   </a:lnTo>
                   <a:lnTo>
                     <a:pt x="3354788" y="2762942"/>
                   </a:lnTo>
                   <a:lnTo>
-                    <a:pt x="3426411" y="2766739"/>
-                  </a:lnTo>
-                  <a:lnTo>
-                    <a:pt x="3498033" y="2770515"/>
+                    <a:pt x="3426411" y="2766738"/>
+                  </a:lnTo>
+                  <a:lnTo>
+                    <a:pt x="3498033" y="2770514"/>
                   </a:lnTo>
                   <a:lnTo>
                     <a:pt x="3569656" y="2774271"/>
                   </a:lnTo>
                   <a:lnTo>
-                    <a:pt x="3641278" y="2778008"/>
+                    <a:pt x="3641278" y="2778007"/>
                   </a:lnTo>
                 </a:path>
               </a:pathLst>
@@ -3673,261 +3673,261 @@
           </p:nvSpPr>
           <p:spPr>
             <a:xfrm>
-              <a:off x="1172049" y="4366865"/>
-              <a:ext cx="7090630" cy="1095424"/>
+              <a:off x="1172049" y="4366867"/>
+              <a:ext cx="7090630" cy="1095422"/>
             </a:xfrm>
             <a:custGeom>
               <a:avLst/>
               <a:pathLst>
-                <a:path w="7090630" h="1095424">
+                <a:path w="7090630" h="1095422">
                   <a:moveTo>
-                    <a:pt x="7090630" y="1095424"/>
+                    <a:pt x="7090630" y="1095422"/>
                   </a:moveTo>
                   <a:lnTo>
-                    <a:pt x="7019007" y="1088452"/>
-                  </a:lnTo>
-                  <a:lnTo>
-                    <a:pt x="6947385" y="1080968"/>
-                  </a:lnTo>
-                  <a:lnTo>
-                    <a:pt x="6875762" y="1072935"/>
-                  </a:lnTo>
-                  <a:lnTo>
-                    <a:pt x="6804139" y="1064311"/>
-                  </a:lnTo>
-                  <a:lnTo>
-                    <a:pt x="6732517" y="1055055"/>
-                  </a:lnTo>
-                  <a:lnTo>
-                    <a:pt x="6660894" y="1045119"/>
-                  </a:lnTo>
-                  <a:lnTo>
-                    <a:pt x="6589272" y="1034453"/>
-                  </a:lnTo>
-                  <a:lnTo>
-                    <a:pt x="6517649" y="1023004"/>
-                  </a:lnTo>
-                  <a:lnTo>
-                    <a:pt x="6446027" y="1010715"/>
-                  </a:lnTo>
-                  <a:lnTo>
-                    <a:pt x="6374404" y="997524"/>
-                  </a:lnTo>
-                  <a:lnTo>
-                    <a:pt x="6302782" y="983363"/>
-                  </a:lnTo>
-                  <a:lnTo>
-                    <a:pt x="6231159" y="968164"/>
-                  </a:lnTo>
-                  <a:lnTo>
-                    <a:pt x="6159537" y="951848"/>
-                  </a:lnTo>
-                  <a:lnTo>
-                    <a:pt x="6087914" y="934334"/>
-                  </a:lnTo>
-                  <a:lnTo>
-                    <a:pt x="6016292" y="915534"/>
-                  </a:lnTo>
-                  <a:lnTo>
-                    <a:pt x="5944669" y="895354"/>
-                  </a:lnTo>
-                  <a:lnTo>
-                    <a:pt x="5873047" y="873693"/>
-                  </a:lnTo>
-                  <a:lnTo>
-                    <a:pt x="5801424" y="850441"/>
-                  </a:lnTo>
-                  <a:lnTo>
-                    <a:pt x="5729802" y="825482"/>
-                  </a:lnTo>
-                  <a:lnTo>
-                    <a:pt x="5658179" y="798690"/>
-                  </a:lnTo>
-                  <a:lnTo>
-                    <a:pt x="5586557" y="769931"/>
-                  </a:lnTo>
-                  <a:lnTo>
-                    <a:pt x="5514934" y="739061"/>
-                  </a:lnTo>
-                  <a:lnTo>
-                    <a:pt x="5443311" y="705924"/>
-                  </a:lnTo>
-                  <a:lnTo>
-                    <a:pt x="5371689" y="670354"/>
-                  </a:lnTo>
-                  <a:lnTo>
-                    <a:pt x="5300066" y="632172"/>
-                  </a:lnTo>
-                  <a:lnTo>
-                    <a:pt x="5228444" y="591187"/>
-                  </a:lnTo>
-                  <a:lnTo>
-                    <a:pt x="5156821" y="547193"/>
-                  </a:lnTo>
-                  <a:lnTo>
-                    <a:pt x="5085199" y="499969"/>
-                  </a:lnTo>
-                  <a:lnTo>
-                    <a:pt x="5013576" y="449277"/>
-                  </a:lnTo>
-                  <a:lnTo>
-                    <a:pt x="4941954" y="394864"/>
-                  </a:lnTo>
-                  <a:lnTo>
-                    <a:pt x="4870331" y="359121"/>
-                  </a:lnTo>
-                  <a:lnTo>
-                    <a:pt x="4798709" y="354720"/>
-                  </a:lnTo>
-                  <a:lnTo>
-                    <a:pt x="4727086" y="350295"/>
-                  </a:lnTo>
-                  <a:lnTo>
-                    <a:pt x="4655464" y="345847"/>
-                  </a:lnTo>
-                  <a:lnTo>
-                    <a:pt x="4583841" y="341376"/>
-                  </a:lnTo>
-                  <a:lnTo>
-                    <a:pt x="4512219" y="336881"/>
-                  </a:lnTo>
-                  <a:lnTo>
-                    <a:pt x="4440596" y="332362"/>
-                  </a:lnTo>
-                  <a:lnTo>
-                    <a:pt x="4368974" y="327819"/>
-                  </a:lnTo>
-                  <a:lnTo>
-                    <a:pt x="4297351" y="323252"/>
-                  </a:lnTo>
-                  <a:lnTo>
-                    <a:pt x="4225729" y="318661"/>
-                  </a:lnTo>
-                  <a:lnTo>
-                    <a:pt x="4154106" y="314045"/>
-                  </a:lnTo>
-                  <a:lnTo>
-                    <a:pt x="4082483" y="309405"/>
-                  </a:lnTo>
-                  <a:lnTo>
-                    <a:pt x="4010861" y="304741"/>
-                  </a:lnTo>
-                  <a:lnTo>
-                    <a:pt x="3939238" y="300052"/>
-                  </a:lnTo>
-                  <a:lnTo>
-                    <a:pt x="3867616" y="295338"/>
-                  </a:lnTo>
-                  <a:lnTo>
-                    <a:pt x="3795993" y="290599"/>
-                  </a:lnTo>
-                  <a:lnTo>
-                    <a:pt x="3724371" y="285835"/>
-                  </a:lnTo>
-                  <a:lnTo>
-                    <a:pt x="3652748" y="281045"/>
-                  </a:lnTo>
-                  <a:lnTo>
-                    <a:pt x="3581126" y="276231"/>
-                  </a:lnTo>
-                  <a:lnTo>
-                    <a:pt x="3509503" y="271391"/>
-                  </a:lnTo>
-                  <a:lnTo>
-                    <a:pt x="3437881" y="266525"/>
-                  </a:lnTo>
-                  <a:lnTo>
-                    <a:pt x="3366258" y="261633"/>
-                  </a:lnTo>
-                  <a:lnTo>
-                    <a:pt x="3294636" y="256716"/>
-                  </a:lnTo>
-                  <a:lnTo>
-                    <a:pt x="3223013" y="251773"/>
-                  </a:lnTo>
-                  <a:lnTo>
-                    <a:pt x="3151391" y="246803"/>
-                  </a:lnTo>
-                  <a:lnTo>
-                    <a:pt x="3079768" y="241807"/>
-                  </a:lnTo>
-                  <a:lnTo>
-                    <a:pt x="3008146" y="236785"/>
-                  </a:lnTo>
-                  <a:lnTo>
-                    <a:pt x="2936523" y="231736"/>
-                  </a:lnTo>
-                  <a:lnTo>
-                    <a:pt x="2864901" y="226660"/>
-                  </a:lnTo>
-                  <a:lnTo>
-                    <a:pt x="2793278" y="221557"/>
-                  </a:lnTo>
-                  <a:lnTo>
-                    <a:pt x="2721655" y="216428"/>
-                  </a:lnTo>
-                  <a:lnTo>
-                    <a:pt x="2650033" y="211271"/>
-                  </a:lnTo>
-                  <a:lnTo>
-                    <a:pt x="2578410" y="206087"/>
-                  </a:lnTo>
-                  <a:lnTo>
-                    <a:pt x="2506788" y="200876"/>
-                  </a:lnTo>
-                  <a:lnTo>
-                    <a:pt x="2435165" y="195637"/>
-                  </a:lnTo>
-                  <a:lnTo>
-                    <a:pt x="2363543" y="190370"/>
-                  </a:lnTo>
-                  <a:lnTo>
-                    <a:pt x="2291920" y="185075"/>
-                  </a:lnTo>
-                  <a:lnTo>
-                    <a:pt x="2220298" y="179752"/>
-                  </a:lnTo>
-                  <a:lnTo>
-                    <a:pt x="2148675" y="174401"/>
-                  </a:lnTo>
-                  <a:lnTo>
-                    <a:pt x="2077053" y="169022"/>
-                  </a:lnTo>
-                  <a:lnTo>
-                    <a:pt x="2005430" y="163614"/>
-                  </a:lnTo>
-                  <a:lnTo>
-                    <a:pt x="1933808" y="158178"/>
-                  </a:lnTo>
-                  <a:lnTo>
-                    <a:pt x="1862185" y="152713"/>
-                  </a:lnTo>
-                  <a:lnTo>
-                    <a:pt x="1790563" y="147219"/>
-                  </a:lnTo>
-                  <a:lnTo>
-                    <a:pt x="1718940" y="141696"/>
-                  </a:lnTo>
-                  <a:lnTo>
-                    <a:pt x="1647318" y="136143"/>
+                    <a:pt x="7019007" y="1088450"/>
+                  </a:lnTo>
+                  <a:lnTo>
+                    <a:pt x="6947385" y="1080966"/>
+                  </a:lnTo>
+                  <a:lnTo>
+                    <a:pt x="6875762" y="1072933"/>
+                  </a:lnTo>
+                  <a:lnTo>
+                    <a:pt x="6804139" y="1064310"/>
+                  </a:lnTo>
+                  <a:lnTo>
+                    <a:pt x="6732517" y="1055053"/>
+                  </a:lnTo>
+                  <a:lnTo>
+                    <a:pt x="6660894" y="1045117"/>
+                  </a:lnTo>
+                  <a:lnTo>
+                    <a:pt x="6589272" y="1034451"/>
+                  </a:lnTo>
+                  <a:lnTo>
+                    <a:pt x="6517649" y="1023003"/>
+                  </a:lnTo>
+                  <a:lnTo>
+                    <a:pt x="6446027" y="1010713"/>
+                  </a:lnTo>
+                  <a:lnTo>
+                    <a:pt x="6374404" y="997522"/>
+                  </a:lnTo>
+                  <a:lnTo>
+                    <a:pt x="6302782" y="983362"/>
+                  </a:lnTo>
+                  <a:lnTo>
+                    <a:pt x="6231159" y="968162"/>
+                  </a:lnTo>
+                  <a:lnTo>
+                    <a:pt x="6159537" y="951846"/>
+                  </a:lnTo>
+                  <a:lnTo>
+                    <a:pt x="6087914" y="934332"/>
+                  </a:lnTo>
+                  <a:lnTo>
+                    <a:pt x="6016292" y="915533"/>
+                  </a:lnTo>
+                  <a:lnTo>
+                    <a:pt x="5944669" y="895353"/>
+                  </a:lnTo>
+                  <a:lnTo>
+                    <a:pt x="5873047" y="873691"/>
+                  </a:lnTo>
+                  <a:lnTo>
+                    <a:pt x="5801424" y="850439"/>
+                  </a:lnTo>
+                  <a:lnTo>
+                    <a:pt x="5729802" y="825480"/>
+                  </a:lnTo>
+                  <a:lnTo>
+                    <a:pt x="5658179" y="798688"/>
+                  </a:lnTo>
+                  <a:lnTo>
+                    <a:pt x="5586557" y="769929"/>
+                  </a:lnTo>
+                  <a:lnTo>
+                    <a:pt x="5514934" y="739059"/>
+                  </a:lnTo>
+                  <a:lnTo>
+                    <a:pt x="5443311" y="705922"/>
+                  </a:lnTo>
+                  <a:lnTo>
+                    <a:pt x="5371689" y="670352"/>
+                  </a:lnTo>
+                  <a:lnTo>
+                    <a:pt x="5300066" y="632170"/>
+                  </a:lnTo>
+                  <a:lnTo>
+                    <a:pt x="5228444" y="591185"/>
+                  </a:lnTo>
+                  <a:lnTo>
+                    <a:pt x="5156821" y="547191"/>
+                  </a:lnTo>
+                  <a:lnTo>
+                    <a:pt x="5085199" y="499967"/>
+                  </a:lnTo>
+                  <a:lnTo>
+                    <a:pt x="5013576" y="449276"/>
+                  </a:lnTo>
+                  <a:lnTo>
+                    <a:pt x="4941954" y="394862"/>
+                  </a:lnTo>
+                  <a:lnTo>
+                    <a:pt x="4870331" y="359119"/>
+                  </a:lnTo>
+                  <a:lnTo>
+                    <a:pt x="4798709" y="354718"/>
+                  </a:lnTo>
+                  <a:lnTo>
+                    <a:pt x="4727086" y="350294"/>
+                  </a:lnTo>
+                  <a:lnTo>
+                    <a:pt x="4655464" y="345846"/>
+                  </a:lnTo>
+                  <a:lnTo>
+                    <a:pt x="4583841" y="341374"/>
+                  </a:lnTo>
+                  <a:lnTo>
+                    <a:pt x="4512219" y="336879"/>
+                  </a:lnTo>
+                  <a:lnTo>
+                    <a:pt x="4440596" y="332360"/>
+                  </a:lnTo>
+                  <a:lnTo>
+                    <a:pt x="4368974" y="327817"/>
+                  </a:lnTo>
+                  <a:lnTo>
+                    <a:pt x="4297351" y="323250"/>
+                  </a:lnTo>
+                  <a:lnTo>
+                    <a:pt x="4225729" y="318659"/>
+                  </a:lnTo>
+                  <a:lnTo>
+                    <a:pt x="4154106" y="314044"/>
+                  </a:lnTo>
+                  <a:lnTo>
+                    <a:pt x="4082483" y="309404"/>
+                  </a:lnTo>
+                  <a:lnTo>
+                    <a:pt x="4010861" y="304739"/>
+                  </a:lnTo>
+                  <a:lnTo>
+                    <a:pt x="3939238" y="300050"/>
+                  </a:lnTo>
+                  <a:lnTo>
+                    <a:pt x="3867616" y="295336"/>
+                  </a:lnTo>
+                  <a:lnTo>
+                    <a:pt x="3795993" y="290597"/>
+                  </a:lnTo>
+                  <a:lnTo>
+                    <a:pt x="3724371" y="285833"/>
+                  </a:lnTo>
+                  <a:lnTo>
+                    <a:pt x="3652748" y="281044"/>
+                  </a:lnTo>
+                  <a:lnTo>
+                    <a:pt x="3581126" y="276229"/>
+                  </a:lnTo>
+                  <a:lnTo>
+                    <a:pt x="3509503" y="271389"/>
+                  </a:lnTo>
+                  <a:lnTo>
+                    <a:pt x="3437881" y="266524"/>
+                  </a:lnTo>
+                  <a:lnTo>
+                    <a:pt x="3366258" y="261632"/>
+                  </a:lnTo>
+                  <a:lnTo>
+                    <a:pt x="3294636" y="256715"/>
+                  </a:lnTo>
+                  <a:lnTo>
+                    <a:pt x="3223013" y="251771"/>
+                  </a:lnTo>
+                  <a:lnTo>
+                    <a:pt x="3151391" y="246802"/>
+                  </a:lnTo>
+                  <a:lnTo>
+                    <a:pt x="3079768" y="241806"/>
+                  </a:lnTo>
+                  <a:lnTo>
+                    <a:pt x="3008146" y="236784"/>
+                  </a:lnTo>
+                  <a:lnTo>
+                    <a:pt x="2936523" y="231735"/>
+                  </a:lnTo>
+                  <a:lnTo>
+                    <a:pt x="2864901" y="226659"/>
+                  </a:lnTo>
+                  <a:lnTo>
+                    <a:pt x="2793278" y="221556"/>
+                  </a:lnTo>
+                  <a:lnTo>
+                    <a:pt x="2721655" y="216427"/>
+                  </a:lnTo>
+                  <a:lnTo>
+                    <a:pt x="2650033" y="211270"/>
+                  </a:lnTo>
+                  <a:lnTo>
+                    <a:pt x="2578410" y="206086"/>
+                  </a:lnTo>
+                  <a:lnTo>
+                    <a:pt x="2506788" y="200875"/>
+                  </a:lnTo>
+                  <a:lnTo>
+                    <a:pt x="2435165" y="195636"/>
+                  </a:lnTo>
+                  <a:lnTo>
+                    <a:pt x="2363543" y="190369"/>
+                  </a:lnTo>
+                  <a:lnTo>
+                    <a:pt x="2291920" y="185074"/>
+                  </a:lnTo>
+                  <a:lnTo>
+                    <a:pt x="2220298" y="179751"/>
+                  </a:lnTo>
+                  <a:lnTo>
+                    <a:pt x="2148675" y="174400"/>
+                  </a:lnTo>
+                  <a:lnTo>
+                    <a:pt x="2077053" y="169021"/>
+                  </a:lnTo>
+                  <a:lnTo>
+                    <a:pt x="2005430" y="163613"/>
+                  </a:lnTo>
+                  <a:lnTo>
+                    <a:pt x="1933808" y="158177"/>
+                  </a:lnTo>
+                  <a:lnTo>
+                    <a:pt x="1862185" y="152712"/>
+                  </a:lnTo>
+                  <a:lnTo>
+                    <a:pt x="1790563" y="147218"/>
+                  </a:lnTo>
+                  <a:lnTo>
+                    <a:pt x="1718940" y="141695"/>
+                  </a:lnTo>
+                  <a:lnTo>
+                    <a:pt x="1647318" y="136142"/>
                   </a:lnTo>
                   <a:lnTo>
                     <a:pt x="1575695" y="130561"/>
                   </a:lnTo>
                   <a:lnTo>
-                    <a:pt x="1504073" y="124950"/>
-                  </a:lnTo>
-                  <a:lnTo>
-                    <a:pt x="1432450" y="119309"/>
-                  </a:lnTo>
-                  <a:lnTo>
-                    <a:pt x="1360827" y="113638"/>
-                  </a:lnTo>
-                  <a:lnTo>
-                    <a:pt x="1289205" y="107937"/>
-                  </a:lnTo>
-                  <a:lnTo>
-                    <a:pt x="1217582" y="102206"/>
+                    <a:pt x="1504073" y="124949"/>
+                  </a:lnTo>
+                  <a:lnTo>
+                    <a:pt x="1432450" y="119308"/>
+                  </a:lnTo>
+                  <a:lnTo>
+                    <a:pt x="1360827" y="113637"/>
+                  </a:lnTo>
+                  <a:lnTo>
+                    <a:pt x="1289205" y="107936"/>
+                  </a:lnTo>
+                  <a:lnTo>
+                    <a:pt x="1217582" y="102205"/>
                   </a:lnTo>
                   <a:lnTo>
                     <a:pt x="1145960" y="96444"/>
@@ -3936,16 +3936,16 @@
                     <a:pt x="1074337" y="90652"/>
                   </a:lnTo>
                   <a:lnTo>
-                    <a:pt x="1002715" y="84830"/>
+                    <a:pt x="1002715" y="84829"/>
                   </a:lnTo>
                   <a:lnTo>
                     <a:pt x="931092" y="78976"/>
                   </a:lnTo>
                   <a:lnTo>
-                    <a:pt x="859470" y="73092"/>
-                  </a:lnTo>
-                  <a:lnTo>
-                    <a:pt x="787847" y="67176"/>
+                    <a:pt x="859470" y="73091"/>
+                  </a:lnTo>
+                  <a:lnTo>
+                    <a:pt x="787847" y="67175"/>
                   </a:lnTo>
                   <a:lnTo>
                     <a:pt x="716225" y="61229"/>
@@ -3998,222 +3998,222 @@
           </p:nvSpPr>
           <p:spPr>
             <a:xfrm>
-              <a:off x="3371890" y="2073503"/>
-              <a:ext cx="4890788" cy="3224871"/>
+              <a:off x="3371889" y="2073503"/>
+              <a:ext cx="4890789" cy="3224871"/>
             </a:xfrm>
             <a:custGeom>
               <a:avLst/>
               <a:pathLst>
-                <a:path w="4890788" h="3224871">
+                <a:path w="4890789" h="3224871">
                   <a:moveTo>
                     <a:pt x="0" y="0"/>
                   </a:moveTo>
                   <a:lnTo>
-                    <a:pt x="20457" y="38184"/>
-                  </a:lnTo>
-                  <a:lnTo>
-                    <a:pt x="92079" y="166878"/>
-                  </a:lnTo>
-                  <a:lnTo>
-                    <a:pt x="163702" y="290765"/>
-                  </a:lnTo>
-                  <a:lnTo>
-                    <a:pt x="235324" y="410025"/>
-                  </a:lnTo>
-                  <a:lnTo>
-                    <a:pt x="306947" y="524831"/>
-                  </a:lnTo>
-                  <a:lnTo>
-                    <a:pt x="378569" y="635349"/>
-                  </a:lnTo>
-                  <a:lnTo>
-                    <a:pt x="450192" y="741738"/>
-                  </a:lnTo>
-                  <a:lnTo>
-                    <a:pt x="521814" y="844154"/>
-                  </a:lnTo>
-                  <a:lnTo>
-                    <a:pt x="593437" y="942745"/>
-                  </a:lnTo>
-                  <a:lnTo>
-                    <a:pt x="665059" y="1037653"/>
-                  </a:lnTo>
-                  <a:lnTo>
-                    <a:pt x="736682" y="1129016"/>
-                  </a:lnTo>
-                  <a:lnTo>
-                    <a:pt x="808304" y="1216967"/>
-                  </a:lnTo>
-                  <a:lnTo>
-                    <a:pt x="879927" y="1301633"/>
-                  </a:lnTo>
-                  <a:lnTo>
-                    <a:pt x="951549" y="1383136"/>
-                  </a:lnTo>
-                  <a:lnTo>
-                    <a:pt x="1023172" y="1461596"/>
-                  </a:lnTo>
-                  <a:lnTo>
-                    <a:pt x="1094794" y="1537124"/>
-                  </a:lnTo>
-                  <a:lnTo>
-                    <a:pt x="1166417" y="1609832"/>
-                  </a:lnTo>
-                  <a:lnTo>
-                    <a:pt x="1238039" y="1679824"/>
-                  </a:lnTo>
-                  <a:lnTo>
-                    <a:pt x="1309662" y="1747202"/>
-                  </a:lnTo>
-                  <a:lnTo>
-                    <a:pt x="1381285" y="1812063"/>
-                  </a:lnTo>
-                  <a:lnTo>
-                    <a:pt x="1452907" y="1874502"/>
-                  </a:lnTo>
-                  <a:lnTo>
-                    <a:pt x="1524530" y="1934608"/>
-                  </a:lnTo>
-                  <a:lnTo>
-                    <a:pt x="1596152" y="1992469"/>
-                  </a:lnTo>
-                  <a:lnTo>
-                    <a:pt x="1667775" y="2048170"/>
-                  </a:lnTo>
-                  <a:lnTo>
-                    <a:pt x="1739397" y="2101789"/>
-                  </a:lnTo>
-                  <a:lnTo>
-                    <a:pt x="1811020" y="2153407"/>
-                  </a:lnTo>
-                  <a:lnTo>
-                    <a:pt x="1882642" y="2203096"/>
-                  </a:lnTo>
-                  <a:lnTo>
-                    <a:pt x="1954265" y="2250929"/>
-                  </a:lnTo>
-                  <a:lnTo>
-                    <a:pt x="2025887" y="2296975"/>
-                  </a:lnTo>
-                  <a:lnTo>
-                    <a:pt x="2097510" y="2341302"/>
-                  </a:lnTo>
-                  <a:lnTo>
-                    <a:pt x="2169132" y="2383973"/>
-                  </a:lnTo>
-                  <a:lnTo>
-                    <a:pt x="2240755" y="2425051"/>
-                  </a:lnTo>
-                  <a:lnTo>
-                    <a:pt x="2312377" y="2464594"/>
-                  </a:lnTo>
-                  <a:lnTo>
-                    <a:pt x="2384000" y="2502660"/>
-                  </a:lnTo>
-                  <a:lnTo>
-                    <a:pt x="2455622" y="2539304"/>
-                  </a:lnTo>
-                  <a:lnTo>
-                    <a:pt x="2527245" y="2574580"/>
-                  </a:lnTo>
-                  <a:lnTo>
-                    <a:pt x="2598867" y="2608538"/>
-                  </a:lnTo>
-                  <a:lnTo>
-                    <a:pt x="2670490" y="2641227"/>
-                  </a:lnTo>
-                  <a:lnTo>
-                    <a:pt x="2742113" y="2672696"/>
-                  </a:lnTo>
-                  <a:lnTo>
-                    <a:pt x="2813735" y="2702989"/>
-                  </a:lnTo>
-                  <a:lnTo>
-                    <a:pt x="2885358" y="2732151"/>
-                  </a:lnTo>
-                  <a:lnTo>
-                    <a:pt x="2956980" y="2760224"/>
-                  </a:lnTo>
-                  <a:lnTo>
-                    <a:pt x="3028603" y="2787248"/>
-                  </a:lnTo>
-                  <a:lnTo>
-                    <a:pt x="3100225" y="2813262"/>
-                  </a:lnTo>
-                  <a:lnTo>
-                    <a:pt x="3171848" y="2838306"/>
-                  </a:lnTo>
-                  <a:lnTo>
-                    <a:pt x="3243470" y="2862413"/>
-                  </a:lnTo>
-                  <a:lnTo>
-                    <a:pt x="3315093" y="2885620"/>
-                  </a:lnTo>
-                  <a:lnTo>
-                    <a:pt x="3386715" y="2907961"/>
-                  </a:lnTo>
-                  <a:lnTo>
-                    <a:pt x="3458338" y="2929467"/>
-                  </a:lnTo>
-                  <a:lnTo>
-                    <a:pt x="3529960" y="2950170"/>
-                  </a:lnTo>
-                  <a:lnTo>
-                    <a:pt x="3601583" y="2970099"/>
-                  </a:lnTo>
-                  <a:lnTo>
-                    <a:pt x="3673205" y="2989284"/>
-                  </a:lnTo>
-                  <a:lnTo>
-                    <a:pt x="3744828" y="3007753"/>
-                  </a:lnTo>
-                  <a:lnTo>
-                    <a:pt x="3816450" y="3025531"/>
-                  </a:lnTo>
-                  <a:lnTo>
-                    <a:pt x="3888073" y="3042646"/>
-                  </a:lnTo>
-                  <a:lnTo>
-                    <a:pt x="3959695" y="3059121"/>
-                  </a:lnTo>
-                  <a:lnTo>
-                    <a:pt x="4031318" y="3074981"/>
-                  </a:lnTo>
-                  <a:lnTo>
-                    <a:pt x="4102941" y="3090249"/>
-                  </a:lnTo>
-                  <a:lnTo>
-                    <a:pt x="4174563" y="3104947"/>
-                  </a:lnTo>
-                  <a:lnTo>
-                    <a:pt x="4246186" y="3119095"/>
-                  </a:lnTo>
-                  <a:lnTo>
-                    <a:pt x="4317808" y="3132715"/>
-                  </a:lnTo>
-                  <a:lnTo>
-                    <a:pt x="4389431" y="3145826"/>
-                  </a:lnTo>
-                  <a:lnTo>
-                    <a:pt x="4461053" y="3158448"/>
-                  </a:lnTo>
-                  <a:lnTo>
-                    <a:pt x="4532676" y="3170598"/>
-                  </a:lnTo>
-                  <a:lnTo>
-                    <a:pt x="4604298" y="3182294"/>
-                  </a:lnTo>
-                  <a:lnTo>
-                    <a:pt x="4675921" y="3193554"/>
-                  </a:lnTo>
-                  <a:lnTo>
-                    <a:pt x="4747543" y="3204393"/>
-                  </a:lnTo>
-                  <a:lnTo>
-                    <a:pt x="4819166" y="3214827"/>
-                  </a:lnTo>
-                  <a:lnTo>
-                    <a:pt x="4890788" y="3224871"/>
+                    <a:pt x="20458" y="38186"/>
+                  </a:lnTo>
+                  <a:lnTo>
+                    <a:pt x="92080" y="166880"/>
+                  </a:lnTo>
+                  <a:lnTo>
+                    <a:pt x="163703" y="290767"/>
+                  </a:lnTo>
+                  <a:lnTo>
+                    <a:pt x="235325" y="410027"/>
+                  </a:lnTo>
+                  <a:lnTo>
+                    <a:pt x="306948" y="524832"/>
+                  </a:lnTo>
+                  <a:lnTo>
+                    <a:pt x="378570" y="635350"/>
+                  </a:lnTo>
+                  <a:lnTo>
+                    <a:pt x="450193" y="741739"/>
+                  </a:lnTo>
+                  <a:lnTo>
+                    <a:pt x="521815" y="844155"/>
+                  </a:lnTo>
+                  <a:lnTo>
+                    <a:pt x="593438" y="942746"/>
+                  </a:lnTo>
+                  <a:lnTo>
+                    <a:pt x="665060" y="1037654"/>
+                  </a:lnTo>
+                  <a:lnTo>
+                    <a:pt x="736683" y="1129017"/>
+                  </a:lnTo>
+                  <a:lnTo>
+                    <a:pt x="808305" y="1216968"/>
+                  </a:lnTo>
+                  <a:lnTo>
+                    <a:pt x="879928" y="1301634"/>
+                  </a:lnTo>
+                  <a:lnTo>
+                    <a:pt x="951550" y="1383137"/>
+                  </a:lnTo>
+                  <a:lnTo>
+                    <a:pt x="1023173" y="1461596"/>
+                  </a:lnTo>
+                  <a:lnTo>
+                    <a:pt x="1094795" y="1537125"/>
+                  </a:lnTo>
+                  <a:lnTo>
+                    <a:pt x="1166418" y="1609833"/>
+                  </a:lnTo>
+                  <a:lnTo>
+                    <a:pt x="1238040" y="1679825"/>
+                  </a:lnTo>
+                  <a:lnTo>
+                    <a:pt x="1309663" y="1747202"/>
+                  </a:lnTo>
+                  <a:lnTo>
+                    <a:pt x="1381286" y="1812063"/>
+                  </a:lnTo>
+                  <a:lnTo>
+                    <a:pt x="1452908" y="1874502"/>
+                  </a:lnTo>
+                  <a:lnTo>
+                    <a:pt x="1524531" y="1934608"/>
+                  </a:lnTo>
+                  <a:lnTo>
+                    <a:pt x="1596153" y="1992470"/>
+                  </a:lnTo>
+                  <a:lnTo>
+                    <a:pt x="1667776" y="2048170"/>
+                  </a:lnTo>
+                  <a:lnTo>
+                    <a:pt x="1739398" y="2101790"/>
+                  </a:lnTo>
+                  <a:lnTo>
+                    <a:pt x="1811021" y="2153407"/>
+                  </a:lnTo>
+                  <a:lnTo>
+                    <a:pt x="1882643" y="2203096"/>
+                  </a:lnTo>
+                  <a:lnTo>
+                    <a:pt x="1954266" y="2250929"/>
+                  </a:lnTo>
+                  <a:lnTo>
+                    <a:pt x="2025888" y="2296976"/>
+                  </a:lnTo>
+                  <a:lnTo>
+                    <a:pt x="2097511" y="2341302"/>
+                  </a:lnTo>
+                  <a:lnTo>
+                    <a:pt x="2169133" y="2383973"/>
+                  </a:lnTo>
+                  <a:lnTo>
+                    <a:pt x="2240756" y="2425051"/>
+                  </a:lnTo>
+                  <a:lnTo>
+                    <a:pt x="2312378" y="2464594"/>
+                  </a:lnTo>
+                  <a:lnTo>
+                    <a:pt x="2384001" y="2502660"/>
+                  </a:lnTo>
+                  <a:lnTo>
+                    <a:pt x="2455623" y="2539304"/>
+                  </a:lnTo>
+                  <a:lnTo>
+                    <a:pt x="2527246" y="2574580"/>
+                  </a:lnTo>
+                  <a:lnTo>
+                    <a:pt x="2598868" y="2608538"/>
+                  </a:lnTo>
+                  <a:lnTo>
+                    <a:pt x="2670491" y="2641227"/>
+                  </a:lnTo>
+                  <a:lnTo>
+                    <a:pt x="2742114" y="2672696"/>
+                  </a:lnTo>
+                  <a:lnTo>
+                    <a:pt x="2813736" y="2702989"/>
+                  </a:lnTo>
+                  <a:lnTo>
+                    <a:pt x="2885359" y="2732151"/>
+                  </a:lnTo>
+                  <a:lnTo>
+                    <a:pt x="2956981" y="2760224"/>
+                  </a:lnTo>
+                  <a:lnTo>
+                    <a:pt x="3028604" y="2787248"/>
+                  </a:lnTo>
+                  <a:lnTo>
+                    <a:pt x="3100226" y="2813262"/>
+                  </a:lnTo>
+                  <a:lnTo>
+                    <a:pt x="3171849" y="2838305"/>
+                  </a:lnTo>
+                  <a:lnTo>
+                    <a:pt x="3243471" y="2862413"/>
+                  </a:lnTo>
+                  <a:lnTo>
+                    <a:pt x="3315094" y="2885620"/>
+                  </a:lnTo>
+                  <a:lnTo>
+                    <a:pt x="3386716" y="2907961"/>
+                  </a:lnTo>
+                  <a:lnTo>
+                    <a:pt x="3458339" y="2929467"/>
+                  </a:lnTo>
+                  <a:lnTo>
+                    <a:pt x="3529961" y="2950169"/>
+                  </a:lnTo>
+                  <a:lnTo>
+                    <a:pt x="3601584" y="2970099"/>
+                  </a:lnTo>
+                  <a:lnTo>
+                    <a:pt x="3673206" y="2989284"/>
+                  </a:lnTo>
+                  <a:lnTo>
+                    <a:pt x="3744829" y="3007753"/>
+                  </a:lnTo>
+                  <a:lnTo>
+                    <a:pt x="3816451" y="3025531"/>
+                  </a:lnTo>
+                  <a:lnTo>
+                    <a:pt x="3888074" y="3042646"/>
+                  </a:lnTo>
+                  <a:lnTo>
+                    <a:pt x="3959696" y="3059121"/>
+                  </a:lnTo>
+                  <a:lnTo>
+                    <a:pt x="4031319" y="3074981"/>
+                  </a:lnTo>
+                  <a:lnTo>
+                    <a:pt x="4102942" y="3090249"/>
+                  </a:lnTo>
+                  <a:lnTo>
+                    <a:pt x="4174564" y="3104946"/>
+                  </a:lnTo>
+                  <a:lnTo>
+                    <a:pt x="4246187" y="3119095"/>
+                  </a:lnTo>
+                  <a:lnTo>
+                    <a:pt x="4317809" y="3132715"/>
+                  </a:lnTo>
+                  <a:lnTo>
+                    <a:pt x="4389432" y="3145826"/>
+                  </a:lnTo>
+                  <a:lnTo>
+                    <a:pt x="4461054" y="3158448"/>
+                  </a:lnTo>
+                  <a:lnTo>
+                    <a:pt x="4532677" y="3170598"/>
+                  </a:lnTo>
+                  <a:lnTo>
+                    <a:pt x="4604299" y="3182294"/>
+                  </a:lnTo>
+                  <a:lnTo>
+                    <a:pt x="4675922" y="3193554"/>
+                  </a:lnTo>
+                  <a:lnTo>
+                    <a:pt x="4747544" y="3204392"/>
+                  </a:lnTo>
+                  <a:lnTo>
+                    <a:pt x="4819167" y="3214827"/>
+                  </a:lnTo>
+                  <a:lnTo>
+                    <a:pt x="4890789" y="3224871"/>
                   </a:lnTo>
                 </a:path>
               </a:pathLst>

--- a/docs/plots/carbo/jx_carbo_linsubhr_egfrdisc_grade3.pptx
+++ b/docs/plots/carbo/jx_carbo_linsubhr_egfrdisc_grade3.pptx
@@ -3003,467 +3003,473 @@
           <p:spPr>
             <a:xfrm>
               <a:off x="1172049" y="2073503"/>
-              <a:ext cx="7090630" cy="3388787"/>
+              <a:ext cx="7090630" cy="3376869"/>
             </a:xfrm>
             <a:custGeom>
               <a:avLst/>
               <a:pathLst>
-                <a:path w="7090630" h="3388787">
+                <a:path w="7090630" h="3376869">
                   <a:moveTo>
-                    <a:pt x="3449351" y="0"/>
+                    <a:pt x="3365340" y="0"/>
                   </a:moveTo>
                   <a:lnTo>
-                    <a:pt x="3509503" y="202343"/>
-                  </a:lnTo>
-                  <a:lnTo>
-                    <a:pt x="3581126" y="426790"/>
-                  </a:lnTo>
-                  <a:lnTo>
-                    <a:pt x="3652748" y="635886"/>
-                  </a:lnTo>
-                  <a:lnTo>
-                    <a:pt x="3724371" y="830679"/>
-                  </a:lnTo>
-                  <a:lnTo>
-                    <a:pt x="3795993" y="1012148"/>
-                  </a:lnTo>
-                  <a:lnTo>
-                    <a:pt x="3867616" y="1181205"/>
-                  </a:lnTo>
-                  <a:lnTo>
-                    <a:pt x="3939238" y="1338698"/>
-                  </a:lnTo>
-                  <a:lnTo>
-                    <a:pt x="4010861" y="1485419"/>
-                  </a:lnTo>
-                  <a:lnTo>
-                    <a:pt x="4082483" y="1622104"/>
-                  </a:lnTo>
-                  <a:lnTo>
-                    <a:pt x="4154106" y="1749440"/>
-                  </a:lnTo>
-                  <a:lnTo>
-                    <a:pt x="4225729" y="1868067"/>
-                  </a:lnTo>
-                  <a:lnTo>
-                    <a:pt x="4297351" y="1978579"/>
-                  </a:lnTo>
-                  <a:lnTo>
-                    <a:pt x="4368974" y="2081532"/>
-                  </a:lnTo>
-                  <a:lnTo>
-                    <a:pt x="4440596" y="2177443"/>
-                  </a:lnTo>
-                  <a:lnTo>
-                    <a:pt x="4512219" y="2266794"/>
-                  </a:lnTo>
-                  <a:lnTo>
-                    <a:pt x="4583841" y="2350033"/>
-                  </a:lnTo>
-                  <a:lnTo>
-                    <a:pt x="4655464" y="2427579"/>
-                  </a:lnTo>
-                  <a:lnTo>
-                    <a:pt x="4727086" y="2499821"/>
-                  </a:lnTo>
-                  <a:lnTo>
-                    <a:pt x="4798709" y="2567121"/>
-                  </a:lnTo>
-                  <a:lnTo>
-                    <a:pt x="4870331" y="2629818"/>
-                  </a:lnTo>
-                  <a:lnTo>
-                    <a:pt x="4941954" y="2656862"/>
-                  </a:lnTo>
-                  <a:lnTo>
-                    <a:pt x="5013576" y="2661217"/>
-                  </a:lnTo>
-                  <a:lnTo>
-                    <a:pt x="5085199" y="2665549"/>
-                  </a:lnTo>
-                  <a:lnTo>
-                    <a:pt x="5156821" y="2669858"/>
-                  </a:lnTo>
-                  <a:lnTo>
-                    <a:pt x="5228444" y="2674145"/>
-                  </a:lnTo>
-                  <a:lnTo>
-                    <a:pt x="5300066" y="2678409"/>
-                  </a:lnTo>
-                  <a:lnTo>
-                    <a:pt x="5371689" y="2682650"/>
-                  </a:lnTo>
-                  <a:lnTo>
-                    <a:pt x="5443311" y="2686869"/>
-                  </a:lnTo>
-                  <a:lnTo>
-                    <a:pt x="5514934" y="2691066"/>
-                  </a:lnTo>
-                  <a:lnTo>
-                    <a:pt x="5586557" y="2695241"/>
-                  </a:lnTo>
-                  <a:lnTo>
-                    <a:pt x="5658179" y="2699394"/>
-                  </a:lnTo>
-                  <a:lnTo>
-                    <a:pt x="5729802" y="2703525"/>
-                  </a:lnTo>
-                  <a:lnTo>
-                    <a:pt x="5801424" y="2707634"/>
-                  </a:lnTo>
-                  <a:lnTo>
-                    <a:pt x="5873047" y="2711722"/>
-                  </a:lnTo>
-                  <a:lnTo>
-                    <a:pt x="5944669" y="2715788"/>
-                  </a:lnTo>
-                  <a:lnTo>
-                    <a:pt x="6016292" y="2719832"/>
-                  </a:lnTo>
-                  <a:lnTo>
-                    <a:pt x="6087914" y="2723856"/>
-                  </a:lnTo>
-                  <a:lnTo>
-                    <a:pt x="6159537" y="2727858"/>
-                  </a:lnTo>
-                  <a:lnTo>
-                    <a:pt x="6231159" y="2731839"/>
-                  </a:lnTo>
-                  <a:lnTo>
-                    <a:pt x="6302782" y="2735799"/>
-                  </a:lnTo>
-                  <a:lnTo>
-                    <a:pt x="6374404" y="2739738"/>
-                  </a:lnTo>
-                  <a:lnTo>
-                    <a:pt x="6446027" y="2743657"/>
-                  </a:lnTo>
-                  <a:lnTo>
-                    <a:pt x="6517649" y="2747555"/>
-                  </a:lnTo>
-                  <a:lnTo>
-                    <a:pt x="6589272" y="2751432"/>
-                  </a:lnTo>
-                  <a:lnTo>
-                    <a:pt x="6660894" y="2755289"/>
-                  </a:lnTo>
-                  <a:lnTo>
-                    <a:pt x="6732517" y="2759125"/>
-                  </a:lnTo>
-                  <a:lnTo>
-                    <a:pt x="6804139" y="2762942"/>
-                  </a:lnTo>
-                  <a:lnTo>
-                    <a:pt x="6875762" y="2766738"/>
-                  </a:lnTo>
-                  <a:lnTo>
-                    <a:pt x="6947385" y="2770514"/>
-                  </a:lnTo>
-                  <a:lnTo>
-                    <a:pt x="7019007" y="2774271"/>
-                  </a:lnTo>
-                  <a:lnTo>
-                    <a:pt x="7090630" y="2778007"/>
-                  </a:lnTo>
-                  <a:lnTo>
-                    <a:pt x="7090630" y="3388787"/>
-                  </a:lnTo>
-                  <a:lnTo>
-                    <a:pt x="7019007" y="3381815"/>
-                  </a:lnTo>
-                  <a:lnTo>
-                    <a:pt x="6947385" y="3374331"/>
-                  </a:lnTo>
-                  <a:lnTo>
-                    <a:pt x="6875762" y="3366297"/>
-                  </a:lnTo>
-                  <a:lnTo>
-                    <a:pt x="6804139" y="3357674"/>
-                  </a:lnTo>
-                  <a:lnTo>
-                    <a:pt x="6732517" y="3348418"/>
-                  </a:lnTo>
-                  <a:lnTo>
-                    <a:pt x="6660894" y="3338482"/>
-                  </a:lnTo>
-                  <a:lnTo>
-                    <a:pt x="6589272" y="3327816"/>
-                  </a:lnTo>
-                  <a:lnTo>
-                    <a:pt x="6517649" y="3316367"/>
-                  </a:lnTo>
-                  <a:lnTo>
-                    <a:pt x="6446027" y="3304078"/>
-                  </a:lnTo>
-                  <a:lnTo>
-                    <a:pt x="6374404" y="3290886"/>
-                  </a:lnTo>
-                  <a:lnTo>
-                    <a:pt x="6302782" y="3276726"/>
-                  </a:lnTo>
-                  <a:lnTo>
-                    <a:pt x="6231159" y="3261526"/>
-                  </a:lnTo>
-                  <a:lnTo>
-                    <a:pt x="6159537" y="3245211"/>
-                  </a:lnTo>
-                  <a:lnTo>
-                    <a:pt x="6087914" y="3227697"/>
-                  </a:lnTo>
-                  <a:lnTo>
-                    <a:pt x="6016292" y="3208897"/>
-                  </a:lnTo>
-                  <a:lnTo>
-                    <a:pt x="5944669" y="3188717"/>
-                  </a:lnTo>
-                  <a:lnTo>
-                    <a:pt x="5873047" y="3167056"/>
-                  </a:lnTo>
-                  <a:lnTo>
-                    <a:pt x="5801424" y="3143804"/>
-                  </a:lnTo>
-                  <a:lnTo>
-                    <a:pt x="5729802" y="3118844"/>
-                  </a:lnTo>
-                  <a:lnTo>
-                    <a:pt x="5658179" y="3092053"/>
-                  </a:lnTo>
-                  <a:lnTo>
-                    <a:pt x="5586557" y="3063294"/>
-                  </a:lnTo>
-                  <a:lnTo>
-                    <a:pt x="5514934" y="3032423"/>
-                  </a:lnTo>
-                  <a:lnTo>
-                    <a:pt x="5443311" y="2999286"/>
-                  </a:lnTo>
-                  <a:lnTo>
-                    <a:pt x="5371689" y="2963716"/>
-                  </a:lnTo>
-                  <a:lnTo>
-                    <a:pt x="5300066" y="2925535"/>
-                  </a:lnTo>
-                  <a:lnTo>
-                    <a:pt x="5228444" y="2884550"/>
-                  </a:lnTo>
-                  <a:lnTo>
-                    <a:pt x="5156821" y="2840556"/>
-                  </a:lnTo>
-                  <a:lnTo>
-                    <a:pt x="5085199" y="2793332"/>
-                  </a:lnTo>
-                  <a:lnTo>
-                    <a:pt x="5013576" y="2742640"/>
-                  </a:lnTo>
-                  <a:lnTo>
-                    <a:pt x="4941954" y="2688227"/>
-                  </a:lnTo>
-                  <a:lnTo>
-                    <a:pt x="4870331" y="2652484"/>
-                  </a:lnTo>
-                  <a:lnTo>
-                    <a:pt x="4798709" y="2648083"/>
-                  </a:lnTo>
-                  <a:lnTo>
-                    <a:pt x="4727086" y="2643658"/>
-                  </a:lnTo>
-                  <a:lnTo>
-                    <a:pt x="4655464" y="2639210"/>
-                  </a:lnTo>
-                  <a:lnTo>
-                    <a:pt x="4583841" y="2634739"/>
-                  </a:lnTo>
-                  <a:lnTo>
-                    <a:pt x="4512219" y="2630244"/>
-                  </a:lnTo>
-                  <a:lnTo>
-                    <a:pt x="4440596" y="2625725"/>
-                  </a:lnTo>
-                  <a:lnTo>
-                    <a:pt x="4368974" y="2621182"/>
-                  </a:lnTo>
-                  <a:lnTo>
-                    <a:pt x="4297351" y="2616615"/>
-                  </a:lnTo>
-                  <a:lnTo>
-                    <a:pt x="4225729" y="2612024"/>
-                  </a:lnTo>
-                  <a:lnTo>
-                    <a:pt x="4154106" y="2607408"/>
-                  </a:lnTo>
-                  <a:lnTo>
-                    <a:pt x="4082483" y="2602768"/>
-                  </a:lnTo>
-                  <a:lnTo>
-                    <a:pt x="4010861" y="2598104"/>
-                  </a:lnTo>
-                  <a:lnTo>
-                    <a:pt x="3939238" y="2593415"/>
-                  </a:lnTo>
-                  <a:lnTo>
-                    <a:pt x="3867616" y="2588701"/>
-                  </a:lnTo>
-                  <a:lnTo>
-                    <a:pt x="3795993" y="2583962"/>
-                  </a:lnTo>
-                  <a:lnTo>
-                    <a:pt x="3724371" y="2579198"/>
-                  </a:lnTo>
-                  <a:lnTo>
-                    <a:pt x="3652748" y="2574409"/>
-                  </a:lnTo>
-                  <a:lnTo>
-                    <a:pt x="3581126" y="2569594"/>
-                  </a:lnTo>
-                  <a:lnTo>
-                    <a:pt x="3509503" y="2564754"/>
-                  </a:lnTo>
-                  <a:lnTo>
-                    <a:pt x="3437881" y="2559888"/>
-                  </a:lnTo>
-                  <a:lnTo>
-                    <a:pt x="3366258" y="2554997"/>
-                  </a:lnTo>
-                  <a:lnTo>
-                    <a:pt x="3294636" y="2550079"/>
-                  </a:lnTo>
-                  <a:lnTo>
-                    <a:pt x="3223013" y="2545136"/>
-                  </a:lnTo>
-                  <a:lnTo>
-                    <a:pt x="3151391" y="2540166"/>
-                  </a:lnTo>
-                  <a:lnTo>
-                    <a:pt x="3079768" y="2535170"/>
-                  </a:lnTo>
-                  <a:lnTo>
-                    <a:pt x="3008146" y="2530148"/>
-                  </a:lnTo>
-                  <a:lnTo>
-                    <a:pt x="2936523" y="2525099"/>
-                  </a:lnTo>
-                  <a:lnTo>
-                    <a:pt x="2864901" y="2520023"/>
-                  </a:lnTo>
-                  <a:lnTo>
-                    <a:pt x="2793278" y="2514921"/>
-                  </a:lnTo>
-                  <a:lnTo>
-                    <a:pt x="2721655" y="2509791"/>
-                  </a:lnTo>
-                  <a:lnTo>
-                    <a:pt x="2650033" y="2504635"/>
-                  </a:lnTo>
-                  <a:lnTo>
-                    <a:pt x="2578410" y="2499451"/>
-                  </a:lnTo>
-                  <a:lnTo>
-                    <a:pt x="2506788" y="2494239"/>
-                  </a:lnTo>
-                  <a:lnTo>
-                    <a:pt x="2435165" y="2489000"/>
-                  </a:lnTo>
-                  <a:lnTo>
-                    <a:pt x="2363543" y="2483733"/>
-                  </a:lnTo>
-                  <a:lnTo>
-                    <a:pt x="2291920" y="2478439"/>
-                  </a:lnTo>
-                  <a:lnTo>
-                    <a:pt x="2220298" y="2473116"/>
-                  </a:lnTo>
-                  <a:lnTo>
-                    <a:pt x="2148675" y="2467765"/>
-                  </a:lnTo>
-                  <a:lnTo>
-                    <a:pt x="2077053" y="2462386"/>
-                  </a:lnTo>
-                  <a:lnTo>
-                    <a:pt x="2005430" y="2456978"/>
-                  </a:lnTo>
-                  <a:lnTo>
-                    <a:pt x="1933808" y="2451542"/>
-                  </a:lnTo>
-                  <a:lnTo>
-                    <a:pt x="1862185" y="2446077"/>
-                  </a:lnTo>
-                  <a:lnTo>
-                    <a:pt x="1790563" y="2440583"/>
-                  </a:lnTo>
-                  <a:lnTo>
-                    <a:pt x="1718940" y="2435059"/>
-                  </a:lnTo>
-                  <a:lnTo>
-                    <a:pt x="1647318" y="2429507"/>
-                  </a:lnTo>
-                  <a:lnTo>
-                    <a:pt x="1575695" y="2423925"/>
-                  </a:lnTo>
-                  <a:lnTo>
-                    <a:pt x="1504073" y="2418314"/>
-                  </a:lnTo>
-                  <a:lnTo>
-                    <a:pt x="1432450" y="2412673"/>
-                  </a:lnTo>
-                  <a:lnTo>
-                    <a:pt x="1360827" y="2407002"/>
-                  </a:lnTo>
-                  <a:lnTo>
-                    <a:pt x="1289205" y="2401301"/>
-                  </a:lnTo>
-                  <a:lnTo>
-                    <a:pt x="1217582" y="2395570"/>
-                  </a:lnTo>
-                  <a:lnTo>
-                    <a:pt x="1145960" y="2389808"/>
-                  </a:lnTo>
-                  <a:lnTo>
-                    <a:pt x="1074337" y="2384016"/>
-                  </a:lnTo>
-                  <a:lnTo>
-                    <a:pt x="1002715" y="2378194"/>
-                  </a:lnTo>
-                  <a:lnTo>
-                    <a:pt x="931092" y="2372340"/>
-                  </a:lnTo>
-                  <a:lnTo>
-                    <a:pt x="859470" y="2366456"/>
-                  </a:lnTo>
-                  <a:lnTo>
-                    <a:pt x="787847" y="2360540"/>
-                  </a:lnTo>
-                  <a:lnTo>
-                    <a:pt x="716225" y="2354593"/>
-                  </a:lnTo>
-                  <a:lnTo>
-                    <a:pt x="644602" y="2348615"/>
-                  </a:lnTo>
-                  <a:lnTo>
-                    <a:pt x="572980" y="2342605"/>
-                  </a:lnTo>
-                  <a:lnTo>
-                    <a:pt x="501357" y="2336563"/>
-                  </a:lnTo>
-                  <a:lnTo>
-                    <a:pt x="429735" y="2330489"/>
-                  </a:lnTo>
-                  <a:lnTo>
-                    <a:pt x="358112" y="2324383"/>
-                  </a:lnTo>
-                  <a:lnTo>
-                    <a:pt x="286490" y="2318244"/>
-                  </a:lnTo>
-                  <a:lnTo>
-                    <a:pt x="214867" y="2312073"/>
-                  </a:lnTo>
-                  <a:lnTo>
-                    <a:pt x="143245" y="2305870"/>
-                  </a:lnTo>
-                  <a:lnTo>
-                    <a:pt x="71622" y="2299633"/>
-                  </a:lnTo>
-                  <a:lnTo>
-                    <a:pt x="0" y="2293364"/>
+                    <a:pt x="3366258" y="3090"/>
+                  </a:lnTo>
+                  <a:lnTo>
+                    <a:pt x="3437881" y="228609"/>
+                  </a:lnTo>
+                  <a:lnTo>
+                    <a:pt x="3509503" y="439516"/>
+                  </a:lnTo>
+                  <a:lnTo>
+                    <a:pt x="3581126" y="636758"/>
+                  </a:lnTo>
+                  <a:lnTo>
+                    <a:pt x="3652748" y="821220"/>
+                  </a:lnTo>
+                  <a:lnTo>
+                    <a:pt x="3724371" y="993731"/>
+                  </a:lnTo>
+                  <a:lnTo>
+                    <a:pt x="3795993" y="1155064"/>
+                  </a:lnTo>
+                  <a:lnTo>
+                    <a:pt x="3867616" y="1305944"/>
+                  </a:lnTo>
+                  <a:lnTo>
+                    <a:pt x="3939238" y="1447049"/>
+                  </a:lnTo>
+                  <a:lnTo>
+                    <a:pt x="4010861" y="1579011"/>
+                  </a:lnTo>
+                  <a:lnTo>
+                    <a:pt x="4082483" y="1702423"/>
+                  </a:lnTo>
+                  <a:lnTo>
+                    <a:pt x="4154106" y="1817838"/>
+                  </a:lnTo>
+                  <a:lnTo>
+                    <a:pt x="4225729" y="1925776"/>
+                  </a:lnTo>
+                  <a:lnTo>
+                    <a:pt x="4297351" y="2026720"/>
+                  </a:lnTo>
+                  <a:lnTo>
+                    <a:pt x="4368974" y="2121124"/>
+                  </a:lnTo>
+                  <a:lnTo>
+                    <a:pt x="4440596" y="2209411"/>
+                  </a:lnTo>
+                  <a:lnTo>
+                    <a:pt x="4512219" y="2291978"/>
+                  </a:lnTo>
+                  <a:lnTo>
+                    <a:pt x="4583841" y="2369195"/>
+                  </a:lnTo>
+                  <a:lnTo>
+                    <a:pt x="4655464" y="2441409"/>
+                  </a:lnTo>
+                  <a:lnTo>
+                    <a:pt x="4727086" y="2508944"/>
+                  </a:lnTo>
+                  <a:lnTo>
+                    <a:pt x="4798709" y="2572104"/>
+                  </a:lnTo>
+                  <a:lnTo>
+                    <a:pt x="4870331" y="2631171"/>
+                  </a:lnTo>
+                  <a:lnTo>
+                    <a:pt x="4941954" y="2648367"/>
+                  </a:lnTo>
+                  <a:lnTo>
+                    <a:pt x="5013576" y="2638238"/>
+                  </a:lnTo>
+                  <a:lnTo>
+                    <a:pt x="5085199" y="2627986"/>
+                  </a:lnTo>
+                  <a:lnTo>
+                    <a:pt x="5156821" y="2617611"/>
+                  </a:lnTo>
+                  <a:lnTo>
+                    <a:pt x="5228444" y="2607109"/>
+                  </a:lnTo>
+                  <a:lnTo>
+                    <a:pt x="5300066" y="2596480"/>
+                  </a:lnTo>
+                  <a:lnTo>
+                    <a:pt x="5371689" y="2585722"/>
+                  </a:lnTo>
+                  <a:lnTo>
+                    <a:pt x="5443311" y="2574834"/>
+                  </a:lnTo>
+                  <a:lnTo>
+                    <a:pt x="5514934" y="2563814"/>
+                  </a:lnTo>
+                  <a:lnTo>
+                    <a:pt x="5586557" y="2552660"/>
+                  </a:lnTo>
+                  <a:lnTo>
+                    <a:pt x="5658179" y="2541371"/>
+                  </a:lnTo>
+                  <a:lnTo>
+                    <a:pt x="5729802" y="2529945"/>
+                  </a:lnTo>
+                  <a:lnTo>
+                    <a:pt x="5801424" y="2518380"/>
+                  </a:lnTo>
+                  <a:lnTo>
+                    <a:pt x="5873047" y="2506675"/>
+                  </a:lnTo>
+                  <a:lnTo>
+                    <a:pt x="5944669" y="2494829"/>
+                  </a:lnTo>
+                  <a:lnTo>
+                    <a:pt x="6016292" y="2482839"/>
+                  </a:lnTo>
+                  <a:lnTo>
+                    <a:pt x="6087914" y="2470703"/>
+                  </a:lnTo>
+                  <a:lnTo>
+                    <a:pt x="6159537" y="2458420"/>
+                  </a:lnTo>
+                  <a:lnTo>
+                    <a:pt x="6231159" y="2445988"/>
+                  </a:lnTo>
+                  <a:lnTo>
+                    <a:pt x="6302782" y="2433406"/>
+                  </a:lnTo>
+                  <a:lnTo>
+                    <a:pt x="6374404" y="2420671"/>
+                  </a:lnTo>
+                  <a:lnTo>
+                    <a:pt x="6446027" y="2407781"/>
+                  </a:lnTo>
+                  <a:lnTo>
+                    <a:pt x="6517649" y="2394736"/>
+                  </a:lnTo>
+                  <a:lnTo>
+                    <a:pt x="6589272" y="2381532"/>
+                  </a:lnTo>
+                  <a:lnTo>
+                    <a:pt x="6660894" y="2368168"/>
+                  </a:lnTo>
+                  <a:lnTo>
+                    <a:pt x="6732517" y="2354642"/>
+                  </a:lnTo>
+                  <a:lnTo>
+                    <a:pt x="6804139" y="2340952"/>
+                  </a:lnTo>
+                  <a:lnTo>
+                    <a:pt x="6875762" y="2327096"/>
+                  </a:lnTo>
+                  <a:lnTo>
+                    <a:pt x="6947385" y="2313072"/>
+                  </a:lnTo>
+                  <a:lnTo>
+                    <a:pt x="7019007" y="2298878"/>
+                  </a:lnTo>
+                  <a:lnTo>
+                    <a:pt x="7090630" y="2284512"/>
+                  </a:lnTo>
+                  <a:lnTo>
+                    <a:pt x="7090630" y="3376869"/>
+                  </a:lnTo>
+                  <a:lnTo>
+                    <a:pt x="7019007" y="3369464"/>
+                  </a:lnTo>
+                  <a:lnTo>
+                    <a:pt x="6947385" y="3361547"/>
+                  </a:lnTo>
+                  <a:lnTo>
+                    <a:pt x="6875762" y="3353081"/>
+                  </a:lnTo>
+                  <a:lnTo>
+                    <a:pt x="6804139" y="3344028"/>
+                  </a:lnTo>
+                  <a:lnTo>
+                    <a:pt x="6732517" y="3334348"/>
+                  </a:lnTo>
+                  <a:lnTo>
+                    <a:pt x="6660894" y="3323998"/>
+                  </a:lnTo>
+                  <a:lnTo>
+                    <a:pt x="6589272" y="3312930"/>
+                  </a:lnTo>
+                  <a:lnTo>
+                    <a:pt x="6517649" y="3301096"/>
+                  </a:lnTo>
+                  <a:lnTo>
+                    <a:pt x="6446027" y="3288442"/>
+                  </a:lnTo>
+                  <a:lnTo>
+                    <a:pt x="6374404" y="3274911"/>
+                  </a:lnTo>
+                  <a:lnTo>
+                    <a:pt x="6302782" y="3260443"/>
+                  </a:lnTo>
+                  <a:lnTo>
+                    <a:pt x="6231159" y="3244972"/>
+                  </a:lnTo>
+                  <a:lnTo>
+                    <a:pt x="6159537" y="3228429"/>
+                  </a:lnTo>
+                  <a:lnTo>
+                    <a:pt x="6087914" y="3210741"/>
+                  </a:lnTo>
+                  <a:lnTo>
+                    <a:pt x="6016292" y="3191827"/>
+                  </a:lnTo>
+                  <a:lnTo>
+                    <a:pt x="5944669" y="3171602"/>
+                  </a:lnTo>
+                  <a:lnTo>
+                    <a:pt x="5873047" y="3149977"/>
+                  </a:lnTo>
+                  <a:lnTo>
+                    <a:pt x="5801424" y="3126853"/>
+                  </a:lnTo>
+                  <a:lnTo>
+                    <a:pt x="5729802" y="3102127"/>
+                  </a:lnTo>
+                  <a:lnTo>
+                    <a:pt x="5658179" y="3075688"/>
+                  </a:lnTo>
+                  <a:lnTo>
+                    <a:pt x="5586557" y="3047417"/>
+                  </a:lnTo>
+                  <a:lnTo>
+                    <a:pt x="5514934" y="3017188"/>
+                  </a:lnTo>
+                  <a:lnTo>
+                    <a:pt x="5443311" y="2984864"/>
+                  </a:lnTo>
+                  <a:lnTo>
+                    <a:pt x="5371689" y="2950301"/>
+                  </a:lnTo>
+                  <a:lnTo>
+                    <a:pt x="5300066" y="2913344"/>
+                  </a:lnTo>
+                  <a:lnTo>
+                    <a:pt x="5228444" y="2873825"/>
+                  </a:lnTo>
+                  <a:lnTo>
+                    <a:pt x="5156821" y="2831570"/>
+                  </a:lnTo>
+                  <a:lnTo>
+                    <a:pt x="5085199" y="2786386"/>
+                  </a:lnTo>
+                  <a:lnTo>
+                    <a:pt x="5013576" y="2738072"/>
+                  </a:lnTo>
+                  <a:lnTo>
+                    <a:pt x="4941954" y="2686411"/>
+                  </a:lnTo>
+                  <a:lnTo>
+                    <a:pt x="4870331" y="2658374"/>
+                  </a:lnTo>
+                  <a:lnTo>
+                    <a:pt x="4798709" y="2668261"/>
+                  </a:lnTo>
+                  <a:lnTo>
+                    <a:pt x="4727086" y="2678030"/>
+                  </a:lnTo>
+                  <a:lnTo>
+                    <a:pt x="4655464" y="2687682"/>
+                  </a:lnTo>
+                  <a:lnTo>
+                    <a:pt x="4583841" y="2697219"/>
+                  </a:lnTo>
+                  <a:lnTo>
+                    <a:pt x="4512219" y="2706641"/>
+                  </a:lnTo>
+                  <a:lnTo>
+                    <a:pt x="4440596" y="2715950"/>
+                  </a:lnTo>
+                  <a:lnTo>
+                    <a:pt x="4368974" y="2725148"/>
+                  </a:lnTo>
+                  <a:lnTo>
+                    <a:pt x="4297351" y="2734236"/>
+                  </a:lnTo>
+                  <a:lnTo>
+                    <a:pt x="4225729" y="2743214"/>
+                  </a:lnTo>
+                  <a:lnTo>
+                    <a:pt x="4154106" y="2752085"/>
+                  </a:lnTo>
+                  <a:lnTo>
+                    <a:pt x="4082483" y="2760850"/>
+                  </a:lnTo>
+                  <a:lnTo>
+                    <a:pt x="4010861" y="2769510"/>
+                  </a:lnTo>
+                  <a:lnTo>
+                    <a:pt x="3939238" y="2778066"/>
+                  </a:lnTo>
+                  <a:lnTo>
+                    <a:pt x="3867616" y="2786520"/>
+                  </a:lnTo>
+                  <a:lnTo>
+                    <a:pt x="3795993" y="2794872"/>
+                  </a:lnTo>
+                  <a:lnTo>
+                    <a:pt x="3724371" y="2803125"/>
+                  </a:lnTo>
+                  <a:lnTo>
+                    <a:pt x="3652748" y="2811278"/>
+                  </a:lnTo>
+                  <a:lnTo>
+                    <a:pt x="3581126" y="2819334"/>
+                  </a:lnTo>
+                  <a:lnTo>
+                    <a:pt x="3509503" y="2827293"/>
+                  </a:lnTo>
+                  <a:lnTo>
+                    <a:pt x="3437881" y="2835157"/>
+                  </a:lnTo>
+                  <a:lnTo>
+                    <a:pt x="3366258" y="2842927"/>
+                  </a:lnTo>
+                  <a:lnTo>
+                    <a:pt x="3294636" y="2850603"/>
+                  </a:lnTo>
+                  <a:lnTo>
+                    <a:pt x="3223013" y="2858188"/>
+                  </a:lnTo>
+                  <a:lnTo>
+                    <a:pt x="3151391" y="2865682"/>
+                  </a:lnTo>
+                  <a:lnTo>
+                    <a:pt x="3079768" y="2873086"/>
+                  </a:lnTo>
+                  <a:lnTo>
+                    <a:pt x="3008146" y="2880401"/>
+                  </a:lnTo>
+                  <a:lnTo>
+                    <a:pt x="2936523" y="2887629"/>
+                  </a:lnTo>
+                  <a:lnTo>
+                    <a:pt x="2864901" y="2894770"/>
+                  </a:lnTo>
+                  <a:lnTo>
+                    <a:pt x="2793278" y="2901826"/>
+                  </a:lnTo>
+                  <a:lnTo>
+                    <a:pt x="2721655" y="2908797"/>
+                  </a:lnTo>
+                  <a:lnTo>
+                    <a:pt x="2650033" y="2915684"/>
+                  </a:lnTo>
+                  <a:lnTo>
+                    <a:pt x="2578410" y="2922490"/>
+                  </a:lnTo>
+                  <a:lnTo>
+                    <a:pt x="2506788" y="2929213"/>
+                  </a:lnTo>
+                  <a:lnTo>
+                    <a:pt x="2435165" y="2935856"/>
+                  </a:lnTo>
+                  <a:lnTo>
+                    <a:pt x="2363543" y="2942419"/>
+                  </a:lnTo>
+                  <a:lnTo>
+                    <a:pt x="2291920" y="2948904"/>
+                  </a:lnTo>
+                  <a:lnTo>
+                    <a:pt x="2220298" y="2955311"/>
+                  </a:lnTo>
+                  <a:lnTo>
+                    <a:pt x="2148675" y="2961642"/>
+                  </a:lnTo>
+                  <a:lnTo>
+                    <a:pt x="2077053" y="2967896"/>
+                  </a:lnTo>
+                  <a:lnTo>
+                    <a:pt x="2005430" y="2974076"/>
+                  </a:lnTo>
+                  <a:lnTo>
+                    <a:pt x="1933808" y="2980181"/>
+                  </a:lnTo>
+                  <a:lnTo>
+                    <a:pt x="1862185" y="2986214"/>
+                  </a:lnTo>
+                  <a:lnTo>
+                    <a:pt x="1790563" y="2992174"/>
+                  </a:lnTo>
+                  <a:lnTo>
+                    <a:pt x="1718940" y="2998063"/>
+                  </a:lnTo>
+                  <a:lnTo>
+                    <a:pt x="1647318" y="3003881"/>
+                  </a:lnTo>
+                  <a:lnTo>
+                    <a:pt x="1575695" y="3009629"/>
+                  </a:lnTo>
+                  <a:lnTo>
+                    <a:pt x="1504073" y="3015309"/>
+                  </a:lnTo>
+                  <a:lnTo>
+                    <a:pt x="1432450" y="3020921"/>
+                  </a:lnTo>
+                  <a:lnTo>
+                    <a:pt x="1360827" y="3026465"/>
+                  </a:lnTo>
+                  <a:lnTo>
+                    <a:pt x="1289205" y="3031943"/>
+                  </a:lnTo>
+                  <a:lnTo>
+                    <a:pt x="1217582" y="3037355"/>
+                  </a:lnTo>
+                  <a:lnTo>
+                    <a:pt x="1145960" y="3042703"/>
+                  </a:lnTo>
+                  <a:lnTo>
+                    <a:pt x="1074337" y="3047986"/>
+                  </a:lnTo>
+                  <a:lnTo>
+                    <a:pt x="1002715" y="3053206"/>
+                  </a:lnTo>
+                  <a:lnTo>
+                    <a:pt x="931092" y="3058364"/>
+                  </a:lnTo>
+                  <a:lnTo>
+                    <a:pt x="859470" y="3063460"/>
+                  </a:lnTo>
+                  <a:lnTo>
+                    <a:pt x="787847" y="3068495"/>
+                  </a:lnTo>
+                  <a:lnTo>
+                    <a:pt x="716225" y="3073469"/>
+                  </a:lnTo>
+                  <a:lnTo>
+                    <a:pt x="644602" y="3078384"/>
+                  </a:lnTo>
+                  <a:lnTo>
+                    <a:pt x="572980" y="3083240"/>
+                  </a:lnTo>
+                  <a:lnTo>
+                    <a:pt x="501357" y="3088038"/>
+                  </a:lnTo>
+                  <a:lnTo>
+                    <a:pt x="429735" y="3092778"/>
+                  </a:lnTo>
+                  <a:lnTo>
+                    <a:pt x="358112" y="3097462"/>
+                  </a:lnTo>
+                  <a:lnTo>
+                    <a:pt x="286490" y="3102089"/>
+                  </a:lnTo>
+                  <a:lnTo>
+                    <a:pt x="214867" y="3106661"/>
+                  </a:lnTo>
+                  <a:lnTo>
+                    <a:pt x="143245" y="3111179"/>
+                  </a:lnTo>
+                  <a:lnTo>
+                    <a:pt x="71622" y="3115642"/>
+                  </a:lnTo>
+                  <a:lnTo>
+                    <a:pt x="0" y="3120051"/>
                   </a:lnTo>
                   <a:lnTo>
                     <a:pt x="0" y="0"/>
@@ -3492,168 +3498,174 @@
           </p:nvSpPr>
           <p:spPr>
             <a:xfrm>
-              <a:off x="4621400" y="2073503"/>
-              <a:ext cx="3641278" cy="2778007"/>
+              <a:off x="4537390" y="2073503"/>
+              <a:ext cx="3725289" cy="2648367"/>
             </a:xfrm>
             <a:custGeom>
               <a:avLst/>
               <a:pathLst>
-                <a:path w="3641278" h="2778007">
+                <a:path w="3725289" h="2648367">
                   <a:moveTo>
                     <a:pt x="0" y="0"/>
                   </a:moveTo>
                   <a:lnTo>
-                    <a:pt x="60152" y="202343"/>
-                  </a:lnTo>
-                  <a:lnTo>
-                    <a:pt x="131775" y="426790"/>
-                  </a:lnTo>
-                  <a:lnTo>
-                    <a:pt x="203397" y="635886"/>
-                  </a:lnTo>
-                  <a:lnTo>
-                    <a:pt x="275020" y="830679"/>
-                  </a:lnTo>
-                  <a:lnTo>
-                    <a:pt x="346642" y="1012148"/>
-                  </a:lnTo>
-                  <a:lnTo>
-                    <a:pt x="418265" y="1181205"/>
-                  </a:lnTo>
-                  <a:lnTo>
-                    <a:pt x="489887" y="1338698"/>
-                  </a:lnTo>
-                  <a:lnTo>
-                    <a:pt x="561510" y="1485419"/>
-                  </a:lnTo>
-                  <a:lnTo>
-                    <a:pt x="633132" y="1622104"/>
-                  </a:lnTo>
-                  <a:lnTo>
-                    <a:pt x="704755" y="1749440"/>
-                  </a:lnTo>
-                  <a:lnTo>
-                    <a:pt x="776377" y="1868067"/>
-                  </a:lnTo>
-                  <a:lnTo>
-                    <a:pt x="848000" y="1978579"/>
-                  </a:lnTo>
-                  <a:lnTo>
-                    <a:pt x="919622" y="2081532"/>
-                  </a:lnTo>
-                  <a:lnTo>
-                    <a:pt x="991245" y="2177443"/>
-                  </a:lnTo>
-                  <a:lnTo>
-                    <a:pt x="1062867" y="2266794"/>
-                  </a:lnTo>
-                  <a:lnTo>
-                    <a:pt x="1134490" y="2350033"/>
-                  </a:lnTo>
-                  <a:lnTo>
-                    <a:pt x="1206112" y="2427579"/>
-                  </a:lnTo>
-                  <a:lnTo>
-                    <a:pt x="1277735" y="2499821"/>
-                  </a:lnTo>
-                  <a:lnTo>
-                    <a:pt x="1349357" y="2567121"/>
-                  </a:lnTo>
-                  <a:lnTo>
-                    <a:pt x="1420980" y="2629818"/>
-                  </a:lnTo>
-                  <a:lnTo>
-                    <a:pt x="1492603" y="2656862"/>
-                  </a:lnTo>
-                  <a:lnTo>
-                    <a:pt x="1564225" y="2661217"/>
-                  </a:lnTo>
-                  <a:lnTo>
-                    <a:pt x="1635848" y="2665549"/>
-                  </a:lnTo>
-                  <a:lnTo>
-                    <a:pt x="1707470" y="2669858"/>
-                  </a:lnTo>
-                  <a:lnTo>
-                    <a:pt x="1779093" y="2674145"/>
-                  </a:lnTo>
-                  <a:lnTo>
-                    <a:pt x="1850715" y="2678409"/>
-                  </a:lnTo>
-                  <a:lnTo>
-                    <a:pt x="1922338" y="2682650"/>
-                  </a:lnTo>
-                  <a:lnTo>
-                    <a:pt x="1993960" y="2686869"/>
-                  </a:lnTo>
-                  <a:lnTo>
-                    <a:pt x="2065583" y="2691066"/>
-                  </a:lnTo>
-                  <a:lnTo>
-                    <a:pt x="2137205" y="2695241"/>
-                  </a:lnTo>
-                  <a:lnTo>
-                    <a:pt x="2208828" y="2699394"/>
-                  </a:lnTo>
-                  <a:lnTo>
-                    <a:pt x="2280450" y="2703525"/>
-                  </a:lnTo>
-                  <a:lnTo>
-                    <a:pt x="2352073" y="2707634"/>
-                  </a:lnTo>
-                  <a:lnTo>
-                    <a:pt x="2423695" y="2711722"/>
-                  </a:lnTo>
-                  <a:lnTo>
-                    <a:pt x="2495318" y="2715788"/>
-                  </a:lnTo>
-                  <a:lnTo>
-                    <a:pt x="2566940" y="2719832"/>
-                  </a:lnTo>
-                  <a:lnTo>
-                    <a:pt x="2638563" y="2723856"/>
-                  </a:lnTo>
-                  <a:lnTo>
-                    <a:pt x="2710185" y="2727858"/>
-                  </a:lnTo>
-                  <a:lnTo>
-                    <a:pt x="2781808" y="2731839"/>
-                  </a:lnTo>
-                  <a:lnTo>
-                    <a:pt x="2853431" y="2735799"/>
-                  </a:lnTo>
-                  <a:lnTo>
-                    <a:pt x="2925053" y="2739738"/>
-                  </a:lnTo>
-                  <a:lnTo>
-                    <a:pt x="2996676" y="2743657"/>
-                  </a:lnTo>
-                  <a:lnTo>
-                    <a:pt x="3068298" y="2747555"/>
-                  </a:lnTo>
-                  <a:lnTo>
-                    <a:pt x="3139921" y="2751432"/>
-                  </a:lnTo>
-                  <a:lnTo>
-                    <a:pt x="3211543" y="2755289"/>
-                  </a:lnTo>
-                  <a:lnTo>
-                    <a:pt x="3283166" y="2759125"/>
-                  </a:lnTo>
-                  <a:lnTo>
-                    <a:pt x="3354788" y="2762942"/>
-                  </a:lnTo>
-                  <a:lnTo>
-                    <a:pt x="3426411" y="2766738"/>
-                  </a:lnTo>
-                  <a:lnTo>
-                    <a:pt x="3498033" y="2770514"/>
-                  </a:lnTo>
-                  <a:lnTo>
-                    <a:pt x="3569656" y="2774271"/>
-                  </a:lnTo>
-                  <a:lnTo>
-                    <a:pt x="3641278" y="2778007"/>
+                    <a:pt x="917" y="3090"/>
+                  </a:lnTo>
+                  <a:lnTo>
+                    <a:pt x="72540" y="228609"/>
+                  </a:lnTo>
+                  <a:lnTo>
+                    <a:pt x="144162" y="439516"/>
+                  </a:lnTo>
+                  <a:lnTo>
+                    <a:pt x="215785" y="636758"/>
+                  </a:lnTo>
+                  <a:lnTo>
+                    <a:pt x="287407" y="821220"/>
+                  </a:lnTo>
+                  <a:lnTo>
+                    <a:pt x="359030" y="993731"/>
+                  </a:lnTo>
+                  <a:lnTo>
+                    <a:pt x="430652" y="1155064"/>
+                  </a:lnTo>
+                  <a:lnTo>
+                    <a:pt x="502275" y="1305944"/>
+                  </a:lnTo>
+                  <a:lnTo>
+                    <a:pt x="573897" y="1447049"/>
+                  </a:lnTo>
+                  <a:lnTo>
+                    <a:pt x="645520" y="1579011"/>
+                  </a:lnTo>
+                  <a:lnTo>
+                    <a:pt x="717143" y="1702423"/>
+                  </a:lnTo>
+                  <a:lnTo>
+                    <a:pt x="788765" y="1817838"/>
+                  </a:lnTo>
+                  <a:lnTo>
+                    <a:pt x="860388" y="1925776"/>
+                  </a:lnTo>
+                  <a:lnTo>
+                    <a:pt x="932010" y="2026720"/>
+                  </a:lnTo>
+                  <a:lnTo>
+                    <a:pt x="1003633" y="2121124"/>
+                  </a:lnTo>
+                  <a:lnTo>
+                    <a:pt x="1075255" y="2209411"/>
+                  </a:lnTo>
+                  <a:lnTo>
+                    <a:pt x="1146878" y="2291978"/>
+                  </a:lnTo>
+                  <a:lnTo>
+                    <a:pt x="1218500" y="2369195"/>
+                  </a:lnTo>
+                  <a:lnTo>
+                    <a:pt x="1290123" y="2441409"/>
+                  </a:lnTo>
+                  <a:lnTo>
+                    <a:pt x="1361745" y="2508944"/>
+                  </a:lnTo>
+                  <a:lnTo>
+                    <a:pt x="1433368" y="2572104"/>
+                  </a:lnTo>
+                  <a:lnTo>
+                    <a:pt x="1504990" y="2631171"/>
+                  </a:lnTo>
+                  <a:lnTo>
+                    <a:pt x="1576613" y="2648367"/>
+                  </a:lnTo>
+                  <a:lnTo>
+                    <a:pt x="1648235" y="2638238"/>
+                  </a:lnTo>
+                  <a:lnTo>
+                    <a:pt x="1719858" y="2627986"/>
+                  </a:lnTo>
+                  <a:lnTo>
+                    <a:pt x="1791480" y="2617611"/>
+                  </a:lnTo>
+                  <a:lnTo>
+                    <a:pt x="1863103" y="2607109"/>
+                  </a:lnTo>
+                  <a:lnTo>
+                    <a:pt x="1934725" y="2596480"/>
+                  </a:lnTo>
+                  <a:lnTo>
+                    <a:pt x="2006348" y="2585722"/>
+                  </a:lnTo>
+                  <a:lnTo>
+                    <a:pt x="2077971" y="2574834"/>
+                  </a:lnTo>
+                  <a:lnTo>
+                    <a:pt x="2149593" y="2563814"/>
+                  </a:lnTo>
+                  <a:lnTo>
+                    <a:pt x="2221216" y="2552660"/>
+                  </a:lnTo>
+                  <a:lnTo>
+                    <a:pt x="2292838" y="2541371"/>
+                  </a:lnTo>
+                  <a:lnTo>
+                    <a:pt x="2364461" y="2529945"/>
+                  </a:lnTo>
+                  <a:lnTo>
+                    <a:pt x="2436083" y="2518380"/>
+                  </a:lnTo>
+                  <a:lnTo>
+                    <a:pt x="2507706" y="2506675"/>
+                  </a:lnTo>
+                  <a:lnTo>
+                    <a:pt x="2579328" y="2494829"/>
+                  </a:lnTo>
+                  <a:lnTo>
+                    <a:pt x="2650951" y="2482839"/>
+                  </a:lnTo>
+                  <a:lnTo>
+                    <a:pt x="2722573" y="2470703"/>
+                  </a:lnTo>
+                  <a:lnTo>
+                    <a:pt x="2794196" y="2458420"/>
+                  </a:lnTo>
+                  <a:lnTo>
+                    <a:pt x="2865818" y="2445988"/>
+                  </a:lnTo>
+                  <a:lnTo>
+                    <a:pt x="2937441" y="2433406"/>
+                  </a:lnTo>
+                  <a:lnTo>
+                    <a:pt x="3009063" y="2420671"/>
+                  </a:lnTo>
+                  <a:lnTo>
+                    <a:pt x="3080686" y="2407781"/>
+                  </a:lnTo>
+                  <a:lnTo>
+                    <a:pt x="3152308" y="2394736"/>
+                  </a:lnTo>
+                  <a:lnTo>
+                    <a:pt x="3223931" y="2381532"/>
+                  </a:lnTo>
+                  <a:lnTo>
+                    <a:pt x="3295553" y="2368168"/>
+                  </a:lnTo>
+                  <a:lnTo>
+                    <a:pt x="3367176" y="2354642"/>
+                  </a:lnTo>
+                  <a:lnTo>
+                    <a:pt x="3438799" y="2340952"/>
+                  </a:lnTo>
+                  <a:lnTo>
+                    <a:pt x="3510421" y="2327096"/>
+                  </a:lnTo>
+                  <a:lnTo>
+                    <a:pt x="3582044" y="2313072"/>
+                  </a:lnTo>
+                  <a:lnTo>
+                    <a:pt x="3653666" y="2298878"/>
+                  </a:lnTo>
+                  <a:lnTo>
+                    <a:pt x="3725289" y="2284512"/>
                   </a:lnTo>
                 </a:path>
               </a:pathLst>
@@ -3673,312 +3685,312 @@
           </p:nvSpPr>
           <p:spPr>
             <a:xfrm>
-              <a:off x="1172049" y="4366867"/>
-              <a:ext cx="7090630" cy="1095422"/>
+              <a:off x="1172049" y="4731877"/>
+              <a:ext cx="7090630" cy="718495"/>
             </a:xfrm>
             <a:custGeom>
               <a:avLst/>
               <a:pathLst>
-                <a:path w="7090630" h="1095422">
+                <a:path w="7090630" h="718495">
                   <a:moveTo>
-                    <a:pt x="7090630" y="1095422"/>
+                    <a:pt x="7090630" y="718495"/>
                   </a:moveTo>
                   <a:lnTo>
-                    <a:pt x="7019007" y="1088450"/>
-                  </a:lnTo>
-                  <a:lnTo>
-                    <a:pt x="6947385" y="1080966"/>
-                  </a:lnTo>
-                  <a:lnTo>
-                    <a:pt x="6875762" y="1072933"/>
-                  </a:lnTo>
-                  <a:lnTo>
-                    <a:pt x="6804139" y="1064310"/>
-                  </a:lnTo>
-                  <a:lnTo>
-                    <a:pt x="6732517" y="1055053"/>
-                  </a:lnTo>
-                  <a:lnTo>
-                    <a:pt x="6660894" y="1045117"/>
-                  </a:lnTo>
-                  <a:lnTo>
-                    <a:pt x="6589272" y="1034451"/>
-                  </a:lnTo>
-                  <a:lnTo>
-                    <a:pt x="6517649" y="1023003"/>
-                  </a:lnTo>
-                  <a:lnTo>
-                    <a:pt x="6446027" y="1010713"/>
-                  </a:lnTo>
-                  <a:lnTo>
-                    <a:pt x="6374404" y="997522"/>
-                  </a:lnTo>
-                  <a:lnTo>
-                    <a:pt x="6302782" y="983362"/>
-                  </a:lnTo>
-                  <a:lnTo>
-                    <a:pt x="6231159" y="968162"/>
-                  </a:lnTo>
-                  <a:lnTo>
-                    <a:pt x="6159537" y="951846"/>
-                  </a:lnTo>
-                  <a:lnTo>
-                    <a:pt x="6087914" y="934332"/>
-                  </a:lnTo>
-                  <a:lnTo>
-                    <a:pt x="6016292" y="915533"/>
-                  </a:lnTo>
-                  <a:lnTo>
-                    <a:pt x="5944669" y="895353"/>
-                  </a:lnTo>
-                  <a:lnTo>
-                    <a:pt x="5873047" y="873691"/>
-                  </a:lnTo>
-                  <a:lnTo>
-                    <a:pt x="5801424" y="850439"/>
-                  </a:lnTo>
-                  <a:lnTo>
-                    <a:pt x="5729802" y="825480"/>
-                  </a:lnTo>
-                  <a:lnTo>
-                    <a:pt x="5658179" y="798688"/>
-                  </a:lnTo>
-                  <a:lnTo>
-                    <a:pt x="5586557" y="769929"/>
-                  </a:lnTo>
-                  <a:lnTo>
-                    <a:pt x="5514934" y="739059"/>
-                  </a:lnTo>
-                  <a:lnTo>
-                    <a:pt x="5443311" y="705922"/>
-                  </a:lnTo>
-                  <a:lnTo>
-                    <a:pt x="5371689" y="670352"/>
-                  </a:lnTo>
-                  <a:lnTo>
-                    <a:pt x="5300066" y="632170"/>
-                  </a:lnTo>
-                  <a:lnTo>
-                    <a:pt x="5228444" y="591185"/>
-                  </a:lnTo>
-                  <a:lnTo>
-                    <a:pt x="5156821" y="547191"/>
-                  </a:lnTo>
-                  <a:lnTo>
-                    <a:pt x="5085199" y="499967"/>
-                  </a:lnTo>
-                  <a:lnTo>
-                    <a:pt x="5013576" y="449276"/>
-                  </a:lnTo>
-                  <a:lnTo>
-                    <a:pt x="4941954" y="394862"/>
-                  </a:lnTo>
-                  <a:lnTo>
-                    <a:pt x="4870331" y="359119"/>
-                  </a:lnTo>
-                  <a:lnTo>
-                    <a:pt x="4798709" y="354718"/>
-                  </a:lnTo>
-                  <a:lnTo>
-                    <a:pt x="4727086" y="350294"/>
-                  </a:lnTo>
-                  <a:lnTo>
-                    <a:pt x="4655464" y="345846"/>
-                  </a:lnTo>
-                  <a:lnTo>
-                    <a:pt x="4583841" y="341374"/>
-                  </a:lnTo>
-                  <a:lnTo>
-                    <a:pt x="4512219" y="336879"/>
-                  </a:lnTo>
-                  <a:lnTo>
-                    <a:pt x="4440596" y="332360"/>
-                  </a:lnTo>
-                  <a:lnTo>
-                    <a:pt x="4368974" y="327817"/>
-                  </a:lnTo>
-                  <a:lnTo>
-                    <a:pt x="4297351" y="323250"/>
-                  </a:lnTo>
-                  <a:lnTo>
-                    <a:pt x="4225729" y="318659"/>
-                  </a:lnTo>
-                  <a:lnTo>
-                    <a:pt x="4154106" y="314044"/>
-                  </a:lnTo>
-                  <a:lnTo>
-                    <a:pt x="4082483" y="309404"/>
-                  </a:lnTo>
-                  <a:lnTo>
-                    <a:pt x="4010861" y="304739"/>
-                  </a:lnTo>
-                  <a:lnTo>
-                    <a:pt x="3939238" y="300050"/>
-                  </a:lnTo>
-                  <a:lnTo>
-                    <a:pt x="3867616" y="295336"/>
-                  </a:lnTo>
-                  <a:lnTo>
-                    <a:pt x="3795993" y="290597"/>
-                  </a:lnTo>
-                  <a:lnTo>
-                    <a:pt x="3724371" y="285833"/>
-                  </a:lnTo>
-                  <a:lnTo>
-                    <a:pt x="3652748" y="281044"/>
-                  </a:lnTo>
-                  <a:lnTo>
-                    <a:pt x="3581126" y="276229"/>
-                  </a:lnTo>
-                  <a:lnTo>
-                    <a:pt x="3509503" y="271389"/>
-                  </a:lnTo>
-                  <a:lnTo>
-                    <a:pt x="3437881" y="266524"/>
-                  </a:lnTo>
-                  <a:lnTo>
-                    <a:pt x="3366258" y="261632"/>
-                  </a:lnTo>
-                  <a:lnTo>
-                    <a:pt x="3294636" y="256715"/>
-                  </a:lnTo>
-                  <a:lnTo>
-                    <a:pt x="3223013" y="251771"/>
-                  </a:lnTo>
-                  <a:lnTo>
-                    <a:pt x="3151391" y="246802"/>
-                  </a:lnTo>
-                  <a:lnTo>
-                    <a:pt x="3079768" y="241806"/>
-                  </a:lnTo>
-                  <a:lnTo>
-                    <a:pt x="3008146" y="236784"/>
-                  </a:lnTo>
-                  <a:lnTo>
-                    <a:pt x="2936523" y="231735"/>
-                  </a:lnTo>
-                  <a:lnTo>
-                    <a:pt x="2864901" y="226659"/>
-                  </a:lnTo>
-                  <a:lnTo>
-                    <a:pt x="2793278" y="221556"/>
-                  </a:lnTo>
-                  <a:lnTo>
-                    <a:pt x="2721655" y="216427"/>
-                  </a:lnTo>
-                  <a:lnTo>
-                    <a:pt x="2650033" y="211270"/>
-                  </a:lnTo>
-                  <a:lnTo>
-                    <a:pt x="2578410" y="206086"/>
-                  </a:lnTo>
-                  <a:lnTo>
-                    <a:pt x="2506788" y="200875"/>
-                  </a:lnTo>
-                  <a:lnTo>
-                    <a:pt x="2435165" y="195636"/>
-                  </a:lnTo>
-                  <a:lnTo>
-                    <a:pt x="2363543" y="190369"/>
-                  </a:lnTo>
-                  <a:lnTo>
-                    <a:pt x="2291920" y="185074"/>
-                  </a:lnTo>
-                  <a:lnTo>
-                    <a:pt x="2220298" y="179751"/>
-                  </a:lnTo>
-                  <a:lnTo>
-                    <a:pt x="2148675" y="174400"/>
-                  </a:lnTo>
-                  <a:lnTo>
-                    <a:pt x="2077053" y="169021"/>
-                  </a:lnTo>
-                  <a:lnTo>
-                    <a:pt x="2005430" y="163613"/>
-                  </a:lnTo>
-                  <a:lnTo>
-                    <a:pt x="1933808" y="158177"/>
-                  </a:lnTo>
-                  <a:lnTo>
-                    <a:pt x="1862185" y="152712"/>
-                  </a:lnTo>
-                  <a:lnTo>
-                    <a:pt x="1790563" y="147218"/>
-                  </a:lnTo>
-                  <a:lnTo>
-                    <a:pt x="1718940" y="141695"/>
-                  </a:lnTo>
-                  <a:lnTo>
-                    <a:pt x="1647318" y="136142"/>
-                  </a:lnTo>
-                  <a:lnTo>
-                    <a:pt x="1575695" y="130561"/>
-                  </a:lnTo>
-                  <a:lnTo>
-                    <a:pt x="1504073" y="124949"/>
-                  </a:lnTo>
-                  <a:lnTo>
-                    <a:pt x="1432450" y="119308"/>
-                  </a:lnTo>
-                  <a:lnTo>
-                    <a:pt x="1360827" y="113637"/>
-                  </a:lnTo>
-                  <a:lnTo>
-                    <a:pt x="1289205" y="107936"/>
-                  </a:lnTo>
-                  <a:lnTo>
-                    <a:pt x="1217582" y="102205"/>
-                  </a:lnTo>
-                  <a:lnTo>
-                    <a:pt x="1145960" y="96444"/>
-                  </a:lnTo>
-                  <a:lnTo>
-                    <a:pt x="1074337" y="90652"/>
-                  </a:lnTo>
-                  <a:lnTo>
-                    <a:pt x="1002715" y="84829"/>
-                  </a:lnTo>
-                  <a:lnTo>
-                    <a:pt x="931092" y="78976"/>
-                  </a:lnTo>
-                  <a:lnTo>
-                    <a:pt x="859470" y="73091"/>
-                  </a:lnTo>
-                  <a:lnTo>
-                    <a:pt x="787847" y="67175"/>
-                  </a:lnTo>
-                  <a:lnTo>
-                    <a:pt x="716225" y="61229"/>
-                  </a:lnTo>
-                  <a:lnTo>
-                    <a:pt x="644602" y="55250"/>
-                  </a:lnTo>
-                  <a:lnTo>
-                    <a:pt x="572980" y="49240"/>
-                  </a:lnTo>
-                  <a:lnTo>
-                    <a:pt x="501357" y="43198"/>
-                  </a:lnTo>
-                  <a:lnTo>
-                    <a:pt x="429735" y="37124"/>
-                  </a:lnTo>
-                  <a:lnTo>
-                    <a:pt x="358112" y="31018"/>
-                  </a:lnTo>
-                  <a:lnTo>
-                    <a:pt x="286490" y="24880"/>
-                  </a:lnTo>
-                  <a:lnTo>
-                    <a:pt x="214867" y="18709"/>
-                  </a:lnTo>
-                  <a:lnTo>
-                    <a:pt x="143245" y="12505"/>
-                  </a:lnTo>
-                  <a:lnTo>
-                    <a:pt x="71622" y="6269"/>
-                  </a:lnTo>
-                  <a:lnTo>
-                    <a:pt x="0" y="0"/>
+                    <a:pt x="7019007" y="711090"/>
+                  </a:lnTo>
+                  <a:lnTo>
+                    <a:pt x="6947385" y="703172"/>
+                  </a:lnTo>
+                  <a:lnTo>
+                    <a:pt x="6875762" y="694706"/>
+                  </a:lnTo>
+                  <a:lnTo>
+                    <a:pt x="6804139" y="685654"/>
+                  </a:lnTo>
+                  <a:lnTo>
+                    <a:pt x="6732517" y="675974"/>
+                  </a:lnTo>
+                  <a:lnTo>
+                    <a:pt x="6660894" y="665623"/>
+                  </a:lnTo>
+                  <a:lnTo>
+                    <a:pt x="6589272" y="654556"/>
+                  </a:lnTo>
+                  <a:lnTo>
+                    <a:pt x="6517649" y="642722"/>
+                  </a:lnTo>
+                  <a:lnTo>
+                    <a:pt x="6446027" y="630067"/>
+                  </a:lnTo>
+                  <a:lnTo>
+                    <a:pt x="6374404" y="616537"/>
+                  </a:lnTo>
+                  <a:lnTo>
+                    <a:pt x="6302782" y="602068"/>
+                  </a:lnTo>
+                  <a:lnTo>
+                    <a:pt x="6231159" y="586597"/>
+                  </a:lnTo>
+                  <a:lnTo>
+                    <a:pt x="6159537" y="570055"/>
+                  </a:lnTo>
+                  <a:lnTo>
+                    <a:pt x="6087914" y="552366"/>
+                  </a:lnTo>
+                  <a:lnTo>
+                    <a:pt x="6016292" y="533452"/>
+                  </a:lnTo>
+                  <a:lnTo>
+                    <a:pt x="5944669" y="513228"/>
+                  </a:lnTo>
+                  <a:lnTo>
+                    <a:pt x="5873047" y="491602"/>
+                  </a:lnTo>
+                  <a:lnTo>
+                    <a:pt x="5801424" y="468478"/>
+                  </a:lnTo>
+                  <a:lnTo>
+                    <a:pt x="5729802" y="443752"/>
+                  </a:lnTo>
+                  <a:lnTo>
+                    <a:pt x="5658179" y="417313"/>
+                  </a:lnTo>
+                  <a:lnTo>
+                    <a:pt x="5586557" y="389043"/>
+                  </a:lnTo>
+                  <a:lnTo>
+                    <a:pt x="5514934" y="358813"/>
+                  </a:lnTo>
+                  <a:lnTo>
+                    <a:pt x="5443311" y="326490"/>
+                  </a:lnTo>
+                  <a:lnTo>
+                    <a:pt x="5371689" y="291927"/>
+                  </a:lnTo>
+                  <a:lnTo>
+                    <a:pt x="5300066" y="254969"/>
+                  </a:lnTo>
+                  <a:lnTo>
+                    <a:pt x="5228444" y="215451"/>
+                  </a:lnTo>
+                  <a:lnTo>
+                    <a:pt x="5156821" y="173195"/>
+                  </a:lnTo>
+                  <a:lnTo>
+                    <a:pt x="5085199" y="128012"/>
+                  </a:lnTo>
+                  <a:lnTo>
+                    <a:pt x="5013576" y="79698"/>
+                  </a:lnTo>
+                  <a:lnTo>
+                    <a:pt x="4941954" y="28037"/>
+                  </a:lnTo>
+                  <a:lnTo>
+                    <a:pt x="4870331" y="0"/>
+                  </a:lnTo>
+                  <a:lnTo>
+                    <a:pt x="4798709" y="9887"/>
+                  </a:lnTo>
+                  <a:lnTo>
+                    <a:pt x="4727086" y="19656"/>
+                  </a:lnTo>
+                  <a:lnTo>
+                    <a:pt x="4655464" y="29308"/>
+                  </a:lnTo>
+                  <a:lnTo>
+                    <a:pt x="4583841" y="38844"/>
+                  </a:lnTo>
+                  <a:lnTo>
+                    <a:pt x="4512219" y="48267"/>
+                  </a:lnTo>
+                  <a:lnTo>
+                    <a:pt x="4440596" y="57576"/>
+                  </a:lnTo>
+                  <a:lnTo>
+                    <a:pt x="4368974" y="66774"/>
+                  </a:lnTo>
+                  <a:lnTo>
+                    <a:pt x="4297351" y="75861"/>
+                  </a:lnTo>
+                  <a:lnTo>
+                    <a:pt x="4225729" y="84840"/>
+                  </a:lnTo>
+                  <a:lnTo>
+                    <a:pt x="4154106" y="93711"/>
+                  </a:lnTo>
+                  <a:lnTo>
+                    <a:pt x="4082483" y="102476"/>
+                  </a:lnTo>
+                  <a:lnTo>
+                    <a:pt x="4010861" y="111136"/>
+                  </a:lnTo>
+                  <a:lnTo>
+                    <a:pt x="3939238" y="119692"/>
+                  </a:lnTo>
+                  <a:lnTo>
+                    <a:pt x="3867616" y="128146"/>
+                  </a:lnTo>
+                  <a:lnTo>
+                    <a:pt x="3795993" y="136498"/>
+                  </a:lnTo>
+                  <a:lnTo>
+                    <a:pt x="3724371" y="144750"/>
+                  </a:lnTo>
+                  <a:lnTo>
+                    <a:pt x="3652748" y="152904"/>
+                  </a:lnTo>
+                  <a:lnTo>
+                    <a:pt x="3581126" y="160959"/>
+                  </a:lnTo>
+                  <a:lnTo>
+                    <a:pt x="3509503" y="168919"/>
+                  </a:lnTo>
+                  <a:lnTo>
+                    <a:pt x="3437881" y="176783"/>
+                  </a:lnTo>
+                  <a:lnTo>
+                    <a:pt x="3366258" y="184552"/>
+                  </a:lnTo>
+                  <a:lnTo>
+                    <a:pt x="3294636" y="192229"/>
+                  </a:lnTo>
+                  <a:lnTo>
+                    <a:pt x="3223013" y="199814"/>
+                  </a:lnTo>
+                  <a:lnTo>
+                    <a:pt x="3151391" y="207308"/>
+                  </a:lnTo>
+                  <a:lnTo>
+                    <a:pt x="3079768" y="214712"/>
+                  </a:lnTo>
+                  <a:lnTo>
+                    <a:pt x="3008146" y="222027"/>
+                  </a:lnTo>
+                  <a:lnTo>
+                    <a:pt x="2936523" y="229255"/>
+                  </a:lnTo>
+                  <a:lnTo>
+                    <a:pt x="2864901" y="236396"/>
+                  </a:lnTo>
+                  <a:lnTo>
+                    <a:pt x="2793278" y="243451"/>
+                  </a:lnTo>
+                  <a:lnTo>
+                    <a:pt x="2721655" y="250422"/>
+                  </a:lnTo>
+                  <a:lnTo>
+                    <a:pt x="2650033" y="257310"/>
+                  </a:lnTo>
+                  <a:lnTo>
+                    <a:pt x="2578410" y="264115"/>
+                  </a:lnTo>
+                  <a:lnTo>
+                    <a:pt x="2506788" y="270839"/>
+                  </a:lnTo>
+                  <a:lnTo>
+                    <a:pt x="2435165" y="277482"/>
+                  </a:lnTo>
+                  <a:lnTo>
+                    <a:pt x="2363543" y="284045"/>
+                  </a:lnTo>
+                  <a:lnTo>
+                    <a:pt x="2291920" y="290530"/>
+                  </a:lnTo>
+                  <a:lnTo>
+                    <a:pt x="2220298" y="296937"/>
+                  </a:lnTo>
+                  <a:lnTo>
+                    <a:pt x="2148675" y="303267"/>
+                  </a:lnTo>
+                  <a:lnTo>
+                    <a:pt x="2077053" y="309522"/>
+                  </a:lnTo>
+                  <a:lnTo>
+                    <a:pt x="2005430" y="315701"/>
+                  </a:lnTo>
+                  <a:lnTo>
+                    <a:pt x="1933808" y="321807"/>
+                  </a:lnTo>
+                  <a:lnTo>
+                    <a:pt x="1862185" y="327839"/>
+                  </a:lnTo>
+                  <a:lnTo>
+                    <a:pt x="1790563" y="333799"/>
+                  </a:lnTo>
+                  <a:lnTo>
+                    <a:pt x="1718940" y="339688"/>
+                  </a:lnTo>
+                  <a:lnTo>
+                    <a:pt x="1647318" y="345506"/>
+                  </a:lnTo>
+                  <a:lnTo>
+                    <a:pt x="1575695" y="351255"/>
+                  </a:lnTo>
+                  <a:lnTo>
+                    <a:pt x="1504073" y="356935"/>
+                  </a:lnTo>
+                  <a:lnTo>
+                    <a:pt x="1432450" y="362546"/>
+                  </a:lnTo>
+                  <a:lnTo>
+                    <a:pt x="1360827" y="368091"/>
+                  </a:lnTo>
+                  <a:lnTo>
+                    <a:pt x="1289205" y="373569"/>
+                  </a:lnTo>
+                  <a:lnTo>
+                    <a:pt x="1217582" y="378981"/>
+                  </a:lnTo>
+                  <a:lnTo>
+                    <a:pt x="1145960" y="384328"/>
+                  </a:lnTo>
+                  <a:lnTo>
+                    <a:pt x="1074337" y="389612"/>
+                  </a:lnTo>
+                  <a:lnTo>
+                    <a:pt x="1002715" y="394832"/>
+                  </a:lnTo>
+                  <a:lnTo>
+                    <a:pt x="931092" y="399990"/>
+                  </a:lnTo>
+                  <a:lnTo>
+                    <a:pt x="859470" y="405085"/>
+                  </a:lnTo>
+                  <a:lnTo>
+                    <a:pt x="787847" y="410120"/>
+                  </a:lnTo>
+                  <a:lnTo>
+                    <a:pt x="716225" y="415095"/>
+                  </a:lnTo>
+                  <a:lnTo>
+                    <a:pt x="644602" y="420010"/>
+                  </a:lnTo>
+                  <a:lnTo>
+                    <a:pt x="572980" y="424866"/>
+                  </a:lnTo>
+                  <a:lnTo>
+                    <a:pt x="501357" y="429663"/>
+                  </a:lnTo>
+                  <a:lnTo>
+                    <a:pt x="429735" y="434404"/>
+                  </a:lnTo>
+                  <a:lnTo>
+                    <a:pt x="358112" y="439087"/>
+                  </a:lnTo>
+                  <a:lnTo>
+                    <a:pt x="286490" y="443715"/>
+                  </a:lnTo>
+                  <a:lnTo>
+                    <a:pt x="214867" y="448287"/>
+                  </a:lnTo>
+                  <a:lnTo>
+                    <a:pt x="143245" y="452804"/>
+                  </a:lnTo>
+                  <a:lnTo>
+                    <a:pt x="71622" y="457267"/>
+                  </a:lnTo>
+                  <a:lnTo>
+                    <a:pt x="0" y="461677"/>
                   </a:lnTo>
                 </a:path>
               </a:pathLst>
@@ -3998,222 +4010,264 @@
           </p:nvSpPr>
           <p:spPr>
             <a:xfrm>
-              <a:off x="3371889" y="2073503"/>
-              <a:ext cx="4890789" cy="3224871"/>
+              <a:off x="2329841" y="2073503"/>
+              <a:ext cx="5932837" cy="3125736"/>
             </a:xfrm>
             <a:custGeom>
               <a:avLst/>
               <a:pathLst>
-                <a:path w="4890789" h="3224871">
+                <a:path w="5932837" h="3125736">
                   <a:moveTo>
                     <a:pt x="0" y="0"/>
                   </a:moveTo>
                   <a:lnTo>
-                    <a:pt x="20458" y="38186"/>
-                  </a:lnTo>
-                  <a:lnTo>
-                    <a:pt x="92080" y="166880"/>
-                  </a:lnTo>
-                  <a:lnTo>
-                    <a:pt x="163703" y="290767"/>
-                  </a:lnTo>
-                  <a:lnTo>
-                    <a:pt x="235325" y="410027"/>
-                  </a:lnTo>
-                  <a:lnTo>
-                    <a:pt x="306948" y="524832"/>
-                  </a:lnTo>
-                  <a:lnTo>
-                    <a:pt x="378570" y="635350"/>
-                  </a:lnTo>
-                  <a:lnTo>
-                    <a:pt x="450193" y="741739"/>
-                  </a:lnTo>
-                  <a:lnTo>
-                    <a:pt x="521815" y="844155"/>
-                  </a:lnTo>
-                  <a:lnTo>
-                    <a:pt x="593438" y="942746"/>
-                  </a:lnTo>
-                  <a:lnTo>
-                    <a:pt x="665060" y="1037654"/>
-                  </a:lnTo>
-                  <a:lnTo>
-                    <a:pt x="736683" y="1129017"/>
-                  </a:lnTo>
-                  <a:lnTo>
-                    <a:pt x="808305" y="1216968"/>
-                  </a:lnTo>
-                  <a:lnTo>
-                    <a:pt x="879928" y="1301634"/>
-                  </a:lnTo>
-                  <a:lnTo>
-                    <a:pt x="951550" y="1383137"/>
-                  </a:lnTo>
-                  <a:lnTo>
-                    <a:pt x="1023173" y="1461596"/>
-                  </a:lnTo>
-                  <a:lnTo>
-                    <a:pt x="1094795" y="1537125"/>
-                  </a:lnTo>
-                  <a:lnTo>
-                    <a:pt x="1166418" y="1609833"/>
-                  </a:lnTo>
-                  <a:lnTo>
-                    <a:pt x="1238040" y="1679825"/>
-                  </a:lnTo>
-                  <a:lnTo>
-                    <a:pt x="1309663" y="1747202"/>
-                  </a:lnTo>
-                  <a:lnTo>
-                    <a:pt x="1381286" y="1812063"/>
-                  </a:lnTo>
-                  <a:lnTo>
-                    <a:pt x="1452908" y="1874502"/>
-                  </a:lnTo>
-                  <a:lnTo>
-                    <a:pt x="1524531" y="1934608"/>
-                  </a:lnTo>
-                  <a:lnTo>
-                    <a:pt x="1596153" y="1992470"/>
-                  </a:lnTo>
-                  <a:lnTo>
-                    <a:pt x="1667776" y="2048170"/>
-                  </a:lnTo>
-                  <a:lnTo>
-                    <a:pt x="1739398" y="2101790"/>
-                  </a:lnTo>
-                  <a:lnTo>
-                    <a:pt x="1811021" y="2153407"/>
-                  </a:lnTo>
-                  <a:lnTo>
-                    <a:pt x="1882643" y="2203096"/>
-                  </a:lnTo>
-                  <a:lnTo>
-                    <a:pt x="1954266" y="2250929"/>
-                  </a:lnTo>
-                  <a:lnTo>
-                    <a:pt x="2025888" y="2296976"/>
-                  </a:lnTo>
-                  <a:lnTo>
-                    <a:pt x="2097511" y="2341302"/>
-                  </a:lnTo>
-                  <a:lnTo>
-                    <a:pt x="2169133" y="2383973"/>
-                  </a:lnTo>
-                  <a:lnTo>
-                    <a:pt x="2240756" y="2425051"/>
-                  </a:lnTo>
-                  <a:lnTo>
-                    <a:pt x="2312378" y="2464594"/>
-                  </a:lnTo>
-                  <a:lnTo>
-                    <a:pt x="2384001" y="2502660"/>
-                  </a:lnTo>
-                  <a:lnTo>
-                    <a:pt x="2455623" y="2539304"/>
-                  </a:lnTo>
-                  <a:lnTo>
-                    <a:pt x="2527246" y="2574580"/>
-                  </a:lnTo>
-                  <a:lnTo>
-                    <a:pt x="2598868" y="2608538"/>
-                  </a:lnTo>
-                  <a:lnTo>
-                    <a:pt x="2670491" y="2641227"/>
-                  </a:lnTo>
-                  <a:lnTo>
-                    <a:pt x="2742114" y="2672696"/>
-                  </a:lnTo>
-                  <a:lnTo>
-                    <a:pt x="2813736" y="2702989"/>
-                  </a:lnTo>
-                  <a:lnTo>
-                    <a:pt x="2885359" y="2732151"/>
-                  </a:lnTo>
-                  <a:lnTo>
-                    <a:pt x="2956981" y="2760224"/>
-                  </a:lnTo>
-                  <a:lnTo>
-                    <a:pt x="3028604" y="2787248"/>
-                  </a:lnTo>
-                  <a:lnTo>
-                    <a:pt x="3100226" y="2813262"/>
-                  </a:lnTo>
-                  <a:lnTo>
-                    <a:pt x="3171849" y="2838305"/>
-                  </a:lnTo>
-                  <a:lnTo>
-                    <a:pt x="3243471" y="2862413"/>
-                  </a:lnTo>
-                  <a:lnTo>
-                    <a:pt x="3315094" y="2885620"/>
-                  </a:lnTo>
-                  <a:lnTo>
-                    <a:pt x="3386716" y="2907961"/>
-                  </a:lnTo>
-                  <a:lnTo>
-                    <a:pt x="3458339" y="2929467"/>
-                  </a:lnTo>
-                  <a:lnTo>
-                    <a:pt x="3529961" y="2950169"/>
-                  </a:lnTo>
-                  <a:lnTo>
-                    <a:pt x="3601584" y="2970099"/>
-                  </a:lnTo>
-                  <a:lnTo>
-                    <a:pt x="3673206" y="2989284"/>
-                  </a:lnTo>
-                  <a:lnTo>
-                    <a:pt x="3744829" y="3007753"/>
-                  </a:lnTo>
-                  <a:lnTo>
-                    <a:pt x="3816451" y="3025531"/>
-                  </a:lnTo>
-                  <a:lnTo>
-                    <a:pt x="3888074" y="3042646"/>
-                  </a:lnTo>
-                  <a:lnTo>
-                    <a:pt x="3959696" y="3059121"/>
-                  </a:lnTo>
-                  <a:lnTo>
-                    <a:pt x="4031319" y="3074981"/>
-                  </a:lnTo>
-                  <a:lnTo>
-                    <a:pt x="4102942" y="3090249"/>
-                  </a:lnTo>
-                  <a:lnTo>
-                    <a:pt x="4174564" y="3104946"/>
-                  </a:lnTo>
-                  <a:lnTo>
-                    <a:pt x="4246187" y="3119095"/>
-                  </a:lnTo>
-                  <a:lnTo>
-                    <a:pt x="4317809" y="3132715"/>
-                  </a:lnTo>
-                  <a:lnTo>
-                    <a:pt x="4389432" y="3145826"/>
-                  </a:lnTo>
-                  <a:lnTo>
-                    <a:pt x="4461054" y="3158448"/>
-                  </a:lnTo>
-                  <a:lnTo>
-                    <a:pt x="4532677" y="3170598"/>
-                  </a:lnTo>
-                  <a:lnTo>
-                    <a:pt x="4604299" y="3182294"/>
-                  </a:lnTo>
-                  <a:lnTo>
-                    <a:pt x="4675922" y="3193554"/>
-                  </a:lnTo>
-                  <a:lnTo>
-                    <a:pt x="4747544" y="3204392"/>
-                  </a:lnTo>
-                  <a:lnTo>
-                    <a:pt x="4819167" y="3214827"/>
-                  </a:lnTo>
-                  <a:lnTo>
-                    <a:pt x="4890789" y="3224871"/>
+                    <a:pt x="59790" y="79148"/>
+                  </a:lnTo>
+                  <a:lnTo>
+                    <a:pt x="131413" y="171391"/>
+                  </a:lnTo>
+                  <a:lnTo>
+                    <a:pt x="203035" y="261134"/>
+                  </a:lnTo>
+                  <a:lnTo>
+                    <a:pt x="274658" y="348446"/>
+                  </a:lnTo>
+                  <a:lnTo>
+                    <a:pt x="346280" y="433393"/>
+                  </a:lnTo>
+                  <a:lnTo>
+                    <a:pt x="417903" y="516038"/>
+                  </a:lnTo>
+                  <a:lnTo>
+                    <a:pt x="489525" y="596443"/>
+                  </a:lnTo>
+                  <a:lnTo>
+                    <a:pt x="561148" y="674671"/>
+                  </a:lnTo>
+                  <a:lnTo>
+                    <a:pt x="632770" y="750778"/>
+                  </a:lnTo>
+                  <a:lnTo>
+                    <a:pt x="704393" y="824824"/>
+                  </a:lnTo>
+                  <a:lnTo>
+                    <a:pt x="776015" y="896864"/>
+                  </a:lnTo>
+                  <a:lnTo>
+                    <a:pt x="847638" y="966952"/>
+                  </a:lnTo>
+                  <a:lnTo>
+                    <a:pt x="919260" y="1035140"/>
+                  </a:lnTo>
+                  <a:lnTo>
+                    <a:pt x="990883" y="1101482"/>
+                  </a:lnTo>
+                  <a:lnTo>
+                    <a:pt x="1062506" y="1166026"/>
+                  </a:lnTo>
+                  <a:lnTo>
+                    <a:pt x="1134128" y="1228821"/>
+                  </a:lnTo>
+                  <a:lnTo>
+                    <a:pt x="1205751" y="1289915"/>
+                  </a:lnTo>
+                  <a:lnTo>
+                    <a:pt x="1277373" y="1349354"/>
+                  </a:lnTo>
+                  <a:lnTo>
+                    <a:pt x="1348996" y="1407182"/>
+                  </a:lnTo>
+                  <a:lnTo>
+                    <a:pt x="1420618" y="1463443"/>
+                  </a:lnTo>
+                  <a:lnTo>
+                    <a:pt x="1492241" y="1518180"/>
+                  </a:lnTo>
+                  <a:lnTo>
+                    <a:pt x="1563863" y="1571435"/>
+                  </a:lnTo>
+                  <a:lnTo>
+                    <a:pt x="1635486" y="1623246"/>
+                  </a:lnTo>
+                  <a:lnTo>
+                    <a:pt x="1707108" y="1673653"/>
+                  </a:lnTo>
+                  <a:lnTo>
+                    <a:pt x="1778731" y="1722695"/>
+                  </a:lnTo>
+                  <a:lnTo>
+                    <a:pt x="1850353" y="1770408"/>
+                  </a:lnTo>
+                  <a:lnTo>
+                    <a:pt x="1921976" y="1816829"/>
+                  </a:lnTo>
+                  <a:lnTo>
+                    <a:pt x="1993598" y="1861991"/>
+                  </a:lnTo>
+                  <a:lnTo>
+                    <a:pt x="2065221" y="1905931"/>
+                  </a:lnTo>
+                  <a:lnTo>
+                    <a:pt x="2136843" y="1948679"/>
+                  </a:lnTo>
+                  <a:lnTo>
+                    <a:pt x="2208466" y="1990270"/>
+                  </a:lnTo>
+                  <a:lnTo>
+                    <a:pt x="2280088" y="2030733"/>
+                  </a:lnTo>
+                  <a:lnTo>
+                    <a:pt x="2351711" y="2070100"/>
+                  </a:lnTo>
+                  <a:lnTo>
+                    <a:pt x="2423334" y="2108401"/>
+                  </a:lnTo>
+                  <a:lnTo>
+                    <a:pt x="2494956" y="2145664"/>
+                  </a:lnTo>
+                  <a:lnTo>
+                    <a:pt x="2566579" y="2181917"/>
+                  </a:lnTo>
+                  <a:lnTo>
+                    <a:pt x="2638201" y="2217189"/>
+                  </a:lnTo>
+                  <a:lnTo>
+                    <a:pt x="2709824" y="2251504"/>
+                  </a:lnTo>
+                  <a:lnTo>
+                    <a:pt x="2781446" y="2284890"/>
+                  </a:lnTo>
+                  <a:lnTo>
+                    <a:pt x="2853069" y="2317371"/>
+                  </a:lnTo>
+                  <a:lnTo>
+                    <a:pt x="2924691" y="2348972"/>
+                  </a:lnTo>
+                  <a:lnTo>
+                    <a:pt x="2996314" y="2379717"/>
+                  </a:lnTo>
+                  <a:lnTo>
+                    <a:pt x="3067936" y="2409630"/>
+                  </a:lnTo>
+                  <a:lnTo>
+                    <a:pt x="3139559" y="2438731"/>
+                  </a:lnTo>
+                  <a:lnTo>
+                    <a:pt x="3211181" y="2467044"/>
+                  </a:lnTo>
+                  <a:lnTo>
+                    <a:pt x="3282804" y="2494590"/>
+                  </a:lnTo>
+                  <a:lnTo>
+                    <a:pt x="3354426" y="2521390"/>
+                  </a:lnTo>
+                  <a:lnTo>
+                    <a:pt x="3426049" y="2547464"/>
+                  </a:lnTo>
+                  <a:lnTo>
+                    <a:pt x="3497671" y="2572831"/>
+                  </a:lnTo>
+                  <a:lnTo>
+                    <a:pt x="3569294" y="2597511"/>
+                  </a:lnTo>
+                  <a:lnTo>
+                    <a:pt x="3640916" y="2621522"/>
+                  </a:lnTo>
+                  <a:lnTo>
+                    <a:pt x="3712539" y="2644883"/>
+                  </a:lnTo>
+                  <a:lnTo>
+                    <a:pt x="3784162" y="2667611"/>
+                  </a:lnTo>
+                  <a:lnTo>
+                    <a:pt x="3855784" y="2689723"/>
+                  </a:lnTo>
+                  <a:lnTo>
+                    <a:pt x="3927407" y="2711236"/>
+                  </a:lnTo>
+                  <a:lnTo>
+                    <a:pt x="3999029" y="2732166"/>
+                  </a:lnTo>
+                  <a:lnTo>
+                    <a:pt x="4070652" y="2752529"/>
+                  </a:lnTo>
+                  <a:lnTo>
+                    <a:pt x="4142274" y="2772340"/>
+                  </a:lnTo>
+                  <a:lnTo>
+                    <a:pt x="4213897" y="2791614"/>
+                  </a:lnTo>
+                  <a:lnTo>
+                    <a:pt x="4285519" y="2810367"/>
+                  </a:lnTo>
+                  <a:lnTo>
+                    <a:pt x="4357142" y="2828611"/>
+                  </a:lnTo>
+                  <a:lnTo>
+                    <a:pt x="4428764" y="2846361"/>
+                  </a:lnTo>
+                  <a:lnTo>
+                    <a:pt x="4500387" y="2863630"/>
+                  </a:lnTo>
+                  <a:lnTo>
+                    <a:pt x="4572009" y="2880431"/>
+                  </a:lnTo>
+                  <a:lnTo>
+                    <a:pt x="4643632" y="2896777"/>
+                  </a:lnTo>
+                  <a:lnTo>
+                    <a:pt x="4715254" y="2912680"/>
+                  </a:lnTo>
+                  <a:lnTo>
+                    <a:pt x="4786877" y="2928152"/>
+                  </a:lnTo>
+                  <a:lnTo>
+                    <a:pt x="4858499" y="2943205"/>
+                  </a:lnTo>
+                  <a:lnTo>
+                    <a:pt x="4930122" y="2957850"/>
+                  </a:lnTo>
+                  <a:lnTo>
+                    <a:pt x="5001744" y="2972099"/>
+                  </a:lnTo>
+                  <a:lnTo>
+                    <a:pt x="5073367" y="2985961"/>
+                  </a:lnTo>
+                  <a:lnTo>
+                    <a:pt x="5144990" y="2999448"/>
+                  </a:lnTo>
+                  <a:lnTo>
+                    <a:pt x="5216612" y="3012569"/>
+                  </a:lnTo>
+                  <a:lnTo>
+                    <a:pt x="5288235" y="3025335"/>
+                  </a:lnTo>
+                  <a:lnTo>
+                    <a:pt x="5359857" y="3037755"/>
+                  </a:lnTo>
+                  <a:lnTo>
+                    <a:pt x="5431480" y="3049839"/>
+                  </a:lnTo>
+                  <a:lnTo>
+                    <a:pt x="5503102" y="3061595"/>
+                  </a:lnTo>
+                  <a:lnTo>
+                    <a:pt x="5574725" y="3073032"/>
+                  </a:lnTo>
+                  <a:lnTo>
+                    <a:pt x="5646347" y="3084160"/>
+                  </a:lnTo>
+                  <a:lnTo>
+                    <a:pt x="5717970" y="3094986"/>
+                  </a:lnTo>
+                  <a:lnTo>
+                    <a:pt x="5789592" y="3105519"/>
+                  </a:lnTo>
+                  <a:lnTo>
+                    <a:pt x="5861215" y="3115767"/>
+                  </a:lnTo>
+                  <a:lnTo>
+                    <a:pt x="5932837" y="3125736"/>
                   </a:lnTo>
                 </a:path>
               </a:pathLst>
@@ -4953,7 +5007,7 @@
                   <a:latin typeface="Helvetica"/>
                   <a:cs typeface="Helvetica"/>
                 </a:rPr>
-                <a:t>subHR per 1 mL/min: 0.95 (0.91-0.99)  |  per IQR (Δ = 18.2): 0.41 (0.19-0.88)  |  IQR: [-11.5, 6.7]</a:t>
+                <a:t>subHR per 1 mL/min: 0.97 (0.92-1.02)  |  per IQR (Δ = 18.2): 0.52 (0.21-1.33)  |  IQR: [-11.5, 6.7]</a:t>
               </a:r>
             </a:p>
           </p:txBody>

--- a/docs/plots/carbo/jx_carbo_linsubhr_egfrdisc_grade3.pptx
+++ b/docs/plots/carbo/jx_carbo_linsubhr_egfrdisc_grade3.pptx
@@ -4975,7 +4975,7 @@
           <p:spPr>
             <a:xfrm>
               <a:off x="817517" y="1896563"/>
-              <a:ext cx="4869911" cy="82021"/>
+              <a:ext cx="5413065" cy="82021"/>
             </a:xfrm>
             <a:prstGeom prst="rect">
               <a:avLst/>
@@ -5007,7 +5007,7 @@
                   <a:latin typeface="Helvetica"/>
                   <a:cs typeface="Helvetica"/>
                 </a:rPr>
-                <a:t>subHR per 1 mL/min: 0.97 (0.92-1.02)  |  per IQR (Δ = 18.2): 0.52 (0.21-1.33)  |  IQR: [-11.5, 6.7]</a:t>
+                <a:t>subHR per 1 mL/min: 0.97 (0.92-1.02), p = 0.173  |  per IQR (Δ = 18.2): 0.52 (0.21-1.33)  |  IQR: [-11.5, 6.7]</a:t>
               </a:r>
             </a:p>
           </p:txBody>

--- a/docs/plots/carbo/jx_carbo_linsubhr_egfrdisc_grade3.pptx
+++ b/docs/plots/carbo/jx_carbo_linsubhr_egfrdisc_grade3.pptx
@@ -2271,26 +2271,26 @@
           </p:nvSpPr>
           <p:spPr>
             <a:xfrm>
-              <a:off x="817517" y="5142518"/>
-              <a:ext cx="7799693" cy="0"/>
+              <a:off x="915645" y="5071743"/>
+              <a:ext cx="7682587" cy="0"/>
             </a:xfrm>
             <a:custGeom>
               <a:avLst/>
               <a:pathLst>
-                <a:path w="7799693" h="0">
+                <a:path w="7682587" h="0">
                   <a:moveTo>
                     <a:pt x="0" y="0"/>
                   </a:moveTo>
                   <a:lnTo>
-                    <a:pt x="7799693" y="0"/>
-                  </a:lnTo>
-                  <a:lnTo>
-                    <a:pt x="7799693" y="0"/>
+                    <a:pt x="7682587" y="0"/>
+                  </a:lnTo>
+                  <a:lnTo>
+                    <a:pt x="7682587" y="0"/>
                   </a:lnTo>
                 </a:path>
               </a:pathLst>
             </a:custGeom>
-            <a:ln w="6775" cap="flat">
+            <a:ln w="8623" cap="flat">
               <a:solidFill>
                 <a:srgbClr val="EBEBEB">
                   <a:alpha val="100000"/>
@@ -2314,26 +2314,26 @@
           </p:nvSpPr>
           <p:spPr>
             <a:xfrm>
-              <a:off x="817517" y="4313054"/>
-              <a:ext cx="7799693" cy="0"/>
+              <a:off x="915645" y="4298074"/>
+              <a:ext cx="7682587" cy="0"/>
             </a:xfrm>
             <a:custGeom>
               <a:avLst/>
               <a:pathLst>
-                <a:path w="7799693" h="0">
+                <a:path w="7682587" h="0">
                   <a:moveTo>
                     <a:pt x="0" y="0"/>
                   </a:moveTo>
                   <a:lnTo>
-                    <a:pt x="7799693" y="0"/>
-                  </a:lnTo>
-                  <a:lnTo>
-                    <a:pt x="7799693" y="0"/>
+                    <a:pt x="7682587" y="0"/>
+                  </a:lnTo>
+                  <a:lnTo>
+                    <a:pt x="7682587" y="0"/>
                   </a:lnTo>
                 </a:path>
               </a:pathLst>
             </a:custGeom>
-            <a:ln w="6775" cap="flat">
+            <a:ln w="8623" cap="flat">
               <a:solidFill>
                 <a:srgbClr val="EBEBEB">
                   <a:alpha val="100000"/>
@@ -2357,26 +2357,26 @@
           </p:nvSpPr>
           <p:spPr>
             <a:xfrm>
-              <a:off x="817517" y="3483591"/>
-              <a:ext cx="7799693" cy="0"/>
+              <a:off x="915645" y="3524405"/>
+              <a:ext cx="7682587" cy="0"/>
             </a:xfrm>
             <a:custGeom>
               <a:avLst/>
               <a:pathLst>
-                <a:path w="7799693" h="0">
+                <a:path w="7682587" h="0">
                   <a:moveTo>
                     <a:pt x="0" y="0"/>
                   </a:moveTo>
                   <a:lnTo>
-                    <a:pt x="7799693" y="0"/>
-                  </a:lnTo>
-                  <a:lnTo>
-                    <a:pt x="7799693" y="0"/>
+                    <a:pt x="7682587" y="0"/>
+                  </a:lnTo>
+                  <a:lnTo>
+                    <a:pt x="7682587" y="0"/>
                   </a:lnTo>
                 </a:path>
               </a:pathLst>
             </a:custGeom>
-            <a:ln w="6775" cap="flat">
+            <a:ln w="8623" cap="flat">
               <a:solidFill>
                 <a:srgbClr val="EBEBEB">
                   <a:alpha val="100000"/>
@@ -2400,26 +2400,26 @@
           </p:nvSpPr>
           <p:spPr>
             <a:xfrm>
-              <a:off x="817517" y="2654127"/>
-              <a:ext cx="7799693" cy="0"/>
+              <a:off x="915645" y="2750737"/>
+              <a:ext cx="7682587" cy="0"/>
             </a:xfrm>
             <a:custGeom>
               <a:avLst/>
               <a:pathLst>
-                <a:path w="7799693" h="0">
+                <a:path w="7682587" h="0">
                   <a:moveTo>
                     <a:pt x="0" y="0"/>
                   </a:moveTo>
                   <a:lnTo>
-                    <a:pt x="7799693" y="0"/>
-                  </a:lnTo>
-                  <a:lnTo>
-                    <a:pt x="7799693" y="0"/>
+                    <a:pt x="7682587" y="0"/>
+                  </a:lnTo>
+                  <a:lnTo>
+                    <a:pt x="7682587" y="0"/>
                   </a:lnTo>
                 </a:path>
               </a:pathLst>
             </a:custGeom>
-            <a:ln w="6775" cap="flat">
+            <a:ln w="8623" cap="flat">
               <a:solidFill>
                 <a:srgbClr val="EBEBEB">
                   <a:alpha val="100000"/>
@@ -2443,15 +2443,15 @@
           </p:nvSpPr>
           <p:spPr>
             <a:xfrm>
-              <a:off x="1487487" y="2073503"/>
-              <a:ext cx="0" cy="3649639"/>
+              <a:off x="1575555" y="2209169"/>
+              <a:ext cx="0" cy="3404141"/>
             </a:xfrm>
             <a:custGeom>
               <a:avLst/>
               <a:pathLst>
-                <a:path w="0" h="3649639">
+                <a:path w="0" h="3404141">
                   <a:moveTo>
-                    <a:pt x="0" y="3649639"/>
+                    <a:pt x="0" y="3404141"/>
                   </a:moveTo>
                   <a:lnTo>
                     <a:pt x="0" y="0"/>
@@ -2462,7 +2462,7 @@
                 </a:path>
               </a:pathLst>
             </a:custGeom>
-            <a:ln w="6775" cap="flat">
+            <a:ln w="8623" cap="flat">
               <a:solidFill>
                 <a:srgbClr val="EBEBEB">
                   <a:alpha val="100000"/>
@@ -2486,15 +2486,15 @@
           </p:nvSpPr>
           <p:spPr>
             <a:xfrm>
-              <a:off x="3337360" y="2073503"/>
-              <a:ext cx="0" cy="3649639"/>
+              <a:off x="3397654" y="2209169"/>
+              <a:ext cx="0" cy="3404141"/>
             </a:xfrm>
             <a:custGeom>
               <a:avLst/>
               <a:pathLst>
-                <a:path w="0" h="3649639">
+                <a:path w="0" h="3404141">
                   <a:moveTo>
-                    <a:pt x="0" y="3649639"/>
+                    <a:pt x="0" y="3404141"/>
                   </a:moveTo>
                   <a:lnTo>
                     <a:pt x="0" y="0"/>
@@ -2505,7 +2505,7 @@
                 </a:path>
               </a:pathLst>
             </a:custGeom>
-            <a:ln w="6775" cap="flat">
+            <a:ln w="8623" cap="flat">
               <a:solidFill>
                 <a:srgbClr val="EBEBEB">
                   <a:alpha val="100000"/>
@@ -2529,15 +2529,15 @@
           </p:nvSpPr>
           <p:spPr>
             <a:xfrm>
-              <a:off x="5187233" y="2073503"/>
-              <a:ext cx="0" cy="3649639"/>
+              <a:off x="5219752" y="2209169"/>
+              <a:ext cx="0" cy="3404141"/>
             </a:xfrm>
             <a:custGeom>
               <a:avLst/>
               <a:pathLst>
-                <a:path w="0" h="3649639">
+                <a:path w="0" h="3404141">
                   <a:moveTo>
-                    <a:pt x="0" y="3649639"/>
+                    <a:pt x="0" y="3404141"/>
                   </a:moveTo>
                   <a:lnTo>
                     <a:pt x="0" y="0"/>
@@ -2548,7 +2548,7 @@
                 </a:path>
               </a:pathLst>
             </a:custGeom>
-            <a:ln w="6775" cap="flat">
+            <a:ln w="8623" cap="flat">
               <a:solidFill>
                 <a:srgbClr val="EBEBEB">
                   <a:alpha val="100000"/>
@@ -2572,15 +2572,15 @@
           </p:nvSpPr>
           <p:spPr>
             <a:xfrm>
-              <a:off x="7037106" y="2073503"/>
-              <a:ext cx="0" cy="3649639"/>
+              <a:off x="7041851" y="2209169"/>
+              <a:ext cx="0" cy="3404141"/>
             </a:xfrm>
             <a:custGeom>
               <a:avLst/>
               <a:pathLst>
-                <a:path w="0" h="3649639">
+                <a:path w="0" h="3404141">
                   <a:moveTo>
-                    <a:pt x="0" y="3649639"/>
+                    <a:pt x="0" y="3404141"/>
                   </a:moveTo>
                   <a:lnTo>
                     <a:pt x="0" y="0"/>
@@ -2591,7 +2591,7 @@
                 </a:path>
               </a:pathLst>
             </a:custGeom>
-            <a:ln w="6775" cap="flat">
+            <a:ln w="8623" cap="flat">
               <a:solidFill>
                 <a:srgbClr val="EBEBEB">
                   <a:alpha val="100000"/>
@@ -2615,26 +2615,26 @@
           </p:nvSpPr>
           <p:spPr>
             <a:xfrm>
-              <a:off x="817517" y="5557249"/>
-              <a:ext cx="7799693" cy="0"/>
+              <a:off x="915645" y="5458577"/>
+              <a:ext cx="7682587" cy="0"/>
             </a:xfrm>
             <a:custGeom>
               <a:avLst/>
               <a:pathLst>
-                <a:path w="7799693" h="0">
+                <a:path w="7682587" h="0">
                   <a:moveTo>
                     <a:pt x="0" y="0"/>
                   </a:moveTo>
                   <a:lnTo>
-                    <a:pt x="7799693" y="0"/>
-                  </a:lnTo>
-                  <a:lnTo>
-                    <a:pt x="7799693" y="0"/>
+                    <a:pt x="7682587" y="0"/>
+                  </a:lnTo>
+                  <a:lnTo>
+                    <a:pt x="7682587" y="0"/>
                   </a:lnTo>
                 </a:path>
               </a:pathLst>
             </a:custGeom>
-            <a:ln w="13550" cap="flat">
+            <a:ln w="17246" cap="flat">
               <a:solidFill>
                 <a:srgbClr val="EBEBEB">
                   <a:alpha val="100000"/>
@@ -2658,26 +2658,26 @@
           </p:nvSpPr>
           <p:spPr>
             <a:xfrm>
-              <a:off x="817517" y="4727786"/>
-              <a:ext cx="7799693" cy="0"/>
+              <a:off x="915645" y="4684908"/>
+              <a:ext cx="7682587" cy="0"/>
             </a:xfrm>
             <a:custGeom>
               <a:avLst/>
               <a:pathLst>
-                <a:path w="7799693" h="0">
+                <a:path w="7682587" h="0">
                   <a:moveTo>
                     <a:pt x="0" y="0"/>
                   </a:moveTo>
                   <a:lnTo>
-                    <a:pt x="7799693" y="0"/>
-                  </a:lnTo>
-                  <a:lnTo>
-                    <a:pt x="7799693" y="0"/>
+                    <a:pt x="7682587" y="0"/>
+                  </a:lnTo>
+                  <a:lnTo>
+                    <a:pt x="7682587" y="0"/>
                   </a:lnTo>
                 </a:path>
               </a:pathLst>
             </a:custGeom>
-            <a:ln w="13550" cap="flat">
+            <a:ln w="17246" cap="flat">
               <a:solidFill>
                 <a:srgbClr val="EBEBEB">
                   <a:alpha val="100000"/>
@@ -2701,26 +2701,26 @@
           </p:nvSpPr>
           <p:spPr>
             <a:xfrm>
-              <a:off x="817517" y="3898322"/>
-              <a:ext cx="7799693" cy="0"/>
+              <a:off x="915645" y="3911240"/>
+              <a:ext cx="7682587" cy="0"/>
             </a:xfrm>
             <a:custGeom>
               <a:avLst/>
               <a:pathLst>
-                <a:path w="7799693" h="0">
+                <a:path w="7682587" h="0">
                   <a:moveTo>
                     <a:pt x="0" y="0"/>
                   </a:moveTo>
                   <a:lnTo>
-                    <a:pt x="7799693" y="0"/>
-                  </a:lnTo>
-                  <a:lnTo>
-                    <a:pt x="7799693" y="0"/>
+                    <a:pt x="7682587" y="0"/>
+                  </a:lnTo>
+                  <a:lnTo>
+                    <a:pt x="7682587" y="0"/>
                   </a:lnTo>
                 </a:path>
               </a:pathLst>
             </a:custGeom>
-            <a:ln w="13550" cap="flat">
+            <a:ln w="17246" cap="flat">
               <a:solidFill>
                 <a:srgbClr val="EBEBEB">
                   <a:alpha val="100000"/>
@@ -2744,26 +2744,26 @@
           </p:nvSpPr>
           <p:spPr>
             <a:xfrm>
-              <a:off x="817517" y="3068859"/>
-              <a:ext cx="7799693" cy="0"/>
+              <a:off x="915645" y="3137571"/>
+              <a:ext cx="7682587" cy="0"/>
             </a:xfrm>
             <a:custGeom>
               <a:avLst/>
               <a:pathLst>
-                <a:path w="7799693" h="0">
+                <a:path w="7682587" h="0">
                   <a:moveTo>
                     <a:pt x="0" y="0"/>
                   </a:moveTo>
                   <a:lnTo>
-                    <a:pt x="7799693" y="0"/>
-                  </a:lnTo>
-                  <a:lnTo>
-                    <a:pt x="7799693" y="0"/>
+                    <a:pt x="7682587" y="0"/>
+                  </a:lnTo>
+                  <a:lnTo>
+                    <a:pt x="7682587" y="0"/>
                   </a:lnTo>
                 </a:path>
               </a:pathLst>
             </a:custGeom>
-            <a:ln w="13550" cap="flat">
+            <a:ln w="17246" cap="flat">
               <a:solidFill>
                 <a:srgbClr val="EBEBEB">
                   <a:alpha val="100000"/>
@@ -2787,26 +2787,26 @@
           </p:nvSpPr>
           <p:spPr>
             <a:xfrm>
-              <a:off x="817517" y="2239395"/>
-              <a:ext cx="7799693" cy="0"/>
+              <a:off x="915645" y="2363903"/>
+              <a:ext cx="7682587" cy="0"/>
             </a:xfrm>
             <a:custGeom>
               <a:avLst/>
               <a:pathLst>
-                <a:path w="7799693" h="0">
+                <a:path w="7682587" h="0">
                   <a:moveTo>
                     <a:pt x="0" y="0"/>
                   </a:moveTo>
                   <a:lnTo>
-                    <a:pt x="7799693" y="0"/>
-                  </a:lnTo>
-                  <a:lnTo>
-                    <a:pt x="7799693" y="0"/>
+                    <a:pt x="7682587" y="0"/>
+                  </a:lnTo>
+                  <a:lnTo>
+                    <a:pt x="7682587" y="0"/>
                   </a:lnTo>
                 </a:path>
               </a:pathLst>
             </a:custGeom>
-            <a:ln w="13550" cap="flat">
+            <a:ln w="17246" cap="flat">
               <a:solidFill>
                 <a:srgbClr val="EBEBEB">
                   <a:alpha val="100000"/>
@@ -2830,15 +2830,15 @@
           </p:nvSpPr>
           <p:spPr>
             <a:xfrm>
-              <a:off x="2412424" y="2073503"/>
-              <a:ext cx="0" cy="3649639"/>
+              <a:off x="2486605" y="2209169"/>
+              <a:ext cx="0" cy="3404141"/>
             </a:xfrm>
             <a:custGeom>
               <a:avLst/>
               <a:pathLst>
-                <a:path w="0" h="3649639">
+                <a:path w="0" h="3404141">
                   <a:moveTo>
-                    <a:pt x="0" y="3649639"/>
+                    <a:pt x="0" y="3404141"/>
                   </a:moveTo>
                   <a:lnTo>
                     <a:pt x="0" y="0"/>
@@ -2849,7 +2849,7 @@
                 </a:path>
               </a:pathLst>
             </a:custGeom>
-            <a:ln w="13550" cap="flat">
+            <a:ln w="17246" cap="flat">
               <a:solidFill>
                 <a:srgbClr val="EBEBEB">
                   <a:alpha val="100000"/>
@@ -2873,15 +2873,15 @@
           </p:nvSpPr>
           <p:spPr>
             <a:xfrm>
-              <a:off x="4262297" y="2073503"/>
-              <a:ext cx="0" cy="3649639"/>
+              <a:off x="4308703" y="2209169"/>
+              <a:ext cx="0" cy="3404141"/>
             </a:xfrm>
             <a:custGeom>
               <a:avLst/>
               <a:pathLst>
-                <a:path w="0" h="3649639">
+                <a:path w="0" h="3404141">
                   <a:moveTo>
-                    <a:pt x="0" y="3649639"/>
+                    <a:pt x="0" y="3404141"/>
                   </a:moveTo>
                   <a:lnTo>
                     <a:pt x="0" y="0"/>
@@ -2892,7 +2892,7 @@
                 </a:path>
               </a:pathLst>
             </a:custGeom>
-            <a:ln w="13550" cap="flat">
+            <a:ln w="17246" cap="flat">
               <a:solidFill>
                 <a:srgbClr val="EBEBEB">
                   <a:alpha val="100000"/>
@@ -2916,15 +2916,15 @@
           </p:nvSpPr>
           <p:spPr>
             <a:xfrm>
-              <a:off x="6112169" y="2073503"/>
-              <a:ext cx="0" cy="3649639"/>
+              <a:off x="6130802" y="2209169"/>
+              <a:ext cx="0" cy="3404141"/>
             </a:xfrm>
             <a:custGeom>
               <a:avLst/>
               <a:pathLst>
-                <a:path w="0" h="3649639">
+                <a:path w="0" h="3404141">
                   <a:moveTo>
-                    <a:pt x="0" y="3649639"/>
+                    <a:pt x="0" y="3404141"/>
                   </a:moveTo>
                   <a:lnTo>
                     <a:pt x="0" y="0"/>
@@ -2935,7 +2935,7 @@
                 </a:path>
               </a:pathLst>
             </a:custGeom>
-            <a:ln w="13550" cap="flat">
+            <a:ln w="17246" cap="flat">
               <a:solidFill>
                 <a:srgbClr val="EBEBEB">
                   <a:alpha val="100000"/>
@@ -2959,15 +2959,15 @@
           </p:nvSpPr>
           <p:spPr>
             <a:xfrm>
-              <a:off x="7962042" y="2073503"/>
-              <a:ext cx="0" cy="3649639"/>
+              <a:off x="7952900" y="2209169"/>
+              <a:ext cx="0" cy="3404141"/>
             </a:xfrm>
             <a:custGeom>
               <a:avLst/>
               <a:pathLst>
-                <a:path w="0" h="3649639">
+                <a:path w="0" h="3404141">
                   <a:moveTo>
-                    <a:pt x="0" y="3649639"/>
+                    <a:pt x="0" y="3404141"/>
                   </a:moveTo>
                   <a:lnTo>
                     <a:pt x="0" y="0"/>
@@ -2978,7 +2978,7 @@
                 </a:path>
               </a:pathLst>
             </a:custGeom>
-            <a:ln w="13550" cap="flat">
+            <a:ln w="17246" cap="flat">
               <a:solidFill>
                 <a:srgbClr val="EBEBEB">
                   <a:alpha val="100000"/>
@@ -3002,474 +3002,474 @@
           </p:nvSpPr>
           <p:spPr>
             <a:xfrm>
-              <a:off x="1172049" y="2073503"/>
-              <a:ext cx="7090630" cy="3376869"/>
+              <a:off x="1264853" y="2209169"/>
+              <a:ext cx="6984170" cy="3149719"/>
             </a:xfrm>
             <a:custGeom>
               <a:avLst/>
               <a:pathLst>
-                <a:path w="7090630" h="3376869">
+                <a:path w="6984170" h="3149719">
                   <a:moveTo>
-                    <a:pt x="3365340" y="0"/>
+                    <a:pt x="3314813" y="0"/>
                   </a:moveTo>
                   <a:lnTo>
-                    <a:pt x="3366258" y="3090"/>
-                  </a:lnTo>
-                  <a:lnTo>
-                    <a:pt x="3437881" y="228609"/>
-                  </a:lnTo>
-                  <a:lnTo>
-                    <a:pt x="3509503" y="439516"/>
-                  </a:lnTo>
-                  <a:lnTo>
-                    <a:pt x="3581126" y="636758"/>
-                  </a:lnTo>
-                  <a:lnTo>
-                    <a:pt x="3652748" y="821220"/>
-                  </a:lnTo>
-                  <a:lnTo>
-                    <a:pt x="3724371" y="993731"/>
-                  </a:lnTo>
-                  <a:lnTo>
-                    <a:pt x="3795993" y="1155064"/>
-                  </a:lnTo>
-                  <a:lnTo>
-                    <a:pt x="3867616" y="1305944"/>
-                  </a:lnTo>
-                  <a:lnTo>
-                    <a:pt x="3939238" y="1447049"/>
-                  </a:lnTo>
-                  <a:lnTo>
-                    <a:pt x="4010861" y="1579011"/>
-                  </a:lnTo>
-                  <a:lnTo>
-                    <a:pt x="4082483" y="1702423"/>
-                  </a:lnTo>
-                  <a:lnTo>
-                    <a:pt x="4154106" y="1817838"/>
-                  </a:lnTo>
-                  <a:lnTo>
-                    <a:pt x="4225729" y="1925776"/>
-                  </a:lnTo>
-                  <a:lnTo>
-                    <a:pt x="4297351" y="2026720"/>
-                  </a:lnTo>
-                  <a:lnTo>
-                    <a:pt x="4368974" y="2121124"/>
-                  </a:lnTo>
-                  <a:lnTo>
-                    <a:pt x="4440596" y="2209411"/>
-                  </a:lnTo>
-                  <a:lnTo>
-                    <a:pt x="4512219" y="2291978"/>
-                  </a:lnTo>
-                  <a:lnTo>
-                    <a:pt x="4583841" y="2369195"/>
-                  </a:lnTo>
-                  <a:lnTo>
-                    <a:pt x="4655464" y="2441409"/>
-                  </a:lnTo>
-                  <a:lnTo>
-                    <a:pt x="4727086" y="2508944"/>
-                  </a:lnTo>
-                  <a:lnTo>
-                    <a:pt x="4798709" y="2572104"/>
-                  </a:lnTo>
-                  <a:lnTo>
-                    <a:pt x="4870331" y="2631171"/>
-                  </a:lnTo>
-                  <a:lnTo>
-                    <a:pt x="4941954" y="2648367"/>
-                  </a:lnTo>
-                  <a:lnTo>
-                    <a:pt x="5013576" y="2638238"/>
-                  </a:lnTo>
-                  <a:lnTo>
-                    <a:pt x="5085199" y="2627986"/>
-                  </a:lnTo>
-                  <a:lnTo>
-                    <a:pt x="5156821" y="2617611"/>
-                  </a:lnTo>
-                  <a:lnTo>
-                    <a:pt x="5228444" y="2607109"/>
-                  </a:lnTo>
-                  <a:lnTo>
-                    <a:pt x="5300066" y="2596480"/>
-                  </a:lnTo>
-                  <a:lnTo>
-                    <a:pt x="5371689" y="2585722"/>
-                  </a:lnTo>
-                  <a:lnTo>
-                    <a:pt x="5443311" y="2574834"/>
-                  </a:lnTo>
-                  <a:lnTo>
-                    <a:pt x="5514934" y="2563814"/>
-                  </a:lnTo>
-                  <a:lnTo>
-                    <a:pt x="5586557" y="2552660"/>
-                  </a:lnTo>
-                  <a:lnTo>
-                    <a:pt x="5658179" y="2541371"/>
-                  </a:lnTo>
-                  <a:lnTo>
-                    <a:pt x="5729802" y="2529945"/>
-                  </a:lnTo>
-                  <a:lnTo>
-                    <a:pt x="5801424" y="2518380"/>
-                  </a:lnTo>
-                  <a:lnTo>
-                    <a:pt x="5873047" y="2506675"/>
-                  </a:lnTo>
-                  <a:lnTo>
-                    <a:pt x="5944669" y="2494829"/>
-                  </a:lnTo>
-                  <a:lnTo>
-                    <a:pt x="6016292" y="2482839"/>
-                  </a:lnTo>
-                  <a:lnTo>
-                    <a:pt x="6087914" y="2470703"/>
-                  </a:lnTo>
-                  <a:lnTo>
-                    <a:pt x="6159537" y="2458420"/>
-                  </a:lnTo>
-                  <a:lnTo>
-                    <a:pt x="6231159" y="2445988"/>
-                  </a:lnTo>
-                  <a:lnTo>
-                    <a:pt x="6302782" y="2433406"/>
-                  </a:lnTo>
-                  <a:lnTo>
-                    <a:pt x="6374404" y="2420671"/>
-                  </a:lnTo>
-                  <a:lnTo>
-                    <a:pt x="6446027" y="2407781"/>
-                  </a:lnTo>
-                  <a:lnTo>
-                    <a:pt x="6517649" y="2394736"/>
-                  </a:lnTo>
-                  <a:lnTo>
-                    <a:pt x="6589272" y="2381532"/>
-                  </a:lnTo>
-                  <a:lnTo>
-                    <a:pt x="6660894" y="2368168"/>
-                  </a:lnTo>
-                  <a:lnTo>
-                    <a:pt x="6732517" y="2354642"/>
-                  </a:lnTo>
-                  <a:lnTo>
-                    <a:pt x="6804139" y="2340952"/>
-                  </a:lnTo>
-                  <a:lnTo>
-                    <a:pt x="6875762" y="2327096"/>
-                  </a:lnTo>
-                  <a:lnTo>
-                    <a:pt x="6947385" y="2313072"/>
-                  </a:lnTo>
-                  <a:lnTo>
-                    <a:pt x="7019007" y="2298878"/>
-                  </a:lnTo>
-                  <a:lnTo>
-                    <a:pt x="7090630" y="2284512"/>
-                  </a:lnTo>
-                  <a:lnTo>
-                    <a:pt x="7090630" y="3376869"/>
-                  </a:lnTo>
-                  <a:lnTo>
-                    <a:pt x="7019007" y="3369464"/>
-                  </a:lnTo>
-                  <a:lnTo>
-                    <a:pt x="6947385" y="3361547"/>
-                  </a:lnTo>
-                  <a:lnTo>
-                    <a:pt x="6875762" y="3353081"/>
-                  </a:lnTo>
-                  <a:lnTo>
-                    <a:pt x="6804139" y="3344028"/>
-                  </a:lnTo>
-                  <a:lnTo>
-                    <a:pt x="6732517" y="3334348"/>
-                  </a:lnTo>
-                  <a:lnTo>
-                    <a:pt x="6660894" y="3323998"/>
-                  </a:lnTo>
-                  <a:lnTo>
-                    <a:pt x="6589272" y="3312930"/>
-                  </a:lnTo>
-                  <a:lnTo>
-                    <a:pt x="6517649" y="3301096"/>
-                  </a:lnTo>
-                  <a:lnTo>
-                    <a:pt x="6446027" y="3288442"/>
-                  </a:lnTo>
-                  <a:lnTo>
-                    <a:pt x="6374404" y="3274911"/>
-                  </a:lnTo>
-                  <a:lnTo>
-                    <a:pt x="6302782" y="3260443"/>
-                  </a:lnTo>
-                  <a:lnTo>
-                    <a:pt x="6231159" y="3244972"/>
-                  </a:lnTo>
-                  <a:lnTo>
-                    <a:pt x="6159537" y="3228429"/>
-                  </a:lnTo>
-                  <a:lnTo>
-                    <a:pt x="6087914" y="3210741"/>
-                  </a:lnTo>
-                  <a:lnTo>
-                    <a:pt x="6016292" y="3191827"/>
-                  </a:lnTo>
-                  <a:lnTo>
-                    <a:pt x="5944669" y="3171602"/>
-                  </a:lnTo>
-                  <a:lnTo>
-                    <a:pt x="5873047" y="3149977"/>
-                  </a:lnTo>
-                  <a:lnTo>
-                    <a:pt x="5801424" y="3126853"/>
-                  </a:lnTo>
-                  <a:lnTo>
-                    <a:pt x="5729802" y="3102127"/>
-                  </a:lnTo>
-                  <a:lnTo>
-                    <a:pt x="5658179" y="3075688"/>
-                  </a:lnTo>
-                  <a:lnTo>
-                    <a:pt x="5586557" y="3047417"/>
-                  </a:lnTo>
-                  <a:lnTo>
-                    <a:pt x="5514934" y="3017188"/>
-                  </a:lnTo>
-                  <a:lnTo>
-                    <a:pt x="5443311" y="2984864"/>
-                  </a:lnTo>
-                  <a:lnTo>
-                    <a:pt x="5371689" y="2950301"/>
-                  </a:lnTo>
-                  <a:lnTo>
-                    <a:pt x="5300066" y="2913344"/>
-                  </a:lnTo>
-                  <a:lnTo>
-                    <a:pt x="5228444" y="2873825"/>
-                  </a:lnTo>
-                  <a:lnTo>
-                    <a:pt x="5156821" y="2831570"/>
-                  </a:lnTo>
-                  <a:lnTo>
-                    <a:pt x="5085199" y="2786386"/>
-                  </a:lnTo>
-                  <a:lnTo>
-                    <a:pt x="5013576" y="2738072"/>
-                  </a:lnTo>
-                  <a:lnTo>
-                    <a:pt x="4941954" y="2686411"/>
-                  </a:lnTo>
-                  <a:lnTo>
-                    <a:pt x="4870331" y="2658374"/>
-                  </a:lnTo>
-                  <a:lnTo>
-                    <a:pt x="4798709" y="2668261"/>
-                  </a:lnTo>
-                  <a:lnTo>
-                    <a:pt x="4727086" y="2678030"/>
-                  </a:lnTo>
-                  <a:lnTo>
-                    <a:pt x="4655464" y="2687682"/>
-                  </a:lnTo>
-                  <a:lnTo>
-                    <a:pt x="4583841" y="2697219"/>
-                  </a:lnTo>
-                  <a:lnTo>
-                    <a:pt x="4512219" y="2706641"/>
-                  </a:lnTo>
-                  <a:lnTo>
-                    <a:pt x="4440596" y="2715950"/>
-                  </a:lnTo>
-                  <a:lnTo>
-                    <a:pt x="4368974" y="2725148"/>
-                  </a:lnTo>
-                  <a:lnTo>
-                    <a:pt x="4297351" y="2734236"/>
-                  </a:lnTo>
-                  <a:lnTo>
-                    <a:pt x="4225729" y="2743214"/>
-                  </a:lnTo>
-                  <a:lnTo>
-                    <a:pt x="4154106" y="2752085"/>
-                  </a:lnTo>
-                  <a:lnTo>
-                    <a:pt x="4082483" y="2760850"/>
-                  </a:lnTo>
-                  <a:lnTo>
-                    <a:pt x="4010861" y="2769510"/>
-                  </a:lnTo>
-                  <a:lnTo>
-                    <a:pt x="3939238" y="2778066"/>
-                  </a:lnTo>
-                  <a:lnTo>
-                    <a:pt x="3867616" y="2786520"/>
-                  </a:lnTo>
-                  <a:lnTo>
-                    <a:pt x="3795993" y="2794872"/>
-                  </a:lnTo>
-                  <a:lnTo>
-                    <a:pt x="3724371" y="2803125"/>
-                  </a:lnTo>
-                  <a:lnTo>
-                    <a:pt x="3652748" y="2811278"/>
-                  </a:lnTo>
-                  <a:lnTo>
-                    <a:pt x="3581126" y="2819334"/>
-                  </a:lnTo>
-                  <a:lnTo>
-                    <a:pt x="3509503" y="2827293"/>
-                  </a:lnTo>
-                  <a:lnTo>
-                    <a:pt x="3437881" y="2835157"/>
-                  </a:lnTo>
-                  <a:lnTo>
-                    <a:pt x="3366258" y="2842927"/>
-                  </a:lnTo>
-                  <a:lnTo>
-                    <a:pt x="3294636" y="2850603"/>
-                  </a:lnTo>
-                  <a:lnTo>
-                    <a:pt x="3223013" y="2858188"/>
-                  </a:lnTo>
-                  <a:lnTo>
-                    <a:pt x="3151391" y="2865682"/>
-                  </a:lnTo>
-                  <a:lnTo>
-                    <a:pt x="3079768" y="2873086"/>
-                  </a:lnTo>
-                  <a:lnTo>
-                    <a:pt x="3008146" y="2880401"/>
-                  </a:lnTo>
-                  <a:lnTo>
-                    <a:pt x="2936523" y="2887629"/>
-                  </a:lnTo>
-                  <a:lnTo>
-                    <a:pt x="2864901" y="2894770"/>
-                  </a:lnTo>
-                  <a:lnTo>
-                    <a:pt x="2793278" y="2901826"/>
-                  </a:lnTo>
-                  <a:lnTo>
-                    <a:pt x="2721655" y="2908797"/>
-                  </a:lnTo>
-                  <a:lnTo>
-                    <a:pt x="2650033" y="2915684"/>
-                  </a:lnTo>
-                  <a:lnTo>
-                    <a:pt x="2578410" y="2922490"/>
-                  </a:lnTo>
-                  <a:lnTo>
-                    <a:pt x="2506788" y="2929213"/>
-                  </a:lnTo>
-                  <a:lnTo>
-                    <a:pt x="2435165" y="2935856"/>
-                  </a:lnTo>
-                  <a:lnTo>
-                    <a:pt x="2363543" y="2942419"/>
-                  </a:lnTo>
-                  <a:lnTo>
-                    <a:pt x="2291920" y="2948904"/>
-                  </a:lnTo>
-                  <a:lnTo>
-                    <a:pt x="2220298" y="2955311"/>
-                  </a:lnTo>
-                  <a:lnTo>
-                    <a:pt x="2148675" y="2961642"/>
-                  </a:lnTo>
-                  <a:lnTo>
-                    <a:pt x="2077053" y="2967896"/>
-                  </a:lnTo>
-                  <a:lnTo>
-                    <a:pt x="2005430" y="2974076"/>
-                  </a:lnTo>
-                  <a:lnTo>
-                    <a:pt x="1933808" y="2980181"/>
-                  </a:lnTo>
-                  <a:lnTo>
-                    <a:pt x="1862185" y="2986214"/>
-                  </a:lnTo>
-                  <a:lnTo>
-                    <a:pt x="1790563" y="2992174"/>
-                  </a:lnTo>
-                  <a:lnTo>
-                    <a:pt x="1718940" y="2998063"/>
-                  </a:lnTo>
-                  <a:lnTo>
-                    <a:pt x="1647318" y="3003881"/>
-                  </a:lnTo>
-                  <a:lnTo>
-                    <a:pt x="1575695" y="3009629"/>
-                  </a:lnTo>
-                  <a:lnTo>
-                    <a:pt x="1504073" y="3015309"/>
-                  </a:lnTo>
-                  <a:lnTo>
-                    <a:pt x="1432450" y="3020921"/>
-                  </a:lnTo>
-                  <a:lnTo>
-                    <a:pt x="1360827" y="3026465"/>
-                  </a:lnTo>
-                  <a:lnTo>
-                    <a:pt x="1289205" y="3031943"/>
-                  </a:lnTo>
-                  <a:lnTo>
-                    <a:pt x="1217582" y="3037355"/>
-                  </a:lnTo>
-                  <a:lnTo>
-                    <a:pt x="1145960" y="3042703"/>
-                  </a:lnTo>
-                  <a:lnTo>
-                    <a:pt x="1074337" y="3047986"/>
-                  </a:lnTo>
-                  <a:lnTo>
-                    <a:pt x="1002715" y="3053206"/>
-                  </a:lnTo>
-                  <a:lnTo>
-                    <a:pt x="931092" y="3058364"/>
-                  </a:lnTo>
-                  <a:lnTo>
-                    <a:pt x="859470" y="3063460"/>
-                  </a:lnTo>
-                  <a:lnTo>
-                    <a:pt x="787847" y="3068495"/>
-                  </a:lnTo>
-                  <a:lnTo>
-                    <a:pt x="716225" y="3073469"/>
-                  </a:lnTo>
-                  <a:lnTo>
-                    <a:pt x="644602" y="3078384"/>
-                  </a:lnTo>
-                  <a:lnTo>
-                    <a:pt x="572980" y="3083240"/>
-                  </a:lnTo>
-                  <a:lnTo>
-                    <a:pt x="501357" y="3088038"/>
-                  </a:lnTo>
-                  <a:lnTo>
-                    <a:pt x="429735" y="3092778"/>
-                  </a:lnTo>
-                  <a:lnTo>
-                    <a:pt x="358112" y="3097462"/>
-                  </a:lnTo>
-                  <a:lnTo>
-                    <a:pt x="286490" y="3102089"/>
-                  </a:lnTo>
-                  <a:lnTo>
-                    <a:pt x="214867" y="3106661"/>
-                  </a:lnTo>
-                  <a:lnTo>
-                    <a:pt x="143245" y="3111179"/>
-                  </a:lnTo>
-                  <a:lnTo>
-                    <a:pt x="71622" y="3115642"/>
-                  </a:lnTo>
-                  <a:lnTo>
-                    <a:pt x="0" y="3120051"/>
+                    <a:pt x="3315717" y="2882"/>
+                  </a:lnTo>
+                  <a:lnTo>
+                    <a:pt x="3386264" y="213231"/>
+                  </a:lnTo>
+                  <a:lnTo>
+                    <a:pt x="3456811" y="409951"/>
+                  </a:lnTo>
+                  <a:lnTo>
+                    <a:pt x="3527358" y="593926"/>
+                  </a:lnTo>
+                  <a:lnTo>
+                    <a:pt x="3597905" y="765980"/>
+                  </a:lnTo>
+                  <a:lnTo>
+                    <a:pt x="3668452" y="926886"/>
+                  </a:lnTo>
+                  <a:lnTo>
+                    <a:pt x="3739000" y="1077367"/>
+                  </a:lnTo>
+                  <a:lnTo>
+                    <a:pt x="3809547" y="1218098"/>
+                  </a:lnTo>
+                  <a:lnTo>
+                    <a:pt x="3880094" y="1349711"/>
+                  </a:lnTo>
+                  <a:lnTo>
+                    <a:pt x="3950641" y="1472796"/>
+                  </a:lnTo>
+                  <a:lnTo>
+                    <a:pt x="4021188" y="1587907"/>
+                  </a:lnTo>
+                  <a:lnTo>
+                    <a:pt x="4091736" y="1695559"/>
+                  </a:lnTo>
+                  <a:lnTo>
+                    <a:pt x="4162283" y="1796236"/>
+                  </a:lnTo>
+                  <a:lnTo>
+                    <a:pt x="4232830" y="1890390"/>
+                  </a:lnTo>
+                  <a:lnTo>
+                    <a:pt x="4303377" y="1978444"/>
+                  </a:lnTo>
+                  <a:lnTo>
+                    <a:pt x="4373924" y="2060792"/>
+                  </a:lnTo>
+                  <a:lnTo>
+                    <a:pt x="4444471" y="2137805"/>
+                  </a:lnTo>
+                  <a:lnTo>
+                    <a:pt x="4515019" y="2209828"/>
+                  </a:lnTo>
+                  <a:lnTo>
+                    <a:pt x="4585566" y="2277185"/>
+                  </a:lnTo>
+                  <a:lnTo>
+                    <a:pt x="4656113" y="2340177"/>
+                  </a:lnTo>
+                  <a:lnTo>
+                    <a:pt x="4726660" y="2399088"/>
+                  </a:lnTo>
+                  <a:lnTo>
+                    <a:pt x="4797207" y="2454182"/>
+                  </a:lnTo>
+                  <a:lnTo>
+                    <a:pt x="4867754" y="2470221"/>
+                  </a:lnTo>
+                  <a:lnTo>
+                    <a:pt x="4938302" y="2460773"/>
+                  </a:lnTo>
+                  <a:lnTo>
+                    <a:pt x="5008849" y="2451211"/>
+                  </a:lnTo>
+                  <a:lnTo>
+                    <a:pt x="5079396" y="2441534"/>
+                  </a:lnTo>
+                  <a:lnTo>
+                    <a:pt x="5149943" y="2431738"/>
+                  </a:lnTo>
+                  <a:lnTo>
+                    <a:pt x="5220490" y="2421824"/>
+                  </a:lnTo>
+                  <a:lnTo>
+                    <a:pt x="5291037" y="2411790"/>
+                  </a:lnTo>
+                  <a:lnTo>
+                    <a:pt x="5361585" y="2401634"/>
+                  </a:lnTo>
+                  <a:lnTo>
+                    <a:pt x="5432132" y="2391355"/>
+                  </a:lnTo>
+                  <a:lnTo>
+                    <a:pt x="5502679" y="2380952"/>
+                  </a:lnTo>
+                  <a:lnTo>
+                    <a:pt x="5573226" y="2370422"/>
+                  </a:lnTo>
+                  <a:lnTo>
+                    <a:pt x="5643773" y="2359765"/>
+                  </a:lnTo>
+                  <a:lnTo>
+                    <a:pt x="5714320" y="2348978"/>
+                  </a:lnTo>
+                  <a:lnTo>
+                    <a:pt x="5784868" y="2338061"/>
+                  </a:lnTo>
+                  <a:lnTo>
+                    <a:pt x="5855415" y="2327011"/>
+                  </a:lnTo>
+                  <a:lnTo>
+                    <a:pt x="5925962" y="2315827"/>
+                  </a:lnTo>
+                  <a:lnTo>
+                    <a:pt x="5996509" y="2304508"/>
+                  </a:lnTo>
+                  <a:lnTo>
+                    <a:pt x="6067056" y="2293051"/>
+                  </a:lnTo>
+                  <a:lnTo>
+                    <a:pt x="6137604" y="2281456"/>
+                  </a:lnTo>
+                  <a:lnTo>
+                    <a:pt x="6208151" y="2269720"/>
+                  </a:lnTo>
+                  <a:lnTo>
+                    <a:pt x="6278698" y="2257841"/>
+                  </a:lnTo>
+                  <a:lnTo>
+                    <a:pt x="6349245" y="2245819"/>
+                  </a:lnTo>
+                  <a:lnTo>
+                    <a:pt x="6419792" y="2233651"/>
+                  </a:lnTo>
+                  <a:lnTo>
+                    <a:pt x="6490339" y="2221335"/>
+                  </a:lnTo>
+                  <a:lnTo>
+                    <a:pt x="6560887" y="2208870"/>
+                  </a:lnTo>
+                  <a:lnTo>
+                    <a:pt x="6631434" y="2196254"/>
+                  </a:lnTo>
+                  <a:lnTo>
+                    <a:pt x="6701981" y="2183484"/>
+                  </a:lnTo>
+                  <a:lnTo>
+                    <a:pt x="6772528" y="2170561"/>
+                  </a:lnTo>
+                  <a:lnTo>
+                    <a:pt x="6843075" y="2157480"/>
+                  </a:lnTo>
+                  <a:lnTo>
+                    <a:pt x="6913622" y="2144241"/>
+                  </a:lnTo>
+                  <a:lnTo>
+                    <a:pt x="6984170" y="2130841"/>
+                  </a:lnTo>
+                  <a:lnTo>
+                    <a:pt x="6984170" y="3149719"/>
+                  </a:lnTo>
+                  <a:lnTo>
+                    <a:pt x="6913622" y="3142813"/>
+                  </a:lnTo>
+                  <a:lnTo>
+                    <a:pt x="6843075" y="3135428"/>
+                  </a:lnTo>
+                  <a:lnTo>
+                    <a:pt x="6772528" y="3127531"/>
+                  </a:lnTo>
+                  <a:lnTo>
+                    <a:pt x="6701981" y="3119088"/>
+                  </a:lnTo>
+                  <a:lnTo>
+                    <a:pt x="6631434" y="3110059"/>
+                  </a:lnTo>
+                  <a:lnTo>
+                    <a:pt x="6560887" y="3100405"/>
+                  </a:lnTo>
+                  <a:lnTo>
+                    <a:pt x="6490339" y="3090082"/>
+                  </a:lnTo>
+                  <a:lnTo>
+                    <a:pt x="6419792" y="3079043"/>
+                  </a:lnTo>
+                  <a:lnTo>
+                    <a:pt x="6349245" y="3067240"/>
+                  </a:lnTo>
+                  <a:lnTo>
+                    <a:pt x="6278698" y="3054620"/>
+                  </a:lnTo>
+                  <a:lnTo>
+                    <a:pt x="6208151" y="3041125"/>
+                  </a:lnTo>
+                  <a:lnTo>
+                    <a:pt x="6137604" y="3026695"/>
+                  </a:lnTo>
+                  <a:lnTo>
+                    <a:pt x="6067056" y="3011265"/>
+                  </a:lnTo>
+                  <a:lnTo>
+                    <a:pt x="5996509" y="2994766"/>
+                  </a:lnTo>
+                  <a:lnTo>
+                    <a:pt x="5925962" y="2977124"/>
+                  </a:lnTo>
+                  <a:lnTo>
+                    <a:pt x="5855415" y="2958260"/>
+                  </a:lnTo>
+                  <a:lnTo>
+                    <a:pt x="5784868" y="2938089"/>
+                  </a:lnTo>
+                  <a:lnTo>
+                    <a:pt x="5714320" y="2916521"/>
+                  </a:lnTo>
+                  <a:lnTo>
+                    <a:pt x="5643773" y="2893458"/>
+                  </a:lnTo>
+                  <a:lnTo>
+                    <a:pt x="5573226" y="2868798"/>
+                  </a:lnTo>
+                  <a:lnTo>
+                    <a:pt x="5502679" y="2842429"/>
+                  </a:lnTo>
+                  <a:lnTo>
+                    <a:pt x="5432132" y="2814233"/>
+                  </a:lnTo>
+                  <a:lnTo>
+                    <a:pt x="5361585" y="2784083"/>
+                  </a:lnTo>
+                  <a:lnTo>
+                    <a:pt x="5291037" y="2751845"/>
+                  </a:lnTo>
+                  <a:lnTo>
+                    <a:pt x="5220490" y="2717374"/>
+                  </a:lnTo>
+                  <a:lnTo>
+                    <a:pt x="5149943" y="2680514"/>
+                  </a:lnTo>
+                  <a:lnTo>
+                    <a:pt x="5079396" y="2641100"/>
+                  </a:lnTo>
+                  <a:lnTo>
+                    <a:pt x="5008849" y="2598956"/>
+                  </a:lnTo>
+                  <a:lnTo>
+                    <a:pt x="4938302" y="2553892"/>
+                  </a:lnTo>
+                  <a:lnTo>
+                    <a:pt x="4867754" y="2505706"/>
+                  </a:lnTo>
+                  <a:lnTo>
+                    <a:pt x="4797207" y="2479555"/>
+                  </a:lnTo>
+                  <a:lnTo>
+                    <a:pt x="4726660" y="2488777"/>
+                  </a:lnTo>
+                  <a:lnTo>
+                    <a:pt x="4656113" y="2497889"/>
+                  </a:lnTo>
+                  <a:lnTo>
+                    <a:pt x="4585566" y="2506892"/>
+                  </a:lnTo>
+                  <a:lnTo>
+                    <a:pt x="4515019" y="2515787"/>
+                  </a:lnTo>
+                  <a:lnTo>
+                    <a:pt x="4444471" y="2524575"/>
+                  </a:lnTo>
+                  <a:lnTo>
+                    <a:pt x="4373924" y="2533258"/>
+                  </a:lnTo>
+                  <a:lnTo>
+                    <a:pt x="4303377" y="2541837"/>
+                  </a:lnTo>
+                  <a:lnTo>
+                    <a:pt x="4232830" y="2550314"/>
+                  </a:lnTo>
+                  <a:lnTo>
+                    <a:pt x="4162283" y="2558688"/>
+                  </a:lnTo>
+                  <a:lnTo>
+                    <a:pt x="4091736" y="2566963"/>
+                  </a:lnTo>
+                  <a:lnTo>
+                    <a:pt x="4021188" y="2575138"/>
+                  </a:lnTo>
+                  <a:lnTo>
+                    <a:pt x="3950641" y="2583215"/>
+                  </a:lnTo>
+                  <a:lnTo>
+                    <a:pt x="3880094" y="2591196"/>
+                  </a:lnTo>
+                  <a:lnTo>
+                    <a:pt x="3809547" y="2599081"/>
+                  </a:lnTo>
+                  <a:lnTo>
+                    <a:pt x="3739000" y="2606872"/>
+                  </a:lnTo>
+                  <a:lnTo>
+                    <a:pt x="3668452" y="2614569"/>
+                  </a:lnTo>
+                  <a:lnTo>
+                    <a:pt x="3597905" y="2622174"/>
+                  </a:lnTo>
+                  <a:lnTo>
+                    <a:pt x="3527358" y="2629688"/>
+                  </a:lnTo>
+                  <a:lnTo>
+                    <a:pt x="3456811" y="2637112"/>
+                  </a:lnTo>
+                  <a:lnTo>
+                    <a:pt x="3386264" y="2644446"/>
+                  </a:lnTo>
+                  <a:lnTo>
+                    <a:pt x="3315717" y="2651694"/>
+                  </a:lnTo>
+                  <a:lnTo>
+                    <a:pt x="3245169" y="2658854"/>
+                  </a:lnTo>
+                  <a:lnTo>
+                    <a:pt x="3174622" y="2665928"/>
+                  </a:lnTo>
+                  <a:lnTo>
+                    <a:pt x="3104075" y="2672918"/>
+                  </a:lnTo>
+                  <a:lnTo>
+                    <a:pt x="3033528" y="2679824"/>
+                  </a:lnTo>
+                  <a:lnTo>
+                    <a:pt x="2962981" y="2686647"/>
+                  </a:lnTo>
+                  <a:lnTo>
+                    <a:pt x="2892434" y="2693389"/>
+                  </a:lnTo>
+                  <a:lnTo>
+                    <a:pt x="2821886" y="2700050"/>
+                  </a:lnTo>
+                  <a:lnTo>
+                    <a:pt x="2751339" y="2706631"/>
+                  </a:lnTo>
+                  <a:lnTo>
+                    <a:pt x="2680792" y="2713133"/>
+                  </a:lnTo>
+                  <a:lnTo>
+                    <a:pt x="2610245" y="2719557"/>
+                  </a:lnTo>
+                  <a:lnTo>
+                    <a:pt x="2539698" y="2725904"/>
+                  </a:lnTo>
+                  <a:lnTo>
+                    <a:pt x="2469151" y="2732176"/>
+                  </a:lnTo>
+                  <a:lnTo>
+                    <a:pt x="2398603" y="2738372"/>
+                  </a:lnTo>
+                  <a:lnTo>
+                    <a:pt x="2328056" y="2744494"/>
+                  </a:lnTo>
+                  <a:lnTo>
+                    <a:pt x="2257509" y="2750542"/>
+                  </a:lnTo>
+                  <a:lnTo>
+                    <a:pt x="2186962" y="2756518"/>
+                  </a:lnTo>
+                  <a:lnTo>
+                    <a:pt x="2116415" y="2762423"/>
+                  </a:lnTo>
+                  <a:lnTo>
+                    <a:pt x="2045868" y="2768257"/>
+                  </a:lnTo>
+                  <a:lnTo>
+                    <a:pt x="1975320" y="2774021"/>
+                  </a:lnTo>
+                  <a:lnTo>
+                    <a:pt x="1904773" y="2779715"/>
+                  </a:lnTo>
+                  <a:lnTo>
+                    <a:pt x="1834226" y="2785342"/>
+                  </a:lnTo>
+                  <a:lnTo>
+                    <a:pt x="1763679" y="2790901"/>
+                  </a:lnTo>
+                  <a:lnTo>
+                    <a:pt x="1693132" y="2796394"/>
+                  </a:lnTo>
+                  <a:lnTo>
+                    <a:pt x="1622584" y="2801821"/>
+                  </a:lnTo>
+                  <a:lnTo>
+                    <a:pt x="1552037" y="2807183"/>
+                  </a:lnTo>
+                  <a:lnTo>
+                    <a:pt x="1481490" y="2812480"/>
+                  </a:lnTo>
+                  <a:lnTo>
+                    <a:pt x="1410943" y="2817714"/>
+                  </a:lnTo>
+                  <a:lnTo>
+                    <a:pt x="1340396" y="2822886"/>
+                  </a:lnTo>
+                  <a:lnTo>
+                    <a:pt x="1269849" y="2827995"/>
+                  </a:lnTo>
+                  <a:lnTo>
+                    <a:pt x="1199301" y="2833044"/>
+                  </a:lnTo>
+                  <a:lnTo>
+                    <a:pt x="1128754" y="2838031"/>
+                  </a:lnTo>
+                  <a:lnTo>
+                    <a:pt x="1058207" y="2842959"/>
+                  </a:lnTo>
+                  <a:lnTo>
+                    <a:pt x="987660" y="2847828"/>
+                  </a:lnTo>
+                  <a:lnTo>
+                    <a:pt x="917113" y="2852639"/>
+                  </a:lnTo>
+                  <a:lnTo>
+                    <a:pt x="846566" y="2857392"/>
+                  </a:lnTo>
+                  <a:lnTo>
+                    <a:pt x="776018" y="2862088"/>
+                  </a:lnTo>
+                  <a:lnTo>
+                    <a:pt x="705471" y="2866728"/>
+                  </a:lnTo>
+                  <a:lnTo>
+                    <a:pt x="634924" y="2871312"/>
+                  </a:lnTo>
+                  <a:lnTo>
+                    <a:pt x="564377" y="2875842"/>
+                  </a:lnTo>
+                  <a:lnTo>
+                    <a:pt x="493830" y="2880317"/>
+                  </a:lnTo>
+                  <a:lnTo>
+                    <a:pt x="423283" y="2884738"/>
+                  </a:lnTo>
+                  <a:lnTo>
+                    <a:pt x="352735" y="2889107"/>
+                  </a:lnTo>
+                  <a:lnTo>
+                    <a:pt x="282188" y="2893423"/>
+                  </a:lnTo>
+                  <a:lnTo>
+                    <a:pt x="211641" y="2897688"/>
+                  </a:lnTo>
+                  <a:lnTo>
+                    <a:pt x="141094" y="2901901"/>
+                  </a:lnTo>
+                  <a:lnTo>
+                    <a:pt x="70547" y="2906064"/>
+                  </a:lnTo>
+                  <a:lnTo>
+                    <a:pt x="0" y="2910177"/>
                   </a:lnTo>
                   <a:lnTo>
                     <a:pt x="0" y="0"/>
@@ -3498,174 +3498,174 @@
           </p:nvSpPr>
           <p:spPr>
             <a:xfrm>
-              <a:off x="4537390" y="2073503"/>
-              <a:ext cx="3725289" cy="2648367"/>
+              <a:off x="4579666" y="2209169"/>
+              <a:ext cx="3669356" cy="2470221"/>
             </a:xfrm>
             <a:custGeom>
               <a:avLst/>
               <a:pathLst>
-                <a:path w="3725289" h="2648367">
+                <a:path w="3669356" h="2470221">
                   <a:moveTo>
                     <a:pt x="0" y="0"/>
                   </a:moveTo>
                   <a:lnTo>
-                    <a:pt x="917" y="3090"/>
-                  </a:lnTo>
-                  <a:lnTo>
-                    <a:pt x="72540" y="228609"/>
-                  </a:lnTo>
-                  <a:lnTo>
-                    <a:pt x="144162" y="439516"/>
-                  </a:lnTo>
-                  <a:lnTo>
-                    <a:pt x="215785" y="636758"/>
-                  </a:lnTo>
-                  <a:lnTo>
-                    <a:pt x="287407" y="821220"/>
-                  </a:lnTo>
-                  <a:lnTo>
-                    <a:pt x="359030" y="993731"/>
-                  </a:lnTo>
-                  <a:lnTo>
-                    <a:pt x="430652" y="1155064"/>
-                  </a:lnTo>
-                  <a:lnTo>
-                    <a:pt x="502275" y="1305944"/>
-                  </a:lnTo>
-                  <a:lnTo>
-                    <a:pt x="573897" y="1447049"/>
-                  </a:lnTo>
-                  <a:lnTo>
-                    <a:pt x="645520" y="1579011"/>
-                  </a:lnTo>
-                  <a:lnTo>
-                    <a:pt x="717143" y="1702423"/>
-                  </a:lnTo>
-                  <a:lnTo>
-                    <a:pt x="788765" y="1817838"/>
-                  </a:lnTo>
-                  <a:lnTo>
-                    <a:pt x="860388" y="1925776"/>
-                  </a:lnTo>
-                  <a:lnTo>
-                    <a:pt x="932010" y="2026720"/>
-                  </a:lnTo>
-                  <a:lnTo>
-                    <a:pt x="1003633" y="2121124"/>
-                  </a:lnTo>
-                  <a:lnTo>
-                    <a:pt x="1075255" y="2209411"/>
-                  </a:lnTo>
-                  <a:lnTo>
-                    <a:pt x="1146878" y="2291978"/>
-                  </a:lnTo>
-                  <a:lnTo>
-                    <a:pt x="1218500" y="2369195"/>
-                  </a:lnTo>
-                  <a:lnTo>
-                    <a:pt x="1290123" y="2441409"/>
-                  </a:lnTo>
-                  <a:lnTo>
-                    <a:pt x="1361745" y="2508944"/>
-                  </a:lnTo>
-                  <a:lnTo>
-                    <a:pt x="1433368" y="2572104"/>
-                  </a:lnTo>
-                  <a:lnTo>
-                    <a:pt x="1504990" y="2631171"/>
-                  </a:lnTo>
-                  <a:lnTo>
-                    <a:pt x="1576613" y="2648367"/>
-                  </a:lnTo>
-                  <a:lnTo>
-                    <a:pt x="1648235" y="2638238"/>
-                  </a:lnTo>
-                  <a:lnTo>
-                    <a:pt x="1719858" y="2627986"/>
-                  </a:lnTo>
-                  <a:lnTo>
-                    <a:pt x="1791480" y="2617611"/>
-                  </a:lnTo>
-                  <a:lnTo>
-                    <a:pt x="1863103" y="2607109"/>
-                  </a:lnTo>
-                  <a:lnTo>
-                    <a:pt x="1934725" y="2596480"/>
-                  </a:lnTo>
-                  <a:lnTo>
-                    <a:pt x="2006348" y="2585722"/>
-                  </a:lnTo>
-                  <a:lnTo>
-                    <a:pt x="2077971" y="2574834"/>
-                  </a:lnTo>
-                  <a:lnTo>
-                    <a:pt x="2149593" y="2563814"/>
-                  </a:lnTo>
-                  <a:lnTo>
-                    <a:pt x="2221216" y="2552660"/>
-                  </a:lnTo>
-                  <a:lnTo>
-                    <a:pt x="2292838" y="2541371"/>
-                  </a:lnTo>
-                  <a:lnTo>
-                    <a:pt x="2364461" y="2529945"/>
-                  </a:lnTo>
-                  <a:lnTo>
-                    <a:pt x="2436083" y="2518380"/>
-                  </a:lnTo>
-                  <a:lnTo>
-                    <a:pt x="2507706" y="2506675"/>
-                  </a:lnTo>
-                  <a:lnTo>
-                    <a:pt x="2579328" y="2494829"/>
-                  </a:lnTo>
-                  <a:lnTo>
-                    <a:pt x="2650951" y="2482839"/>
-                  </a:lnTo>
-                  <a:lnTo>
-                    <a:pt x="2722573" y="2470703"/>
-                  </a:lnTo>
-                  <a:lnTo>
-                    <a:pt x="2794196" y="2458420"/>
-                  </a:lnTo>
-                  <a:lnTo>
-                    <a:pt x="2865818" y="2445988"/>
-                  </a:lnTo>
-                  <a:lnTo>
-                    <a:pt x="2937441" y="2433406"/>
-                  </a:lnTo>
-                  <a:lnTo>
-                    <a:pt x="3009063" y="2420671"/>
-                  </a:lnTo>
-                  <a:lnTo>
-                    <a:pt x="3080686" y="2407781"/>
-                  </a:lnTo>
-                  <a:lnTo>
-                    <a:pt x="3152308" y="2394736"/>
-                  </a:lnTo>
-                  <a:lnTo>
-                    <a:pt x="3223931" y="2381532"/>
-                  </a:lnTo>
-                  <a:lnTo>
-                    <a:pt x="3295553" y="2368168"/>
-                  </a:lnTo>
-                  <a:lnTo>
-                    <a:pt x="3367176" y="2354642"/>
-                  </a:lnTo>
-                  <a:lnTo>
-                    <a:pt x="3438799" y="2340952"/>
-                  </a:lnTo>
-                  <a:lnTo>
-                    <a:pt x="3510421" y="2327096"/>
-                  </a:lnTo>
-                  <a:lnTo>
-                    <a:pt x="3582044" y="2313072"/>
-                  </a:lnTo>
-                  <a:lnTo>
-                    <a:pt x="3653666" y="2298878"/>
-                  </a:lnTo>
-                  <a:lnTo>
-                    <a:pt x="3725289" y="2284512"/>
+                    <a:pt x="904" y="2882"/>
+                  </a:lnTo>
+                  <a:lnTo>
+                    <a:pt x="71451" y="213231"/>
+                  </a:lnTo>
+                  <a:lnTo>
+                    <a:pt x="141998" y="409951"/>
+                  </a:lnTo>
+                  <a:lnTo>
+                    <a:pt x="212545" y="593926"/>
+                  </a:lnTo>
+                  <a:lnTo>
+                    <a:pt x="283092" y="765980"/>
+                  </a:lnTo>
+                  <a:lnTo>
+                    <a:pt x="353639" y="926886"/>
+                  </a:lnTo>
+                  <a:lnTo>
+                    <a:pt x="424187" y="1077367"/>
+                  </a:lnTo>
+                  <a:lnTo>
+                    <a:pt x="494734" y="1218098"/>
+                  </a:lnTo>
+                  <a:lnTo>
+                    <a:pt x="565281" y="1349711"/>
+                  </a:lnTo>
+                  <a:lnTo>
+                    <a:pt x="635828" y="1472796"/>
+                  </a:lnTo>
+                  <a:lnTo>
+                    <a:pt x="706375" y="1587907"/>
+                  </a:lnTo>
+                  <a:lnTo>
+                    <a:pt x="776922" y="1695559"/>
+                  </a:lnTo>
+                  <a:lnTo>
+                    <a:pt x="847470" y="1796236"/>
+                  </a:lnTo>
+                  <a:lnTo>
+                    <a:pt x="918017" y="1890390"/>
+                  </a:lnTo>
+                  <a:lnTo>
+                    <a:pt x="988564" y="1978444"/>
+                  </a:lnTo>
+                  <a:lnTo>
+                    <a:pt x="1059111" y="2060792"/>
+                  </a:lnTo>
+                  <a:lnTo>
+                    <a:pt x="1129658" y="2137805"/>
+                  </a:lnTo>
+                  <a:lnTo>
+                    <a:pt x="1200205" y="2209828"/>
+                  </a:lnTo>
+                  <a:lnTo>
+                    <a:pt x="1270753" y="2277185"/>
+                  </a:lnTo>
+                  <a:lnTo>
+                    <a:pt x="1341300" y="2340177"/>
+                  </a:lnTo>
+                  <a:lnTo>
+                    <a:pt x="1411847" y="2399088"/>
+                  </a:lnTo>
+                  <a:lnTo>
+                    <a:pt x="1482394" y="2454182"/>
+                  </a:lnTo>
+                  <a:lnTo>
+                    <a:pt x="1552941" y="2470221"/>
+                  </a:lnTo>
+                  <a:lnTo>
+                    <a:pt x="1623488" y="2460773"/>
+                  </a:lnTo>
+                  <a:lnTo>
+                    <a:pt x="1694036" y="2451211"/>
+                  </a:lnTo>
+                  <a:lnTo>
+                    <a:pt x="1764583" y="2441534"/>
+                  </a:lnTo>
+                  <a:lnTo>
+                    <a:pt x="1835130" y="2431738"/>
+                  </a:lnTo>
+                  <a:lnTo>
+                    <a:pt x="1905677" y="2421824"/>
+                  </a:lnTo>
+                  <a:lnTo>
+                    <a:pt x="1976224" y="2411790"/>
+                  </a:lnTo>
+                  <a:lnTo>
+                    <a:pt x="2046772" y="2401634"/>
+                  </a:lnTo>
+                  <a:lnTo>
+                    <a:pt x="2117319" y="2391355"/>
+                  </a:lnTo>
+                  <a:lnTo>
+                    <a:pt x="2187866" y="2380952"/>
+                  </a:lnTo>
+                  <a:lnTo>
+                    <a:pt x="2258413" y="2370422"/>
+                  </a:lnTo>
+                  <a:lnTo>
+                    <a:pt x="2328960" y="2359765"/>
+                  </a:lnTo>
+                  <a:lnTo>
+                    <a:pt x="2399507" y="2348978"/>
+                  </a:lnTo>
+                  <a:lnTo>
+                    <a:pt x="2470055" y="2338061"/>
+                  </a:lnTo>
+                  <a:lnTo>
+                    <a:pt x="2540602" y="2327011"/>
+                  </a:lnTo>
+                  <a:lnTo>
+                    <a:pt x="2611149" y="2315827"/>
+                  </a:lnTo>
+                  <a:lnTo>
+                    <a:pt x="2681696" y="2304508"/>
+                  </a:lnTo>
+                  <a:lnTo>
+                    <a:pt x="2752243" y="2293051"/>
+                  </a:lnTo>
+                  <a:lnTo>
+                    <a:pt x="2822790" y="2281456"/>
+                  </a:lnTo>
+                  <a:lnTo>
+                    <a:pt x="2893338" y="2269720"/>
+                  </a:lnTo>
+                  <a:lnTo>
+                    <a:pt x="2963885" y="2257841"/>
+                  </a:lnTo>
+                  <a:lnTo>
+                    <a:pt x="3034432" y="2245819"/>
+                  </a:lnTo>
+                  <a:lnTo>
+                    <a:pt x="3104979" y="2233651"/>
+                  </a:lnTo>
+                  <a:lnTo>
+                    <a:pt x="3175526" y="2221335"/>
+                  </a:lnTo>
+                  <a:lnTo>
+                    <a:pt x="3246073" y="2208870"/>
+                  </a:lnTo>
+                  <a:lnTo>
+                    <a:pt x="3316621" y="2196254"/>
+                  </a:lnTo>
+                  <a:lnTo>
+                    <a:pt x="3387168" y="2183484"/>
+                  </a:lnTo>
+                  <a:lnTo>
+                    <a:pt x="3457715" y="2170561"/>
+                  </a:lnTo>
+                  <a:lnTo>
+                    <a:pt x="3528262" y="2157480"/>
+                  </a:lnTo>
+                  <a:lnTo>
+                    <a:pt x="3598809" y="2144241"/>
+                  </a:lnTo>
+                  <a:lnTo>
+                    <a:pt x="3669356" y="2130841"/>
                   </a:lnTo>
                 </a:path>
               </a:pathLst>
@@ -3685,312 +3685,312 @@
           </p:nvSpPr>
           <p:spPr>
             <a:xfrm>
-              <a:off x="1172049" y="4731877"/>
-              <a:ext cx="7090630" cy="718495"/>
+              <a:off x="1264853" y="4688724"/>
+              <a:ext cx="6984170" cy="670164"/>
             </a:xfrm>
             <a:custGeom>
               <a:avLst/>
               <a:pathLst>
-                <a:path w="7090630" h="718495">
+                <a:path w="6984170" h="670164">
                   <a:moveTo>
-                    <a:pt x="7090630" y="718495"/>
+                    <a:pt x="6984170" y="670164"/>
                   </a:moveTo>
                   <a:lnTo>
-                    <a:pt x="7019007" y="711090"/>
-                  </a:lnTo>
-                  <a:lnTo>
-                    <a:pt x="6947385" y="703172"/>
-                  </a:lnTo>
-                  <a:lnTo>
-                    <a:pt x="6875762" y="694706"/>
-                  </a:lnTo>
-                  <a:lnTo>
-                    <a:pt x="6804139" y="685654"/>
-                  </a:lnTo>
-                  <a:lnTo>
-                    <a:pt x="6732517" y="675974"/>
-                  </a:lnTo>
-                  <a:lnTo>
-                    <a:pt x="6660894" y="665623"/>
-                  </a:lnTo>
-                  <a:lnTo>
-                    <a:pt x="6589272" y="654556"/>
-                  </a:lnTo>
-                  <a:lnTo>
-                    <a:pt x="6517649" y="642722"/>
-                  </a:lnTo>
-                  <a:lnTo>
-                    <a:pt x="6446027" y="630067"/>
-                  </a:lnTo>
-                  <a:lnTo>
-                    <a:pt x="6374404" y="616537"/>
-                  </a:lnTo>
-                  <a:lnTo>
-                    <a:pt x="6302782" y="602068"/>
-                  </a:lnTo>
-                  <a:lnTo>
-                    <a:pt x="6231159" y="586597"/>
-                  </a:lnTo>
-                  <a:lnTo>
-                    <a:pt x="6159537" y="570055"/>
-                  </a:lnTo>
-                  <a:lnTo>
-                    <a:pt x="6087914" y="552366"/>
-                  </a:lnTo>
-                  <a:lnTo>
-                    <a:pt x="6016292" y="533452"/>
-                  </a:lnTo>
-                  <a:lnTo>
-                    <a:pt x="5944669" y="513228"/>
-                  </a:lnTo>
-                  <a:lnTo>
-                    <a:pt x="5873047" y="491602"/>
-                  </a:lnTo>
-                  <a:lnTo>
-                    <a:pt x="5801424" y="468478"/>
-                  </a:lnTo>
-                  <a:lnTo>
-                    <a:pt x="5729802" y="443752"/>
-                  </a:lnTo>
-                  <a:lnTo>
-                    <a:pt x="5658179" y="417313"/>
-                  </a:lnTo>
-                  <a:lnTo>
-                    <a:pt x="5586557" y="389043"/>
-                  </a:lnTo>
-                  <a:lnTo>
-                    <a:pt x="5514934" y="358813"/>
-                  </a:lnTo>
-                  <a:lnTo>
-                    <a:pt x="5443311" y="326490"/>
-                  </a:lnTo>
-                  <a:lnTo>
-                    <a:pt x="5371689" y="291927"/>
-                  </a:lnTo>
-                  <a:lnTo>
-                    <a:pt x="5300066" y="254969"/>
-                  </a:lnTo>
-                  <a:lnTo>
-                    <a:pt x="5228444" y="215451"/>
-                  </a:lnTo>
-                  <a:lnTo>
-                    <a:pt x="5156821" y="173195"/>
-                  </a:lnTo>
-                  <a:lnTo>
-                    <a:pt x="5085199" y="128012"/>
-                  </a:lnTo>
-                  <a:lnTo>
-                    <a:pt x="5013576" y="79698"/>
-                  </a:lnTo>
-                  <a:lnTo>
-                    <a:pt x="4941954" y="28037"/>
-                  </a:lnTo>
-                  <a:lnTo>
-                    <a:pt x="4870331" y="0"/>
-                  </a:lnTo>
-                  <a:lnTo>
-                    <a:pt x="4798709" y="9887"/>
-                  </a:lnTo>
-                  <a:lnTo>
-                    <a:pt x="4727086" y="19656"/>
-                  </a:lnTo>
-                  <a:lnTo>
-                    <a:pt x="4655464" y="29308"/>
-                  </a:lnTo>
-                  <a:lnTo>
-                    <a:pt x="4583841" y="38844"/>
-                  </a:lnTo>
-                  <a:lnTo>
-                    <a:pt x="4512219" y="48267"/>
-                  </a:lnTo>
-                  <a:lnTo>
-                    <a:pt x="4440596" y="57576"/>
-                  </a:lnTo>
-                  <a:lnTo>
-                    <a:pt x="4368974" y="66774"/>
-                  </a:lnTo>
-                  <a:lnTo>
-                    <a:pt x="4297351" y="75861"/>
-                  </a:lnTo>
-                  <a:lnTo>
-                    <a:pt x="4225729" y="84840"/>
-                  </a:lnTo>
-                  <a:lnTo>
-                    <a:pt x="4154106" y="93711"/>
-                  </a:lnTo>
-                  <a:lnTo>
-                    <a:pt x="4082483" y="102476"/>
-                  </a:lnTo>
-                  <a:lnTo>
-                    <a:pt x="4010861" y="111136"/>
-                  </a:lnTo>
-                  <a:lnTo>
-                    <a:pt x="3939238" y="119692"/>
-                  </a:lnTo>
-                  <a:lnTo>
-                    <a:pt x="3867616" y="128146"/>
-                  </a:lnTo>
-                  <a:lnTo>
-                    <a:pt x="3795993" y="136498"/>
-                  </a:lnTo>
-                  <a:lnTo>
-                    <a:pt x="3724371" y="144750"/>
-                  </a:lnTo>
-                  <a:lnTo>
-                    <a:pt x="3652748" y="152904"/>
-                  </a:lnTo>
-                  <a:lnTo>
-                    <a:pt x="3581126" y="160959"/>
-                  </a:lnTo>
-                  <a:lnTo>
-                    <a:pt x="3509503" y="168919"/>
-                  </a:lnTo>
-                  <a:lnTo>
-                    <a:pt x="3437881" y="176783"/>
-                  </a:lnTo>
-                  <a:lnTo>
-                    <a:pt x="3366258" y="184552"/>
-                  </a:lnTo>
-                  <a:lnTo>
-                    <a:pt x="3294636" y="192229"/>
-                  </a:lnTo>
-                  <a:lnTo>
-                    <a:pt x="3223013" y="199814"/>
-                  </a:lnTo>
-                  <a:lnTo>
-                    <a:pt x="3151391" y="207308"/>
-                  </a:lnTo>
-                  <a:lnTo>
-                    <a:pt x="3079768" y="214712"/>
-                  </a:lnTo>
-                  <a:lnTo>
-                    <a:pt x="3008146" y="222027"/>
-                  </a:lnTo>
-                  <a:lnTo>
-                    <a:pt x="2936523" y="229255"/>
-                  </a:lnTo>
-                  <a:lnTo>
-                    <a:pt x="2864901" y="236396"/>
-                  </a:lnTo>
-                  <a:lnTo>
-                    <a:pt x="2793278" y="243451"/>
-                  </a:lnTo>
-                  <a:lnTo>
-                    <a:pt x="2721655" y="250422"/>
-                  </a:lnTo>
-                  <a:lnTo>
-                    <a:pt x="2650033" y="257310"/>
-                  </a:lnTo>
-                  <a:lnTo>
-                    <a:pt x="2578410" y="264115"/>
-                  </a:lnTo>
-                  <a:lnTo>
-                    <a:pt x="2506788" y="270839"/>
-                  </a:lnTo>
-                  <a:lnTo>
-                    <a:pt x="2435165" y="277482"/>
-                  </a:lnTo>
-                  <a:lnTo>
-                    <a:pt x="2363543" y="284045"/>
-                  </a:lnTo>
-                  <a:lnTo>
-                    <a:pt x="2291920" y="290530"/>
-                  </a:lnTo>
-                  <a:lnTo>
-                    <a:pt x="2220298" y="296937"/>
-                  </a:lnTo>
-                  <a:lnTo>
-                    <a:pt x="2148675" y="303267"/>
-                  </a:lnTo>
-                  <a:lnTo>
-                    <a:pt x="2077053" y="309522"/>
-                  </a:lnTo>
-                  <a:lnTo>
-                    <a:pt x="2005430" y="315701"/>
-                  </a:lnTo>
-                  <a:lnTo>
-                    <a:pt x="1933808" y="321807"/>
-                  </a:lnTo>
-                  <a:lnTo>
-                    <a:pt x="1862185" y="327839"/>
-                  </a:lnTo>
-                  <a:lnTo>
-                    <a:pt x="1790563" y="333799"/>
-                  </a:lnTo>
-                  <a:lnTo>
-                    <a:pt x="1718940" y="339688"/>
-                  </a:lnTo>
-                  <a:lnTo>
-                    <a:pt x="1647318" y="345506"/>
-                  </a:lnTo>
-                  <a:lnTo>
-                    <a:pt x="1575695" y="351255"/>
-                  </a:lnTo>
-                  <a:lnTo>
-                    <a:pt x="1504073" y="356935"/>
-                  </a:lnTo>
-                  <a:lnTo>
-                    <a:pt x="1432450" y="362546"/>
-                  </a:lnTo>
-                  <a:lnTo>
-                    <a:pt x="1360827" y="368091"/>
-                  </a:lnTo>
-                  <a:lnTo>
-                    <a:pt x="1289205" y="373569"/>
-                  </a:lnTo>
-                  <a:lnTo>
-                    <a:pt x="1217582" y="378981"/>
-                  </a:lnTo>
-                  <a:lnTo>
-                    <a:pt x="1145960" y="384328"/>
-                  </a:lnTo>
-                  <a:lnTo>
-                    <a:pt x="1074337" y="389612"/>
-                  </a:lnTo>
-                  <a:lnTo>
-                    <a:pt x="1002715" y="394832"/>
-                  </a:lnTo>
-                  <a:lnTo>
-                    <a:pt x="931092" y="399990"/>
-                  </a:lnTo>
-                  <a:lnTo>
-                    <a:pt x="859470" y="405085"/>
-                  </a:lnTo>
-                  <a:lnTo>
-                    <a:pt x="787847" y="410120"/>
-                  </a:lnTo>
-                  <a:lnTo>
-                    <a:pt x="716225" y="415095"/>
-                  </a:lnTo>
-                  <a:lnTo>
-                    <a:pt x="644602" y="420010"/>
-                  </a:lnTo>
-                  <a:lnTo>
-                    <a:pt x="572980" y="424866"/>
-                  </a:lnTo>
-                  <a:lnTo>
-                    <a:pt x="501357" y="429663"/>
-                  </a:lnTo>
-                  <a:lnTo>
-                    <a:pt x="429735" y="434404"/>
-                  </a:lnTo>
-                  <a:lnTo>
-                    <a:pt x="358112" y="439087"/>
-                  </a:lnTo>
-                  <a:lnTo>
-                    <a:pt x="286490" y="443715"/>
-                  </a:lnTo>
-                  <a:lnTo>
-                    <a:pt x="214867" y="448287"/>
-                  </a:lnTo>
-                  <a:lnTo>
-                    <a:pt x="143245" y="452804"/>
-                  </a:lnTo>
-                  <a:lnTo>
-                    <a:pt x="71622" y="457267"/>
-                  </a:lnTo>
-                  <a:lnTo>
-                    <a:pt x="0" y="461677"/>
+                    <a:pt x="6913622" y="663258"/>
+                  </a:lnTo>
+                  <a:lnTo>
+                    <a:pt x="6843075" y="655873"/>
+                  </a:lnTo>
+                  <a:lnTo>
+                    <a:pt x="6772528" y="647976"/>
+                  </a:lnTo>
+                  <a:lnTo>
+                    <a:pt x="6701981" y="639532"/>
+                  </a:lnTo>
+                  <a:lnTo>
+                    <a:pt x="6631434" y="630504"/>
+                  </a:lnTo>
+                  <a:lnTo>
+                    <a:pt x="6560887" y="620849"/>
+                  </a:lnTo>
+                  <a:lnTo>
+                    <a:pt x="6490339" y="610526"/>
+                  </a:lnTo>
+                  <a:lnTo>
+                    <a:pt x="6419792" y="599488"/>
+                  </a:lnTo>
+                  <a:lnTo>
+                    <a:pt x="6349245" y="587685"/>
+                  </a:lnTo>
+                  <a:lnTo>
+                    <a:pt x="6278698" y="575064"/>
+                  </a:lnTo>
+                  <a:lnTo>
+                    <a:pt x="6208151" y="561569"/>
+                  </a:lnTo>
+                  <a:lnTo>
+                    <a:pt x="6137604" y="547139"/>
+                  </a:lnTo>
+                  <a:lnTo>
+                    <a:pt x="6067056" y="531709"/>
+                  </a:lnTo>
+                  <a:lnTo>
+                    <a:pt x="5996509" y="515211"/>
+                  </a:lnTo>
+                  <a:lnTo>
+                    <a:pt x="5925962" y="497569"/>
+                  </a:lnTo>
+                  <a:lnTo>
+                    <a:pt x="5855415" y="478705"/>
+                  </a:lnTo>
+                  <a:lnTo>
+                    <a:pt x="5784868" y="458534"/>
+                  </a:lnTo>
+                  <a:lnTo>
+                    <a:pt x="5714320" y="436965"/>
+                  </a:lnTo>
+                  <a:lnTo>
+                    <a:pt x="5643773" y="413903"/>
+                  </a:lnTo>
+                  <a:lnTo>
+                    <a:pt x="5573226" y="389242"/>
+                  </a:lnTo>
+                  <a:lnTo>
+                    <a:pt x="5502679" y="362873"/>
+                  </a:lnTo>
+                  <a:lnTo>
+                    <a:pt x="5432132" y="334677"/>
+                  </a:lnTo>
+                  <a:lnTo>
+                    <a:pt x="5361585" y="304528"/>
+                  </a:lnTo>
+                  <a:lnTo>
+                    <a:pt x="5291037" y="272290"/>
+                  </a:lnTo>
+                  <a:lnTo>
+                    <a:pt x="5220490" y="237818"/>
+                  </a:lnTo>
+                  <a:lnTo>
+                    <a:pt x="5149943" y="200958"/>
+                  </a:lnTo>
+                  <a:lnTo>
+                    <a:pt x="5079396" y="161545"/>
+                  </a:lnTo>
+                  <a:lnTo>
+                    <a:pt x="5008849" y="119401"/>
+                  </a:lnTo>
+                  <a:lnTo>
+                    <a:pt x="4938302" y="74337"/>
+                  </a:lnTo>
+                  <a:lnTo>
+                    <a:pt x="4867754" y="26151"/>
+                  </a:lnTo>
+                  <a:lnTo>
+                    <a:pt x="4797207" y="0"/>
+                  </a:lnTo>
+                  <a:lnTo>
+                    <a:pt x="4726660" y="9222"/>
+                  </a:lnTo>
+                  <a:lnTo>
+                    <a:pt x="4656113" y="18334"/>
+                  </a:lnTo>
+                  <a:lnTo>
+                    <a:pt x="4585566" y="27337"/>
+                  </a:lnTo>
+                  <a:lnTo>
+                    <a:pt x="4515019" y="36231"/>
+                  </a:lnTo>
+                  <a:lnTo>
+                    <a:pt x="4444471" y="45020"/>
+                  </a:lnTo>
+                  <a:lnTo>
+                    <a:pt x="4373924" y="53703"/>
+                  </a:lnTo>
+                  <a:lnTo>
+                    <a:pt x="4303377" y="62282"/>
+                  </a:lnTo>
+                  <a:lnTo>
+                    <a:pt x="4232830" y="70758"/>
+                  </a:lnTo>
+                  <a:lnTo>
+                    <a:pt x="4162283" y="79133"/>
+                  </a:lnTo>
+                  <a:lnTo>
+                    <a:pt x="4091736" y="87407"/>
+                  </a:lnTo>
+                  <a:lnTo>
+                    <a:pt x="4021188" y="95583"/>
+                  </a:lnTo>
+                  <a:lnTo>
+                    <a:pt x="3950641" y="103660"/>
+                  </a:lnTo>
+                  <a:lnTo>
+                    <a:pt x="3880094" y="111641"/>
+                  </a:lnTo>
+                  <a:lnTo>
+                    <a:pt x="3809547" y="119526"/>
+                  </a:lnTo>
+                  <a:lnTo>
+                    <a:pt x="3739000" y="127316"/>
+                  </a:lnTo>
+                  <a:lnTo>
+                    <a:pt x="3668452" y="135013"/>
+                  </a:lnTo>
+                  <a:lnTo>
+                    <a:pt x="3597905" y="142618"/>
+                  </a:lnTo>
+                  <a:lnTo>
+                    <a:pt x="3527358" y="150132"/>
+                  </a:lnTo>
+                  <a:lnTo>
+                    <a:pt x="3456811" y="157556"/>
+                  </a:lnTo>
+                  <a:lnTo>
+                    <a:pt x="3386264" y="164891"/>
+                  </a:lnTo>
+                  <a:lnTo>
+                    <a:pt x="3315717" y="172138"/>
+                  </a:lnTo>
+                  <a:lnTo>
+                    <a:pt x="3245169" y="179298"/>
+                  </a:lnTo>
+                  <a:lnTo>
+                    <a:pt x="3174622" y="186373"/>
+                  </a:lnTo>
+                  <a:lnTo>
+                    <a:pt x="3104075" y="193363"/>
+                  </a:lnTo>
+                  <a:lnTo>
+                    <a:pt x="3033528" y="200269"/>
+                  </a:lnTo>
+                  <a:lnTo>
+                    <a:pt x="2962981" y="207092"/>
+                  </a:lnTo>
+                  <a:lnTo>
+                    <a:pt x="2892434" y="213834"/>
+                  </a:lnTo>
+                  <a:lnTo>
+                    <a:pt x="2821886" y="220494"/>
+                  </a:lnTo>
+                  <a:lnTo>
+                    <a:pt x="2751339" y="227075"/>
+                  </a:lnTo>
+                  <a:lnTo>
+                    <a:pt x="2680792" y="233577"/>
+                  </a:lnTo>
+                  <a:lnTo>
+                    <a:pt x="2610245" y="240002"/>
+                  </a:lnTo>
+                  <a:lnTo>
+                    <a:pt x="2539698" y="246349"/>
+                  </a:lnTo>
+                  <a:lnTo>
+                    <a:pt x="2469151" y="252620"/>
+                  </a:lnTo>
+                  <a:lnTo>
+                    <a:pt x="2398603" y="258816"/>
+                  </a:lnTo>
+                  <a:lnTo>
+                    <a:pt x="2328056" y="264938"/>
+                  </a:lnTo>
+                  <a:lnTo>
+                    <a:pt x="2257509" y="270987"/>
+                  </a:lnTo>
+                  <a:lnTo>
+                    <a:pt x="2186962" y="276963"/>
+                  </a:lnTo>
+                  <a:lnTo>
+                    <a:pt x="2116415" y="282868"/>
+                  </a:lnTo>
+                  <a:lnTo>
+                    <a:pt x="2045868" y="288701"/>
+                  </a:lnTo>
+                  <a:lnTo>
+                    <a:pt x="1975320" y="294465"/>
+                  </a:lnTo>
+                  <a:lnTo>
+                    <a:pt x="1904773" y="300160"/>
+                  </a:lnTo>
+                  <a:lnTo>
+                    <a:pt x="1834226" y="305787"/>
+                  </a:lnTo>
+                  <a:lnTo>
+                    <a:pt x="1763679" y="311346"/>
+                  </a:lnTo>
+                  <a:lnTo>
+                    <a:pt x="1693132" y="316839"/>
+                  </a:lnTo>
+                  <a:lnTo>
+                    <a:pt x="1622584" y="322265"/>
+                  </a:lnTo>
+                  <a:lnTo>
+                    <a:pt x="1552037" y="327627"/>
+                  </a:lnTo>
+                  <a:lnTo>
+                    <a:pt x="1481490" y="332925"/>
+                  </a:lnTo>
+                  <a:lnTo>
+                    <a:pt x="1410943" y="338159"/>
+                  </a:lnTo>
+                  <a:lnTo>
+                    <a:pt x="1340396" y="343330"/>
+                  </a:lnTo>
+                  <a:lnTo>
+                    <a:pt x="1269849" y="348440"/>
+                  </a:lnTo>
+                  <a:lnTo>
+                    <a:pt x="1199301" y="353488"/>
+                  </a:lnTo>
+                  <a:lnTo>
+                    <a:pt x="1128754" y="358476"/>
+                  </a:lnTo>
+                  <a:lnTo>
+                    <a:pt x="1058207" y="363404"/>
+                  </a:lnTo>
+                  <a:lnTo>
+                    <a:pt x="987660" y="368273"/>
+                  </a:lnTo>
+                  <a:lnTo>
+                    <a:pt x="917113" y="373084"/>
+                  </a:lnTo>
+                  <a:lnTo>
+                    <a:pt x="846566" y="377837"/>
+                  </a:lnTo>
+                  <a:lnTo>
+                    <a:pt x="776018" y="382533"/>
+                  </a:lnTo>
+                  <a:lnTo>
+                    <a:pt x="705471" y="387173"/>
+                  </a:lnTo>
+                  <a:lnTo>
+                    <a:pt x="634924" y="391757"/>
+                  </a:lnTo>
+                  <a:lnTo>
+                    <a:pt x="564377" y="396286"/>
+                  </a:lnTo>
+                  <a:lnTo>
+                    <a:pt x="493830" y="400762"/>
+                  </a:lnTo>
+                  <a:lnTo>
+                    <a:pt x="423283" y="405183"/>
+                  </a:lnTo>
+                  <a:lnTo>
+                    <a:pt x="352735" y="409552"/>
+                  </a:lnTo>
+                  <a:lnTo>
+                    <a:pt x="282188" y="413868"/>
+                  </a:lnTo>
+                  <a:lnTo>
+                    <a:pt x="211641" y="418132"/>
+                  </a:lnTo>
+                  <a:lnTo>
+                    <a:pt x="141094" y="422346"/>
+                  </a:lnTo>
+                  <a:lnTo>
+                    <a:pt x="70547" y="426509"/>
+                  </a:lnTo>
+                  <a:lnTo>
+                    <a:pt x="0" y="430622"/>
                   </a:lnTo>
                 </a:path>
               </a:pathLst>
@@ -4010,264 +4010,264 @@
           </p:nvSpPr>
           <p:spPr>
             <a:xfrm>
-              <a:off x="2329841" y="2073503"/>
-              <a:ext cx="5932837" cy="3125736"/>
+              <a:off x="2405262" y="2209169"/>
+              <a:ext cx="5843761" cy="2915480"/>
             </a:xfrm>
             <a:custGeom>
               <a:avLst/>
               <a:pathLst>
-                <a:path w="5932837" h="3125736">
+                <a:path w="5843761" h="2915480">
                   <a:moveTo>
                     <a:pt x="0" y="0"/>
                   </a:moveTo>
                   <a:lnTo>
-                    <a:pt x="59790" y="79148"/>
-                  </a:lnTo>
-                  <a:lnTo>
-                    <a:pt x="131413" y="171391"/>
-                  </a:lnTo>
-                  <a:lnTo>
-                    <a:pt x="203035" y="261134"/>
-                  </a:lnTo>
-                  <a:lnTo>
-                    <a:pt x="274658" y="348446"/>
-                  </a:lnTo>
-                  <a:lnTo>
-                    <a:pt x="346280" y="433393"/>
-                  </a:lnTo>
-                  <a:lnTo>
-                    <a:pt x="417903" y="516038"/>
-                  </a:lnTo>
-                  <a:lnTo>
-                    <a:pt x="489525" y="596443"/>
-                  </a:lnTo>
-                  <a:lnTo>
-                    <a:pt x="561148" y="674671"/>
-                  </a:lnTo>
-                  <a:lnTo>
-                    <a:pt x="632770" y="750778"/>
-                  </a:lnTo>
-                  <a:lnTo>
-                    <a:pt x="704393" y="824824"/>
-                  </a:lnTo>
-                  <a:lnTo>
-                    <a:pt x="776015" y="896864"/>
-                  </a:lnTo>
-                  <a:lnTo>
-                    <a:pt x="847638" y="966952"/>
-                  </a:lnTo>
-                  <a:lnTo>
-                    <a:pt x="919260" y="1035140"/>
-                  </a:lnTo>
-                  <a:lnTo>
-                    <a:pt x="990883" y="1101482"/>
-                  </a:lnTo>
-                  <a:lnTo>
-                    <a:pt x="1062506" y="1166026"/>
-                  </a:lnTo>
-                  <a:lnTo>
-                    <a:pt x="1134128" y="1228821"/>
-                  </a:lnTo>
-                  <a:lnTo>
-                    <a:pt x="1205751" y="1289915"/>
-                  </a:lnTo>
-                  <a:lnTo>
-                    <a:pt x="1277373" y="1349354"/>
-                  </a:lnTo>
-                  <a:lnTo>
-                    <a:pt x="1348996" y="1407182"/>
-                  </a:lnTo>
-                  <a:lnTo>
-                    <a:pt x="1420618" y="1463443"/>
-                  </a:lnTo>
-                  <a:lnTo>
-                    <a:pt x="1492241" y="1518180"/>
-                  </a:lnTo>
-                  <a:lnTo>
-                    <a:pt x="1563863" y="1571435"/>
-                  </a:lnTo>
-                  <a:lnTo>
-                    <a:pt x="1635486" y="1623246"/>
-                  </a:lnTo>
-                  <a:lnTo>
-                    <a:pt x="1707108" y="1673653"/>
-                  </a:lnTo>
-                  <a:lnTo>
-                    <a:pt x="1778731" y="1722695"/>
-                  </a:lnTo>
-                  <a:lnTo>
-                    <a:pt x="1850353" y="1770408"/>
-                  </a:lnTo>
-                  <a:lnTo>
-                    <a:pt x="1921976" y="1816829"/>
-                  </a:lnTo>
-                  <a:lnTo>
-                    <a:pt x="1993598" y="1861991"/>
-                  </a:lnTo>
-                  <a:lnTo>
-                    <a:pt x="2065221" y="1905931"/>
-                  </a:lnTo>
-                  <a:lnTo>
-                    <a:pt x="2136843" y="1948679"/>
-                  </a:lnTo>
-                  <a:lnTo>
-                    <a:pt x="2208466" y="1990270"/>
-                  </a:lnTo>
-                  <a:lnTo>
-                    <a:pt x="2280088" y="2030733"/>
-                  </a:lnTo>
-                  <a:lnTo>
-                    <a:pt x="2351711" y="2070100"/>
-                  </a:lnTo>
-                  <a:lnTo>
-                    <a:pt x="2423334" y="2108401"/>
-                  </a:lnTo>
-                  <a:lnTo>
-                    <a:pt x="2494956" y="2145664"/>
-                  </a:lnTo>
-                  <a:lnTo>
-                    <a:pt x="2566579" y="2181917"/>
-                  </a:lnTo>
-                  <a:lnTo>
-                    <a:pt x="2638201" y="2217189"/>
-                  </a:lnTo>
-                  <a:lnTo>
-                    <a:pt x="2709824" y="2251504"/>
-                  </a:lnTo>
-                  <a:lnTo>
-                    <a:pt x="2781446" y="2284890"/>
-                  </a:lnTo>
-                  <a:lnTo>
-                    <a:pt x="2853069" y="2317371"/>
-                  </a:lnTo>
-                  <a:lnTo>
-                    <a:pt x="2924691" y="2348972"/>
-                  </a:lnTo>
-                  <a:lnTo>
-                    <a:pt x="2996314" y="2379717"/>
-                  </a:lnTo>
-                  <a:lnTo>
-                    <a:pt x="3067936" y="2409630"/>
-                  </a:lnTo>
-                  <a:lnTo>
-                    <a:pt x="3139559" y="2438731"/>
-                  </a:lnTo>
-                  <a:lnTo>
-                    <a:pt x="3211181" y="2467044"/>
-                  </a:lnTo>
-                  <a:lnTo>
-                    <a:pt x="3282804" y="2494590"/>
-                  </a:lnTo>
-                  <a:lnTo>
-                    <a:pt x="3354426" y="2521390"/>
-                  </a:lnTo>
-                  <a:lnTo>
-                    <a:pt x="3426049" y="2547464"/>
-                  </a:lnTo>
-                  <a:lnTo>
-                    <a:pt x="3497671" y="2572831"/>
-                  </a:lnTo>
-                  <a:lnTo>
-                    <a:pt x="3569294" y="2597511"/>
-                  </a:lnTo>
-                  <a:lnTo>
-                    <a:pt x="3640916" y="2621522"/>
-                  </a:lnTo>
-                  <a:lnTo>
-                    <a:pt x="3712539" y="2644883"/>
-                  </a:lnTo>
-                  <a:lnTo>
-                    <a:pt x="3784162" y="2667611"/>
-                  </a:lnTo>
-                  <a:lnTo>
-                    <a:pt x="3855784" y="2689723"/>
-                  </a:lnTo>
-                  <a:lnTo>
-                    <a:pt x="3927407" y="2711236"/>
-                  </a:lnTo>
-                  <a:lnTo>
-                    <a:pt x="3999029" y="2732166"/>
-                  </a:lnTo>
-                  <a:lnTo>
-                    <a:pt x="4070652" y="2752529"/>
-                  </a:lnTo>
-                  <a:lnTo>
-                    <a:pt x="4142274" y="2772340"/>
-                  </a:lnTo>
-                  <a:lnTo>
-                    <a:pt x="4213897" y="2791614"/>
-                  </a:lnTo>
-                  <a:lnTo>
-                    <a:pt x="4285519" y="2810367"/>
-                  </a:lnTo>
-                  <a:lnTo>
-                    <a:pt x="4357142" y="2828611"/>
-                  </a:lnTo>
-                  <a:lnTo>
-                    <a:pt x="4428764" y="2846361"/>
-                  </a:lnTo>
-                  <a:lnTo>
-                    <a:pt x="4500387" y="2863630"/>
-                  </a:lnTo>
-                  <a:lnTo>
-                    <a:pt x="4572009" y="2880431"/>
-                  </a:lnTo>
-                  <a:lnTo>
-                    <a:pt x="4643632" y="2896777"/>
-                  </a:lnTo>
-                  <a:lnTo>
-                    <a:pt x="4715254" y="2912680"/>
-                  </a:lnTo>
-                  <a:lnTo>
-                    <a:pt x="4786877" y="2928152"/>
-                  </a:lnTo>
-                  <a:lnTo>
-                    <a:pt x="4858499" y="2943205"/>
-                  </a:lnTo>
-                  <a:lnTo>
-                    <a:pt x="4930122" y="2957850"/>
-                  </a:lnTo>
-                  <a:lnTo>
-                    <a:pt x="5001744" y="2972099"/>
-                  </a:lnTo>
-                  <a:lnTo>
-                    <a:pt x="5073367" y="2985961"/>
-                  </a:lnTo>
-                  <a:lnTo>
-                    <a:pt x="5144990" y="2999448"/>
-                  </a:lnTo>
-                  <a:lnTo>
-                    <a:pt x="5216612" y="3012569"/>
-                  </a:lnTo>
-                  <a:lnTo>
-                    <a:pt x="5288235" y="3025335"/>
-                  </a:lnTo>
-                  <a:lnTo>
-                    <a:pt x="5359857" y="3037755"/>
-                  </a:lnTo>
-                  <a:lnTo>
-                    <a:pt x="5431480" y="3049839"/>
-                  </a:lnTo>
-                  <a:lnTo>
-                    <a:pt x="5503102" y="3061595"/>
-                  </a:lnTo>
-                  <a:lnTo>
-                    <a:pt x="5574725" y="3073032"/>
-                  </a:lnTo>
-                  <a:lnTo>
-                    <a:pt x="5646347" y="3084160"/>
-                  </a:lnTo>
-                  <a:lnTo>
-                    <a:pt x="5717970" y="3094986"/>
-                  </a:lnTo>
-                  <a:lnTo>
-                    <a:pt x="5789592" y="3105519"/>
-                  </a:lnTo>
-                  <a:lnTo>
-                    <a:pt x="5861215" y="3115767"/>
-                  </a:lnTo>
-                  <a:lnTo>
-                    <a:pt x="5932837" y="3125736"/>
+                    <a:pt x="58892" y="73824"/>
+                  </a:lnTo>
+                  <a:lnTo>
+                    <a:pt x="129440" y="159862"/>
+                  </a:lnTo>
+                  <a:lnTo>
+                    <a:pt x="199987" y="243569"/>
+                  </a:lnTo>
+                  <a:lnTo>
+                    <a:pt x="270534" y="325008"/>
+                  </a:lnTo>
+                  <a:lnTo>
+                    <a:pt x="341081" y="404240"/>
+                  </a:lnTo>
+                  <a:lnTo>
+                    <a:pt x="411628" y="481326"/>
+                  </a:lnTo>
+                  <a:lnTo>
+                    <a:pt x="482176" y="556323"/>
+                  </a:lnTo>
+                  <a:lnTo>
+                    <a:pt x="552723" y="629288"/>
+                  </a:lnTo>
+                  <a:lnTo>
+                    <a:pt x="623270" y="700276"/>
+                  </a:lnTo>
+                  <a:lnTo>
+                    <a:pt x="693817" y="769341"/>
+                  </a:lnTo>
+                  <a:lnTo>
+                    <a:pt x="764364" y="836535"/>
+                  </a:lnTo>
+                  <a:lnTo>
+                    <a:pt x="834911" y="901908"/>
+                  </a:lnTo>
+                  <a:lnTo>
+                    <a:pt x="905459" y="965510"/>
+                  </a:lnTo>
+                  <a:lnTo>
+                    <a:pt x="976006" y="1027389"/>
+                  </a:lnTo>
+                  <a:lnTo>
+                    <a:pt x="1046553" y="1087591"/>
+                  </a:lnTo>
+                  <a:lnTo>
+                    <a:pt x="1117100" y="1146163"/>
+                  </a:lnTo>
+                  <a:lnTo>
+                    <a:pt x="1187647" y="1203147"/>
+                  </a:lnTo>
+                  <a:lnTo>
+                    <a:pt x="1258194" y="1258588"/>
+                  </a:lnTo>
+                  <a:lnTo>
+                    <a:pt x="1328742" y="1312526"/>
+                  </a:lnTo>
+                  <a:lnTo>
+                    <a:pt x="1399289" y="1365003"/>
+                  </a:lnTo>
+                  <a:lnTo>
+                    <a:pt x="1469836" y="1416058"/>
+                  </a:lnTo>
+                  <a:lnTo>
+                    <a:pt x="1540383" y="1465730"/>
+                  </a:lnTo>
+                  <a:lnTo>
+                    <a:pt x="1610930" y="1514056"/>
+                  </a:lnTo>
+                  <a:lnTo>
+                    <a:pt x="1681477" y="1561073"/>
+                  </a:lnTo>
+                  <a:lnTo>
+                    <a:pt x="1752025" y="1606816"/>
+                  </a:lnTo>
+                  <a:lnTo>
+                    <a:pt x="1822572" y="1651319"/>
+                  </a:lnTo>
+                  <a:lnTo>
+                    <a:pt x="1893119" y="1694617"/>
+                  </a:lnTo>
+                  <a:lnTo>
+                    <a:pt x="1963666" y="1736742"/>
+                  </a:lnTo>
+                  <a:lnTo>
+                    <a:pt x="2034213" y="1777726"/>
+                  </a:lnTo>
+                  <a:lnTo>
+                    <a:pt x="2104760" y="1817599"/>
+                  </a:lnTo>
+                  <a:lnTo>
+                    <a:pt x="2175308" y="1856391"/>
+                  </a:lnTo>
+                  <a:lnTo>
+                    <a:pt x="2245855" y="1894133"/>
+                  </a:lnTo>
+                  <a:lnTo>
+                    <a:pt x="2316402" y="1930852"/>
+                  </a:lnTo>
+                  <a:lnTo>
+                    <a:pt x="2386949" y="1966577"/>
+                  </a:lnTo>
+                  <a:lnTo>
+                    <a:pt x="2457496" y="2001333"/>
+                  </a:lnTo>
+                  <a:lnTo>
+                    <a:pt x="2528044" y="2035148"/>
+                  </a:lnTo>
+                  <a:lnTo>
+                    <a:pt x="2598591" y="2068046"/>
+                  </a:lnTo>
+                  <a:lnTo>
+                    <a:pt x="2669138" y="2100054"/>
+                  </a:lnTo>
+                  <a:lnTo>
+                    <a:pt x="2739685" y="2131194"/>
+                  </a:lnTo>
+                  <a:lnTo>
+                    <a:pt x="2810232" y="2161490"/>
+                  </a:lnTo>
+                  <a:lnTo>
+                    <a:pt x="2880779" y="2190966"/>
+                  </a:lnTo>
+                  <a:lnTo>
+                    <a:pt x="2951327" y="2219643"/>
+                  </a:lnTo>
+                  <a:lnTo>
+                    <a:pt x="3021874" y="2247543"/>
+                  </a:lnTo>
+                  <a:lnTo>
+                    <a:pt x="3092421" y="2274687"/>
+                  </a:lnTo>
+                  <a:lnTo>
+                    <a:pt x="3162968" y="2301095"/>
+                  </a:lnTo>
+                  <a:lnTo>
+                    <a:pt x="3233515" y="2326788"/>
+                  </a:lnTo>
+                  <a:lnTo>
+                    <a:pt x="3304062" y="2351785"/>
+                  </a:lnTo>
+                  <a:lnTo>
+                    <a:pt x="3374610" y="2376105"/>
+                  </a:lnTo>
+                  <a:lnTo>
+                    <a:pt x="3445157" y="2399766"/>
+                  </a:lnTo>
+                  <a:lnTo>
+                    <a:pt x="3515704" y="2422786"/>
+                  </a:lnTo>
+                  <a:lnTo>
+                    <a:pt x="3586251" y="2445182"/>
+                  </a:lnTo>
+                  <a:lnTo>
+                    <a:pt x="3656798" y="2466971"/>
+                  </a:lnTo>
+                  <a:lnTo>
+                    <a:pt x="3727345" y="2488170"/>
+                  </a:lnTo>
+                  <a:lnTo>
+                    <a:pt x="3797893" y="2508795"/>
+                  </a:lnTo>
+                  <a:lnTo>
+                    <a:pt x="3868440" y="2528861"/>
+                  </a:lnTo>
+                  <a:lnTo>
+                    <a:pt x="3938987" y="2548383"/>
+                  </a:lnTo>
+                  <a:lnTo>
+                    <a:pt x="4009534" y="2567376"/>
+                  </a:lnTo>
+                  <a:lnTo>
+                    <a:pt x="4080081" y="2585855"/>
+                  </a:lnTo>
+                  <a:lnTo>
+                    <a:pt x="4150628" y="2603833"/>
+                  </a:lnTo>
+                  <a:lnTo>
+                    <a:pt x="4221176" y="2621324"/>
+                  </a:lnTo>
+                  <a:lnTo>
+                    <a:pt x="4291723" y="2638341"/>
+                  </a:lnTo>
+                  <a:lnTo>
+                    <a:pt x="4362270" y="2654897"/>
+                  </a:lnTo>
+                  <a:lnTo>
+                    <a:pt x="4432817" y="2671004"/>
+                  </a:lnTo>
+                  <a:lnTo>
+                    <a:pt x="4503364" y="2686675"/>
+                  </a:lnTo>
+                  <a:lnTo>
+                    <a:pt x="4573912" y="2701921"/>
+                  </a:lnTo>
+                  <a:lnTo>
+                    <a:pt x="4644459" y="2716755"/>
+                  </a:lnTo>
+                  <a:lnTo>
+                    <a:pt x="4715006" y="2731186"/>
+                  </a:lnTo>
+                  <a:lnTo>
+                    <a:pt x="4785553" y="2745227"/>
+                  </a:lnTo>
+                  <a:lnTo>
+                    <a:pt x="4856100" y="2758887"/>
+                  </a:lnTo>
+                  <a:lnTo>
+                    <a:pt x="4926647" y="2772177"/>
+                  </a:lnTo>
+                  <a:lnTo>
+                    <a:pt x="4997195" y="2785107"/>
+                  </a:lnTo>
+                  <a:lnTo>
+                    <a:pt x="5067742" y="2797686"/>
+                  </a:lnTo>
+                  <a:lnTo>
+                    <a:pt x="5138289" y="2809925"/>
+                  </a:lnTo>
+                  <a:lnTo>
+                    <a:pt x="5208836" y="2821832"/>
+                  </a:lnTo>
+                  <a:lnTo>
+                    <a:pt x="5279383" y="2833416"/>
+                  </a:lnTo>
+                  <a:lnTo>
+                    <a:pt x="5349930" y="2844687"/>
+                  </a:lnTo>
+                  <a:lnTo>
+                    <a:pt x="5420478" y="2855652"/>
+                  </a:lnTo>
+                  <a:lnTo>
+                    <a:pt x="5491025" y="2866321"/>
+                  </a:lnTo>
+                  <a:lnTo>
+                    <a:pt x="5561572" y="2876700"/>
+                  </a:lnTo>
+                  <a:lnTo>
+                    <a:pt x="5632119" y="2886798"/>
+                  </a:lnTo>
+                  <a:lnTo>
+                    <a:pt x="5702666" y="2896622"/>
+                  </a:lnTo>
+                  <a:lnTo>
+                    <a:pt x="5773213" y="2906180"/>
+                  </a:lnTo>
+                  <a:lnTo>
+                    <a:pt x="5843761" y="2915480"/>
                   </a:lnTo>
                 </a:path>
               </a:pathLst>
@@ -4296,21 +4296,21 @@
           </p:nvSpPr>
           <p:spPr>
             <a:xfrm>
-              <a:off x="817517" y="4727786"/>
-              <a:ext cx="7799693" cy="0"/>
+              <a:off x="915645" y="4684908"/>
+              <a:ext cx="7682587" cy="0"/>
             </a:xfrm>
             <a:custGeom>
               <a:avLst/>
               <a:pathLst>
-                <a:path w="7799693" h="0">
+                <a:path w="7682587" h="0">
                   <a:moveTo>
                     <a:pt x="0" y="0"/>
                   </a:moveTo>
                   <a:lnTo>
-                    <a:pt x="7799693" y="0"/>
-                  </a:lnTo>
-                  <a:lnTo>
-                    <a:pt x="7799693" y="0"/>
+                    <a:pt x="7682587" y="0"/>
+                  </a:lnTo>
+                  <a:lnTo>
+                    <a:pt x="7682587" y="0"/>
                   </a:lnTo>
                 </a:path>
               </a:pathLst>
@@ -4339,15 +4339,15 @@
           </p:nvSpPr>
           <p:spPr>
             <a:xfrm>
-              <a:off x="6071765" y="2073503"/>
-              <a:ext cx="0" cy="3649639"/>
+              <a:off x="6091004" y="2209169"/>
+              <a:ext cx="0" cy="3404141"/>
             </a:xfrm>
             <a:custGeom>
               <a:avLst/>
               <a:pathLst>
-                <a:path w="0" h="3649639">
+                <a:path w="0" h="3404141">
                   <a:moveTo>
-                    <a:pt x="0" y="3649639"/>
+                    <a:pt x="0" y="3404141"/>
                   </a:moveTo>
                   <a:lnTo>
                     <a:pt x="0" y="0"/>
@@ -4382,15 +4382,15 @@
           </p:nvSpPr>
           <p:spPr>
             <a:xfrm>
-              <a:off x="5051213" y="2073503"/>
-              <a:ext cx="0" cy="3649639"/>
+              <a:off x="5085775" y="2209169"/>
+              <a:ext cx="0" cy="3404141"/>
             </a:xfrm>
             <a:custGeom>
               <a:avLst/>
               <a:pathLst>
-                <a:path w="0" h="3649639">
+                <a:path w="0" h="3404141">
                   <a:moveTo>
-                    <a:pt x="0" y="3649639"/>
+                    <a:pt x="0" y="3404141"/>
                   </a:moveTo>
                   <a:lnTo>
                     <a:pt x="0" y="0"/>
@@ -4425,15 +4425,15 @@
           </p:nvSpPr>
           <p:spPr>
             <a:xfrm>
-              <a:off x="6733531" y="2073503"/>
-              <a:ext cx="0" cy="3649639"/>
+              <a:off x="6742834" y="2209169"/>
+              <a:ext cx="0" cy="3404141"/>
             </a:xfrm>
             <a:custGeom>
               <a:avLst/>
               <a:pathLst>
-                <a:path w="0" h="3649639">
+                <a:path w="0" h="3404141">
                   <a:moveTo>
-                    <a:pt x="0" y="3649639"/>
+                    <a:pt x="0" y="3404141"/>
                   </a:moveTo>
                   <a:lnTo>
                     <a:pt x="0" y="0"/>
@@ -4468,8 +4468,8 @@
           </p:nvSpPr>
           <p:spPr>
             <a:xfrm>
-              <a:off x="692708" y="5517199"/>
-              <a:ext cx="62179" cy="80101"/>
+              <a:off x="756929" y="5407599"/>
+              <a:ext cx="79004" cy="101955"/>
             </a:xfrm>
             <a:prstGeom prst="rect">
               <a:avLst/>
@@ -4482,7 +4482,7 @@
             <a:p>
               <a:pPr algn="l" marL="0" marR="0" indent="0">
                 <a:lnSpc>
-                  <a:spcPts val="880"/>
+                  <a:spcPts val="1120"/>
                 </a:lnSpc>
                 <a:spcBef>
                   <a:spcPts val="0"/>
@@ -4492,7 +4492,7 @@
                 </a:spcAft>
               </a:pPr>
               <a:r>
-                <a:rPr sz="880">
+                <a:rPr sz="1120">
                   <a:solidFill>
                     <a:srgbClr val="4D4D4D">
                       <a:alpha val="100000"/>
@@ -4514,8 +4514,8 @@
           </p:nvSpPr>
           <p:spPr>
             <a:xfrm>
-              <a:off x="692708" y="4687735"/>
-              <a:ext cx="62179" cy="80101"/>
+              <a:off x="756929" y="4633931"/>
+              <a:ext cx="79004" cy="101955"/>
             </a:xfrm>
             <a:prstGeom prst="rect">
               <a:avLst/>
@@ -4528,7 +4528,7 @@
             <a:p>
               <a:pPr algn="l" marL="0" marR="0" indent="0">
                 <a:lnSpc>
-                  <a:spcPts val="880"/>
+                  <a:spcPts val="1120"/>
                 </a:lnSpc>
                 <a:spcBef>
                   <a:spcPts val="0"/>
@@ -4538,7 +4538,7 @@
                 </a:spcAft>
               </a:pPr>
               <a:r>
-                <a:rPr sz="880">
+                <a:rPr sz="1120">
                   <a:solidFill>
                     <a:srgbClr val="4D4D4D">
                       <a:alpha val="100000"/>
@@ -4560,8 +4560,8 @@
           </p:nvSpPr>
           <p:spPr>
             <a:xfrm>
-              <a:off x="692708" y="3858272"/>
-              <a:ext cx="62179" cy="80101"/>
+              <a:off x="756929" y="3860262"/>
+              <a:ext cx="79004" cy="101955"/>
             </a:xfrm>
             <a:prstGeom prst="rect">
               <a:avLst/>
@@ -4574,7 +4574,7 @@
             <a:p>
               <a:pPr algn="l" marL="0" marR="0" indent="0">
                 <a:lnSpc>
-                  <a:spcPts val="880"/>
+                  <a:spcPts val="1120"/>
                 </a:lnSpc>
                 <a:spcBef>
                   <a:spcPts val="0"/>
@@ -4584,7 +4584,7 @@
                 </a:spcAft>
               </a:pPr>
               <a:r>
-                <a:rPr sz="880">
+                <a:rPr sz="1120">
                   <a:solidFill>
                     <a:srgbClr val="4D4D4D">
                       <a:alpha val="100000"/>
@@ -4606,8 +4606,8 @@
           </p:nvSpPr>
           <p:spPr>
             <a:xfrm>
-              <a:off x="692708" y="3028808"/>
-              <a:ext cx="62179" cy="80101"/>
+              <a:off x="756929" y="3086593"/>
+              <a:ext cx="79004" cy="101955"/>
             </a:xfrm>
             <a:prstGeom prst="rect">
               <a:avLst/>
@@ -4620,7 +4620,7 @@
             <a:p>
               <a:pPr algn="l" marL="0" marR="0" indent="0">
                 <a:lnSpc>
-                  <a:spcPts val="880"/>
+                  <a:spcPts val="1120"/>
                 </a:lnSpc>
                 <a:spcBef>
                   <a:spcPts val="0"/>
@@ -4630,7 +4630,7 @@
                 </a:spcAft>
               </a:pPr>
               <a:r>
-                <a:rPr sz="880">
+                <a:rPr sz="1120">
                   <a:solidFill>
                     <a:srgbClr val="4D4D4D">
                       <a:alpha val="100000"/>
@@ -4652,8 +4652,8 @@
           </p:nvSpPr>
           <p:spPr>
             <a:xfrm>
-              <a:off x="692708" y="2199345"/>
-              <a:ext cx="62179" cy="80101"/>
+              <a:off x="756929" y="2312925"/>
+              <a:ext cx="79004" cy="101955"/>
             </a:xfrm>
             <a:prstGeom prst="rect">
               <a:avLst/>
@@ -4666,7 +4666,7 @@
             <a:p>
               <a:pPr algn="l" marL="0" marR="0" indent="0">
                 <a:lnSpc>
-                  <a:spcPts val="880"/>
+                  <a:spcPts val="1120"/>
                 </a:lnSpc>
                 <a:spcBef>
                   <a:spcPts val="0"/>
@@ -4676,7 +4676,7 @@
                 </a:spcAft>
               </a:pPr>
               <a:r>
-                <a:rPr sz="880">
+                <a:rPr sz="1120">
                   <a:solidFill>
                     <a:srgbClr val="4D4D4D">
                       <a:alpha val="100000"/>
@@ -4698,8 +4698,8 @@
           </p:nvSpPr>
           <p:spPr>
             <a:xfrm>
-              <a:off x="2331636" y="5785772"/>
-              <a:ext cx="161574" cy="80101"/>
+              <a:off x="2383963" y="5693022"/>
+              <a:ext cx="205282" cy="101955"/>
             </a:xfrm>
             <a:prstGeom prst="rect">
               <a:avLst/>
@@ -4712,7 +4712,7 @@
             <a:p>
               <a:pPr algn="l" marL="0" marR="0" indent="0">
                 <a:lnSpc>
-                  <a:spcPts val="880"/>
+                  <a:spcPts val="1120"/>
                 </a:lnSpc>
                 <a:spcBef>
                   <a:spcPts val="0"/>
@@ -4722,7 +4722,7 @@
                 </a:spcAft>
               </a:pPr>
               <a:r>
-                <a:rPr sz="880">
+                <a:rPr sz="1120">
                   <a:solidFill>
                     <a:srgbClr val="4D4D4D">
                       <a:alpha val="100000"/>
@@ -4744,8 +4744,8 @@
           </p:nvSpPr>
           <p:spPr>
             <a:xfrm>
-              <a:off x="4181509" y="5785772"/>
-              <a:ext cx="161574" cy="80101"/>
+              <a:off x="4206062" y="5693022"/>
+              <a:ext cx="205282" cy="101955"/>
             </a:xfrm>
             <a:prstGeom prst="rect">
               <a:avLst/>
@@ -4758,7 +4758,7 @@
             <a:p>
               <a:pPr algn="l" marL="0" marR="0" indent="0">
                 <a:lnSpc>
-                  <a:spcPts val="880"/>
+                  <a:spcPts val="1120"/>
                 </a:lnSpc>
                 <a:spcBef>
                   <a:spcPts val="0"/>
@@ -4768,7 +4768,7 @@
                 </a:spcAft>
               </a:pPr>
               <a:r>
-                <a:rPr sz="880">
+                <a:rPr sz="1120">
                   <a:solidFill>
                     <a:srgbClr val="4D4D4D">
                       <a:alpha val="100000"/>
@@ -4790,8 +4790,8 @@
           </p:nvSpPr>
           <p:spPr>
             <a:xfrm>
-              <a:off x="6081080" y="5785772"/>
-              <a:ext cx="62179" cy="80101"/>
+              <a:off x="6091300" y="5693022"/>
+              <a:ext cx="79004" cy="101955"/>
             </a:xfrm>
             <a:prstGeom prst="rect">
               <a:avLst/>
@@ -4804,7 +4804,7 @@
             <a:p>
               <a:pPr algn="l" marL="0" marR="0" indent="0">
                 <a:lnSpc>
-                  <a:spcPts val="880"/>
+                  <a:spcPts val="1120"/>
                 </a:lnSpc>
                 <a:spcBef>
                   <a:spcPts val="0"/>
@@ -4814,7 +4814,7 @@
                 </a:spcAft>
               </a:pPr>
               <a:r>
-                <a:rPr sz="880">
+                <a:rPr sz="1120">
                   <a:solidFill>
                     <a:srgbClr val="4D4D4D">
                       <a:alpha val="100000"/>
@@ -4836,8 +4836,8 @@
           </p:nvSpPr>
           <p:spPr>
             <a:xfrm>
-              <a:off x="7899863" y="5785772"/>
-              <a:ext cx="124358" cy="80101"/>
+              <a:off x="7873896" y="5693022"/>
+              <a:ext cx="158008" cy="101955"/>
             </a:xfrm>
             <a:prstGeom prst="rect">
               <a:avLst/>
@@ -4850,7 +4850,7 @@
             <a:p>
               <a:pPr algn="l" marL="0" marR="0" indent="0">
                 <a:lnSpc>
-                  <a:spcPts val="880"/>
+                  <a:spcPts val="1120"/>
                 </a:lnSpc>
                 <a:spcBef>
                   <a:spcPts val="0"/>
@@ -4860,7 +4860,7 @@
                 </a:spcAft>
               </a:pPr>
               <a:r>
-                <a:rPr sz="880">
+                <a:rPr sz="1120">
                   <a:solidFill>
                     <a:srgbClr val="4D4D4D">
                       <a:alpha val="100000"/>
@@ -4882,8 +4882,8 @@
           </p:nvSpPr>
           <p:spPr>
             <a:xfrm>
-              <a:off x="3832408" y="5925448"/>
-              <a:ext cx="1769912" cy="100218"/>
+              <a:off x="3630809" y="5870717"/>
+              <a:ext cx="2252258" cy="127558"/>
             </a:xfrm>
             <a:prstGeom prst="rect">
               <a:avLst/>
@@ -4896,7 +4896,7 @@
             <a:p>
               <a:pPr algn="l" marL="0" marR="0" indent="0">
                 <a:lnSpc>
-                  <a:spcPts val="1100"/>
+                  <a:spcPts val="1400"/>
                 </a:lnSpc>
                 <a:spcBef>
                   <a:spcPts val="0"/>
@@ -4906,7 +4906,7 @@
                 </a:spcAft>
               </a:pPr>
               <a:r>
-                <a:rPr sz="1100">
+                <a:rPr sz="1400">
                   <a:solidFill>
                     <a:srgbClr val="000000">
                       <a:alpha val="100000"/>
@@ -4928,8 +4928,8 @@
           </p:nvSpPr>
           <p:spPr>
             <a:xfrm rot="-5400000">
-              <a:off x="68446" y="3848213"/>
-              <a:ext cx="1016904" cy="100218"/>
+              <a:off x="-37527" y="3847460"/>
+              <a:ext cx="1294150" cy="127558"/>
             </a:xfrm>
             <a:prstGeom prst="rect">
               <a:avLst/>
@@ -4942,7 +4942,7 @@
             <a:p>
               <a:pPr algn="l" marL="0" marR="0" indent="0">
                 <a:lnSpc>
-                  <a:spcPts val="1100"/>
+                  <a:spcPts val="1400"/>
                 </a:lnSpc>
                 <a:spcBef>
                   <a:spcPts val="0"/>
@@ -4952,7 +4952,7 @@
                 </a:spcAft>
               </a:pPr>
               <a:r>
-                <a:rPr sz="1100">
+                <a:rPr sz="1400">
                   <a:solidFill>
                     <a:srgbClr val="000000">
                       <a:alpha val="100000"/>
@@ -4974,8 +4974,8 @@
           </p:nvSpPr>
           <p:spPr>
             <a:xfrm>
-              <a:off x="817517" y="1896563"/>
-              <a:ext cx="5413065" cy="82021"/>
+              <a:off x="915645" y="1977589"/>
+              <a:ext cx="7220102" cy="109362"/>
             </a:xfrm>
             <a:prstGeom prst="rect">
               <a:avLst/>
@@ -4988,7 +4988,7 @@
             <a:p>
               <a:pPr algn="l" marL="0" marR="0" indent="0">
                 <a:lnSpc>
-                  <a:spcPts val="900"/>
+                  <a:spcPts val="1200"/>
                 </a:lnSpc>
                 <a:spcBef>
                   <a:spcPts val="0"/>
@@ -4998,7 +4998,7 @@
                 </a:spcAft>
               </a:pPr>
               <a:r>
-                <a:rPr sz="900">
+                <a:rPr sz="1200">
                   <a:solidFill>
                     <a:srgbClr val="404040">
                       <a:alpha val="100000"/>
@@ -5020,8 +5020,8 @@
           </p:nvSpPr>
           <p:spPr>
             <a:xfrm>
-              <a:off x="817517" y="1669789"/>
-              <a:ext cx="2821289" cy="120152"/>
+              <a:off x="915645" y="1688767"/>
+              <a:ext cx="3591763" cy="153070"/>
             </a:xfrm>
             <a:prstGeom prst="rect">
               <a:avLst/>
@@ -5034,7 +5034,7 @@
             <a:p>
               <a:pPr algn="l" marL="0" marR="0" indent="0">
                 <a:lnSpc>
-                  <a:spcPts val="1320"/>
+                  <a:spcPts val="1680"/>
                 </a:lnSpc>
                 <a:spcBef>
                   <a:spcPts val="0"/>
@@ -5044,7 +5044,7 @@
                 </a:spcAft>
               </a:pPr>
               <a:r>
-                <a:rPr sz="1320">
+                <a:rPr sz="1680">
                   <a:solidFill>
                     <a:srgbClr val="000000">
                       <a:alpha val="100000"/>
